--- a/docs/slides/dsupdt_guide.pptx
+++ b/docs/slides/dsupdt_guide.pptx
@@ -17931,7 +17931,7 @@
                 <a:gridCol w="1371600"/>
                 <a:gridCol w="3749040"/>
               </a:tblGrid>
-              <a:tr h="402336">
+              <a:tr h="357632">
                 <a:tc>
                   <a:txBody>
                     <a:bodyPr/>
@@ -18137,7 +18137,7 @@
                   </a:tcPr>
                 </a:tc>
               </a:tr>
-              <a:tr h="402336">
+              <a:tr h="357632">
                 <a:tc>
                   <a:txBody>
                     <a:bodyPr/>
@@ -18343,7 +18343,7 @@
                   </a:tcPr>
                 </a:tc>
               </a:tr>
-              <a:tr h="402336">
+              <a:tr h="357632">
                 <a:tc>
                   <a:txBody>
                     <a:bodyPr/>
@@ -18549,7 +18549,7 @@
                   </a:tcPr>
                 </a:tc>
               </a:tr>
-              <a:tr h="402336">
+              <a:tr h="357632">
                 <a:tc>
                   <a:txBody>
                     <a:bodyPr/>
@@ -18755,7 +18755,7 @@
                   </a:tcPr>
                 </a:tc>
               </a:tr>
-              <a:tr h="402336">
+              <a:tr h="357632">
                 <a:tc>
                   <a:txBody>
                     <a:bodyPr/>
@@ -18961,7 +18961,7 @@
                   </a:tcPr>
                 </a:tc>
               </a:tr>
-              <a:tr h="402336">
+              <a:tr h="357632">
                 <a:tc>
                   <a:txBody>
                     <a:bodyPr/>
@@ -19167,7 +19167,7 @@
                   </a:tcPr>
                 </a:tc>
               </a:tr>
-              <a:tr h="402336">
+              <a:tr h="357632">
                 <a:tc>
                   <a:txBody>
                     <a:bodyPr/>
@@ -19373,7 +19373,7 @@
                   </a:tcPr>
                 </a:tc>
               </a:tr>
-              <a:tr h="402336">
+              <a:tr h="357632">
                 <a:tc>
                   <a:txBody>
                     <a:bodyPr/>
@@ -19575,6 +19575,212 @@
                     </a:lnB>
                     <a:solidFill>
                       <a:srgbClr val="FFFFFF"/>
+                    </a:solidFill>
+                  </a:tcPr>
+                </a:tc>
+              </a:tr>
+              <a:tr h="357632">
+                <a:tc>
+                  <a:txBody>
+                    <a:bodyPr/>
+                    <a:lstStyle/>
+                    <a:p>
+                      <a:pPr indent="0" marL="0">
+                        <a:buNone/>
+                      </a:pPr>
+                      <a:r>
+                        <a:rPr lang="en-US" sz="1250" b="1" dirty="0">
+                          <a:solidFill>
+                            <a:srgbClr val="0057C2"/>
+                          </a:solidFill>
+                          <a:latin typeface="Courier New" pitchFamily="34" charset="0"/>
+                          <a:ea typeface="Courier New" pitchFamily="34" charset="-122"/>
+                          <a:cs typeface="Courier New" pitchFamily="34" charset="-120"/>
+                        </a:rPr>
+                        <a:t>&lt;S01:03S&gt;</a:t>
+                      </a:r>
+                      <a:endParaRPr lang="en-US" sz="1250" dirty="0">
+                        <a:latin typeface="Courier New" charset="0"/>
+                        <a:ea typeface="Courier New" charset="0"/>
+                        <a:cs typeface="Courier New" charset="0"/>
+                      </a:endParaRPr>
+                    </a:p>
+                  </a:txBody>
+                  <a:tcPr marL="73152" marR="73152" marT="0" marB="0" anchor="ctr">
+                    <a:lnL w="6350" cap="flat" cmpd="sng" algn="ctr">
+                      <a:solidFill>
+                        <a:srgbClr val="A9D6F2"/>
+                      </a:solidFill>
+                      <a:prstDash val="solid"/>
+                      <a:round/>
+                      <a:headEnd type="none" w="med" len="med"/>
+                      <a:tailEnd type="none" w="med" len="med"/>
+                    </a:lnL>
+                    <a:lnR w="6350" cap="flat" cmpd="sng" algn="ctr">
+                      <a:solidFill>
+                        <a:srgbClr val="A9D6F2"/>
+                      </a:solidFill>
+                      <a:prstDash val="solid"/>
+                      <a:round/>
+                      <a:headEnd type="none" w="med" len="med"/>
+                      <a:tailEnd type="none" w="med" len="med"/>
+                    </a:lnR>
+                    <a:lnT w="6350" cap="flat" cmpd="sng" algn="ctr">
+                      <a:solidFill>
+                        <a:srgbClr val="A9D6F2"/>
+                      </a:solidFill>
+                      <a:prstDash val="solid"/>
+                      <a:round/>
+                      <a:headEnd type="none" w="med" len="med"/>
+                      <a:tailEnd type="none" w="med" len="med"/>
+                    </a:lnT>
+                    <a:lnB w="6350" cap="flat" cmpd="sng" algn="ctr">
+                      <a:solidFill>
+                        <a:srgbClr val="A9D6F2"/>
+                      </a:solidFill>
+                      <a:prstDash val="solid"/>
+                      <a:round/>
+                      <a:headEnd type="none" w="med" len="med"/>
+                      <a:tailEnd type="none" w="med" len="med"/>
+                    </a:lnB>
+                    <a:solidFill>
+                      <a:srgbClr val="DCEBF7"/>
+                    </a:solidFill>
+                  </a:tcPr>
+                </a:tc>
+                <a:tc>
+                  <a:txBody>
+                    <a:bodyPr/>
+                    <a:lstStyle/>
+                    <a:p>
+                      <a:pPr indent="0" marL="0">
+                        <a:buNone/>
+                      </a:pPr>
+                      <a:r>
+                        <a:rPr lang="en-US" sz="1250" b="1" dirty="0">
+                          <a:solidFill>
+                            <a:srgbClr val="0092DB"/>
+                          </a:solidFill>
+                          <a:latin typeface="Poppins" pitchFamily="34" charset="0"/>
+                          <a:ea typeface="Poppins" pitchFamily="34" charset="-122"/>
+                          <a:cs typeface="Poppins" pitchFamily="34" charset="-120"/>
+                        </a:rPr>
+                        <a:t>serial</a:t>
+                      </a:r>
+                      <a:endParaRPr lang="en-US" sz="1250" dirty="0">
+                        <a:latin typeface="Poppins" charset="0"/>
+                        <a:ea typeface="Poppins" charset="0"/>
+                        <a:cs typeface="Poppins" charset="0"/>
+                      </a:endParaRPr>
+                    </a:p>
+                  </a:txBody>
+                  <a:tcPr marL="73152" marR="73152" marT="0" marB="0" anchor="ctr">
+                    <a:lnL w="6350" cap="flat" cmpd="sng" algn="ctr">
+                      <a:solidFill>
+                        <a:srgbClr val="A9D6F2"/>
+                      </a:solidFill>
+                      <a:prstDash val="solid"/>
+                      <a:round/>
+                      <a:headEnd type="none" w="med" len="med"/>
+                      <a:tailEnd type="none" w="med" len="med"/>
+                    </a:lnL>
+                    <a:lnR w="6350" cap="flat" cmpd="sng" algn="ctr">
+                      <a:solidFill>
+                        <a:srgbClr val="A9D6F2"/>
+                      </a:solidFill>
+                      <a:prstDash val="solid"/>
+                      <a:round/>
+                      <a:headEnd type="none" w="med" len="med"/>
+                      <a:tailEnd type="none" w="med" len="med"/>
+                    </a:lnR>
+                    <a:lnT w="6350" cap="flat" cmpd="sng" algn="ctr">
+                      <a:solidFill>
+                        <a:srgbClr val="A9D6F2"/>
+                      </a:solidFill>
+                      <a:prstDash val="solid"/>
+                      <a:round/>
+                      <a:headEnd type="none" w="med" len="med"/>
+                      <a:tailEnd type="none" w="med" len="med"/>
+                    </a:lnT>
+                    <a:lnB w="6350" cap="flat" cmpd="sng" algn="ctr">
+                      <a:solidFill>
+                        <a:srgbClr val="A9D6F2"/>
+                      </a:solidFill>
+                      <a:prstDash val="solid"/>
+                      <a:round/>
+                      <a:headEnd type="none" w="med" len="med"/>
+                      <a:tailEnd type="none" w="med" len="med"/>
+                    </a:lnB>
+                    <a:solidFill>
+                      <a:srgbClr val="DCEBF7"/>
+                    </a:solidFill>
+                  </a:tcPr>
+                </a:tc>
+                <a:tc>
+                  <a:txBody>
+                    <a:bodyPr/>
+                    <a:lstStyle/>
+                    <a:p>
+                      <a:pPr indent="0" marL="0">
+                        <a:buNone/>
+                      </a:pPr>
+                      <a:r>
+                        <a:rPr lang="en-US" sz="1250" dirty="0">
+                          <a:solidFill>
+                            <a:srgbClr val="00357A"/>
+                          </a:solidFill>
+                          <a:latin typeface="Poppins" pitchFamily="34" charset="0"/>
+                          <a:ea typeface="Poppins" pitchFamily="34" charset="-122"/>
+                          <a:cs typeface="Poppins" pitchFamily="34" charset="-120"/>
+                        </a:rPr>
+                        <a:t>expand one name into 01,02,03 (padded to start width)</a:t>
+                      </a:r>
+                      <a:endParaRPr lang="en-US" sz="1250" dirty="0">
+                        <a:latin typeface="Poppins" charset="0"/>
+                        <a:ea typeface="Poppins" charset="0"/>
+                        <a:cs typeface="Poppins" charset="0"/>
+                      </a:endParaRPr>
+                    </a:p>
+                  </a:txBody>
+                  <a:tcPr marL="73152" marR="73152" marT="0" marB="0" anchor="ctr">
+                    <a:lnL w="6350" cap="flat" cmpd="sng" algn="ctr">
+                      <a:solidFill>
+                        <a:srgbClr val="A9D6F2"/>
+                      </a:solidFill>
+                      <a:prstDash val="solid"/>
+                      <a:round/>
+                      <a:headEnd type="none" w="med" len="med"/>
+                      <a:tailEnd type="none" w="med" len="med"/>
+                    </a:lnL>
+                    <a:lnR w="6350" cap="flat" cmpd="sng" algn="ctr">
+                      <a:solidFill>
+                        <a:srgbClr val="A9D6F2"/>
+                      </a:solidFill>
+                      <a:prstDash val="solid"/>
+                      <a:round/>
+                      <a:headEnd type="none" w="med" len="med"/>
+                      <a:tailEnd type="none" w="med" len="med"/>
+                    </a:lnR>
+                    <a:lnT w="6350" cap="flat" cmpd="sng" algn="ctr">
+                      <a:solidFill>
+                        <a:srgbClr val="A9D6F2"/>
+                      </a:solidFill>
+                      <a:prstDash val="solid"/>
+                      <a:round/>
+                      <a:headEnd type="none" w="med" len="med"/>
+                      <a:tailEnd type="none" w="med" len="med"/>
+                    </a:lnT>
+                    <a:lnB w="6350" cap="flat" cmpd="sng" algn="ctr">
+                      <a:solidFill>
+                        <a:srgbClr val="A9D6F2"/>
+                      </a:solidFill>
+                      <a:prstDash val="solid"/>
+                      <a:round/>
+                      <a:headEnd type="none" w="med" len="med"/>
+                      <a:tailEnd type="none" w="med" len="med"/>
+                    </a:lnB>
+                    <a:solidFill>
+                      <a:srgbClr val="DCEBF7"/>
                     </a:solidFill>
                   </a:tcPr>
                 </a:tc>

--- a/docs/slides/dsupdt_guide.pptx
+++ b/docs/slides/dsupdt_guide.pptx
@@ -2888,6 +2888,202 @@
 </p:sldLayout>
 </file>
 
+<file path=ppt/slideLayouts/slideLayout2.xml><?xml version="1.0" encoding="utf-8"?>
+<p:sldLayout xmlns:a="http://schemas.openxmlformats.org/drawingml/2006/main" xmlns:r="http://schemas.openxmlformats.org/officeDocument/2006/relationships" xmlns:p="http://schemas.openxmlformats.org/presentationml/2006/main" preserve="1">
+  <p:cSld name="INTERIOR">
+    <p:bg>
+      <p:bgPr>
+        <a:blipFill dpi="0" rotWithShape="1">
+          <a:blip r:embed="rId3">
+            <a:lum/>
+          </a:blip>
+          <a:srcRect/>
+          <a:stretch>
+            <a:fillRect/>
+          </a:stretch>
+        </a:blipFill>
+        <a:effectLst/>
+      </p:bgPr>
+    </p:bg>
+    <p:spTree>
+      <p:nvGrpSpPr>
+        <p:cNvPr id="1" name=""/>
+        <p:cNvGrpSpPr/>
+        <p:nvPr/>
+      </p:nvGrpSpPr>
+      <p:grpSpPr>
+        <a:xfrm>
+          <a:off x="0" y="0"/>
+          <a:ext cx="0" cy="0"/>
+          <a:chOff x="0" y="0"/>
+          <a:chExt cx="0" cy="0"/>
+        </a:xfrm>
+      </p:grpSpPr>
+      <p:pic>
+        <p:nvPicPr>
+          <p:cNvPr id="2" name="Image 0" descr="nsf_ncar_logo_color.png">    </p:cNvPr>
+          <p:cNvPicPr>
+            <a:picLocks noChangeAspect="1"/>
+          </p:cNvPicPr>
+          <p:nvPr/>
+        </p:nvPicPr>
+        <p:blipFill>
+          <a:blip r:embed="rId1"/>
+          <a:stretch>
+            <a:fillRect/>
+          </a:stretch>
+        </p:blipFill>
+        <p:spPr>
+          <a:xfrm>
+            <a:off x="9683496" y="402336"/>
+            <a:ext cx="1892808" cy="521208"/>
+          </a:xfrm>
+          <a:prstGeom prst="rect">
+            <a:avLst/>
+          </a:prstGeom>
+        </p:spPr>
+      </p:pic>
+      <p:pic>
+        <p:nvPicPr>
+          <p:cNvPr id="3" name="Image 1" descr="gdex_lockup_color.png">    </p:cNvPr>
+          <p:cNvPicPr>
+            <a:picLocks noChangeAspect="1"/>
+          </p:cNvPicPr>
+          <p:nvPr/>
+        </p:nvPicPr>
+        <p:blipFill>
+          <a:blip r:embed="rId2"/>
+          <a:stretch>
+            <a:fillRect/>
+          </a:stretch>
+        </p:blipFill>
+        <p:spPr>
+          <a:xfrm>
+            <a:off x="10616184" y="6126480"/>
+            <a:ext cx="960120" cy="484632"/>
+          </a:xfrm>
+          <a:prstGeom prst="rect">
+            <a:avLst/>
+          </a:prstGeom>
+        </p:spPr>
+      </p:pic>
+      <p:sp>
+        <p:nvSpPr>
+          <p:cNvPr id="4" name="Shape 0"/>
+          <p:cNvSpPr/>
+          <p:nvPr/>
+        </p:nvSpPr>
+        <p:spPr>
+          <a:xfrm>
+            <a:off x="612648" y="6437376"/>
+            <a:ext cx="0" cy="201168"/>
+          </a:xfrm>
+          <a:prstGeom prst="line">
+            <a:avLst/>
+          </a:prstGeom>
+          <a:noFill/>
+          <a:ln w="9525">
+            <a:solidFill>
+              <a:srgbClr val="00357A"/>
+            </a:solidFill>
+            <a:prstDash val="solid"/>
+          </a:ln>
+        </p:spPr>
+      </p:sp>
+    </p:spTree>
+  </p:cSld>
+  <p:clrMapOvr>
+    <a:masterClrMapping/>
+  </p:clrMapOvr>
+</p:sldLayout>
+</file>
+
+<file path=ppt/slideLayouts/slideLayout3.xml><?xml version="1.0" encoding="utf-8"?>
+<p:sldLayout xmlns:a="http://schemas.openxmlformats.org/drawingml/2006/main" xmlns:r="http://schemas.openxmlformats.org/officeDocument/2006/relationships" xmlns:p="http://schemas.openxmlformats.org/presentationml/2006/main" preserve="1">
+  <p:cSld name="INTERIOR_NG">
+    <p:bg>
+      <p:bgPr>
+        <a:blipFill dpi="0" rotWithShape="1">
+          <a:blip r:embed="rId2">
+            <a:lum/>
+          </a:blip>
+          <a:srcRect/>
+          <a:stretch>
+            <a:fillRect/>
+          </a:stretch>
+        </a:blipFill>
+        <a:effectLst/>
+      </p:bgPr>
+    </p:bg>
+    <p:spTree>
+      <p:nvGrpSpPr>
+        <p:cNvPr id="1" name=""/>
+        <p:cNvGrpSpPr/>
+        <p:nvPr/>
+      </p:nvGrpSpPr>
+      <p:grpSpPr>
+        <a:xfrm>
+          <a:off x="0" y="0"/>
+          <a:ext cx="0" cy="0"/>
+          <a:chOff x="0" y="0"/>
+          <a:chExt cx="0" cy="0"/>
+        </a:xfrm>
+      </p:grpSpPr>
+      <p:pic>
+        <p:nvPicPr>
+          <p:cNvPr id="2" name="Image 0" descr="nsf_ncar_logo_color.png">    </p:cNvPr>
+          <p:cNvPicPr>
+            <a:picLocks noChangeAspect="1"/>
+          </p:cNvPicPr>
+          <p:nvPr/>
+        </p:nvPicPr>
+        <p:blipFill>
+          <a:blip r:embed="rId1"/>
+          <a:stretch>
+            <a:fillRect/>
+          </a:stretch>
+        </p:blipFill>
+        <p:spPr>
+          <a:xfrm>
+            <a:off x="9683496" y="402336"/>
+            <a:ext cx="1892808" cy="521208"/>
+          </a:xfrm>
+          <a:prstGeom prst="rect">
+            <a:avLst/>
+          </a:prstGeom>
+        </p:spPr>
+      </p:pic>
+      <p:sp>
+        <p:nvSpPr>
+          <p:cNvPr id="3" name="Shape 0"/>
+          <p:cNvSpPr/>
+          <p:nvPr/>
+        </p:nvSpPr>
+        <p:spPr>
+          <a:xfrm>
+            <a:off x="612648" y="6437376"/>
+            <a:ext cx="0" cy="201168"/>
+          </a:xfrm>
+          <a:prstGeom prst="line">
+            <a:avLst/>
+          </a:prstGeom>
+          <a:noFill/>
+          <a:ln w="9525">
+            <a:solidFill>
+              <a:srgbClr val="00357A"/>
+            </a:solidFill>
+            <a:prstDash val="solid"/>
+          </a:ln>
+        </p:spPr>
+      </p:sp>
+    </p:spTree>
+  </p:cSld>
+  <p:clrMapOvr>
+    <a:masterClrMapping/>
+  </p:clrMapOvr>
+</p:sldLayout>
+</file>
+
 <file path=ppt/slideMasters/slideMaster1.xml><?xml version="1.0" encoding="utf-8"?>
 <p:sldMaster xmlns:a="http://schemas.openxmlformats.org/drawingml/2006/main" xmlns:r="http://schemas.openxmlformats.org/officeDocument/2006/relationships" xmlns:p="http://schemas.openxmlformats.org/presentationml/2006/main">
   <p:cSld>
@@ -2910,6 +3106,8 @@
   <p:clrMap bg1="lt1" tx1="dk1" bg2="lt2" tx2="dk2" accent1="accent1" accent2="accent2" accent3="accent3" accent4="accent4" accent5="accent5" accent6="accent6" hlink="hlink" folHlink="folHlink"/>
   <p:sldLayoutIdLst>
     <p:sldLayoutId id="2147483649" r:id="rId1"/>
+    <p:sldLayoutId id="2147483650" r:id="rId2"/>
+    <p:sldLayoutId id="2147483651" r:id="rId3"/>
   </p:sldLayoutIdLst>
   <p:hf sldNum="0" hdr="0" ftr="0" dt="0"/>
   <p:txStyles>
@@ -3191,7 +3389,7 @@
       </p:grpSpPr>
       <p:pic>
         <p:nvPicPr>
-          <p:cNvPr id="2" name="Image 0" descr="nsf_ncar_logo_white.png">    </p:cNvPr>
+          <p:cNvPr id="2" name="Image 0" descr="cover_earth.jpg">    </p:cNvPr>
           <p:cNvPicPr>
             <a:picLocks noChangeAspect="1"/>
           </p:cNvPicPr>
@@ -3205,8 +3403,8 @@
         </p:blipFill>
         <p:spPr>
           <a:xfrm>
-            <a:off x="640080" y="548640"/>
-            <a:ext cx="2560320" cy="704088"/>
+            <a:off x="3081528" y="0"/>
+            <a:ext cx="9107424" cy="6858000"/>
           </a:xfrm>
           <a:prstGeom prst="rect">
             <a:avLst/>
@@ -3215,7 +3413,7 @@
       </p:pic>
       <p:pic>
         <p:nvPicPr>
-          <p:cNvPr id="3" name="Image 1" descr="gdex_lockup_white.png">    </p:cNvPr>
+          <p:cNvPr id="3" name="Image 1" descr="cover_blue.png">    </p:cNvPr>
           <p:cNvPicPr>
             <a:picLocks noChangeAspect="1"/>
           </p:cNvPicPr>
@@ -3229,24 +3427,92 @@
         </p:blipFill>
         <p:spPr>
           <a:xfrm>
-            <a:off x="9905695" y="640080"/>
-            <a:ext cx="1737360" cy="877824"/>
+            <a:off x="0" y="0"/>
+            <a:ext cx="8686800" cy="6858000"/>
           </a:xfrm>
           <a:prstGeom prst="rect">
             <a:avLst/>
           </a:prstGeom>
         </p:spPr>
       </p:pic>
-      <p:sp>
-        <p:nvSpPr>
-          <p:cNvPr id="4" name="Text 0"/>
-          <p:cNvSpPr/>
-          <p:nvPr/>
-        </p:nvSpPr>
-        <p:spPr>
-          <a:xfrm>
-            <a:off x="640080" y="2148840"/>
-            <a:ext cx="8229600" cy="1280160"/>
+      <p:pic>
+        <p:nvPicPr>
+          <p:cNvPr id="4" name="Image 2" descr="nsf_ncar_logo_white.png">    </p:cNvPr>
+          <p:cNvPicPr>
+            <a:picLocks noChangeAspect="1"/>
+          </p:cNvPicPr>
+          <p:nvPr/>
+        </p:nvPicPr>
+        <p:blipFill>
+          <a:blip r:embed="rId3"/>
+          <a:stretch>
+            <a:fillRect/>
+          </a:stretch>
+        </p:blipFill>
+        <p:spPr>
+          <a:xfrm>
+            <a:off x="841248" y="758952"/>
+            <a:ext cx="3794760" cy="1042416"/>
+          </a:xfrm>
+          <a:prstGeom prst="rect">
+            <a:avLst/>
+          </a:prstGeom>
+        </p:spPr>
+      </p:pic>
+      <p:pic>
+        <p:nvPicPr>
+          <p:cNvPr id="5" name="Image 3" descr="gdex_lockup_white.png">    </p:cNvPr>
+          <p:cNvPicPr>
+            <a:picLocks noChangeAspect="1"/>
+          </p:cNvPicPr>
+          <p:nvPr/>
+        </p:nvPicPr>
+        <p:blipFill>
+          <a:blip r:embed="rId4"/>
+          <a:stretch>
+            <a:fillRect/>
+          </a:stretch>
+        </p:blipFill>
+        <p:spPr>
+          <a:xfrm>
+            <a:off x="8247888" y="722376"/>
+            <a:ext cx="2212848" cy="1115568"/>
+          </a:xfrm>
+          <a:prstGeom prst="rect">
+            <a:avLst/>
+          </a:prstGeom>
+        </p:spPr>
+      </p:pic>
+      <p:sp>
+        <p:nvSpPr>
+          <p:cNvPr id="6" name="Shape 0"/>
+          <p:cNvSpPr/>
+          <p:nvPr/>
+        </p:nvSpPr>
+        <p:spPr>
+          <a:xfrm>
+            <a:off x="0" y="2258568"/>
+            <a:ext cx="210312" cy="3429000"/>
+          </a:xfrm>
+          <a:prstGeom prst="rect">
+            <a:avLst/>
+          </a:prstGeom>
+          <a:solidFill>
+            <a:srgbClr val="FAA119"/>
+          </a:solidFill>
+          <a:ln/>
+        </p:spPr>
+      </p:sp>
+      <p:sp>
+        <p:nvSpPr>
+          <p:cNvPr id="7" name="Text 1"/>
+          <p:cNvSpPr/>
+          <p:nvPr/>
+        </p:nvSpPr>
+        <p:spPr>
+          <a:xfrm>
+            <a:off x="923544" y="2002536"/>
+            <a:ext cx="5029200" cy="274320"/>
           </a:xfrm>
           <a:prstGeom prst="rect">
             <a:avLst/>
@@ -3262,7 +3528,7 @@
               <a:buNone/>
             </a:pPr>
             <a:r>
-              <a:rPr lang="en-US" sz="7800" b="1" dirty="0">
+              <a:rPr lang="en-US" sz="1100" b="1" spc="100" kern="0" dirty="0">
                 <a:solidFill>
                   <a:srgbClr val="FFFFFF"/>
                 </a:solidFill>
@@ -3270,22 +3536,64 @@
                 <a:ea typeface="Poppins" pitchFamily="34" charset="-122"/>
                 <a:cs typeface="Poppins" pitchFamily="34" charset="-120"/>
               </a:rPr>
-              <a:t>dsupdt</a:t>
-            </a:r>
-            <a:endParaRPr lang="en-US" sz="7800" dirty="0"/>
-          </a:p>
-        </p:txBody>
-      </p:sp>
-      <p:sp>
-        <p:nvSpPr>
-          <p:cNvPr id="5" name="Text 1"/>
-          <p:cNvSpPr/>
-          <p:nvPr/>
-        </p:nvSpPr>
-        <p:spPr>
-          <a:xfrm>
-            <a:off x="658368" y="3383280"/>
-            <a:ext cx="10515600" cy="548640"/>
+              <a:t>UPDATED AUGUST 2026</a:t>
+            </a:r>
+            <a:endParaRPr lang="en-US" sz="1100" dirty="0"/>
+          </a:p>
+        </p:txBody>
+      </p:sp>
+      <p:sp>
+        <p:nvSpPr>
+          <p:cNvPr id="8" name="Text 2"/>
+          <p:cNvSpPr/>
+          <p:nvPr/>
+        </p:nvSpPr>
+        <p:spPr>
+          <a:xfrm>
+            <a:off x="923544" y="2331720"/>
+            <a:ext cx="5029200" cy="1691640"/>
+          </a:xfrm>
+          <a:prstGeom prst="rect">
+            <a:avLst/>
+          </a:prstGeom>
+          <a:noFill/>
+          <a:ln/>
+        </p:spPr>
+        <p:txBody>
+          <a:bodyPr wrap="square" lIns="0" tIns="0" rIns="0" bIns="0" rtlCol="0" anchor="t"/>
+          <a:lstStyle/>
+          <a:p>
+            <a:pPr indent="0" marL="0">
+              <a:lnSpc>
+                <a:spcPct val="95000"/>
+              </a:lnSpc>
+              <a:buNone/>
+            </a:pPr>
+            <a:r>
+              <a:rPr lang="en-US" sz="2900" b="1" dirty="0">
+                <a:solidFill>
+                  <a:srgbClr val="FFFFFF"/>
+                </a:solidFill>
+                <a:latin typeface="Poppins" pitchFamily="34" charset="0"/>
+                <a:ea typeface="Poppins" pitchFamily="34" charset="-122"/>
+                <a:cs typeface="Poppins" pitchFamily="34" charset="-120"/>
+              </a:rPr>
+              <a:t>dsupdt: Periodic Dataset Updates for the GDEX Servers</a:t>
+            </a:r>
+            <a:endParaRPr lang="en-US" sz="2900" dirty="0"/>
+          </a:p>
+        </p:txBody>
+      </p:sp>
+      <p:sp>
+        <p:nvSpPr>
+          <p:cNvPr id="9" name="Text 3"/>
+          <p:cNvSpPr/>
+          <p:nvPr/>
+        </p:nvSpPr>
+        <p:spPr>
+          <a:xfrm>
+            <a:off x="923544" y="4069080"/>
+            <a:ext cx="5029200" cy="365760"/>
           </a:xfrm>
           <a:prstGeom prst="rect">
             <a:avLst/>
@@ -3301,48 +3609,9 @@
               <a:buNone/>
             </a:pPr>
             <a:r>
-              <a:rPr lang="en-US" sz="2400" dirty="0">
-                <a:solidFill>
-                  <a:srgbClr val="C3D7EE"/>
-                </a:solidFill>
-                <a:latin typeface="Poppins" pitchFamily="34" charset="0"/>
-                <a:ea typeface="Poppins" pitchFamily="34" charset="-122"/>
-                <a:cs typeface="Poppins" pitchFamily="34" charset="-120"/>
-              </a:rPr>
-              <a:t>Periodic Dataset Updates for the GDEX Servers</a:t>
-            </a:r>
-            <a:endParaRPr lang="en-US" sz="2400" dirty="0"/>
-          </a:p>
-        </p:txBody>
-      </p:sp>
-      <p:sp>
-        <p:nvSpPr>
-          <p:cNvPr id="6" name="Text 2"/>
-          <p:cNvSpPr/>
-          <p:nvPr/>
-        </p:nvSpPr>
-        <p:spPr>
-          <a:xfrm>
-            <a:off x="658368" y="3977640"/>
-            <a:ext cx="10058400" cy="457200"/>
-          </a:xfrm>
-          <a:prstGeom prst="rect">
-            <a:avLst/>
-          </a:prstGeom>
-          <a:noFill/>
-          <a:ln/>
-        </p:spPr>
-        <p:txBody>
-          <a:bodyPr wrap="square" lIns="0" tIns="0" rIns="0" bIns="0" rtlCol="0" anchor="ctr"/>
-          <a:lstStyle/>
-          <a:p>
-            <a:pPr indent="0" marL="0">
-              <a:buNone/>
-            </a:pPr>
-            <a:r>
-              <a:rPr lang="en-US" sz="1500" i="1" dirty="0">
-                <a:solidFill>
-                  <a:srgbClr val="C3D7EE"/>
+              <a:rPr lang="en-US" sz="1300" b="1" dirty="0">
+                <a:solidFill>
+                  <a:srgbClr val="FFFFFF"/>
                 </a:solidFill>
                 <a:latin typeface="Poppins" pitchFamily="34" charset="0"/>
                 <a:ea typeface="Poppins" pitchFamily="34" charset="-122"/>
@@ -3350,32 +3619,28 @@
               </a:rPr>
               <a:t>Download → Build → Archive, scheduled and automated</a:t>
             </a:r>
-            <a:endParaRPr lang="en-US" sz="1500" dirty="0"/>
-          </a:p>
-        </p:txBody>
-      </p:sp>
-      <p:sp>
-        <p:nvSpPr>
-          <p:cNvPr id="7" name="Shape 3"/>
-          <p:cNvSpPr/>
-          <p:nvPr/>
-        </p:nvSpPr>
-        <p:spPr>
-          <a:xfrm>
-            <a:off x="658368" y="4892040"/>
-            <a:ext cx="2317090" cy="457200"/>
-          </a:xfrm>
-          <a:prstGeom prst="roundRect">
-            <a:avLst>
-              <a:gd name="adj" fmla="val 20000"/>
-            </a:avLst>
-          </a:prstGeom>
-          <a:solidFill>
-            <a:srgbClr val="0B2A63"/>
-          </a:solidFill>
-          <a:ln w="12700">
+            <a:endParaRPr lang="en-US" sz="1300" dirty="0"/>
+          </a:p>
+        </p:txBody>
+      </p:sp>
+      <p:sp>
+        <p:nvSpPr>
+          <p:cNvPr id="10" name="Shape 4"/>
+          <p:cNvSpPr/>
+          <p:nvPr/>
+        </p:nvSpPr>
+        <p:spPr>
+          <a:xfrm>
+            <a:off x="923544" y="4581144"/>
+            <a:ext cx="804672" cy="0"/>
+          </a:xfrm>
+          <a:prstGeom prst="line">
+            <a:avLst/>
+          </a:prstGeom>
+          <a:noFill/>
+          <a:ln w="38100">
             <a:solidFill>
-              <a:srgbClr val="2C4E7D"/>
+              <a:srgbClr val="42C0FF"/>
             </a:solidFill>
             <a:prstDash val="solid"/>
           </a:ln>
@@ -3383,14 +3648,14 @@
       </p:sp>
       <p:sp>
         <p:nvSpPr>
-          <p:cNvPr id="8" name="Text 4"/>
-          <p:cNvSpPr/>
-          <p:nvPr/>
-        </p:nvSpPr>
-        <p:spPr>
-          <a:xfrm>
-            <a:off x="658368" y="4892040"/>
-            <a:ext cx="2317090" cy="457200"/>
+          <p:cNvPr id="11" name="Text 5"/>
+          <p:cNvSpPr/>
+          <p:nvPr/>
+        </p:nvSpPr>
+        <p:spPr>
+          <a:xfrm>
+            <a:off x="923544" y="4828032"/>
+            <a:ext cx="5029200" cy="320040"/>
           </a:xfrm>
           <a:prstGeom prst="rect">
             <a:avLst/>
@@ -3402,61 +3667,34 @@
           <a:bodyPr wrap="square" lIns="0" tIns="0" rIns="0" bIns="0" rtlCol="0" anchor="ctr"/>
           <a:lstStyle/>
           <a:p>
-            <a:pPr algn="ctr" indent="0" marL="0">
-              <a:buNone/>
-            </a:pPr>
-            <a:r>
-              <a:rPr lang="en-US" sz="1200" b="1" dirty="0">
-                <a:solidFill>
-                  <a:srgbClr val="C3D7EE"/>
-                </a:solidFill>
-                <a:latin typeface="Poppins" pitchFamily="34" charset="0"/>
-                <a:ea typeface="Poppins" pitchFamily="34" charset="-122"/>
-                <a:cs typeface="Poppins" pitchFamily="34" charset="-120"/>
-              </a:rPr>
-              <a:t>Developer Configuration</a:t>
-            </a:r>
-            <a:endParaRPr lang="en-US" sz="1200" dirty="0"/>
-          </a:p>
-        </p:txBody>
-      </p:sp>
-      <p:sp>
-        <p:nvSpPr>
-          <p:cNvPr id="9" name="Shape 5"/>
-          <p:cNvSpPr/>
-          <p:nvPr/>
-        </p:nvSpPr>
-        <p:spPr>
-          <a:xfrm>
-            <a:off x="3158338" y="4892040"/>
-            <a:ext cx="1420978" cy="457200"/>
-          </a:xfrm>
-          <a:prstGeom prst="roundRect">
-            <a:avLst>
-              <a:gd name="adj" fmla="val 20000"/>
-            </a:avLst>
-          </a:prstGeom>
-          <a:solidFill>
-            <a:srgbClr val="0B2A63"/>
-          </a:solidFill>
-          <a:ln w="12700">
-            <a:solidFill>
-              <a:srgbClr val="2C4E7D"/>
-            </a:solidFill>
-            <a:prstDash val="solid"/>
-          </a:ln>
-        </p:spPr>
-      </p:sp>
-      <p:sp>
-        <p:nvSpPr>
-          <p:cNvPr id="10" name="Text 6"/>
-          <p:cNvSpPr/>
-          <p:nvPr/>
-        </p:nvSpPr>
-        <p:spPr>
-          <a:xfrm>
-            <a:off x="3158338" y="4892040"/>
-            <a:ext cx="1420978" cy="457200"/>
+            <a:pPr indent="0" marL="0">
+              <a:buNone/>
+            </a:pPr>
+            <a:r>
+              <a:rPr lang="en-US" sz="1600" b="1" dirty="0">
+                <a:solidFill>
+                  <a:srgbClr val="FFFFFF"/>
+                </a:solidFill>
+                <a:latin typeface="Poppins" pitchFamily="34" charset="0"/>
+                <a:ea typeface="Poppins" pitchFamily="34" charset="-122"/>
+                <a:cs typeface="Poppins" pitchFamily="34" charset="-120"/>
+              </a:rPr>
+              <a:t>Zaihua Ji</a:t>
+            </a:r>
+            <a:endParaRPr lang="en-US" sz="1600" dirty="0"/>
+          </a:p>
+        </p:txBody>
+      </p:sp>
+      <p:sp>
+        <p:nvSpPr>
+          <p:cNvPr id="12" name="Text 6"/>
+          <p:cNvSpPr/>
+          <p:nvPr/>
+        </p:nvSpPr>
+        <p:spPr>
+          <a:xfrm>
+            <a:off x="923544" y="5148072"/>
+            <a:ext cx="5029200" cy="320040"/>
           </a:xfrm>
           <a:prstGeom prst="rect">
             <a:avLst/>
@@ -3468,61 +3706,34 @@
           <a:bodyPr wrap="square" lIns="0" tIns="0" rIns="0" bIns="0" rtlCol="0" anchor="ctr"/>
           <a:lstStyle/>
           <a:p>
-            <a:pPr algn="ctr" indent="0" marL="0">
-              <a:buNone/>
-            </a:pPr>
-            <a:r>
-              <a:rPr lang="en-US" sz="1200" b="1" dirty="0">
-                <a:solidFill>
-                  <a:srgbClr val="C3D7EE"/>
-                </a:solidFill>
-                <a:latin typeface="Poppins" pitchFamily="34" charset="0"/>
-                <a:ea typeface="Poppins" pitchFamily="34" charset="-122"/>
-                <a:cs typeface="Poppins" pitchFamily="34" charset="-120"/>
-              </a:rPr>
-              <a:t>General Usage</a:t>
-            </a:r>
-            <a:endParaRPr lang="en-US" sz="1200" dirty="0"/>
-          </a:p>
-        </p:txBody>
-      </p:sp>
-      <p:sp>
-        <p:nvSpPr>
-          <p:cNvPr id="11" name="Shape 7"/>
-          <p:cNvSpPr/>
-          <p:nvPr/>
-        </p:nvSpPr>
-        <p:spPr>
-          <a:xfrm>
-            <a:off x="4762195" y="4892040"/>
-            <a:ext cx="1600200" cy="457200"/>
-          </a:xfrm>
-          <a:prstGeom prst="roundRect">
-            <a:avLst>
-              <a:gd name="adj" fmla="val 20000"/>
-            </a:avLst>
-          </a:prstGeom>
-          <a:solidFill>
-            <a:srgbClr val="0B2A63"/>
-          </a:solidFill>
-          <a:ln w="12700">
-            <a:solidFill>
-              <a:srgbClr val="2C4E7D"/>
-            </a:solidFill>
-            <a:prstDash val="solid"/>
-          </a:ln>
-        </p:spPr>
-      </p:sp>
-      <p:sp>
-        <p:nvSpPr>
-          <p:cNvPr id="12" name="Text 8"/>
-          <p:cNvSpPr/>
-          <p:nvPr/>
-        </p:nvSpPr>
-        <p:spPr>
-          <a:xfrm>
-            <a:off x="4762195" y="4892040"/>
-            <a:ext cx="1600200" cy="457200"/>
+            <a:pPr indent="0" marL="0">
+              <a:buNone/>
+            </a:pPr>
+            <a:r>
+              <a:rPr lang="en-US" sz="1600" dirty="0">
+                <a:solidFill>
+                  <a:srgbClr val="FFFFFF"/>
+                </a:solidFill>
+                <a:latin typeface="Poppins" pitchFamily="34" charset="0"/>
+                <a:ea typeface="Poppins" pitchFamily="34" charset="-122"/>
+                <a:cs typeface="Poppins" pitchFamily="34" charset="-120"/>
+              </a:rPr>
+              <a:t>Software Engineer  •  zji@ucar.edu</a:t>
+            </a:r>
+            <a:endParaRPr lang="en-US" sz="1600" dirty="0"/>
+          </a:p>
+        </p:txBody>
+      </p:sp>
+      <p:sp>
+        <p:nvSpPr>
+          <p:cNvPr id="13" name="Text 7"/>
+          <p:cNvSpPr/>
+          <p:nvPr/>
+        </p:nvSpPr>
+        <p:spPr>
+          <a:xfrm>
+            <a:off x="923544" y="5559552"/>
+            <a:ext cx="5029200" cy="457200"/>
           </a:xfrm>
           <a:prstGeom prst="rect">
             <a:avLst/>
@@ -3534,34 +3745,37 @@
           <a:bodyPr wrap="square" lIns="0" tIns="0" rIns="0" bIns="0" rtlCol="0" anchor="ctr"/>
           <a:lstStyle/>
           <a:p>
-            <a:pPr algn="ctr" indent="0" marL="0">
-              <a:buNone/>
-            </a:pPr>
-            <a:r>
-              <a:rPr lang="en-US" sz="1200" b="1" dirty="0">
-                <a:solidFill>
-                  <a:srgbClr val="C3D7EE"/>
-                </a:solidFill>
-                <a:latin typeface="Poppins" pitchFamily="34" charset="0"/>
-                <a:ea typeface="Poppins" pitchFamily="34" charset="-122"/>
-                <a:cs typeface="Poppins" pitchFamily="34" charset="-120"/>
-              </a:rPr>
-              <a:t>Updated 2026-07</a:t>
-            </a:r>
-            <a:endParaRPr lang="en-US" sz="1200" dirty="0"/>
-          </a:p>
-        </p:txBody>
-      </p:sp>
-      <p:sp>
-        <p:nvSpPr>
-          <p:cNvPr id="13" name="Text 9"/>
-          <p:cNvSpPr/>
-          <p:nvPr/>
-        </p:nvSpPr>
-        <p:spPr>
-          <a:xfrm>
-            <a:off x="658368" y="5532120"/>
-            <a:ext cx="10058400" cy="365760"/>
+            <a:pPr indent="0" marL="0">
+              <a:lnSpc>
+                <a:spcPct val="110000"/>
+              </a:lnSpc>
+              <a:buNone/>
+            </a:pPr>
+            <a:r>
+              <a:rPr lang="en-US" sz="950" dirty="0">
+                <a:solidFill>
+                  <a:srgbClr val="FFFFFF"/>
+                </a:solidFill>
+                <a:latin typeface="Poppins" pitchFamily="34" charset="0"/>
+                <a:ea typeface="Poppins" pitchFamily="34" charset="-122"/>
+                <a:cs typeface="Poppins" pitchFamily="34" charset="-120"/>
+              </a:rPr>
+              <a:t>DEVELOPER CONFIGURATION • GENERAL USAGE • COMPANION UTILITY TO DSARCH</a:t>
+            </a:r>
+            <a:endParaRPr lang="en-US" sz="950" dirty="0"/>
+          </a:p>
+        </p:txBody>
+      </p:sp>
+      <p:sp>
+        <p:nvSpPr>
+          <p:cNvPr id="14" name="Text 8"/>
+          <p:cNvSpPr/>
+          <p:nvPr/>
+        </p:nvSpPr>
+        <p:spPr>
+          <a:xfrm>
+            <a:off x="923544" y="6217920"/>
+            <a:ext cx="5029200" cy="411480"/>
           </a:xfrm>
           <a:prstGeom prst="rect">
             <a:avLst/>
@@ -3574,73 +3788,23 @@
           <a:lstStyle/>
           <a:p>
             <a:pPr indent="0" marL="0">
-              <a:buNone/>
-            </a:pPr>
-            <a:r>
-              <a:rPr lang="en-US" sz="1300" b="1" dirty="0">
-                <a:solidFill>
-                  <a:srgbClr val="C3D7EE"/>
-                </a:solidFill>
-                <a:latin typeface="Poppins" pitchFamily="34" charset="0"/>
-                <a:ea typeface="Poppins" pitchFamily="34" charset="-122"/>
-                <a:cs typeface="Poppins" pitchFamily="34" charset="-120"/>
-              </a:rPr>
-              <a:t>Zaihua Ji</a:t>
-            </a:r>
-            <a:pPr indent="0" marL="0">
-              <a:buNone/>
-            </a:pPr>
-            <a:r>
-              <a:rPr lang="en-US" sz="1300" dirty="0">
-                <a:solidFill>
-                  <a:srgbClr val="C3D7EE"/>
-                </a:solidFill>
-                <a:latin typeface="Poppins" pitchFamily="34" charset="0"/>
-                <a:ea typeface="Poppins" pitchFamily="34" charset="-122"/>
-                <a:cs typeface="Poppins" pitchFamily="34" charset="-120"/>
-              </a:rPr>
-              <a:t>   zji@ucar.edu</a:t>
-            </a:r>
-            <a:endParaRPr lang="en-US" sz="1300" dirty="0"/>
-          </a:p>
-        </p:txBody>
-      </p:sp>
-      <p:sp>
-        <p:nvSpPr>
-          <p:cNvPr id="14" name="Text 10"/>
-          <p:cNvSpPr/>
-          <p:nvPr/>
-        </p:nvSpPr>
-        <p:spPr>
-          <a:xfrm>
-            <a:off x="658368" y="5943600"/>
-            <a:ext cx="10058400" cy="365760"/>
-          </a:xfrm>
-          <a:prstGeom prst="rect">
-            <a:avLst/>
-          </a:prstGeom>
-          <a:noFill/>
-          <a:ln/>
-        </p:spPr>
-        <p:txBody>
-          <a:bodyPr wrap="square" lIns="0" tIns="0" rIns="0" bIns="0" rtlCol="0" anchor="ctr"/>
-          <a:lstStyle/>
-          <a:p>
-            <a:pPr indent="0" marL="0">
-              <a:buNone/>
-            </a:pPr>
-            <a:r>
-              <a:rPr lang="en-US" sz="1200" dirty="0">
-                <a:solidFill>
-                  <a:srgbClr val="97999B"/>
-                </a:solidFill>
-                <a:latin typeface="Courier New" pitchFamily="34" charset="0"/>
-                <a:ea typeface="Courier New" pitchFamily="34" charset="-122"/>
-                <a:cs typeface="Courier New" pitchFamily="34" charset="-120"/>
-              </a:rPr>
-              <a:t>Companion utility to  dsarch  •  orchestrated by the  dscheck  daemon</a:t>
-            </a:r>
-            <a:endParaRPr lang="en-US" sz="1200" dirty="0"/>
+              <a:lnSpc>
+                <a:spcPct val="110000"/>
+              </a:lnSpc>
+              <a:buNone/>
+            </a:pPr>
+            <a:r>
+              <a:rPr lang="en-US" sz="700" i="1" dirty="0">
+                <a:solidFill>
+                  <a:srgbClr val="FFFFFF"/>
+                </a:solidFill>
+                <a:latin typeface="Poppins" pitchFamily="34" charset="0"/>
+                <a:ea typeface="Poppins" pitchFamily="34" charset="-122"/>
+                <a:cs typeface="Poppins" pitchFamily="34" charset="-120"/>
+              </a:rPr>
+              <a:t>Orchestrated by the dscheck daemon: dsupdt retrieves data from remote servers, assembles archive-ready local files, and hands them to dsarch for archiving onto the GDEX Servers.</a:t>
+            </a:r>
+            <a:endParaRPr lang="en-US" sz="700" dirty="0"/>
           </a:p>
         </p:txBody>
       </p:sp>
@@ -3655,13 +3819,6 @@
 <file path=ppt/slides/slide10.xml><?xml version="1.0" encoding="utf-8"?>
 <p:sld xmlns:a="http://schemas.openxmlformats.org/drawingml/2006/main" xmlns:r="http://schemas.openxmlformats.org/officeDocument/2006/relationships" xmlns:p="http://schemas.openxmlformats.org/presentationml/2006/main">
   <p:cSld name="Slide 10">
-    <p:bg>
-      <p:bgPr>
-        <a:solidFill>
-          <a:srgbClr val="FFFFFF"/>
-        </a:solidFill>
-      </p:bgPr>
-    </p:bg>
     <p:spTree>
       <p:nvGrpSpPr>
         <p:cNvPr id="1" name=""/>
@@ -6586,40 +6743,16 @@
           </a:graphicData>
         </a:graphic>
       </p:graphicFrame>
-      <p:pic>
-        <p:nvPicPr>
-          <p:cNvPr id="6" name="Image 0" descr="nsf_ncar_logo_color.png">    </p:cNvPr>
-          <p:cNvPicPr>
-            <a:picLocks noChangeAspect="1"/>
-          </p:cNvPicPr>
-          <p:nvPr/>
-        </p:nvPicPr>
-        <p:blipFill>
-          <a:blip r:embed="rId1"/>
-          <a:stretch>
-            <a:fillRect/>
-          </a:stretch>
-        </p:blipFill>
-        <p:spPr>
-          <a:xfrm>
-            <a:off x="9951415" y="274320"/>
-            <a:ext cx="1874520" cy="512064"/>
-          </a:xfrm>
-          <a:prstGeom prst="rect">
-            <a:avLst/>
-          </a:prstGeom>
-        </p:spPr>
-      </p:pic>
-      <p:sp>
-        <p:nvSpPr>
-          <p:cNvPr id="7" name="Text 3"/>
-          <p:cNvSpPr/>
-          <p:nvPr/>
-        </p:nvSpPr>
-        <p:spPr>
-          <a:xfrm>
-            <a:off x="457200" y="6473952"/>
-            <a:ext cx="7315200" cy="274320"/>
+      <p:sp>
+        <p:nvSpPr>
+          <p:cNvPr id="6" name="Text 3"/>
+          <p:cNvSpPr/>
+          <p:nvPr/>
+        </p:nvSpPr>
+        <p:spPr>
+          <a:xfrm>
+            <a:off x="256032" y="6446520"/>
+            <a:ext cx="365760" cy="274320"/>
           </a:xfrm>
           <a:prstGeom prst="rect">
             <a:avLst/>
@@ -6631,34 +6764,34 @@
           <a:bodyPr wrap="square" lIns="0" tIns="0" rIns="0" bIns="0" rtlCol="0" anchor="ctr"/>
           <a:lstStyle/>
           <a:p>
-            <a:pPr algn="l" indent="0" marL="0">
-              <a:buNone/>
-            </a:pPr>
-            <a:r>
-              <a:rPr lang="en-US" sz="900" dirty="0">
-                <a:solidFill>
-                  <a:srgbClr val="53565A"/>
-                </a:solidFill>
-                <a:latin typeface="Poppins" pitchFamily="34" charset="0"/>
-                <a:ea typeface="Poppins" pitchFamily="34" charset="-122"/>
-                <a:cs typeface="Poppins" pitchFamily="34" charset="-120"/>
-              </a:rPr>
-              <a:t>dsupdt  •  Developer &amp; General Usage Guide</a:t>
-            </a:r>
-            <a:endParaRPr lang="en-US" sz="900" dirty="0"/>
-          </a:p>
-        </p:txBody>
-      </p:sp>
-      <p:sp>
-        <p:nvSpPr>
-          <p:cNvPr id="8" name="Text 4"/>
-          <p:cNvSpPr/>
-          <p:nvPr/>
-        </p:nvSpPr>
-        <p:spPr>
-          <a:xfrm>
-            <a:off x="11368735" y="6473952"/>
-            <a:ext cx="365760" cy="274320"/>
+            <a:pPr indent="0" marL="0">
+              <a:buNone/>
+            </a:pPr>
+            <a:r>
+              <a:rPr lang="en-US" sz="950" b="1" dirty="0">
+                <a:solidFill>
+                  <a:srgbClr val="00357A"/>
+                </a:solidFill>
+                <a:latin typeface="Poppins" pitchFamily="34" charset="0"/>
+                <a:ea typeface="Poppins" pitchFamily="34" charset="-122"/>
+                <a:cs typeface="Poppins" pitchFamily="34" charset="-120"/>
+              </a:rPr>
+              <a:t>9</a:t>
+            </a:r>
+            <a:endParaRPr lang="en-US" sz="950" dirty="0"/>
+          </a:p>
+        </p:txBody>
+      </p:sp>
+      <p:sp>
+        <p:nvSpPr>
+          <p:cNvPr id="7" name="Text 4"/>
+          <p:cNvSpPr/>
+          <p:nvPr/>
+        </p:nvSpPr>
+        <p:spPr>
+          <a:xfrm>
+            <a:off x="786384" y="6446520"/>
+            <a:ext cx="5486400" cy="274320"/>
           </a:xfrm>
           <a:prstGeom prst="rect">
             <a:avLst/>
@@ -6670,21 +6803,21 @@
           <a:bodyPr wrap="square" lIns="0" tIns="0" rIns="0" bIns="0" rtlCol="0" anchor="ctr"/>
           <a:lstStyle/>
           <a:p>
-            <a:pPr algn="r" indent="0" marL="0">
-              <a:buNone/>
-            </a:pPr>
-            <a:r>
-              <a:rPr lang="en-US" sz="900" dirty="0">
-                <a:solidFill>
-                  <a:srgbClr val="53565A"/>
-                </a:solidFill>
-                <a:latin typeface="Poppins" pitchFamily="34" charset="0"/>
-                <a:ea typeface="Poppins" pitchFamily="34" charset="-122"/>
-                <a:cs typeface="Poppins" pitchFamily="34" charset="-120"/>
-              </a:rPr>
-              <a:t>9</a:t>
-            </a:r>
-            <a:endParaRPr lang="en-US" sz="900" dirty="0"/>
+            <a:pPr indent="0" marL="0">
+              <a:buNone/>
+            </a:pPr>
+            <a:r>
+              <a:rPr lang="en-US" sz="950" b="1" dirty="0">
+                <a:solidFill>
+                  <a:srgbClr val="00357A"/>
+                </a:solidFill>
+                <a:latin typeface="Poppins" pitchFamily="34" charset="0"/>
+                <a:ea typeface="Poppins" pitchFamily="34" charset="-122"/>
+                <a:cs typeface="Poppins" pitchFamily="34" charset="-120"/>
+              </a:rPr>
+              <a:t>DSUPDT  •  DEVELOPER &amp; GENERAL USAGE GUIDE</a:t>
+            </a:r>
+            <a:endParaRPr lang="en-US" sz="950" dirty="0"/>
           </a:p>
         </p:txBody>
       </p:sp>
@@ -6699,13 +6832,6 @@
 <file path=ppt/slides/slide11.xml><?xml version="1.0" encoding="utf-8"?>
 <p:sld xmlns:a="http://schemas.openxmlformats.org/drawingml/2006/main" xmlns:r="http://schemas.openxmlformats.org/officeDocument/2006/relationships" xmlns:p="http://schemas.openxmlformats.org/presentationml/2006/main">
   <p:cSld name="Slide 11">
-    <p:bg>
-      <p:bgPr>
-        <a:solidFill>
-          <a:srgbClr val="FFFFFF"/>
-        </a:solidFill>
-      </p:bgPr>
-    </p:bg>
     <p:spTree>
       <p:nvGrpSpPr>
         <p:cNvPr id="1" name=""/>
@@ -10388,40 +10514,16 @@
           </a:p>
         </p:txBody>
       </p:sp>
-      <p:pic>
-        <p:nvPicPr>
-          <p:cNvPr id="8" name="Image 0" descr="nsf_ncar_logo_color.png">    </p:cNvPr>
-          <p:cNvPicPr>
-            <a:picLocks noChangeAspect="1"/>
-          </p:cNvPicPr>
-          <p:nvPr/>
-        </p:nvPicPr>
-        <p:blipFill>
-          <a:blip r:embed="rId1"/>
-          <a:stretch>
-            <a:fillRect/>
-          </a:stretch>
-        </p:blipFill>
-        <p:spPr>
-          <a:xfrm>
-            <a:off x="9951415" y="274320"/>
-            <a:ext cx="1874520" cy="512064"/>
-          </a:xfrm>
-          <a:prstGeom prst="rect">
-            <a:avLst/>
-          </a:prstGeom>
-        </p:spPr>
-      </p:pic>
-      <p:sp>
-        <p:nvSpPr>
-          <p:cNvPr id="9" name="Text 4"/>
-          <p:cNvSpPr/>
-          <p:nvPr/>
-        </p:nvSpPr>
-        <p:spPr>
-          <a:xfrm>
-            <a:off x="457200" y="6473952"/>
-            <a:ext cx="7315200" cy="274320"/>
+      <p:sp>
+        <p:nvSpPr>
+          <p:cNvPr id="8" name="Text 4"/>
+          <p:cNvSpPr/>
+          <p:nvPr/>
+        </p:nvSpPr>
+        <p:spPr>
+          <a:xfrm>
+            <a:off x="256032" y="6446520"/>
+            <a:ext cx="365760" cy="274320"/>
           </a:xfrm>
           <a:prstGeom prst="rect">
             <a:avLst/>
@@ -10433,34 +10535,34 @@
           <a:bodyPr wrap="square" lIns="0" tIns="0" rIns="0" bIns="0" rtlCol="0" anchor="ctr"/>
           <a:lstStyle/>
           <a:p>
-            <a:pPr algn="l" indent="0" marL="0">
-              <a:buNone/>
-            </a:pPr>
-            <a:r>
-              <a:rPr lang="en-US" sz="900" dirty="0">
-                <a:solidFill>
-                  <a:srgbClr val="53565A"/>
-                </a:solidFill>
-                <a:latin typeface="Poppins" pitchFamily="34" charset="0"/>
-                <a:ea typeface="Poppins" pitchFamily="34" charset="-122"/>
-                <a:cs typeface="Poppins" pitchFamily="34" charset="-120"/>
-              </a:rPr>
-              <a:t>dsupdt  •  Developer &amp; General Usage Guide</a:t>
-            </a:r>
-            <a:endParaRPr lang="en-US" sz="900" dirty="0"/>
-          </a:p>
-        </p:txBody>
-      </p:sp>
-      <p:sp>
-        <p:nvSpPr>
-          <p:cNvPr id="10" name="Text 5"/>
-          <p:cNvSpPr/>
-          <p:nvPr/>
-        </p:nvSpPr>
-        <p:spPr>
-          <a:xfrm>
-            <a:off x="11368735" y="6473952"/>
-            <a:ext cx="365760" cy="274320"/>
+            <a:pPr indent="0" marL="0">
+              <a:buNone/>
+            </a:pPr>
+            <a:r>
+              <a:rPr lang="en-US" sz="950" b="1" dirty="0">
+                <a:solidFill>
+                  <a:srgbClr val="00357A"/>
+                </a:solidFill>
+                <a:latin typeface="Poppins" pitchFamily="34" charset="0"/>
+                <a:ea typeface="Poppins" pitchFamily="34" charset="-122"/>
+                <a:cs typeface="Poppins" pitchFamily="34" charset="-120"/>
+              </a:rPr>
+              <a:t>10</a:t>
+            </a:r>
+            <a:endParaRPr lang="en-US" sz="950" dirty="0"/>
+          </a:p>
+        </p:txBody>
+      </p:sp>
+      <p:sp>
+        <p:nvSpPr>
+          <p:cNvPr id="9" name="Text 5"/>
+          <p:cNvSpPr/>
+          <p:nvPr/>
+        </p:nvSpPr>
+        <p:spPr>
+          <a:xfrm>
+            <a:off x="786384" y="6446520"/>
+            <a:ext cx="5486400" cy="274320"/>
           </a:xfrm>
           <a:prstGeom prst="rect">
             <a:avLst/>
@@ -10472,21 +10574,21 @@
           <a:bodyPr wrap="square" lIns="0" tIns="0" rIns="0" bIns="0" rtlCol="0" anchor="ctr"/>
           <a:lstStyle/>
           <a:p>
-            <a:pPr algn="r" indent="0" marL="0">
-              <a:buNone/>
-            </a:pPr>
-            <a:r>
-              <a:rPr lang="en-US" sz="900" dirty="0">
-                <a:solidFill>
-                  <a:srgbClr val="53565A"/>
-                </a:solidFill>
-                <a:latin typeface="Poppins" pitchFamily="34" charset="0"/>
-                <a:ea typeface="Poppins" pitchFamily="34" charset="-122"/>
-                <a:cs typeface="Poppins" pitchFamily="34" charset="-120"/>
-              </a:rPr>
-              <a:t>10</a:t>
-            </a:r>
-            <a:endParaRPr lang="en-US" sz="900" dirty="0"/>
+            <a:pPr indent="0" marL="0">
+              <a:buNone/>
+            </a:pPr>
+            <a:r>
+              <a:rPr lang="en-US" sz="950" b="1" dirty="0">
+                <a:solidFill>
+                  <a:srgbClr val="00357A"/>
+                </a:solidFill>
+                <a:latin typeface="Poppins" pitchFamily="34" charset="0"/>
+                <a:ea typeface="Poppins" pitchFamily="34" charset="-122"/>
+                <a:cs typeface="Poppins" pitchFamily="34" charset="-120"/>
+              </a:rPr>
+              <a:t>DSUPDT  •  DEVELOPER &amp; GENERAL USAGE GUIDE</a:t>
+            </a:r>
+            <a:endParaRPr lang="en-US" sz="950" dirty="0"/>
           </a:p>
         </p:txBody>
       </p:sp>
@@ -10501,13 +10603,6 @@
 <file path=ppt/slides/slide12.xml><?xml version="1.0" encoding="utf-8"?>
 <p:sld xmlns:a="http://schemas.openxmlformats.org/drawingml/2006/main" xmlns:r="http://schemas.openxmlformats.org/officeDocument/2006/relationships" xmlns:p="http://schemas.openxmlformats.org/presentationml/2006/main">
   <p:cSld name="Slide 12">
-    <p:bg>
-      <p:bgPr>
-        <a:solidFill>
-          <a:srgbClr val="FFFFFF"/>
-        </a:solidFill>
-      </p:bgPr>
-    </p:bg>
     <p:spTree>
       <p:nvGrpSpPr>
         <p:cNvPr id="1" name=""/>
@@ -13025,40 +13120,16 @@
           </a:graphicData>
         </a:graphic>
       </p:graphicFrame>
-      <p:pic>
-        <p:nvPicPr>
-          <p:cNvPr id="21" name="Image 0" descr="nsf_ncar_logo_color.png">    </p:cNvPr>
-          <p:cNvPicPr>
-            <a:picLocks noChangeAspect="1"/>
-          </p:cNvPicPr>
-          <p:nvPr/>
-        </p:nvPicPr>
-        <p:blipFill>
-          <a:blip r:embed="rId1"/>
-          <a:stretch>
-            <a:fillRect/>
-          </a:stretch>
-        </p:blipFill>
-        <p:spPr>
-          <a:xfrm>
-            <a:off x="9951415" y="274320"/>
-            <a:ext cx="1874520" cy="512064"/>
-          </a:xfrm>
-          <a:prstGeom prst="rect">
-            <a:avLst/>
-          </a:prstGeom>
-        </p:spPr>
-      </p:pic>
-      <p:sp>
-        <p:nvSpPr>
-          <p:cNvPr id="22" name="Text 18"/>
-          <p:cNvSpPr/>
-          <p:nvPr/>
-        </p:nvSpPr>
-        <p:spPr>
-          <a:xfrm>
-            <a:off x="457200" y="6473952"/>
-            <a:ext cx="7315200" cy="274320"/>
+      <p:sp>
+        <p:nvSpPr>
+          <p:cNvPr id="21" name="Text 18"/>
+          <p:cNvSpPr/>
+          <p:nvPr/>
+        </p:nvSpPr>
+        <p:spPr>
+          <a:xfrm>
+            <a:off x="256032" y="6446520"/>
+            <a:ext cx="365760" cy="274320"/>
           </a:xfrm>
           <a:prstGeom prst="rect">
             <a:avLst/>
@@ -13070,34 +13141,34 @@
           <a:bodyPr wrap="square" lIns="0" tIns="0" rIns="0" bIns="0" rtlCol="0" anchor="ctr"/>
           <a:lstStyle/>
           <a:p>
-            <a:pPr algn="l" indent="0" marL="0">
-              <a:buNone/>
-            </a:pPr>
-            <a:r>
-              <a:rPr lang="en-US" sz="900" dirty="0">
-                <a:solidFill>
-                  <a:srgbClr val="53565A"/>
-                </a:solidFill>
-                <a:latin typeface="Poppins" pitchFamily="34" charset="0"/>
-                <a:ea typeface="Poppins" pitchFamily="34" charset="-122"/>
-                <a:cs typeface="Poppins" pitchFamily="34" charset="-120"/>
-              </a:rPr>
-              <a:t>dsupdt  •  Developer &amp; General Usage Guide</a:t>
-            </a:r>
-            <a:endParaRPr lang="en-US" sz="900" dirty="0"/>
-          </a:p>
-        </p:txBody>
-      </p:sp>
-      <p:sp>
-        <p:nvSpPr>
-          <p:cNvPr id="23" name="Text 19"/>
-          <p:cNvSpPr/>
-          <p:nvPr/>
-        </p:nvSpPr>
-        <p:spPr>
-          <a:xfrm>
-            <a:off x="11368735" y="6473952"/>
-            <a:ext cx="365760" cy="274320"/>
+            <a:pPr indent="0" marL="0">
+              <a:buNone/>
+            </a:pPr>
+            <a:r>
+              <a:rPr lang="en-US" sz="950" b="1" dirty="0">
+                <a:solidFill>
+                  <a:srgbClr val="00357A"/>
+                </a:solidFill>
+                <a:latin typeface="Poppins" pitchFamily="34" charset="0"/>
+                <a:ea typeface="Poppins" pitchFamily="34" charset="-122"/>
+                <a:cs typeface="Poppins" pitchFamily="34" charset="-120"/>
+              </a:rPr>
+              <a:t>11</a:t>
+            </a:r>
+            <a:endParaRPr lang="en-US" sz="950" dirty="0"/>
+          </a:p>
+        </p:txBody>
+      </p:sp>
+      <p:sp>
+        <p:nvSpPr>
+          <p:cNvPr id="22" name="Text 19"/>
+          <p:cNvSpPr/>
+          <p:nvPr/>
+        </p:nvSpPr>
+        <p:spPr>
+          <a:xfrm>
+            <a:off x="786384" y="6446520"/>
+            <a:ext cx="5486400" cy="274320"/>
           </a:xfrm>
           <a:prstGeom prst="rect">
             <a:avLst/>
@@ -13109,21 +13180,21 @@
           <a:bodyPr wrap="square" lIns="0" tIns="0" rIns="0" bIns="0" rtlCol="0" anchor="ctr"/>
           <a:lstStyle/>
           <a:p>
-            <a:pPr algn="r" indent="0" marL="0">
-              <a:buNone/>
-            </a:pPr>
-            <a:r>
-              <a:rPr lang="en-US" sz="900" dirty="0">
-                <a:solidFill>
-                  <a:srgbClr val="53565A"/>
-                </a:solidFill>
-                <a:latin typeface="Poppins" pitchFamily="34" charset="0"/>
-                <a:ea typeface="Poppins" pitchFamily="34" charset="-122"/>
-                <a:cs typeface="Poppins" pitchFamily="34" charset="-120"/>
-              </a:rPr>
-              <a:t>11</a:t>
-            </a:r>
-            <a:endParaRPr lang="en-US" sz="900" dirty="0"/>
+            <a:pPr indent="0" marL="0">
+              <a:buNone/>
+            </a:pPr>
+            <a:r>
+              <a:rPr lang="en-US" sz="950" b="1" dirty="0">
+                <a:solidFill>
+                  <a:srgbClr val="00357A"/>
+                </a:solidFill>
+                <a:latin typeface="Poppins" pitchFamily="34" charset="0"/>
+                <a:ea typeface="Poppins" pitchFamily="34" charset="-122"/>
+                <a:cs typeface="Poppins" pitchFamily="34" charset="-120"/>
+              </a:rPr>
+              <a:t>DSUPDT  •  DEVELOPER &amp; GENERAL USAGE GUIDE</a:t>
+            </a:r>
+            <a:endParaRPr lang="en-US" sz="950" dirty="0"/>
           </a:p>
         </p:txBody>
       </p:sp>
@@ -13138,13 +13209,6 @@
 <file path=ppt/slides/slide13.xml><?xml version="1.0" encoding="utf-8"?>
 <p:sld xmlns:a="http://schemas.openxmlformats.org/drawingml/2006/main" xmlns:r="http://schemas.openxmlformats.org/officeDocument/2006/relationships" xmlns:p="http://schemas.openxmlformats.org/presentationml/2006/main">
   <p:cSld name="Slide 13">
-    <p:bg>
-      <p:bgPr>
-        <a:solidFill>
-          <a:srgbClr val="FFFFFF"/>
-        </a:solidFill>
-      </p:bgPr>
-    </p:bg>
     <p:spTree>
       <p:nvGrpSpPr>
         <p:cNvPr id="1" name=""/>
@@ -14623,40 +14687,16 @@
           </a:p>
         </p:txBody>
       </p:sp>
-      <p:pic>
-        <p:nvPicPr>
-          <p:cNvPr id="38" name="Image 0" descr="nsf_ncar_logo_color.png">    </p:cNvPr>
-          <p:cNvPicPr>
-            <a:picLocks noChangeAspect="1"/>
-          </p:cNvPicPr>
-          <p:nvPr/>
-        </p:nvPicPr>
-        <p:blipFill>
-          <a:blip r:embed="rId1"/>
-          <a:stretch>
-            <a:fillRect/>
-          </a:stretch>
-        </p:blipFill>
-        <p:spPr>
-          <a:xfrm>
-            <a:off x="9951415" y="274320"/>
-            <a:ext cx="1874520" cy="512064"/>
-          </a:xfrm>
-          <a:prstGeom prst="rect">
-            <a:avLst/>
-          </a:prstGeom>
-        </p:spPr>
-      </p:pic>
-      <p:sp>
-        <p:nvSpPr>
-          <p:cNvPr id="39" name="Text 36"/>
-          <p:cNvSpPr/>
-          <p:nvPr/>
-        </p:nvSpPr>
-        <p:spPr>
-          <a:xfrm>
-            <a:off x="457200" y="6473952"/>
-            <a:ext cx="7315200" cy="274320"/>
+      <p:sp>
+        <p:nvSpPr>
+          <p:cNvPr id="38" name="Text 36"/>
+          <p:cNvSpPr/>
+          <p:nvPr/>
+        </p:nvSpPr>
+        <p:spPr>
+          <a:xfrm>
+            <a:off x="256032" y="6446520"/>
+            <a:ext cx="365760" cy="274320"/>
           </a:xfrm>
           <a:prstGeom prst="rect">
             <a:avLst/>
@@ -14668,34 +14708,34 @@
           <a:bodyPr wrap="square" lIns="0" tIns="0" rIns="0" bIns="0" rtlCol="0" anchor="ctr"/>
           <a:lstStyle/>
           <a:p>
-            <a:pPr algn="l" indent="0" marL="0">
-              <a:buNone/>
-            </a:pPr>
-            <a:r>
-              <a:rPr lang="en-US" sz="900" dirty="0">
-                <a:solidFill>
-                  <a:srgbClr val="53565A"/>
-                </a:solidFill>
-                <a:latin typeface="Poppins" pitchFamily="34" charset="0"/>
-                <a:ea typeface="Poppins" pitchFamily="34" charset="-122"/>
-                <a:cs typeface="Poppins" pitchFamily="34" charset="-120"/>
-              </a:rPr>
-              <a:t>dsupdt  •  Developer &amp; General Usage Guide</a:t>
-            </a:r>
-            <a:endParaRPr lang="en-US" sz="900" dirty="0"/>
-          </a:p>
-        </p:txBody>
-      </p:sp>
-      <p:sp>
-        <p:nvSpPr>
-          <p:cNvPr id="40" name="Text 37"/>
-          <p:cNvSpPr/>
-          <p:nvPr/>
-        </p:nvSpPr>
-        <p:spPr>
-          <a:xfrm>
-            <a:off x="11368735" y="6473952"/>
-            <a:ext cx="365760" cy="274320"/>
+            <a:pPr indent="0" marL="0">
+              <a:buNone/>
+            </a:pPr>
+            <a:r>
+              <a:rPr lang="en-US" sz="950" b="1" dirty="0">
+                <a:solidFill>
+                  <a:srgbClr val="00357A"/>
+                </a:solidFill>
+                <a:latin typeface="Poppins" pitchFamily="34" charset="0"/>
+                <a:ea typeface="Poppins" pitchFamily="34" charset="-122"/>
+                <a:cs typeface="Poppins" pitchFamily="34" charset="-120"/>
+              </a:rPr>
+              <a:t>12</a:t>
+            </a:r>
+            <a:endParaRPr lang="en-US" sz="950" dirty="0"/>
+          </a:p>
+        </p:txBody>
+      </p:sp>
+      <p:sp>
+        <p:nvSpPr>
+          <p:cNvPr id="39" name="Text 37"/>
+          <p:cNvSpPr/>
+          <p:nvPr/>
+        </p:nvSpPr>
+        <p:spPr>
+          <a:xfrm>
+            <a:off x="786384" y="6446520"/>
+            <a:ext cx="5486400" cy="274320"/>
           </a:xfrm>
           <a:prstGeom prst="rect">
             <a:avLst/>
@@ -14707,21 +14747,21 @@
           <a:bodyPr wrap="square" lIns="0" tIns="0" rIns="0" bIns="0" rtlCol="0" anchor="ctr"/>
           <a:lstStyle/>
           <a:p>
-            <a:pPr algn="r" indent="0" marL="0">
-              <a:buNone/>
-            </a:pPr>
-            <a:r>
-              <a:rPr lang="en-US" sz="900" dirty="0">
-                <a:solidFill>
-                  <a:srgbClr val="53565A"/>
-                </a:solidFill>
-                <a:latin typeface="Poppins" pitchFamily="34" charset="0"/>
-                <a:ea typeface="Poppins" pitchFamily="34" charset="-122"/>
-                <a:cs typeface="Poppins" pitchFamily="34" charset="-120"/>
-              </a:rPr>
-              <a:t>12</a:t>
-            </a:r>
-            <a:endParaRPr lang="en-US" sz="900" dirty="0"/>
+            <a:pPr indent="0" marL="0">
+              <a:buNone/>
+            </a:pPr>
+            <a:r>
+              <a:rPr lang="en-US" sz="950" b="1" dirty="0">
+                <a:solidFill>
+                  <a:srgbClr val="00357A"/>
+                </a:solidFill>
+                <a:latin typeface="Poppins" pitchFamily="34" charset="0"/>
+                <a:ea typeface="Poppins" pitchFamily="34" charset="-122"/>
+                <a:cs typeface="Poppins" pitchFamily="34" charset="-120"/>
+              </a:rPr>
+              <a:t>DSUPDT  •  DEVELOPER &amp; GENERAL USAGE GUIDE</a:t>
+            </a:r>
+            <a:endParaRPr lang="en-US" sz="950" dirty="0"/>
           </a:p>
         </p:txBody>
       </p:sp>
@@ -14736,13 +14776,6 @@
 <file path=ppt/slides/slide14.xml><?xml version="1.0" encoding="utf-8"?>
 <p:sld xmlns:a="http://schemas.openxmlformats.org/drawingml/2006/main" xmlns:r="http://schemas.openxmlformats.org/officeDocument/2006/relationships" xmlns:p="http://schemas.openxmlformats.org/presentationml/2006/main">
   <p:cSld name="Slide 14">
-    <p:bg>
-      <p:bgPr>
-        <a:solidFill>
-          <a:srgbClr val="FFFFFF"/>
-        </a:solidFill>
-      </p:bgPr>
-    </p:bg>
     <p:spTree>
       <p:nvGrpSpPr>
         <p:cNvPr id="1" name=""/>
@@ -16679,40 +16712,16 @@
           </a:p>
         </p:txBody>
       </p:sp>
-      <p:pic>
-        <p:nvPicPr>
-          <p:cNvPr id="10" name="Image 0" descr="nsf_ncar_logo_color.png">    </p:cNvPr>
-          <p:cNvPicPr>
-            <a:picLocks noChangeAspect="1"/>
-          </p:cNvPicPr>
-          <p:nvPr/>
-        </p:nvPicPr>
-        <p:blipFill>
-          <a:blip r:embed="rId1"/>
-          <a:stretch>
-            <a:fillRect/>
-          </a:stretch>
-        </p:blipFill>
-        <p:spPr>
-          <a:xfrm>
-            <a:off x="9951415" y="274320"/>
-            <a:ext cx="1874520" cy="512064"/>
-          </a:xfrm>
-          <a:prstGeom prst="rect">
-            <a:avLst/>
-          </a:prstGeom>
-        </p:spPr>
-      </p:pic>
-      <p:sp>
-        <p:nvSpPr>
-          <p:cNvPr id="11" name="Text 7"/>
-          <p:cNvSpPr/>
-          <p:nvPr/>
-        </p:nvSpPr>
-        <p:spPr>
-          <a:xfrm>
-            <a:off x="457200" y="6473952"/>
-            <a:ext cx="7315200" cy="274320"/>
+      <p:sp>
+        <p:nvSpPr>
+          <p:cNvPr id="10" name="Text 7"/>
+          <p:cNvSpPr/>
+          <p:nvPr/>
+        </p:nvSpPr>
+        <p:spPr>
+          <a:xfrm>
+            <a:off x="256032" y="6446520"/>
+            <a:ext cx="365760" cy="274320"/>
           </a:xfrm>
           <a:prstGeom prst="rect">
             <a:avLst/>
@@ -16724,34 +16733,34 @@
           <a:bodyPr wrap="square" lIns="0" tIns="0" rIns="0" bIns="0" rtlCol="0" anchor="ctr"/>
           <a:lstStyle/>
           <a:p>
-            <a:pPr algn="l" indent="0" marL="0">
-              <a:buNone/>
-            </a:pPr>
-            <a:r>
-              <a:rPr lang="en-US" sz="900" dirty="0">
-                <a:solidFill>
-                  <a:srgbClr val="53565A"/>
-                </a:solidFill>
-                <a:latin typeface="Poppins" pitchFamily="34" charset="0"/>
-                <a:ea typeface="Poppins" pitchFamily="34" charset="-122"/>
-                <a:cs typeface="Poppins" pitchFamily="34" charset="-120"/>
-              </a:rPr>
-              <a:t>dsupdt  •  Developer &amp; General Usage Guide</a:t>
-            </a:r>
-            <a:endParaRPr lang="en-US" sz="900" dirty="0"/>
-          </a:p>
-        </p:txBody>
-      </p:sp>
-      <p:sp>
-        <p:nvSpPr>
-          <p:cNvPr id="12" name="Text 8"/>
-          <p:cNvSpPr/>
-          <p:nvPr/>
-        </p:nvSpPr>
-        <p:spPr>
-          <a:xfrm>
-            <a:off x="11368735" y="6473952"/>
-            <a:ext cx="365760" cy="274320"/>
+            <a:pPr indent="0" marL="0">
+              <a:buNone/>
+            </a:pPr>
+            <a:r>
+              <a:rPr lang="en-US" sz="950" b="1" dirty="0">
+                <a:solidFill>
+                  <a:srgbClr val="00357A"/>
+                </a:solidFill>
+                <a:latin typeface="Poppins" pitchFamily="34" charset="0"/>
+                <a:ea typeface="Poppins" pitchFamily="34" charset="-122"/>
+                <a:cs typeface="Poppins" pitchFamily="34" charset="-120"/>
+              </a:rPr>
+              <a:t>13</a:t>
+            </a:r>
+            <a:endParaRPr lang="en-US" sz="950" dirty="0"/>
+          </a:p>
+        </p:txBody>
+      </p:sp>
+      <p:sp>
+        <p:nvSpPr>
+          <p:cNvPr id="11" name="Text 8"/>
+          <p:cNvSpPr/>
+          <p:nvPr/>
+        </p:nvSpPr>
+        <p:spPr>
+          <a:xfrm>
+            <a:off x="786384" y="6446520"/>
+            <a:ext cx="5486400" cy="274320"/>
           </a:xfrm>
           <a:prstGeom prst="rect">
             <a:avLst/>
@@ -16763,21 +16772,21 @@
           <a:bodyPr wrap="square" lIns="0" tIns="0" rIns="0" bIns="0" rtlCol="0" anchor="ctr"/>
           <a:lstStyle/>
           <a:p>
-            <a:pPr algn="r" indent="0" marL="0">
-              <a:buNone/>
-            </a:pPr>
-            <a:r>
-              <a:rPr lang="en-US" sz="900" dirty="0">
-                <a:solidFill>
-                  <a:srgbClr val="53565A"/>
-                </a:solidFill>
-                <a:latin typeface="Poppins" pitchFamily="34" charset="0"/>
-                <a:ea typeface="Poppins" pitchFamily="34" charset="-122"/>
-                <a:cs typeface="Poppins" pitchFamily="34" charset="-120"/>
-              </a:rPr>
-              <a:t>13</a:t>
-            </a:r>
-            <a:endParaRPr lang="en-US" sz="900" dirty="0"/>
+            <a:pPr indent="0" marL="0">
+              <a:buNone/>
+            </a:pPr>
+            <a:r>
+              <a:rPr lang="en-US" sz="950" b="1" dirty="0">
+                <a:solidFill>
+                  <a:srgbClr val="00357A"/>
+                </a:solidFill>
+                <a:latin typeface="Poppins" pitchFamily="34" charset="0"/>
+                <a:ea typeface="Poppins" pitchFamily="34" charset="-122"/>
+                <a:cs typeface="Poppins" pitchFamily="34" charset="-120"/>
+              </a:rPr>
+              <a:t>DSUPDT  •  DEVELOPER &amp; GENERAL USAGE GUIDE</a:t>
+            </a:r>
+            <a:endParaRPr lang="en-US" sz="950" dirty="0"/>
           </a:p>
         </p:txBody>
       </p:sp>
@@ -16792,13 +16801,6 @@
 <file path=ppt/slides/slide15.xml><?xml version="1.0" encoding="utf-8"?>
 <p:sld xmlns:a="http://schemas.openxmlformats.org/drawingml/2006/main" xmlns:r="http://schemas.openxmlformats.org/officeDocument/2006/relationships" xmlns:p="http://schemas.openxmlformats.org/presentationml/2006/main">
   <p:cSld name="Slide 15">
-    <p:bg>
-      <p:bgPr>
-        <a:solidFill>
-          <a:srgbClr val="FFFFFF"/>
-        </a:solidFill>
-      </p:bgPr>
-    </p:bg>
     <p:spTree>
       <p:nvGrpSpPr>
         <p:cNvPr id="1" name=""/>
@@ -17582,40 +17584,16 @@
           </a:p>
         </p:txBody>
       </p:sp>
-      <p:pic>
-        <p:nvPicPr>
-          <p:cNvPr id="22" name="Image 0" descr="nsf_ncar_logo_color.png">    </p:cNvPr>
-          <p:cNvPicPr>
-            <a:picLocks noChangeAspect="1"/>
-          </p:cNvPicPr>
-          <p:nvPr/>
-        </p:nvPicPr>
-        <p:blipFill>
-          <a:blip r:embed="rId1"/>
-          <a:stretch>
-            <a:fillRect/>
-          </a:stretch>
-        </p:blipFill>
-        <p:spPr>
-          <a:xfrm>
-            <a:off x="9951415" y="274320"/>
-            <a:ext cx="1874520" cy="512064"/>
-          </a:xfrm>
-          <a:prstGeom prst="rect">
-            <a:avLst/>
-          </a:prstGeom>
-        </p:spPr>
-      </p:pic>
-      <p:sp>
-        <p:nvSpPr>
-          <p:cNvPr id="23" name="Text 20"/>
-          <p:cNvSpPr/>
-          <p:nvPr/>
-        </p:nvSpPr>
-        <p:spPr>
-          <a:xfrm>
-            <a:off x="457200" y="6473952"/>
-            <a:ext cx="7315200" cy="274320"/>
+      <p:sp>
+        <p:nvSpPr>
+          <p:cNvPr id="22" name="Text 20"/>
+          <p:cNvSpPr/>
+          <p:nvPr/>
+        </p:nvSpPr>
+        <p:spPr>
+          <a:xfrm>
+            <a:off x="256032" y="6446520"/>
+            <a:ext cx="365760" cy="274320"/>
           </a:xfrm>
           <a:prstGeom prst="rect">
             <a:avLst/>
@@ -17627,34 +17605,34 @@
           <a:bodyPr wrap="square" lIns="0" tIns="0" rIns="0" bIns="0" rtlCol="0" anchor="ctr"/>
           <a:lstStyle/>
           <a:p>
-            <a:pPr algn="l" indent="0" marL="0">
-              <a:buNone/>
-            </a:pPr>
-            <a:r>
-              <a:rPr lang="en-US" sz="900" dirty="0">
-                <a:solidFill>
-                  <a:srgbClr val="53565A"/>
-                </a:solidFill>
-                <a:latin typeface="Poppins" pitchFamily="34" charset="0"/>
-                <a:ea typeface="Poppins" pitchFamily="34" charset="-122"/>
-                <a:cs typeface="Poppins" pitchFamily="34" charset="-120"/>
-              </a:rPr>
-              <a:t>dsupdt  •  Developer &amp; General Usage Guide</a:t>
-            </a:r>
-            <a:endParaRPr lang="en-US" sz="900" dirty="0"/>
-          </a:p>
-        </p:txBody>
-      </p:sp>
-      <p:sp>
-        <p:nvSpPr>
-          <p:cNvPr id="24" name="Text 21"/>
-          <p:cNvSpPr/>
-          <p:nvPr/>
-        </p:nvSpPr>
-        <p:spPr>
-          <a:xfrm>
-            <a:off x="11368735" y="6473952"/>
-            <a:ext cx="365760" cy="274320"/>
+            <a:pPr indent="0" marL="0">
+              <a:buNone/>
+            </a:pPr>
+            <a:r>
+              <a:rPr lang="en-US" sz="950" b="1" dirty="0">
+                <a:solidFill>
+                  <a:srgbClr val="00357A"/>
+                </a:solidFill>
+                <a:latin typeface="Poppins" pitchFamily="34" charset="0"/>
+                <a:ea typeface="Poppins" pitchFamily="34" charset="-122"/>
+                <a:cs typeface="Poppins" pitchFamily="34" charset="-120"/>
+              </a:rPr>
+              <a:t>14</a:t>
+            </a:r>
+            <a:endParaRPr lang="en-US" sz="950" dirty="0"/>
+          </a:p>
+        </p:txBody>
+      </p:sp>
+      <p:sp>
+        <p:nvSpPr>
+          <p:cNvPr id="23" name="Text 21"/>
+          <p:cNvSpPr/>
+          <p:nvPr/>
+        </p:nvSpPr>
+        <p:spPr>
+          <a:xfrm>
+            <a:off x="786384" y="6446520"/>
+            <a:ext cx="5486400" cy="274320"/>
           </a:xfrm>
           <a:prstGeom prst="rect">
             <a:avLst/>
@@ -17666,21 +17644,21 @@
           <a:bodyPr wrap="square" lIns="0" tIns="0" rIns="0" bIns="0" rtlCol="0" anchor="ctr"/>
           <a:lstStyle/>
           <a:p>
-            <a:pPr algn="r" indent="0" marL="0">
-              <a:buNone/>
-            </a:pPr>
-            <a:r>
-              <a:rPr lang="en-US" sz="900" dirty="0">
-                <a:solidFill>
-                  <a:srgbClr val="53565A"/>
-                </a:solidFill>
-                <a:latin typeface="Poppins" pitchFamily="34" charset="0"/>
-                <a:ea typeface="Poppins" pitchFamily="34" charset="-122"/>
-                <a:cs typeface="Poppins" pitchFamily="34" charset="-120"/>
-              </a:rPr>
-              <a:t>14</a:t>
-            </a:r>
-            <a:endParaRPr lang="en-US" sz="900" dirty="0"/>
+            <a:pPr indent="0" marL="0">
+              <a:buNone/>
+            </a:pPr>
+            <a:r>
+              <a:rPr lang="en-US" sz="950" b="1" dirty="0">
+                <a:solidFill>
+                  <a:srgbClr val="00357A"/>
+                </a:solidFill>
+                <a:latin typeface="Poppins" pitchFamily="34" charset="0"/>
+                <a:ea typeface="Poppins" pitchFamily="34" charset="-122"/>
+                <a:cs typeface="Poppins" pitchFamily="34" charset="-120"/>
+              </a:rPr>
+              <a:t>DSUPDT  •  DEVELOPER &amp; GENERAL USAGE GUIDE</a:t>
+            </a:r>
+            <a:endParaRPr lang="en-US" sz="950" dirty="0"/>
           </a:p>
         </p:txBody>
       </p:sp>
@@ -17695,13 +17673,6 @@
 <file path=ppt/slides/slide16.xml><?xml version="1.0" encoding="utf-8"?>
 <p:sld xmlns:a="http://schemas.openxmlformats.org/drawingml/2006/main" xmlns:r="http://schemas.openxmlformats.org/officeDocument/2006/relationships" xmlns:p="http://schemas.openxmlformats.org/presentationml/2006/main">
   <p:cSld name="Slide 16">
-    <p:bg>
-      <p:bgPr>
-        <a:solidFill>
-          <a:srgbClr val="FFFFFF"/>
-        </a:solidFill>
-      </p:bgPr>
-    </p:bg>
     <p:spTree>
       <p:nvGrpSpPr>
         <p:cNvPr id="1" name=""/>
@@ -17931,7 +17902,7 @@
                 <a:gridCol w="1371600"/>
                 <a:gridCol w="3749040"/>
               </a:tblGrid>
-              <a:tr h="357632">
+              <a:tr h="356616">
                 <a:tc>
                   <a:txBody>
                     <a:bodyPr/>
@@ -18137,7 +18108,7 @@
                   </a:tcPr>
                 </a:tc>
               </a:tr>
-              <a:tr h="357632">
+              <a:tr h="356616">
                 <a:tc>
                   <a:txBody>
                     <a:bodyPr/>
@@ -18343,7 +18314,7 @@
                   </a:tcPr>
                 </a:tc>
               </a:tr>
-              <a:tr h="357632">
+              <a:tr h="356616">
                 <a:tc>
                   <a:txBody>
                     <a:bodyPr/>
@@ -18549,7 +18520,7 @@
                   </a:tcPr>
                 </a:tc>
               </a:tr>
-              <a:tr h="357632">
+              <a:tr h="356616">
                 <a:tc>
                   <a:txBody>
                     <a:bodyPr/>
@@ -18755,7 +18726,7 @@
                   </a:tcPr>
                 </a:tc>
               </a:tr>
-              <a:tr h="357632">
+              <a:tr h="356616">
                 <a:tc>
                   <a:txBody>
                     <a:bodyPr/>
@@ -18961,7 +18932,7 @@
                   </a:tcPr>
                 </a:tc>
               </a:tr>
-              <a:tr h="357632">
+              <a:tr h="356616">
                 <a:tc>
                   <a:txBody>
                     <a:bodyPr/>
@@ -19167,7 +19138,7 @@
                   </a:tcPr>
                 </a:tc>
               </a:tr>
-              <a:tr h="357632">
+              <a:tr h="356616">
                 <a:tc>
                   <a:txBody>
                     <a:bodyPr/>
@@ -19373,7 +19344,7 @@
                   </a:tcPr>
                 </a:tc>
               </a:tr>
-              <a:tr h="357632">
+              <a:tr h="356616">
                 <a:tc>
                   <a:txBody>
                     <a:bodyPr/>
@@ -19579,7 +19550,7 @@
                   </a:tcPr>
                 </a:tc>
               </a:tr>
-              <a:tr h="357632">
+              <a:tr h="356616">
                 <a:tc>
                   <a:txBody>
                     <a:bodyPr/>
@@ -20060,40 +20031,16 @@
           </a:p>
         </p:txBody>
       </p:sp>
-      <p:pic>
-        <p:nvPicPr>
-          <p:cNvPr id="11" name="Image 0" descr="nsf_ncar_logo_color.png">    </p:cNvPr>
-          <p:cNvPicPr>
-            <a:picLocks noChangeAspect="1"/>
-          </p:cNvPicPr>
-          <p:nvPr/>
-        </p:nvPicPr>
-        <p:blipFill>
-          <a:blip r:embed="rId1"/>
-          <a:stretch>
-            <a:fillRect/>
-          </a:stretch>
-        </p:blipFill>
-        <p:spPr>
-          <a:xfrm>
-            <a:off x="9951415" y="274320"/>
-            <a:ext cx="1874520" cy="512064"/>
-          </a:xfrm>
-          <a:prstGeom prst="rect">
-            <a:avLst/>
-          </a:prstGeom>
-        </p:spPr>
-      </p:pic>
-      <p:sp>
-        <p:nvSpPr>
-          <p:cNvPr id="12" name="Text 8"/>
-          <p:cNvSpPr/>
-          <p:nvPr/>
-        </p:nvSpPr>
-        <p:spPr>
-          <a:xfrm>
-            <a:off x="457200" y="6473952"/>
-            <a:ext cx="7315200" cy="274320"/>
+      <p:sp>
+        <p:nvSpPr>
+          <p:cNvPr id="11" name="Text 8"/>
+          <p:cNvSpPr/>
+          <p:nvPr/>
+        </p:nvSpPr>
+        <p:spPr>
+          <a:xfrm>
+            <a:off x="256032" y="6446520"/>
+            <a:ext cx="365760" cy="274320"/>
           </a:xfrm>
           <a:prstGeom prst="rect">
             <a:avLst/>
@@ -20105,34 +20052,34 @@
           <a:bodyPr wrap="square" lIns="0" tIns="0" rIns="0" bIns="0" rtlCol="0" anchor="ctr"/>
           <a:lstStyle/>
           <a:p>
-            <a:pPr algn="l" indent="0" marL="0">
-              <a:buNone/>
-            </a:pPr>
-            <a:r>
-              <a:rPr lang="en-US" sz="900" dirty="0">
-                <a:solidFill>
-                  <a:srgbClr val="53565A"/>
-                </a:solidFill>
-                <a:latin typeface="Poppins" pitchFamily="34" charset="0"/>
-                <a:ea typeface="Poppins" pitchFamily="34" charset="-122"/>
-                <a:cs typeface="Poppins" pitchFamily="34" charset="-120"/>
-              </a:rPr>
-              <a:t>dsupdt  •  Developer &amp; General Usage Guide</a:t>
-            </a:r>
-            <a:endParaRPr lang="en-US" sz="900" dirty="0"/>
-          </a:p>
-        </p:txBody>
-      </p:sp>
-      <p:sp>
-        <p:nvSpPr>
-          <p:cNvPr id="13" name="Text 9"/>
-          <p:cNvSpPr/>
-          <p:nvPr/>
-        </p:nvSpPr>
-        <p:spPr>
-          <a:xfrm>
-            <a:off x="11368735" y="6473952"/>
-            <a:ext cx="365760" cy="274320"/>
+            <a:pPr indent="0" marL="0">
+              <a:buNone/>
+            </a:pPr>
+            <a:r>
+              <a:rPr lang="en-US" sz="950" b="1" dirty="0">
+                <a:solidFill>
+                  <a:srgbClr val="00357A"/>
+                </a:solidFill>
+                <a:latin typeface="Poppins" pitchFamily="34" charset="0"/>
+                <a:ea typeface="Poppins" pitchFamily="34" charset="-122"/>
+                <a:cs typeface="Poppins" pitchFamily="34" charset="-120"/>
+              </a:rPr>
+              <a:t>15</a:t>
+            </a:r>
+            <a:endParaRPr lang="en-US" sz="950" dirty="0"/>
+          </a:p>
+        </p:txBody>
+      </p:sp>
+      <p:sp>
+        <p:nvSpPr>
+          <p:cNvPr id="12" name="Text 9"/>
+          <p:cNvSpPr/>
+          <p:nvPr/>
+        </p:nvSpPr>
+        <p:spPr>
+          <a:xfrm>
+            <a:off x="786384" y="6446520"/>
+            <a:ext cx="5486400" cy="274320"/>
           </a:xfrm>
           <a:prstGeom prst="rect">
             <a:avLst/>
@@ -20144,21 +20091,21 @@
           <a:bodyPr wrap="square" lIns="0" tIns="0" rIns="0" bIns="0" rtlCol="0" anchor="ctr"/>
           <a:lstStyle/>
           <a:p>
-            <a:pPr algn="r" indent="0" marL="0">
-              <a:buNone/>
-            </a:pPr>
-            <a:r>
-              <a:rPr lang="en-US" sz="900" dirty="0">
-                <a:solidFill>
-                  <a:srgbClr val="53565A"/>
-                </a:solidFill>
-                <a:latin typeface="Poppins" pitchFamily="34" charset="0"/>
-                <a:ea typeface="Poppins" pitchFamily="34" charset="-122"/>
-                <a:cs typeface="Poppins" pitchFamily="34" charset="-120"/>
-              </a:rPr>
-              <a:t>15</a:t>
-            </a:r>
-            <a:endParaRPr lang="en-US" sz="900" dirty="0"/>
+            <a:pPr indent="0" marL="0">
+              <a:buNone/>
+            </a:pPr>
+            <a:r>
+              <a:rPr lang="en-US" sz="950" b="1" dirty="0">
+                <a:solidFill>
+                  <a:srgbClr val="00357A"/>
+                </a:solidFill>
+                <a:latin typeface="Poppins" pitchFamily="34" charset="0"/>
+                <a:ea typeface="Poppins" pitchFamily="34" charset="-122"/>
+                <a:cs typeface="Poppins" pitchFamily="34" charset="-120"/>
+              </a:rPr>
+              <a:t>DSUPDT  •  DEVELOPER &amp; GENERAL USAGE GUIDE</a:t>
+            </a:r>
+            <a:endParaRPr lang="en-US" sz="950" dirty="0"/>
           </a:p>
         </p:txBody>
       </p:sp>
@@ -20173,13 +20120,6 @@
 <file path=ppt/slides/slide17.xml><?xml version="1.0" encoding="utf-8"?>
 <p:sld xmlns:a="http://schemas.openxmlformats.org/drawingml/2006/main" xmlns:r="http://schemas.openxmlformats.org/officeDocument/2006/relationships" xmlns:p="http://schemas.openxmlformats.org/presentationml/2006/main">
   <p:cSld name="Slide 17">
-    <p:bg>
-      <p:bgPr>
-        <a:solidFill>
-          <a:srgbClr val="FFFFFF"/>
-        </a:solidFill>
-      </p:bgPr>
-    </p:bg>
     <p:spTree>
       <p:nvGrpSpPr>
         <p:cNvPr id="1" name=""/>
@@ -21550,40 +21490,16 @@
           </a:p>
         </p:txBody>
       </p:sp>
-      <p:pic>
-        <p:nvPicPr>
-          <p:cNvPr id="38" name="Image 0" descr="nsf_ncar_logo_color.png">    </p:cNvPr>
-          <p:cNvPicPr>
-            <a:picLocks noChangeAspect="1"/>
-          </p:cNvPicPr>
-          <p:nvPr/>
-        </p:nvPicPr>
-        <p:blipFill>
-          <a:blip r:embed="rId1"/>
-          <a:stretch>
-            <a:fillRect/>
-          </a:stretch>
-        </p:blipFill>
-        <p:spPr>
-          <a:xfrm>
-            <a:off x="9951415" y="274320"/>
-            <a:ext cx="1874520" cy="512064"/>
-          </a:xfrm>
-          <a:prstGeom prst="rect">
-            <a:avLst/>
-          </a:prstGeom>
-        </p:spPr>
-      </p:pic>
-      <p:sp>
-        <p:nvSpPr>
-          <p:cNvPr id="39" name="Text 36"/>
-          <p:cNvSpPr/>
-          <p:nvPr/>
-        </p:nvSpPr>
-        <p:spPr>
-          <a:xfrm>
-            <a:off x="457200" y="6473952"/>
-            <a:ext cx="7315200" cy="274320"/>
+      <p:sp>
+        <p:nvSpPr>
+          <p:cNvPr id="38" name="Text 36"/>
+          <p:cNvSpPr/>
+          <p:nvPr/>
+        </p:nvSpPr>
+        <p:spPr>
+          <a:xfrm>
+            <a:off x="256032" y="6446520"/>
+            <a:ext cx="365760" cy="274320"/>
           </a:xfrm>
           <a:prstGeom prst="rect">
             <a:avLst/>
@@ -21595,34 +21511,34 @@
           <a:bodyPr wrap="square" lIns="0" tIns="0" rIns="0" bIns="0" rtlCol="0" anchor="ctr"/>
           <a:lstStyle/>
           <a:p>
-            <a:pPr algn="l" indent="0" marL="0">
-              <a:buNone/>
-            </a:pPr>
-            <a:r>
-              <a:rPr lang="en-US" sz="900" dirty="0">
-                <a:solidFill>
-                  <a:srgbClr val="53565A"/>
-                </a:solidFill>
-                <a:latin typeface="Poppins" pitchFamily="34" charset="0"/>
-                <a:ea typeface="Poppins" pitchFamily="34" charset="-122"/>
-                <a:cs typeface="Poppins" pitchFamily="34" charset="-120"/>
-              </a:rPr>
-              <a:t>dsupdt  •  Developer &amp; General Usage Guide</a:t>
-            </a:r>
-            <a:endParaRPr lang="en-US" sz="900" dirty="0"/>
-          </a:p>
-        </p:txBody>
-      </p:sp>
-      <p:sp>
-        <p:nvSpPr>
-          <p:cNvPr id="40" name="Text 37"/>
-          <p:cNvSpPr/>
-          <p:nvPr/>
-        </p:nvSpPr>
-        <p:spPr>
-          <a:xfrm>
-            <a:off x="11368735" y="6473952"/>
-            <a:ext cx="365760" cy="274320"/>
+            <a:pPr indent="0" marL="0">
+              <a:buNone/>
+            </a:pPr>
+            <a:r>
+              <a:rPr lang="en-US" sz="950" b="1" dirty="0">
+                <a:solidFill>
+                  <a:srgbClr val="00357A"/>
+                </a:solidFill>
+                <a:latin typeface="Poppins" pitchFamily="34" charset="0"/>
+                <a:ea typeface="Poppins" pitchFamily="34" charset="-122"/>
+                <a:cs typeface="Poppins" pitchFamily="34" charset="-120"/>
+              </a:rPr>
+              <a:t>16</a:t>
+            </a:r>
+            <a:endParaRPr lang="en-US" sz="950" dirty="0"/>
+          </a:p>
+        </p:txBody>
+      </p:sp>
+      <p:sp>
+        <p:nvSpPr>
+          <p:cNvPr id="39" name="Text 37"/>
+          <p:cNvSpPr/>
+          <p:nvPr/>
+        </p:nvSpPr>
+        <p:spPr>
+          <a:xfrm>
+            <a:off x="786384" y="6446520"/>
+            <a:ext cx="5486400" cy="274320"/>
           </a:xfrm>
           <a:prstGeom prst="rect">
             <a:avLst/>
@@ -21634,21 +21550,21 @@
           <a:bodyPr wrap="square" lIns="0" tIns="0" rIns="0" bIns="0" rtlCol="0" anchor="ctr"/>
           <a:lstStyle/>
           <a:p>
-            <a:pPr algn="r" indent="0" marL="0">
-              <a:buNone/>
-            </a:pPr>
-            <a:r>
-              <a:rPr lang="en-US" sz="900" dirty="0">
-                <a:solidFill>
-                  <a:srgbClr val="53565A"/>
-                </a:solidFill>
-                <a:latin typeface="Poppins" pitchFamily="34" charset="0"/>
-                <a:ea typeface="Poppins" pitchFamily="34" charset="-122"/>
-                <a:cs typeface="Poppins" pitchFamily="34" charset="-120"/>
-              </a:rPr>
-              <a:t>16</a:t>
-            </a:r>
-            <a:endParaRPr lang="en-US" sz="900" dirty="0"/>
+            <a:pPr indent="0" marL="0">
+              <a:buNone/>
+            </a:pPr>
+            <a:r>
+              <a:rPr lang="en-US" sz="950" b="1" dirty="0">
+                <a:solidFill>
+                  <a:srgbClr val="00357A"/>
+                </a:solidFill>
+                <a:latin typeface="Poppins" pitchFamily="34" charset="0"/>
+                <a:ea typeface="Poppins" pitchFamily="34" charset="-122"/>
+                <a:cs typeface="Poppins" pitchFamily="34" charset="-120"/>
+              </a:rPr>
+              <a:t>DSUPDT  •  DEVELOPER &amp; GENERAL USAGE GUIDE</a:t>
+            </a:r>
+            <a:endParaRPr lang="en-US" sz="950" dirty="0"/>
           </a:p>
         </p:txBody>
       </p:sp>
@@ -21663,13 +21579,6 @@
 <file path=ppt/slides/slide18.xml><?xml version="1.0" encoding="utf-8"?>
 <p:sld xmlns:a="http://schemas.openxmlformats.org/drawingml/2006/main" xmlns:r="http://schemas.openxmlformats.org/officeDocument/2006/relationships" xmlns:p="http://schemas.openxmlformats.org/presentationml/2006/main">
   <p:cSld name="Slide 18">
-    <p:bg>
-      <p:bgPr>
-        <a:solidFill>
-          <a:srgbClr val="FFFFFF"/>
-        </a:solidFill>
-      </p:bgPr>
-    </p:bg>
     <p:spTree>
       <p:nvGrpSpPr>
         <p:cNvPr id="1" name=""/>
@@ -22959,40 +22868,16 @@
           </a:p>
         </p:txBody>
       </p:sp>
-      <p:pic>
-        <p:nvPicPr>
-          <p:cNvPr id="38" name="Image 0" descr="nsf_ncar_logo_color.png">    </p:cNvPr>
-          <p:cNvPicPr>
-            <a:picLocks noChangeAspect="1"/>
-          </p:cNvPicPr>
-          <p:nvPr/>
-        </p:nvPicPr>
-        <p:blipFill>
-          <a:blip r:embed="rId1"/>
-          <a:stretch>
-            <a:fillRect/>
-          </a:stretch>
-        </p:blipFill>
-        <p:spPr>
-          <a:xfrm>
-            <a:off x="9951415" y="274320"/>
-            <a:ext cx="1874520" cy="512064"/>
-          </a:xfrm>
-          <a:prstGeom prst="rect">
-            <a:avLst/>
-          </a:prstGeom>
-        </p:spPr>
-      </p:pic>
-      <p:sp>
-        <p:nvSpPr>
-          <p:cNvPr id="39" name="Text 36"/>
-          <p:cNvSpPr/>
-          <p:nvPr/>
-        </p:nvSpPr>
-        <p:spPr>
-          <a:xfrm>
-            <a:off x="457200" y="6473952"/>
-            <a:ext cx="7315200" cy="274320"/>
+      <p:sp>
+        <p:nvSpPr>
+          <p:cNvPr id="38" name="Text 36"/>
+          <p:cNvSpPr/>
+          <p:nvPr/>
+        </p:nvSpPr>
+        <p:spPr>
+          <a:xfrm>
+            <a:off x="256032" y="6446520"/>
+            <a:ext cx="365760" cy="274320"/>
           </a:xfrm>
           <a:prstGeom prst="rect">
             <a:avLst/>
@@ -23004,34 +22889,34 @@
           <a:bodyPr wrap="square" lIns="0" tIns="0" rIns="0" bIns="0" rtlCol="0" anchor="ctr"/>
           <a:lstStyle/>
           <a:p>
-            <a:pPr algn="l" indent="0" marL="0">
-              <a:buNone/>
-            </a:pPr>
-            <a:r>
-              <a:rPr lang="en-US" sz="900" dirty="0">
-                <a:solidFill>
-                  <a:srgbClr val="53565A"/>
-                </a:solidFill>
-                <a:latin typeface="Poppins" pitchFamily="34" charset="0"/>
-                <a:ea typeface="Poppins" pitchFamily="34" charset="-122"/>
-                <a:cs typeface="Poppins" pitchFamily="34" charset="-120"/>
-              </a:rPr>
-              <a:t>dsupdt  •  Developer &amp; General Usage Guide</a:t>
-            </a:r>
-            <a:endParaRPr lang="en-US" sz="900" dirty="0"/>
-          </a:p>
-        </p:txBody>
-      </p:sp>
-      <p:sp>
-        <p:nvSpPr>
-          <p:cNvPr id="40" name="Text 37"/>
-          <p:cNvSpPr/>
-          <p:nvPr/>
-        </p:nvSpPr>
-        <p:spPr>
-          <a:xfrm>
-            <a:off x="11368735" y="6473952"/>
-            <a:ext cx="365760" cy="274320"/>
+            <a:pPr indent="0" marL="0">
+              <a:buNone/>
+            </a:pPr>
+            <a:r>
+              <a:rPr lang="en-US" sz="950" b="1" dirty="0">
+                <a:solidFill>
+                  <a:srgbClr val="00357A"/>
+                </a:solidFill>
+                <a:latin typeface="Poppins" pitchFamily="34" charset="0"/>
+                <a:ea typeface="Poppins" pitchFamily="34" charset="-122"/>
+                <a:cs typeface="Poppins" pitchFamily="34" charset="-120"/>
+              </a:rPr>
+              <a:t>17</a:t>
+            </a:r>
+            <a:endParaRPr lang="en-US" sz="950" dirty="0"/>
+          </a:p>
+        </p:txBody>
+      </p:sp>
+      <p:sp>
+        <p:nvSpPr>
+          <p:cNvPr id="39" name="Text 37"/>
+          <p:cNvSpPr/>
+          <p:nvPr/>
+        </p:nvSpPr>
+        <p:spPr>
+          <a:xfrm>
+            <a:off x="786384" y="6446520"/>
+            <a:ext cx="5486400" cy="274320"/>
           </a:xfrm>
           <a:prstGeom prst="rect">
             <a:avLst/>
@@ -23043,21 +22928,21 @@
           <a:bodyPr wrap="square" lIns="0" tIns="0" rIns="0" bIns="0" rtlCol="0" anchor="ctr"/>
           <a:lstStyle/>
           <a:p>
-            <a:pPr algn="r" indent="0" marL="0">
-              <a:buNone/>
-            </a:pPr>
-            <a:r>
-              <a:rPr lang="en-US" sz="900" dirty="0">
-                <a:solidFill>
-                  <a:srgbClr val="53565A"/>
-                </a:solidFill>
-                <a:latin typeface="Poppins" pitchFamily="34" charset="0"/>
-                <a:ea typeface="Poppins" pitchFamily="34" charset="-122"/>
-                <a:cs typeface="Poppins" pitchFamily="34" charset="-120"/>
-              </a:rPr>
-              <a:t>17</a:t>
-            </a:r>
-            <a:endParaRPr lang="en-US" sz="900" dirty="0"/>
+            <a:pPr indent="0" marL="0">
+              <a:buNone/>
+            </a:pPr>
+            <a:r>
+              <a:rPr lang="en-US" sz="950" b="1" dirty="0">
+                <a:solidFill>
+                  <a:srgbClr val="00357A"/>
+                </a:solidFill>
+                <a:latin typeface="Poppins" pitchFamily="34" charset="0"/>
+                <a:ea typeface="Poppins" pitchFamily="34" charset="-122"/>
+                <a:cs typeface="Poppins" pitchFamily="34" charset="-120"/>
+              </a:rPr>
+              <a:t>DSUPDT  •  DEVELOPER &amp; GENERAL USAGE GUIDE</a:t>
+            </a:r>
+            <a:endParaRPr lang="en-US" sz="950" dirty="0"/>
           </a:p>
         </p:txBody>
       </p:sp>
@@ -23072,13 +22957,6 @@
 <file path=ppt/slides/slide19.xml><?xml version="1.0" encoding="utf-8"?>
 <p:sld xmlns:a="http://schemas.openxmlformats.org/drawingml/2006/main" xmlns:r="http://schemas.openxmlformats.org/officeDocument/2006/relationships" xmlns:p="http://schemas.openxmlformats.org/presentationml/2006/main">
   <p:cSld name="Slide 19">
-    <p:bg>
-      <p:bgPr>
-        <a:solidFill>
-          <a:srgbClr val="FFFFFF"/>
-        </a:solidFill>
-      </p:bgPr>
-    </p:bg>
     <p:spTree>
       <p:nvGrpSpPr>
         <p:cNvPr id="1" name=""/>
@@ -24113,40 +23991,16 @@
           </a:p>
         </p:txBody>
       </p:sp>
-      <p:pic>
-        <p:nvPicPr>
-          <p:cNvPr id="31" name="Image 0" descr="nsf_ncar_logo_color.png">    </p:cNvPr>
-          <p:cNvPicPr>
-            <a:picLocks noChangeAspect="1"/>
-          </p:cNvPicPr>
-          <p:nvPr/>
-        </p:nvPicPr>
-        <p:blipFill>
-          <a:blip r:embed="rId1"/>
-          <a:stretch>
-            <a:fillRect/>
-          </a:stretch>
-        </p:blipFill>
-        <p:spPr>
-          <a:xfrm>
-            <a:off x="9951415" y="274320"/>
-            <a:ext cx="1874520" cy="512064"/>
-          </a:xfrm>
-          <a:prstGeom prst="rect">
-            <a:avLst/>
-          </a:prstGeom>
-        </p:spPr>
-      </p:pic>
-      <p:sp>
-        <p:nvSpPr>
-          <p:cNvPr id="32" name="Text 29"/>
-          <p:cNvSpPr/>
-          <p:nvPr/>
-        </p:nvSpPr>
-        <p:spPr>
-          <a:xfrm>
-            <a:off x="457200" y="6473952"/>
-            <a:ext cx="7315200" cy="274320"/>
+      <p:sp>
+        <p:nvSpPr>
+          <p:cNvPr id="31" name="Text 29"/>
+          <p:cNvSpPr/>
+          <p:nvPr/>
+        </p:nvSpPr>
+        <p:spPr>
+          <a:xfrm>
+            <a:off x="256032" y="6446520"/>
+            <a:ext cx="365760" cy="274320"/>
           </a:xfrm>
           <a:prstGeom prst="rect">
             <a:avLst/>
@@ -24158,34 +24012,34 @@
           <a:bodyPr wrap="square" lIns="0" tIns="0" rIns="0" bIns="0" rtlCol="0" anchor="ctr"/>
           <a:lstStyle/>
           <a:p>
-            <a:pPr algn="l" indent="0" marL="0">
-              <a:buNone/>
-            </a:pPr>
-            <a:r>
-              <a:rPr lang="en-US" sz="900" dirty="0">
-                <a:solidFill>
-                  <a:srgbClr val="53565A"/>
-                </a:solidFill>
-                <a:latin typeface="Poppins" pitchFamily="34" charset="0"/>
-                <a:ea typeface="Poppins" pitchFamily="34" charset="-122"/>
-                <a:cs typeface="Poppins" pitchFamily="34" charset="-120"/>
-              </a:rPr>
-              <a:t>dsupdt  •  Developer &amp; General Usage Guide</a:t>
-            </a:r>
-            <a:endParaRPr lang="en-US" sz="900" dirty="0"/>
-          </a:p>
-        </p:txBody>
-      </p:sp>
-      <p:sp>
-        <p:nvSpPr>
-          <p:cNvPr id="33" name="Text 30"/>
-          <p:cNvSpPr/>
-          <p:nvPr/>
-        </p:nvSpPr>
-        <p:spPr>
-          <a:xfrm>
-            <a:off x="11368735" y="6473952"/>
-            <a:ext cx="365760" cy="274320"/>
+            <a:pPr indent="0" marL="0">
+              <a:buNone/>
+            </a:pPr>
+            <a:r>
+              <a:rPr lang="en-US" sz="950" b="1" dirty="0">
+                <a:solidFill>
+                  <a:srgbClr val="00357A"/>
+                </a:solidFill>
+                <a:latin typeface="Poppins" pitchFamily="34" charset="0"/>
+                <a:ea typeface="Poppins" pitchFamily="34" charset="-122"/>
+                <a:cs typeface="Poppins" pitchFamily="34" charset="-120"/>
+              </a:rPr>
+              <a:t>18</a:t>
+            </a:r>
+            <a:endParaRPr lang="en-US" sz="950" dirty="0"/>
+          </a:p>
+        </p:txBody>
+      </p:sp>
+      <p:sp>
+        <p:nvSpPr>
+          <p:cNvPr id="32" name="Text 30"/>
+          <p:cNvSpPr/>
+          <p:nvPr/>
+        </p:nvSpPr>
+        <p:spPr>
+          <a:xfrm>
+            <a:off x="786384" y="6446520"/>
+            <a:ext cx="5486400" cy="274320"/>
           </a:xfrm>
           <a:prstGeom prst="rect">
             <a:avLst/>
@@ -24197,21 +24051,21 @@
           <a:bodyPr wrap="square" lIns="0" tIns="0" rIns="0" bIns="0" rtlCol="0" anchor="ctr"/>
           <a:lstStyle/>
           <a:p>
-            <a:pPr algn="r" indent="0" marL="0">
-              <a:buNone/>
-            </a:pPr>
-            <a:r>
-              <a:rPr lang="en-US" sz="900" dirty="0">
-                <a:solidFill>
-                  <a:srgbClr val="53565A"/>
-                </a:solidFill>
-                <a:latin typeface="Poppins" pitchFamily="34" charset="0"/>
-                <a:ea typeface="Poppins" pitchFamily="34" charset="-122"/>
-                <a:cs typeface="Poppins" pitchFamily="34" charset="-120"/>
-              </a:rPr>
-              <a:t>18</a:t>
-            </a:r>
-            <a:endParaRPr lang="en-US" sz="900" dirty="0"/>
+            <a:pPr indent="0" marL="0">
+              <a:buNone/>
+            </a:pPr>
+            <a:r>
+              <a:rPr lang="en-US" sz="950" b="1" dirty="0">
+                <a:solidFill>
+                  <a:srgbClr val="00357A"/>
+                </a:solidFill>
+                <a:latin typeface="Poppins" pitchFamily="34" charset="0"/>
+                <a:ea typeface="Poppins" pitchFamily="34" charset="-122"/>
+                <a:cs typeface="Poppins" pitchFamily="34" charset="-120"/>
+              </a:rPr>
+              <a:t>DSUPDT  •  DEVELOPER &amp; GENERAL USAGE GUIDE</a:t>
+            </a:r>
+            <a:endParaRPr lang="en-US" sz="950" dirty="0"/>
           </a:p>
         </p:txBody>
       </p:sp>
@@ -24226,13 +24080,6 @@
 <file path=ppt/slides/slide2.xml><?xml version="1.0" encoding="utf-8"?>
 <p:sld xmlns:a="http://schemas.openxmlformats.org/drawingml/2006/main" xmlns:r="http://schemas.openxmlformats.org/officeDocument/2006/relationships" xmlns:p="http://schemas.openxmlformats.org/presentationml/2006/main">
   <p:cSld name="Slide 2">
-    <p:bg>
-      <p:bgPr>
-        <a:solidFill>
-          <a:srgbClr val="FFFFFF"/>
-        </a:solidFill>
-      </p:bgPr>
-    </p:bg>
     <p:spTree>
       <p:nvGrpSpPr>
         <p:cNvPr id="1" name=""/>
@@ -24481,14 +24328,34 @@
       </p:sp>
       <p:sp>
         <p:nvSpPr>
-          <p:cNvPr id="6" name="Text 4"/>
-          <p:cNvSpPr/>
-          <p:nvPr/>
-        </p:nvSpPr>
-        <p:spPr>
-          <a:xfrm>
-            <a:off x="685800" y="3429000"/>
-            <a:ext cx="4480560" cy="365760"/>
+          <p:cNvPr id="6" name="Shape 4"/>
+          <p:cNvSpPr/>
+          <p:nvPr/>
+        </p:nvSpPr>
+        <p:spPr>
+          <a:xfrm>
+            <a:off x="457200" y="3246120"/>
+            <a:ext cx="109728" cy="2788920"/>
+          </a:xfrm>
+          <a:prstGeom prst="rect">
+            <a:avLst/>
+          </a:prstGeom>
+          <a:solidFill>
+            <a:srgbClr val="0057C2"/>
+          </a:solidFill>
+          <a:ln/>
+        </p:spPr>
+      </p:sp>
+      <p:sp>
+        <p:nvSpPr>
+          <p:cNvPr id="7" name="Text 5"/>
+          <p:cNvSpPr/>
+          <p:nvPr/>
+        </p:nvSpPr>
+        <p:spPr>
+          <a:xfrm>
+            <a:off x="731520" y="3401568"/>
+            <a:ext cx="4434840" cy="365760"/>
           </a:xfrm>
           <a:prstGeom prst="rect">
             <a:avLst/>
@@ -24504,7 +24371,7 @@
               <a:buNone/>
             </a:pPr>
             <a:r>
-              <a:rPr lang="en-US" sz="1400" b="1" dirty="0">
+              <a:rPr lang="en-US" sz="1450" b="1" dirty="0">
                 <a:solidFill>
                   <a:srgbClr val="0057C2"/>
                 </a:solidFill>
@@ -24514,20 +24381,43 @@
               </a:rPr>
               <a:t>Configured per dataset in GDEXDB</a:t>
             </a:r>
-            <a:endParaRPr lang="en-US" sz="1400" dirty="0"/>
-          </a:p>
-        </p:txBody>
-      </p:sp>
-      <p:sp>
-        <p:nvSpPr>
-          <p:cNvPr id="7" name="Text 5"/>
-          <p:cNvSpPr/>
-          <p:nvPr/>
-        </p:nvSpPr>
-        <p:spPr>
-          <a:xfrm>
-            <a:off x="685800" y="3840480"/>
-            <a:ext cx="4434840" cy="2057400"/>
+            <a:endParaRPr lang="en-US" sz="1450" dirty="0"/>
+          </a:p>
+        </p:txBody>
+      </p:sp>
+      <p:sp>
+        <p:nvSpPr>
+          <p:cNvPr id="8" name="Shape 6"/>
+          <p:cNvSpPr/>
+          <p:nvPr/>
+        </p:nvSpPr>
+        <p:spPr>
+          <a:xfrm>
+            <a:off x="731520" y="3785616"/>
+            <a:ext cx="4279392" cy="0"/>
+          </a:xfrm>
+          <a:prstGeom prst="line">
+            <a:avLst/>
+          </a:prstGeom>
+          <a:noFill/>
+          <a:ln w="12700">
+            <a:solidFill>
+              <a:srgbClr val="A9D6F2"/>
+            </a:solidFill>
+            <a:prstDash val="solid"/>
+          </a:ln>
+        </p:spPr>
+      </p:sp>
+      <p:sp>
+        <p:nvSpPr>
+          <p:cNvPr id="9" name="Text 7"/>
+          <p:cNvSpPr/>
+          <p:nvPr/>
+        </p:nvSpPr>
+        <p:spPr>
+          <a:xfrm>
+            <a:off x="731520" y="3895344"/>
+            <a:ext cx="4389120" cy="2011680"/>
           </a:xfrm>
           <a:prstGeom prst="rect">
             <a:avLst/>
@@ -24539,14 +24429,18 @@
           <a:bodyPr wrap="square" lIns="0" tIns="0" rIns="0" bIns="0" rtlCol="0" anchor="t"/>
           <a:lstStyle/>
           <a:p>
-            <a:pPr indent="0" marL="0">
+            <a:pPr marL="190500" indent="-190500">
               <a:lnSpc>
-                <a:spcPct val="112000"/>
+                <a:spcPct val="106000"/>
               </a:lnSpc>
-              <a:buNone/>
-            </a:pPr>
-            <a:r>
-              <a:rPr lang="en-US" sz="1300" dirty="0">
+              <a:spcAft>
+                <a:spcPts val="700"/>
+              </a:spcAft>
+              <a:buSzPct val="100000"/>
+              <a:buChar char="•"/>
+            </a:pPr>
+            <a:r>
+              <a:rPr lang="en-US" sz="1250" dirty="0">
                 <a:solidFill>
                   <a:srgbClr val="00357A"/>
                 </a:solidFill>
@@ -24558,12 +24452,15 @@
             </a:r>
             <a:pPr indent="0" marL="0">
               <a:lnSpc>
-                <a:spcPct val="112000"/>
+                <a:spcPct val="106000"/>
               </a:lnSpc>
-              <a:buNone/>
-            </a:pPr>
-            <a:r>
-              <a:rPr lang="en-US" sz="1300" b="1" dirty="0">
+              <a:spcAft>
+                <a:spcPts val="700"/>
+              </a:spcAft>
+              <a:buNone/>
+            </a:pPr>
+            <a:r>
+              <a:rPr lang="en-US" sz="1250" b="1" dirty="0">
                 <a:solidFill>
                   <a:srgbClr val="00357A"/>
                 </a:solidFill>
@@ -24575,12 +24472,15 @@
             </a:r>
             <a:pPr indent="0" marL="0">
               <a:lnSpc>
-                <a:spcPct val="112000"/>
+                <a:spcPct val="106000"/>
               </a:lnSpc>
-              <a:buNone/>
-            </a:pPr>
-            <a:r>
-              <a:rPr lang="en-US" sz="1300" dirty="0">
+              <a:spcAft>
+                <a:spcPts val="700"/>
+              </a:spcAft>
+              <a:buNone/>
+            </a:pPr>
+            <a:r>
+              <a:rPr lang="en-US" sz="1250" dirty="0">
                 <a:solidFill>
                   <a:srgbClr val="00357A"/>
                 </a:solidFill>
@@ -24590,43 +24490,41 @@
               </a:rPr>
               <a:t>; configuration spans three record types.</a:t>
             </a:r>
-            <a:pPr indent="0" marL="0">
+            <a:endParaRPr lang="en-US" sz="1250" dirty="0"/>
+          </a:p>
+          <a:p>
+            <a:pPr marL="190500" indent="-190500">
               <a:lnSpc>
-                <a:spcPct val="112000"/>
+                <a:spcPct val="106000"/>
               </a:lnSpc>
-              <a:buNone/>
-            </a:pPr>
-            <a:endParaRPr lang="en-US" sz="1300" dirty="0"/>
-          </a:p>
-          <a:p>
+              <a:spcAft>
+                <a:spcPts val="700"/>
+              </a:spcAft>
+              <a:buSzPct val="100000"/>
+              <a:buChar char="•"/>
+            </a:pPr>
+            <a:r>
+              <a:rPr lang="en-US" sz="1250" dirty="0">
+                <a:solidFill>
+                  <a:srgbClr val="00357A"/>
+                </a:solidFill>
+                <a:latin typeface="Poppins" pitchFamily="34" charset="0"/>
+                <a:ea typeface="Poppins" pitchFamily="34" charset="-122"/>
+                <a:cs typeface="Poppins" pitchFamily="34" charset="-120"/>
+              </a:rPr>
+              <a:t>Edit records from the CLI (</a:t>
+            </a:r>
             <a:pPr indent="0" marL="0">
               <a:lnSpc>
-                <a:spcPct val="112000"/>
+                <a:spcPct val="106000"/>
               </a:lnSpc>
-              <a:buNone/>
-            </a:pPr>
-            <a:r>
-              <a:rPr lang="en-US" sz="1300" dirty="0">
-                <a:solidFill>
-                  <a:srgbClr val="00357A"/>
-                </a:solidFill>
-                <a:latin typeface="Poppins" pitchFamily="34" charset="0"/>
-                <a:ea typeface="Poppins" pitchFamily="34" charset="-122"/>
-                <a:cs typeface="Poppins" pitchFamily="34" charset="-120"/>
-              </a:rPr>
-              <a:t>Edit records from the CLI (</a:t>
-            </a:r>
-            <a:endParaRPr lang="en-US" sz="1300" dirty="0"/>
-          </a:p>
-          <a:p>
-            <a:pPr indent="0" marL="0">
-              <a:lnSpc>
-                <a:spcPct val="112000"/>
-              </a:lnSpc>
-              <a:buNone/>
-            </a:pPr>
-            <a:r>
-              <a:rPr lang="en-US" sz="1300" b="1" dirty="0">
+              <a:spcAft>
+                <a:spcPts val="700"/>
+              </a:spcAft>
+              <a:buNone/>
+            </a:pPr>
+            <a:r>
+              <a:rPr lang="en-US" sz="1250" b="1" dirty="0">
                 <a:solidFill>
                   <a:srgbClr val="0057C2"/>
                 </a:solidFill>
@@ -24638,12 +24536,15 @@
             </a:r>
             <a:pPr indent="0" marL="0">
               <a:lnSpc>
-                <a:spcPct val="112000"/>
+                <a:spcPct val="106000"/>
               </a:lnSpc>
-              <a:buNone/>
-            </a:pPr>
-            <a:r>
-              <a:rPr lang="en-US" sz="1300" dirty="0">
+              <a:spcAft>
+                <a:spcPts val="700"/>
+              </a:spcAft>
+              <a:buNone/>
+            </a:pPr>
+            <a:r>
+              <a:rPr lang="en-US" sz="1250" dirty="0">
                 <a:solidFill>
                   <a:srgbClr val="00357A"/>
                 </a:solidFill>
@@ -24653,43 +24554,41 @@
               </a:rPr>
               <a:t>) or the web Config Editor (next slide).</a:t>
             </a:r>
-            <a:pPr indent="0" marL="0">
+            <a:endParaRPr lang="en-US" sz="1250" dirty="0"/>
+          </a:p>
+          <a:p>
+            <a:pPr marL="190500" indent="-190500">
               <a:lnSpc>
-                <a:spcPct val="112000"/>
+                <a:spcPct val="106000"/>
               </a:lnSpc>
-              <a:buNone/>
-            </a:pPr>
-            <a:endParaRPr lang="en-US" sz="1300" dirty="0"/>
-          </a:p>
-          <a:p>
+              <a:spcAft>
+                <a:spcPts val="700"/>
+              </a:spcAft>
+              <a:buSzPct val="100000"/>
+              <a:buChar char="•"/>
+            </a:pPr>
+            <a:r>
+              <a:rPr lang="en-US" sz="1250" dirty="0">
+                <a:solidFill>
+                  <a:srgbClr val="00357A"/>
+                </a:solidFill>
+                <a:latin typeface="Poppins" pitchFamily="34" charset="0"/>
+                <a:ea typeface="Poppins" pitchFamily="34" charset="-122"/>
+                <a:cs typeface="Poppins" pitchFamily="34" charset="-120"/>
+              </a:rPr>
+              <a:t>Only the owning specialist may run an update record (override with </a:t>
+            </a:r>
             <a:pPr indent="0" marL="0">
               <a:lnSpc>
-                <a:spcPct val="112000"/>
+                <a:spcPct val="106000"/>
               </a:lnSpc>
-              <a:buNone/>
-            </a:pPr>
-            <a:r>
-              <a:rPr lang="en-US" sz="1300" dirty="0">
-                <a:solidFill>
-                  <a:srgbClr val="00357A"/>
-                </a:solidFill>
-                <a:latin typeface="Poppins" pitchFamily="34" charset="0"/>
-                <a:ea typeface="Poppins" pitchFamily="34" charset="-122"/>
-                <a:cs typeface="Poppins" pitchFamily="34" charset="-120"/>
-              </a:rPr>
-              <a:t>Only the owning specialist may run an update record (override with </a:t>
-            </a:r>
-            <a:endParaRPr lang="en-US" sz="1300" dirty="0"/>
-          </a:p>
-          <a:p>
-            <a:pPr indent="0" marL="0">
-              <a:lnSpc>
-                <a:spcPct val="112000"/>
-              </a:lnSpc>
-              <a:buNone/>
-            </a:pPr>
-            <a:r>
-              <a:rPr lang="en-US" sz="1300" b="1" dirty="0">
+              <a:spcAft>
+                <a:spcPts val="700"/>
+              </a:spcAft>
+              <a:buNone/>
+            </a:pPr>
+            <a:r>
+              <a:rPr lang="en-US" sz="1250" b="1" dirty="0">
                 <a:solidFill>
                   <a:srgbClr val="0057C2"/>
                 </a:solidFill>
@@ -24701,12 +24600,15 @@
             </a:r>
             <a:pPr indent="0" marL="0">
               <a:lnSpc>
-                <a:spcPct val="112000"/>
+                <a:spcPct val="106000"/>
               </a:lnSpc>
-              <a:buNone/>
-            </a:pPr>
-            <a:r>
-              <a:rPr lang="en-US" sz="1300" dirty="0">
+              <a:spcAft>
+                <a:spcPts val="700"/>
+              </a:spcAft>
+              <a:buNone/>
+            </a:pPr>
+            <a:r>
+              <a:rPr lang="en-US" sz="1250" dirty="0">
                 <a:solidFill>
                   <a:srgbClr val="00357A"/>
                 </a:solidFill>
@@ -24716,43 +24618,41 @@
               </a:rPr>
               <a:t>).</a:t>
             </a:r>
-            <a:pPr indent="0" marL="0">
+            <a:endParaRPr lang="en-US" sz="1250" dirty="0"/>
+          </a:p>
+          <a:p>
+            <a:pPr marL="190500" indent="-190500">
               <a:lnSpc>
-                <a:spcPct val="112000"/>
+                <a:spcPct val="106000"/>
               </a:lnSpc>
-              <a:buNone/>
-            </a:pPr>
-            <a:endParaRPr lang="en-US" sz="1300" dirty="0"/>
-          </a:p>
-          <a:p>
+              <a:spcAft>
+                <a:spcPts val="700"/>
+              </a:spcAft>
+              <a:buSzPct val="100000"/>
+              <a:buChar char="•"/>
+            </a:pPr>
+            <a:r>
+              <a:rPr lang="en-US" sz="1250" dirty="0">
+                <a:solidFill>
+                  <a:srgbClr val="00357A"/>
+                </a:solidFill>
+                <a:latin typeface="Poppins" pitchFamily="34" charset="0"/>
+                <a:ea typeface="Poppins" pitchFamily="34" charset="-122"/>
+                <a:cs typeface="Poppins" pitchFamily="34" charset="-120"/>
+              </a:rPr>
+              <a:t>Input files must be named </a:t>
+            </a:r>
             <a:pPr indent="0" marL="0">
               <a:lnSpc>
-                <a:spcPct val="112000"/>
+                <a:spcPct val="106000"/>
               </a:lnSpc>
-              <a:buNone/>
-            </a:pPr>
-            <a:r>
-              <a:rPr lang="en-US" sz="1300" dirty="0">
-                <a:solidFill>
-                  <a:srgbClr val="00357A"/>
-                </a:solidFill>
-                <a:latin typeface="Poppins" pitchFamily="34" charset="0"/>
-                <a:ea typeface="Poppins" pitchFamily="34" charset="-122"/>
-                <a:cs typeface="Poppins" pitchFamily="34" charset="-120"/>
-              </a:rPr>
-              <a:t>Input files must be named </a:t>
-            </a:r>
-            <a:endParaRPr lang="en-US" sz="1300" dirty="0"/>
-          </a:p>
-          <a:p>
-            <a:pPr indent="0" marL="0">
-              <a:lnSpc>
-                <a:spcPct val="112000"/>
-              </a:lnSpc>
-              <a:buNone/>
-            </a:pPr>
-            <a:r>
-              <a:rPr lang="en-US" sz="1300" b="1" dirty="0">
+              <a:spcAft>
+                <a:spcPts val="700"/>
+              </a:spcAft>
+              <a:buNone/>
+            </a:pPr>
+            <a:r>
+              <a:rPr lang="en-US" sz="1250" b="1" dirty="0">
                 <a:solidFill>
                   <a:srgbClr val="0057C2"/>
                 </a:solidFill>
@@ -24764,12 +24664,15 @@
             </a:r>
             <a:pPr indent="0" marL="0">
               <a:lnSpc>
-                <a:spcPct val="112000"/>
+                <a:spcPct val="106000"/>
               </a:lnSpc>
-              <a:buNone/>
-            </a:pPr>
-            <a:r>
-              <a:rPr lang="en-US" sz="1300" dirty="0">
+              <a:spcAft>
+                <a:spcPts val="700"/>
+              </a:spcAft>
+              <a:buNone/>
+            </a:pPr>
+            <a:r>
+              <a:rPr lang="en-US" sz="1250" dirty="0">
                 <a:solidFill>
                   <a:srgbClr val="00357A"/>
                 </a:solidFill>
@@ -24779,13 +24682,13 @@
               </a:rPr>
               <a:t> to guard against the wrong dataset.</a:t>
             </a:r>
-            <a:endParaRPr lang="en-US" sz="1300" dirty="0"/>
-          </a:p>
-        </p:txBody>
-      </p:sp>
-      <p:sp>
-        <p:nvSpPr>
-          <p:cNvPr id="8" name="Shape 6"/>
+            <a:endParaRPr lang="en-US" sz="1250" dirty="0"/>
+          </a:p>
+        </p:txBody>
+      </p:sp>
+      <p:sp>
+        <p:nvSpPr>
+          <p:cNvPr id="10" name="Shape 8"/>
           <p:cNvSpPr/>
           <p:nvPr/>
         </p:nvSpPr>
@@ -24819,7 +24722,7 @@
       </p:sp>
       <p:sp>
         <p:nvSpPr>
-          <p:cNvPr id="9" name="Shape 7"/>
+          <p:cNvPr id="11" name="Shape 9"/>
           <p:cNvSpPr/>
           <p:nvPr/>
         </p:nvSpPr>
@@ -24839,7 +24742,7 @@
       </p:sp>
       <p:sp>
         <p:nvSpPr>
-          <p:cNvPr id="10" name="Text 8"/>
+          <p:cNvPr id="12" name="Text 10"/>
           <p:cNvSpPr/>
           <p:nvPr/>
         </p:nvSpPr>
@@ -24878,7 +24781,7 @@
       </p:sp>
       <p:sp>
         <p:nvSpPr>
-          <p:cNvPr id="11" name="Text 9"/>
+          <p:cNvPr id="13" name="Text 11"/>
           <p:cNvSpPr/>
           <p:nvPr/>
         </p:nvSpPr>
@@ -24917,7 +24820,7 @@
       </p:sp>
       <p:sp>
         <p:nvSpPr>
-          <p:cNvPr id="12" name="Text 10"/>
+          <p:cNvPr id="14" name="Text 12"/>
           <p:cNvSpPr/>
           <p:nvPr/>
         </p:nvSpPr>
@@ -24959,7 +24862,7 @@
       </p:sp>
       <p:sp>
         <p:nvSpPr>
-          <p:cNvPr id="13" name="Shape 11"/>
+          <p:cNvPr id="15" name="Shape 13"/>
           <p:cNvSpPr/>
           <p:nvPr/>
         </p:nvSpPr>
@@ -24993,7 +24896,7 @@
       </p:sp>
       <p:sp>
         <p:nvSpPr>
-          <p:cNvPr id="14" name="Shape 12"/>
+          <p:cNvPr id="16" name="Shape 14"/>
           <p:cNvSpPr/>
           <p:nvPr/>
         </p:nvSpPr>
@@ -25013,7 +24916,7 @@
       </p:sp>
       <p:sp>
         <p:nvSpPr>
-          <p:cNvPr id="15" name="Text 13"/>
+          <p:cNvPr id="17" name="Text 15"/>
           <p:cNvSpPr/>
           <p:nvPr/>
         </p:nvSpPr>
@@ -25052,7 +24955,7 @@
       </p:sp>
       <p:sp>
         <p:nvSpPr>
-          <p:cNvPr id="16" name="Text 14"/>
+          <p:cNvPr id="18" name="Text 16"/>
           <p:cNvSpPr/>
           <p:nvPr/>
         </p:nvSpPr>
@@ -25091,7 +24994,7 @@
       </p:sp>
       <p:sp>
         <p:nvSpPr>
-          <p:cNvPr id="17" name="Text 15"/>
+          <p:cNvPr id="19" name="Text 17"/>
           <p:cNvSpPr/>
           <p:nvPr/>
         </p:nvSpPr>
@@ -25133,7 +25036,7 @@
       </p:sp>
       <p:sp>
         <p:nvSpPr>
-          <p:cNvPr id="18" name="Shape 16"/>
+          <p:cNvPr id="20" name="Shape 18"/>
           <p:cNvSpPr/>
           <p:nvPr/>
         </p:nvSpPr>
@@ -25167,7 +25070,7 @@
       </p:sp>
       <p:sp>
         <p:nvSpPr>
-          <p:cNvPr id="19" name="Shape 17"/>
+          <p:cNvPr id="21" name="Shape 19"/>
           <p:cNvSpPr/>
           <p:nvPr/>
         </p:nvSpPr>
@@ -25187,7 +25090,7 @@
       </p:sp>
       <p:sp>
         <p:nvSpPr>
-          <p:cNvPr id="20" name="Text 18"/>
+          <p:cNvPr id="22" name="Text 20"/>
           <p:cNvSpPr/>
           <p:nvPr/>
         </p:nvSpPr>
@@ -25226,7 +25129,7 @@
       </p:sp>
       <p:sp>
         <p:nvSpPr>
-          <p:cNvPr id="21" name="Text 19"/>
+          <p:cNvPr id="23" name="Text 21"/>
           <p:cNvSpPr/>
           <p:nvPr/>
         </p:nvSpPr>
@@ -25265,7 +25168,7 @@
       </p:sp>
       <p:sp>
         <p:nvSpPr>
-          <p:cNvPr id="22" name="Text 20"/>
+          <p:cNvPr id="24" name="Text 22"/>
           <p:cNvSpPr/>
           <p:nvPr/>
         </p:nvSpPr>
@@ -25307,7 +25210,7 @@
       </p:sp>
       <p:sp>
         <p:nvSpPr>
-          <p:cNvPr id="23" name="Shape 21"/>
+          <p:cNvPr id="25" name="Shape 23"/>
           <p:cNvSpPr/>
           <p:nvPr/>
         </p:nvSpPr>
@@ -25341,7 +25244,7 @@
       </p:sp>
       <p:sp>
         <p:nvSpPr>
-          <p:cNvPr id="24" name="Shape 22"/>
+          <p:cNvPr id="26" name="Shape 24"/>
           <p:cNvSpPr/>
           <p:nvPr/>
         </p:nvSpPr>
@@ -25361,7 +25264,7 @@
       </p:sp>
       <p:sp>
         <p:nvSpPr>
-          <p:cNvPr id="25" name="Text 23"/>
+          <p:cNvPr id="27" name="Text 25"/>
           <p:cNvSpPr/>
           <p:nvPr/>
         </p:nvSpPr>
@@ -25400,7 +25303,7 @@
       </p:sp>
       <p:sp>
         <p:nvSpPr>
-          <p:cNvPr id="26" name="Text 24"/>
+          <p:cNvPr id="28" name="Text 26"/>
           <p:cNvSpPr/>
           <p:nvPr/>
         </p:nvSpPr>
@@ -25439,7 +25342,7 @@
       </p:sp>
       <p:sp>
         <p:nvSpPr>
-          <p:cNvPr id="27" name="Text 25"/>
+          <p:cNvPr id="29" name="Text 27"/>
           <p:cNvSpPr/>
           <p:nvPr/>
         </p:nvSpPr>
@@ -25481,7 +25384,7 @@
       </p:sp>
       <p:sp>
         <p:nvSpPr>
-          <p:cNvPr id="28" name="Shape 26"/>
+          <p:cNvPr id="30" name="Shape 28"/>
           <p:cNvSpPr/>
           <p:nvPr/>
         </p:nvSpPr>
@@ -25515,7 +25418,7 @@
       </p:sp>
       <p:sp>
         <p:nvSpPr>
-          <p:cNvPr id="29" name="Shape 27"/>
+          <p:cNvPr id="31" name="Shape 29"/>
           <p:cNvSpPr/>
           <p:nvPr/>
         </p:nvSpPr>
@@ -25535,7 +25438,7 @@
       </p:sp>
       <p:sp>
         <p:nvSpPr>
-          <p:cNvPr id="30" name="Text 28"/>
+          <p:cNvPr id="32" name="Text 30"/>
           <p:cNvSpPr/>
           <p:nvPr/>
         </p:nvSpPr>
@@ -25574,7 +25477,7 @@
       </p:sp>
       <p:sp>
         <p:nvSpPr>
-          <p:cNvPr id="31" name="Text 29"/>
+          <p:cNvPr id="33" name="Text 31"/>
           <p:cNvSpPr/>
           <p:nvPr/>
         </p:nvSpPr>
@@ -25613,7 +25516,7 @@
       </p:sp>
       <p:sp>
         <p:nvSpPr>
-          <p:cNvPr id="32" name="Text 30"/>
+          <p:cNvPr id="34" name="Text 32"/>
           <p:cNvSpPr/>
           <p:nvPr/>
         </p:nvSpPr>
@@ -25655,7 +25558,7 @@
       </p:sp>
       <p:sp>
         <p:nvSpPr>
-          <p:cNvPr id="33" name="Shape 31"/>
+          <p:cNvPr id="35" name="Shape 33"/>
           <p:cNvSpPr/>
           <p:nvPr/>
         </p:nvSpPr>
@@ -25689,7 +25592,7 @@
       </p:sp>
       <p:sp>
         <p:nvSpPr>
-          <p:cNvPr id="34" name="Shape 32"/>
+          <p:cNvPr id="36" name="Shape 34"/>
           <p:cNvSpPr/>
           <p:nvPr/>
         </p:nvSpPr>
@@ -25709,7 +25612,7 @@
       </p:sp>
       <p:sp>
         <p:nvSpPr>
-          <p:cNvPr id="35" name="Text 33"/>
+          <p:cNvPr id="37" name="Text 35"/>
           <p:cNvSpPr/>
           <p:nvPr/>
         </p:nvSpPr>
@@ -25748,7 +25651,7 @@
       </p:sp>
       <p:sp>
         <p:nvSpPr>
-          <p:cNvPr id="36" name="Text 34"/>
+          <p:cNvPr id="38" name="Text 36"/>
           <p:cNvSpPr/>
           <p:nvPr/>
         </p:nvSpPr>
@@ -25787,7 +25690,7 @@
       </p:sp>
       <p:sp>
         <p:nvSpPr>
-          <p:cNvPr id="37" name="Text 35"/>
+          <p:cNvPr id="39" name="Text 37"/>
           <p:cNvSpPr/>
           <p:nvPr/>
         </p:nvSpPr>
@@ -25827,40 +25730,16 @@
           </a:p>
         </p:txBody>
       </p:sp>
-      <p:pic>
-        <p:nvPicPr>
-          <p:cNvPr id="38" name="Image 0" descr="nsf_ncar_logo_color.png">    </p:cNvPr>
-          <p:cNvPicPr>
-            <a:picLocks noChangeAspect="1"/>
-          </p:cNvPicPr>
-          <p:nvPr/>
-        </p:nvPicPr>
-        <p:blipFill>
-          <a:blip r:embed="rId1"/>
-          <a:stretch>
-            <a:fillRect/>
-          </a:stretch>
-        </p:blipFill>
-        <p:spPr>
-          <a:xfrm>
-            <a:off x="9951415" y="274320"/>
-            <a:ext cx="1874520" cy="512064"/>
-          </a:xfrm>
-          <a:prstGeom prst="rect">
-            <a:avLst/>
-          </a:prstGeom>
-        </p:spPr>
-      </p:pic>
-      <p:sp>
-        <p:nvSpPr>
-          <p:cNvPr id="39" name="Text 36"/>
-          <p:cNvSpPr/>
-          <p:nvPr/>
-        </p:nvSpPr>
-        <p:spPr>
-          <a:xfrm>
-            <a:off x="457200" y="6473952"/>
-            <a:ext cx="7315200" cy="274320"/>
+      <p:sp>
+        <p:nvSpPr>
+          <p:cNvPr id="40" name="Text 38"/>
+          <p:cNvSpPr/>
+          <p:nvPr/>
+        </p:nvSpPr>
+        <p:spPr>
+          <a:xfrm>
+            <a:off x="256032" y="6446520"/>
+            <a:ext cx="365760" cy="274320"/>
           </a:xfrm>
           <a:prstGeom prst="rect">
             <a:avLst/>
@@ -25872,34 +25751,34 @@
           <a:bodyPr wrap="square" lIns="0" tIns="0" rIns="0" bIns="0" rtlCol="0" anchor="ctr"/>
           <a:lstStyle/>
           <a:p>
-            <a:pPr algn="l" indent="0" marL="0">
-              <a:buNone/>
-            </a:pPr>
-            <a:r>
-              <a:rPr lang="en-US" sz="900" dirty="0">
-                <a:solidFill>
-                  <a:srgbClr val="53565A"/>
-                </a:solidFill>
-                <a:latin typeface="Poppins" pitchFamily="34" charset="0"/>
-                <a:ea typeface="Poppins" pitchFamily="34" charset="-122"/>
-                <a:cs typeface="Poppins" pitchFamily="34" charset="-120"/>
-              </a:rPr>
-              <a:t>dsupdt  •  Developer &amp; General Usage Guide</a:t>
-            </a:r>
-            <a:endParaRPr lang="en-US" sz="900" dirty="0"/>
-          </a:p>
-        </p:txBody>
-      </p:sp>
-      <p:sp>
-        <p:nvSpPr>
-          <p:cNvPr id="40" name="Text 37"/>
-          <p:cNvSpPr/>
-          <p:nvPr/>
-        </p:nvSpPr>
-        <p:spPr>
-          <a:xfrm>
-            <a:off x="11368735" y="6473952"/>
-            <a:ext cx="365760" cy="274320"/>
+            <a:pPr indent="0" marL="0">
+              <a:buNone/>
+            </a:pPr>
+            <a:r>
+              <a:rPr lang="en-US" sz="950" b="1" dirty="0">
+                <a:solidFill>
+                  <a:srgbClr val="00357A"/>
+                </a:solidFill>
+                <a:latin typeface="Poppins" pitchFamily="34" charset="0"/>
+                <a:ea typeface="Poppins" pitchFamily="34" charset="-122"/>
+                <a:cs typeface="Poppins" pitchFamily="34" charset="-120"/>
+              </a:rPr>
+              <a:t>1</a:t>
+            </a:r>
+            <a:endParaRPr lang="en-US" sz="950" dirty="0"/>
+          </a:p>
+        </p:txBody>
+      </p:sp>
+      <p:sp>
+        <p:nvSpPr>
+          <p:cNvPr id="41" name="Text 39"/>
+          <p:cNvSpPr/>
+          <p:nvPr/>
+        </p:nvSpPr>
+        <p:spPr>
+          <a:xfrm>
+            <a:off x="786384" y="6446520"/>
+            <a:ext cx="5486400" cy="274320"/>
           </a:xfrm>
           <a:prstGeom prst="rect">
             <a:avLst/>
@@ -25911,21 +25790,21 @@
           <a:bodyPr wrap="square" lIns="0" tIns="0" rIns="0" bIns="0" rtlCol="0" anchor="ctr"/>
           <a:lstStyle/>
           <a:p>
-            <a:pPr algn="r" indent="0" marL="0">
-              <a:buNone/>
-            </a:pPr>
-            <a:r>
-              <a:rPr lang="en-US" sz="900" dirty="0">
-                <a:solidFill>
-                  <a:srgbClr val="53565A"/>
-                </a:solidFill>
-                <a:latin typeface="Poppins" pitchFamily="34" charset="0"/>
-                <a:ea typeface="Poppins" pitchFamily="34" charset="-122"/>
-                <a:cs typeface="Poppins" pitchFamily="34" charset="-120"/>
-              </a:rPr>
-              <a:t>1</a:t>
-            </a:r>
-            <a:endParaRPr lang="en-US" sz="900" dirty="0"/>
+            <a:pPr indent="0" marL="0">
+              <a:buNone/>
+            </a:pPr>
+            <a:r>
+              <a:rPr lang="en-US" sz="950" b="1" dirty="0">
+                <a:solidFill>
+                  <a:srgbClr val="00357A"/>
+                </a:solidFill>
+                <a:latin typeface="Poppins" pitchFamily="34" charset="0"/>
+                <a:ea typeface="Poppins" pitchFamily="34" charset="-122"/>
+                <a:cs typeface="Poppins" pitchFamily="34" charset="-120"/>
+              </a:rPr>
+              <a:t>DSUPDT  •  DEVELOPER &amp; GENERAL USAGE GUIDE</a:t>
+            </a:r>
+            <a:endParaRPr lang="en-US" sz="950" dirty="0"/>
           </a:p>
         </p:txBody>
       </p:sp>
@@ -25940,13 +25819,6 @@
 <file path=ppt/slides/slide20.xml><?xml version="1.0" encoding="utf-8"?>
 <p:sld xmlns:a="http://schemas.openxmlformats.org/drawingml/2006/main" xmlns:r="http://schemas.openxmlformats.org/officeDocument/2006/relationships" xmlns:p="http://schemas.openxmlformats.org/presentationml/2006/main">
   <p:cSld name="Slide 20">
-    <p:bg>
-      <p:bgPr>
-        <a:solidFill>
-          <a:srgbClr val="FFFFFF"/>
-        </a:solidFill>
-      </p:bgPr>
-    </p:bg>
     <p:spTree>
       <p:nvGrpSpPr>
         <p:cNvPr id="1" name=""/>
@@ -28365,12 +28237,12 @@
         </p:nvSpPr>
         <p:spPr>
           <a:xfrm>
-            <a:off x="457200" y="5943600"/>
-            <a:ext cx="11274552" cy="475488"/>
+            <a:off x="457200" y="5870448"/>
+            <a:ext cx="9966960" cy="512064"/>
           </a:xfrm>
           <a:prstGeom prst="roundRect">
             <a:avLst>
-              <a:gd name="adj" fmla="val 15385"/>
+              <a:gd name="adj" fmla="val 14286"/>
             </a:avLst>
           </a:prstGeom>
           <a:solidFill>
@@ -28392,8 +28264,8 @@
         </p:nvSpPr>
         <p:spPr>
           <a:xfrm>
-            <a:off x="685800" y="5943600"/>
-            <a:ext cx="10835640" cy="475488"/>
+            <a:off x="658368" y="5870448"/>
+            <a:ext cx="9564624" cy="512064"/>
           </a:xfrm>
           <a:prstGeom prst="rect">
             <a:avLst/>
@@ -28412,7 +28284,7 @@
               <a:buNone/>
             </a:pPr>
             <a:r>
-              <a:rPr lang="en-US" sz="1100" b="1" dirty="0">
+              <a:rPr lang="en-US" sz="1000" b="1" dirty="0">
                 <a:solidFill>
                   <a:srgbClr val="0057C2"/>
                 </a:solidFill>
@@ -28429,7 +28301,7 @@
               <a:buNone/>
             </a:pPr>
             <a:r>
-              <a:rPr lang="en-US" sz="1100" dirty="0">
+              <a:rPr lang="en-US" sz="1000" dirty="0">
                 <a:solidFill>
                   <a:srgbClr val="00357A"/>
                 </a:solidFill>
@@ -28446,7 +28318,7 @@
               <a:buNone/>
             </a:pPr>
             <a:r>
-              <a:rPr lang="en-US" sz="1100" i="1" dirty="0">
+              <a:rPr lang="en-US" sz="1000" i="1" dirty="0">
                 <a:solidFill>
                   <a:srgbClr val="53565A"/>
                 </a:solidFill>
@@ -28456,44 +28328,20 @@
               </a:rPr>
               <a:t>VI = 0 → only the most recent period.</a:t>
             </a:r>
-            <a:endParaRPr lang="en-US" sz="1100" dirty="0"/>
-          </a:p>
-        </p:txBody>
-      </p:sp>
-      <p:pic>
-        <p:nvPicPr>
-          <p:cNvPr id="70" name="Image 0" descr="nsf_ncar_logo_color.png">    </p:cNvPr>
-          <p:cNvPicPr>
-            <a:picLocks noChangeAspect="1"/>
-          </p:cNvPicPr>
-          <p:nvPr/>
-        </p:nvPicPr>
-        <p:blipFill>
-          <a:blip r:embed="rId1"/>
-          <a:stretch>
-            <a:fillRect/>
-          </a:stretch>
-        </p:blipFill>
-        <p:spPr>
-          <a:xfrm>
-            <a:off x="9951415" y="274320"/>
-            <a:ext cx="1874520" cy="512064"/>
-          </a:xfrm>
-          <a:prstGeom prst="rect">
-            <a:avLst/>
-          </a:prstGeom>
-        </p:spPr>
-      </p:pic>
-      <p:sp>
-        <p:nvSpPr>
-          <p:cNvPr id="71" name="Text 68"/>
-          <p:cNvSpPr/>
-          <p:nvPr/>
-        </p:nvSpPr>
-        <p:spPr>
-          <a:xfrm>
-            <a:off x="457200" y="6473952"/>
-            <a:ext cx="7315200" cy="274320"/>
+            <a:endParaRPr lang="en-US" sz="1000" dirty="0"/>
+          </a:p>
+        </p:txBody>
+      </p:sp>
+      <p:sp>
+        <p:nvSpPr>
+          <p:cNvPr id="70" name="Text 68"/>
+          <p:cNvSpPr/>
+          <p:nvPr/>
+        </p:nvSpPr>
+        <p:spPr>
+          <a:xfrm>
+            <a:off x="256032" y="6446520"/>
+            <a:ext cx="365760" cy="274320"/>
           </a:xfrm>
           <a:prstGeom prst="rect">
             <a:avLst/>
@@ -28505,34 +28353,34 @@
           <a:bodyPr wrap="square" lIns="0" tIns="0" rIns="0" bIns="0" rtlCol="0" anchor="ctr"/>
           <a:lstStyle/>
           <a:p>
-            <a:pPr algn="l" indent="0" marL="0">
-              <a:buNone/>
-            </a:pPr>
-            <a:r>
-              <a:rPr lang="en-US" sz="900" dirty="0">
-                <a:solidFill>
-                  <a:srgbClr val="53565A"/>
-                </a:solidFill>
-                <a:latin typeface="Poppins" pitchFamily="34" charset="0"/>
-                <a:ea typeface="Poppins" pitchFamily="34" charset="-122"/>
-                <a:cs typeface="Poppins" pitchFamily="34" charset="-120"/>
-              </a:rPr>
-              <a:t>dsupdt  •  Developer &amp; General Usage Guide</a:t>
-            </a:r>
-            <a:endParaRPr lang="en-US" sz="900" dirty="0"/>
-          </a:p>
-        </p:txBody>
-      </p:sp>
-      <p:sp>
-        <p:nvSpPr>
-          <p:cNvPr id="72" name="Text 69"/>
-          <p:cNvSpPr/>
-          <p:nvPr/>
-        </p:nvSpPr>
-        <p:spPr>
-          <a:xfrm>
-            <a:off x="11368735" y="6473952"/>
-            <a:ext cx="365760" cy="274320"/>
+            <a:pPr indent="0" marL="0">
+              <a:buNone/>
+            </a:pPr>
+            <a:r>
+              <a:rPr lang="en-US" sz="950" b="1" dirty="0">
+                <a:solidFill>
+                  <a:srgbClr val="00357A"/>
+                </a:solidFill>
+                <a:latin typeface="Poppins" pitchFamily="34" charset="0"/>
+                <a:ea typeface="Poppins" pitchFamily="34" charset="-122"/>
+                <a:cs typeface="Poppins" pitchFamily="34" charset="-120"/>
+              </a:rPr>
+              <a:t>19</a:t>
+            </a:r>
+            <a:endParaRPr lang="en-US" sz="950" dirty="0"/>
+          </a:p>
+        </p:txBody>
+      </p:sp>
+      <p:sp>
+        <p:nvSpPr>
+          <p:cNvPr id="71" name="Text 69"/>
+          <p:cNvSpPr/>
+          <p:nvPr/>
+        </p:nvSpPr>
+        <p:spPr>
+          <a:xfrm>
+            <a:off x="786384" y="6446520"/>
+            <a:ext cx="5486400" cy="274320"/>
           </a:xfrm>
           <a:prstGeom prst="rect">
             <a:avLst/>
@@ -28544,21 +28392,21 @@
           <a:bodyPr wrap="square" lIns="0" tIns="0" rIns="0" bIns="0" rtlCol="0" anchor="ctr"/>
           <a:lstStyle/>
           <a:p>
-            <a:pPr algn="r" indent="0" marL="0">
-              <a:buNone/>
-            </a:pPr>
-            <a:r>
-              <a:rPr lang="en-US" sz="900" dirty="0">
-                <a:solidFill>
-                  <a:srgbClr val="53565A"/>
-                </a:solidFill>
-                <a:latin typeface="Poppins" pitchFamily="34" charset="0"/>
-                <a:ea typeface="Poppins" pitchFamily="34" charset="-122"/>
-                <a:cs typeface="Poppins" pitchFamily="34" charset="-120"/>
-              </a:rPr>
-              <a:t>19</a:t>
-            </a:r>
-            <a:endParaRPr lang="en-US" sz="900" dirty="0"/>
+            <a:pPr indent="0" marL="0">
+              <a:buNone/>
+            </a:pPr>
+            <a:r>
+              <a:rPr lang="en-US" sz="950" b="1" dirty="0">
+                <a:solidFill>
+                  <a:srgbClr val="00357A"/>
+                </a:solidFill>
+                <a:latin typeface="Poppins" pitchFamily="34" charset="0"/>
+                <a:ea typeface="Poppins" pitchFamily="34" charset="-122"/>
+                <a:cs typeface="Poppins" pitchFamily="34" charset="-120"/>
+              </a:rPr>
+              <a:t>DSUPDT  •  DEVELOPER &amp; GENERAL USAGE GUIDE</a:t>
+            </a:r>
+            <a:endParaRPr lang="en-US" sz="950" dirty="0"/>
           </a:p>
         </p:txBody>
       </p:sp>
@@ -28573,13 +28421,6 @@
 <file path=ppt/slides/slide21.xml><?xml version="1.0" encoding="utf-8"?>
 <p:sld xmlns:a="http://schemas.openxmlformats.org/drawingml/2006/main" xmlns:r="http://schemas.openxmlformats.org/officeDocument/2006/relationships" xmlns:p="http://schemas.openxmlformats.org/presentationml/2006/main">
   <p:cSld name="Slide 21">
-    <p:bg>
-      <p:bgPr>
-        <a:solidFill>
-          <a:srgbClr val="FFFFFF"/>
-        </a:solidFill>
-      </p:bgPr>
-    </p:bg>
     <p:spTree>
       <p:nvGrpSpPr>
         <p:cNvPr id="1" name=""/>
@@ -29589,7 +29430,7 @@
         </p:nvSpPr>
         <p:spPr>
           <a:xfrm>
-            <a:off x="457200" y="4023360"/>
+            <a:off x="457200" y="3950208"/>
             <a:ext cx="11274552" cy="621792"/>
           </a:xfrm>
           <a:prstGeom prst="roundRect">
@@ -29616,7 +29457,7 @@
         </p:nvSpPr>
         <p:spPr>
           <a:xfrm>
-            <a:off x="457200" y="4023360"/>
+            <a:off x="457200" y="3950208"/>
             <a:ext cx="1737360" cy="621792"/>
           </a:xfrm>
           <a:prstGeom prst="roundRect">
@@ -29638,7 +29479,7 @@
         </p:nvSpPr>
         <p:spPr>
           <a:xfrm>
-            <a:off x="457200" y="4023360"/>
+            <a:off x="457200" y="3950208"/>
             <a:ext cx="1737360" cy="621792"/>
           </a:xfrm>
           <a:prstGeom prst="rect">
@@ -29677,7 +29518,7 @@
         </p:nvSpPr>
         <p:spPr>
           <a:xfrm>
-            <a:off x="2377440" y="4023360"/>
+            <a:off x="2377440" y="3950208"/>
             <a:ext cx="9189720" cy="621792"/>
           </a:xfrm>
           <a:prstGeom prst="rect">
@@ -29716,7 +29557,7 @@
         </p:nvSpPr>
         <p:spPr>
           <a:xfrm>
-            <a:off x="457200" y="4736592"/>
+            <a:off x="457200" y="4626864"/>
             <a:ext cx="11274552" cy="621792"/>
           </a:xfrm>
           <a:prstGeom prst="roundRect">
@@ -29743,7 +29584,7 @@
         </p:nvSpPr>
         <p:spPr>
           <a:xfrm>
-            <a:off x="457200" y="4736592"/>
+            <a:off x="457200" y="4626864"/>
             <a:ext cx="1737360" cy="621792"/>
           </a:xfrm>
           <a:prstGeom prst="roundRect">
@@ -29765,7 +29606,7 @@
         </p:nvSpPr>
         <p:spPr>
           <a:xfrm>
-            <a:off x="457200" y="4736592"/>
+            <a:off x="457200" y="4626864"/>
             <a:ext cx="1737360" cy="621792"/>
           </a:xfrm>
           <a:prstGeom prst="rect">
@@ -29804,7 +29645,7 @@
         </p:nvSpPr>
         <p:spPr>
           <a:xfrm>
-            <a:off x="2377440" y="4736592"/>
+            <a:off x="2377440" y="4626864"/>
             <a:ext cx="9189720" cy="621792"/>
           </a:xfrm>
           <a:prstGeom prst="rect">
@@ -29843,7 +29684,7 @@
         </p:nvSpPr>
         <p:spPr>
           <a:xfrm>
-            <a:off x="457200" y="5449824"/>
+            <a:off x="457200" y="5303520"/>
             <a:ext cx="11274552" cy="621792"/>
           </a:xfrm>
           <a:prstGeom prst="roundRect">
@@ -29870,7 +29711,7 @@
         </p:nvSpPr>
         <p:spPr>
           <a:xfrm>
-            <a:off x="457200" y="5449824"/>
+            <a:off x="457200" y="5303520"/>
             <a:ext cx="1737360" cy="621792"/>
           </a:xfrm>
           <a:prstGeom prst="roundRect">
@@ -29892,7 +29733,7 @@
         </p:nvSpPr>
         <p:spPr>
           <a:xfrm>
-            <a:off x="457200" y="5449824"/>
+            <a:off x="457200" y="5303520"/>
             <a:ext cx="1737360" cy="621792"/>
           </a:xfrm>
           <a:prstGeom prst="rect">
@@ -29931,7 +29772,7 @@
         </p:nvSpPr>
         <p:spPr>
           <a:xfrm>
-            <a:off x="2377440" y="5449824"/>
+            <a:off x="2377440" y="5303520"/>
             <a:ext cx="9189720" cy="621792"/>
           </a:xfrm>
           <a:prstGeom prst="rect">
@@ -29970,8 +29811,8 @@
         </p:nvSpPr>
         <p:spPr>
           <a:xfrm>
-            <a:off x="457200" y="6263640"/>
-            <a:ext cx="11247120" cy="274320"/>
+            <a:off x="457200" y="5998464"/>
+            <a:ext cx="9966960" cy="274320"/>
           </a:xfrm>
           <a:prstGeom prst="rect">
             <a:avLst/>
@@ -30113,40 +29954,16 @@
           </a:p>
         </p:txBody>
       </p:sp>
-      <p:pic>
-        <p:nvPicPr>
-          <p:cNvPr id="43" name="Image 0" descr="nsf_ncar_logo_color.png">    </p:cNvPr>
-          <p:cNvPicPr>
-            <a:picLocks noChangeAspect="1"/>
-          </p:cNvPicPr>
-          <p:nvPr/>
-        </p:nvPicPr>
-        <p:blipFill>
-          <a:blip r:embed="rId1"/>
-          <a:stretch>
-            <a:fillRect/>
-          </a:stretch>
-        </p:blipFill>
-        <p:spPr>
-          <a:xfrm>
-            <a:off x="9951415" y="274320"/>
-            <a:ext cx="1874520" cy="512064"/>
-          </a:xfrm>
-          <a:prstGeom prst="rect">
-            <a:avLst/>
-          </a:prstGeom>
-        </p:spPr>
-      </p:pic>
-      <p:sp>
-        <p:nvSpPr>
-          <p:cNvPr id="44" name="Text 41"/>
-          <p:cNvSpPr/>
-          <p:nvPr/>
-        </p:nvSpPr>
-        <p:spPr>
-          <a:xfrm>
-            <a:off x="457200" y="6473952"/>
-            <a:ext cx="7315200" cy="274320"/>
+      <p:sp>
+        <p:nvSpPr>
+          <p:cNvPr id="43" name="Text 41"/>
+          <p:cNvSpPr/>
+          <p:nvPr/>
+        </p:nvSpPr>
+        <p:spPr>
+          <a:xfrm>
+            <a:off x="256032" y="6446520"/>
+            <a:ext cx="365760" cy="274320"/>
           </a:xfrm>
           <a:prstGeom prst="rect">
             <a:avLst/>
@@ -30158,34 +29975,34 @@
           <a:bodyPr wrap="square" lIns="0" tIns="0" rIns="0" bIns="0" rtlCol="0" anchor="ctr"/>
           <a:lstStyle/>
           <a:p>
-            <a:pPr algn="l" indent="0" marL="0">
-              <a:buNone/>
-            </a:pPr>
-            <a:r>
-              <a:rPr lang="en-US" sz="900" dirty="0">
-                <a:solidFill>
-                  <a:srgbClr val="53565A"/>
-                </a:solidFill>
-                <a:latin typeface="Poppins" pitchFamily="34" charset="0"/>
-                <a:ea typeface="Poppins" pitchFamily="34" charset="-122"/>
-                <a:cs typeface="Poppins" pitchFamily="34" charset="-120"/>
-              </a:rPr>
-              <a:t>dsupdt  •  Developer &amp; General Usage Guide</a:t>
-            </a:r>
-            <a:endParaRPr lang="en-US" sz="900" dirty="0"/>
-          </a:p>
-        </p:txBody>
-      </p:sp>
-      <p:sp>
-        <p:nvSpPr>
-          <p:cNvPr id="45" name="Text 42"/>
-          <p:cNvSpPr/>
-          <p:nvPr/>
-        </p:nvSpPr>
-        <p:spPr>
-          <a:xfrm>
-            <a:off x="11368735" y="6473952"/>
-            <a:ext cx="365760" cy="274320"/>
+            <a:pPr indent="0" marL="0">
+              <a:buNone/>
+            </a:pPr>
+            <a:r>
+              <a:rPr lang="en-US" sz="950" b="1" dirty="0">
+                <a:solidFill>
+                  <a:srgbClr val="00357A"/>
+                </a:solidFill>
+                <a:latin typeface="Poppins" pitchFamily="34" charset="0"/>
+                <a:ea typeface="Poppins" pitchFamily="34" charset="-122"/>
+                <a:cs typeface="Poppins" pitchFamily="34" charset="-120"/>
+              </a:rPr>
+              <a:t>20</a:t>
+            </a:r>
+            <a:endParaRPr lang="en-US" sz="950" dirty="0"/>
+          </a:p>
+        </p:txBody>
+      </p:sp>
+      <p:sp>
+        <p:nvSpPr>
+          <p:cNvPr id="44" name="Text 42"/>
+          <p:cNvSpPr/>
+          <p:nvPr/>
+        </p:nvSpPr>
+        <p:spPr>
+          <a:xfrm>
+            <a:off x="786384" y="6446520"/>
+            <a:ext cx="5486400" cy="274320"/>
           </a:xfrm>
           <a:prstGeom prst="rect">
             <a:avLst/>
@@ -30197,21 +30014,21 @@
           <a:bodyPr wrap="square" lIns="0" tIns="0" rIns="0" bIns="0" rtlCol="0" anchor="ctr"/>
           <a:lstStyle/>
           <a:p>
-            <a:pPr algn="r" indent="0" marL="0">
-              <a:buNone/>
-            </a:pPr>
-            <a:r>
-              <a:rPr lang="en-US" sz="900" dirty="0">
-                <a:solidFill>
-                  <a:srgbClr val="53565A"/>
-                </a:solidFill>
-                <a:latin typeface="Poppins" pitchFamily="34" charset="0"/>
-                <a:ea typeface="Poppins" pitchFamily="34" charset="-122"/>
-                <a:cs typeface="Poppins" pitchFamily="34" charset="-120"/>
-              </a:rPr>
-              <a:t>20</a:t>
-            </a:r>
-            <a:endParaRPr lang="en-US" sz="900" dirty="0"/>
+            <a:pPr indent="0" marL="0">
+              <a:buNone/>
+            </a:pPr>
+            <a:r>
+              <a:rPr lang="en-US" sz="950" b="1" dirty="0">
+                <a:solidFill>
+                  <a:srgbClr val="00357A"/>
+                </a:solidFill>
+                <a:latin typeface="Poppins" pitchFamily="34" charset="0"/>
+                <a:ea typeface="Poppins" pitchFamily="34" charset="-122"/>
+                <a:cs typeface="Poppins" pitchFamily="34" charset="-120"/>
+              </a:rPr>
+              <a:t>DSUPDT  •  DEVELOPER &amp; GENERAL USAGE GUIDE</a:t>
+            </a:r>
+            <a:endParaRPr lang="en-US" sz="950" dirty="0"/>
           </a:p>
         </p:txBody>
       </p:sp>
@@ -30226,13 +30043,6 @@
 <file path=ppt/slides/slide22.xml><?xml version="1.0" encoding="utf-8"?>
 <p:sld xmlns:a="http://schemas.openxmlformats.org/drawingml/2006/main" xmlns:r="http://schemas.openxmlformats.org/officeDocument/2006/relationships" xmlns:p="http://schemas.openxmlformats.org/presentationml/2006/main">
   <p:cSld name="Slide 22">
-    <p:bg>
-      <p:bgPr>
-        <a:solidFill>
-          <a:srgbClr val="FFFFFF"/>
-        </a:solidFill>
-      </p:bgPr>
-    </p:bg>
     <p:spTree>
       <p:nvGrpSpPr>
         <p:cNvPr id="1" name=""/>
@@ -30900,12 +30710,12 @@
         </p:nvSpPr>
         <p:spPr>
           <a:xfrm>
-            <a:off x="8275320" y="1828800"/>
-            <a:ext cx="3456432" cy="603504"/>
+            <a:off x="8275320" y="1719072"/>
+            <a:ext cx="3456432" cy="585216"/>
           </a:xfrm>
           <a:prstGeom prst="roundRect">
             <a:avLst>
-              <a:gd name="adj" fmla="val 9091"/>
+              <a:gd name="adj" fmla="val 9375"/>
             </a:avLst>
           </a:prstGeom>
           <a:solidFill>
@@ -30927,8 +30737,8 @@
         </p:nvSpPr>
         <p:spPr>
           <a:xfrm>
-            <a:off x="8275320" y="1828800"/>
-            <a:ext cx="109728" cy="603504"/>
+            <a:off x="8275320" y="1719072"/>
+            <a:ext cx="109728" cy="585216"/>
           </a:xfrm>
           <a:prstGeom prst="roundRect">
             <a:avLst>
@@ -30949,8 +30759,8 @@
         </p:nvSpPr>
         <p:spPr>
           <a:xfrm>
-            <a:off x="8494776" y="1828800"/>
-            <a:ext cx="3127248" cy="603504"/>
+            <a:off x="8494776" y="1719072"/>
+            <a:ext cx="3127248" cy="585216"/>
           </a:xfrm>
           <a:prstGeom prst="rect">
             <a:avLst/>
@@ -31008,12 +30818,12 @@
         </p:nvSpPr>
         <p:spPr>
           <a:xfrm>
-            <a:off x="8275320" y="2487168"/>
-            <a:ext cx="3456432" cy="603504"/>
+            <a:off x="8275320" y="2359152"/>
+            <a:ext cx="3456432" cy="585216"/>
           </a:xfrm>
           <a:prstGeom prst="roundRect">
             <a:avLst>
-              <a:gd name="adj" fmla="val 9091"/>
+              <a:gd name="adj" fmla="val 9375"/>
             </a:avLst>
           </a:prstGeom>
           <a:solidFill>
@@ -31035,8 +30845,8 @@
         </p:nvSpPr>
         <p:spPr>
           <a:xfrm>
-            <a:off x="8275320" y="2487168"/>
-            <a:ext cx="109728" cy="603504"/>
+            <a:off x="8275320" y="2359152"/>
+            <a:ext cx="109728" cy="585216"/>
           </a:xfrm>
           <a:prstGeom prst="roundRect">
             <a:avLst>
@@ -31057,8 +30867,8 @@
         </p:nvSpPr>
         <p:spPr>
           <a:xfrm>
-            <a:off x="8494776" y="2487168"/>
-            <a:ext cx="3127248" cy="603504"/>
+            <a:off x="8494776" y="2359152"/>
+            <a:ext cx="3127248" cy="585216"/>
           </a:xfrm>
           <a:prstGeom prst="rect">
             <a:avLst/>
@@ -31116,12 +30926,12 @@
         </p:nvSpPr>
         <p:spPr>
           <a:xfrm>
-            <a:off x="8275320" y="3145536"/>
-            <a:ext cx="3456432" cy="603504"/>
+            <a:off x="8275320" y="2999232"/>
+            <a:ext cx="3456432" cy="585216"/>
           </a:xfrm>
           <a:prstGeom prst="roundRect">
             <a:avLst>
-              <a:gd name="adj" fmla="val 9091"/>
+              <a:gd name="adj" fmla="val 9375"/>
             </a:avLst>
           </a:prstGeom>
           <a:solidFill>
@@ -31143,8 +30953,8 @@
         </p:nvSpPr>
         <p:spPr>
           <a:xfrm>
-            <a:off x="8275320" y="3145536"/>
-            <a:ext cx="109728" cy="603504"/>
+            <a:off x="8275320" y="2999232"/>
+            <a:ext cx="109728" cy="585216"/>
           </a:xfrm>
           <a:prstGeom prst="roundRect">
             <a:avLst>
@@ -31165,8 +30975,8 @@
         </p:nvSpPr>
         <p:spPr>
           <a:xfrm>
-            <a:off x="8494776" y="3145536"/>
-            <a:ext cx="3127248" cy="603504"/>
+            <a:off x="8494776" y="2999232"/>
+            <a:ext cx="3127248" cy="585216"/>
           </a:xfrm>
           <a:prstGeom prst="rect">
             <a:avLst/>
@@ -31224,12 +31034,12 @@
         </p:nvSpPr>
         <p:spPr>
           <a:xfrm>
-            <a:off x="8275320" y="3803904"/>
-            <a:ext cx="3456432" cy="603504"/>
+            <a:off x="8275320" y="3639312"/>
+            <a:ext cx="3456432" cy="585216"/>
           </a:xfrm>
           <a:prstGeom prst="roundRect">
             <a:avLst>
-              <a:gd name="adj" fmla="val 9091"/>
+              <a:gd name="adj" fmla="val 9375"/>
             </a:avLst>
           </a:prstGeom>
           <a:solidFill>
@@ -31251,8 +31061,8 @@
         </p:nvSpPr>
         <p:spPr>
           <a:xfrm>
-            <a:off x="8275320" y="3803904"/>
-            <a:ext cx="109728" cy="603504"/>
+            <a:off x="8275320" y="3639312"/>
+            <a:ext cx="109728" cy="585216"/>
           </a:xfrm>
           <a:prstGeom prst="roundRect">
             <a:avLst>
@@ -31273,8 +31083,8 @@
         </p:nvSpPr>
         <p:spPr>
           <a:xfrm>
-            <a:off x="8494776" y="3803904"/>
-            <a:ext cx="3127248" cy="603504"/>
+            <a:off x="8494776" y="3639312"/>
+            <a:ext cx="3127248" cy="585216"/>
           </a:xfrm>
           <a:prstGeom prst="rect">
             <a:avLst/>
@@ -31332,12 +31142,12 @@
         </p:nvSpPr>
         <p:spPr>
           <a:xfrm>
-            <a:off x="8275320" y="4462272"/>
-            <a:ext cx="3456432" cy="603504"/>
+            <a:off x="8275320" y="4279392"/>
+            <a:ext cx="3456432" cy="585216"/>
           </a:xfrm>
           <a:prstGeom prst="roundRect">
             <a:avLst>
-              <a:gd name="adj" fmla="val 9091"/>
+              <a:gd name="adj" fmla="val 9375"/>
             </a:avLst>
           </a:prstGeom>
           <a:solidFill>
@@ -31359,8 +31169,8 @@
         </p:nvSpPr>
         <p:spPr>
           <a:xfrm>
-            <a:off x="8275320" y="4462272"/>
-            <a:ext cx="109728" cy="603504"/>
+            <a:off x="8275320" y="4279392"/>
+            <a:ext cx="109728" cy="585216"/>
           </a:xfrm>
           <a:prstGeom prst="roundRect">
             <a:avLst>
@@ -31381,8 +31191,8 @@
         </p:nvSpPr>
         <p:spPr>
           <a:xfrm>
-            <a:off x="8494776" y="4462272"/>
-            <a:ext cx="3127248" cy="603504"/>
+            <a:off x="8494776" y="4279392"/>
+            <a:ext cx="3127248" cy="585216"/>
           </a:xfrm>
           <a:prstGeom prst="rect">
             <a:avLst/>
@@ -31440,7 +31250,7 @@
         </p:nvSpPr>
         <p:spPr>
           <a:xfrm>
-            <a:off x="8275320" y="5084064"/>
+            <a:off x="8275320" y="4882896"/>
             <a:ext cx="3456432" cy="274320"/>
           </a:xfrm>
           <a:prstGeom prst="rect">
@@ -31479,7 +31289,7 @@
         </p:nvSpPr>
         <p:spPr>
           <a:xfrm>
-            <a:off x="8293608" y="5468112"/>
+            <a:off x="8293608" y="5266944"/>
             <a:ext cx="128016" cy="128016"/>
           </a:xfrm>
           <a:prstGeom prst="ellipse">
@@ -31499,7 +31309,7 @@
         </p:nvSpPr>
         <p:spPr>
           <a:xfrm>
-            <a:off x="8293608" y="5468112"/>
+            <a:off x="8293608" y="5266944"/>
             <a:ext cx="128016" cy="128016"/>
           </a:xfrm>
           <a:prstGeom prst="rect">
@@ -31527,7 +31337,7 @@
         </p:nvSpPr>
         <p:spPr>
           <a:xfrm>
-            <a:off x="8531352" y="5394960"/>
+            <a:off x="8531352" y="5193792"/>
             <a:ext cx="3200400" cy="274320"/>
           </a:xfrm>
           <a:prstGeom prst="rect">
@@ -31580,7 +31390,7 @@
         </p:nvSpPr>
         <p:spPr>
           <a:xfrm>
-            <a:off x="8293608" y="5742432"/>
+            <a:off x="8293608" y="5541264"/>
             <a:ext cx="128016" cy="128016"/>
           </a:xfrm>
           <a:prstGeom prst="ellipse">
@@ -31600,7 +31410,7 @@
         </p:nvSpPr>
         <p:spPr>
           <a:xfrm>
-            <a:off x="8293608" y="5742432"/>
+            <a:off x="8293608" y="5541264"/>
             <a:ext cx="128016" cy="128016"/>
           </a:xfrm>
           <a:prstGeom prst="rect">
@@ -31628,7 +31438,7 @@
         </p:nvSpPr>
         <p:spPr>
           <a:xfrm>
-            <a:off x="8531352" y="5669280"/>
+            <a:off x="8531352" y="5468112"/>
             <a:ext cx="3200400" cy="274320"/>
           </a:xfrm>
           <a:prstGeom prst="rect">
@@ -31681,7 +31491,7 @@
         </p:nvSpPr>
         <p:spPr>
           <a:xfrm>
-            <a:off x="8293608" y="6016752"/>
+            <a:off x="8293608" y="5815584"/>
             <a:ext cx="128016" cy="128016"/>
           </a:xfrm>
           <a:prstGeom prst="ellipse">
@@ -31701,7 +31511,7 @@
         </p:nvSpPr>
         <p:spPr>
           <a:xfrm>
-            <a:off x="8293608" y="6016752"/>
+            <a:off x="8293608" y="5815584"/>
             <a:ext cx="128016" cy="128016"/>
           </a:xfrm>
           <a:prstGeom prst="rect">
@@ -31729,7 +31539,7 @@
         </p:nvSpPr>
         <p:spPr>
           <a:xfrm>
-            <a:off x="8531352" y="5943600"/>
+            <a:off x="8531352" y="5742432"/>
             <a:ext cx="3200400" cy="274320"/>
           </a:xfrm>
           <a:prstGeom prst="rect">
@@ -31782,8 +31592,8 @@
         </p:nvSpPr>
         <p:spPr>
           <a:xfrm>
-            <a:off x="457200" y="6236208"/>
-            <a:ext cx="11247120" cy="292608"/>
+            <a:off x="457200" y="6144768"/>
+            <a:ext cx="9966960" cy="292608"/>
           </a:xfrm>
           <a:prstGeom prst="rect">
             <a:avLst/>
@@ -31841,40 +31651,16 @@
           </a:p>
         </p:txBody>
       </p:sp>
-      <p:pic>
-        <p:nvPicPr>
-          <p:cNvPr id="34" name="Image 0" descr="nsf_ncar_logo_color.png">    </p:cNvPr>
-          <p:cNvPicPr>
-            <a:picLocks noChangeAspect="1"/>
-          </p:cNvPicPr>
-          <p:nvPr/>
-        </p:nvPicPr>
-        <p:blipFill>
-          <a:blip r:embed="rId1"/>
-          <a:stretch>
-            <a:fillRect/>
-          </a:stretch>
-        </p:blipFill>
-        <p:spPr>
-          <a:xfrm>
-            <a:off x="9951415" y="274320"/>
-            <a:ext cx="1874520" cy="512064"/>
-          </a:xfrm>
-          <a:prstGeom prst="rect">
-            <a:avLst/>
-          </a:prstGeom>
-        </p:spPr>
-      </p:pic>
-      <p:sp>
-        <p:nvSpPr>
-          <p:cNvPr id="35" name="Text 32"/>
-          <p:cNvSpPr/>
-          <p:nvPr/>
-        </p:nvSpPr>
-        <p:spPr>
-          <a:xfrm>
-            <a:off x="457200" y="6473952"/>
-            <a:ext cx="7315200" cy="274320"/>
+      <p:sp>
+        <p:nvSpPr>
+          <p:cNvPr id="34" name="Text 32"/>
+          <p:cNvSpPr/>
+          <p:nvPr/>
+        </p:nvSpPr>
+        <p:spPr>
+          <a:xfrm>
+            <a:off x="256032" y="6446520"/>
+            <a:ext cx="365760" cy="274320"/>
           </a:xfrm>
           <a:prstGeom prst="rect">
             <a:avLst/>
@@ -31886,34 +31672,34 @@
           <a:bodyPr wrap="square" lIns="0" tIns="0" rIns="0" bIns="0" rtlCol="0" anchor="ctr"/>
           <a:lstStyle/>
           <a:p>
-            <a:pPr algn="l" indent="0" marL="0">
-              <a:buNone/>
-            </a:pPr>
-            <a:r>
-              <a:rPr lang="en-US" sz="900" dirty="0">
-                <a:solidFill>
-                  <a:srgbClr val="53565A"/>
-                </a:solidFill>
-                <a:latin typeface="Poppins" pitchFamily="34" charset="0"/>
-                <a:ea typeface="Poppins" pitchFamily="34" charset="-122"/>
-                <a:cs typeface="Poppins" pitchFamily="34" charset="-120"/>
-              </a:rPr>
-              <a:t>dsupdt  •  Developer &amp; General Usage Guide</a:t>
-            </a:r>
-            <a:endParaRPr lang="en-US" sz="900" dirty="0"/>
-          </a:p>
-        </p:txBody>
-      </p:sp>
-      <p:sp>
-        <p:nvSpPr>
-          <p:cNvPr id="36" name="Text 33"/>
-          <p:cNvSpPr/>
-          <p:nvPr/>
-        </p:nvSpPr>
-        <p:spPr>
-          <a:xfrm>
-            <a:off x="11368735" y="6473952"/>
-            <a:ext cx="365760" cy="274320"/>
+            <a:pPr indent="0" marL="0">
+              <a:buNone/>
+            </a:pPr>
+            <a:r>
+              <a:rPr lang="en-US" sz="950" b="1" dirty="0">
+                <a:solidFill>
+                  <a:srgbClr val="00357A"/>
+                </a:solidFill>
+                <a:latin typeface="Poppins" pitchFamily="34" charset="0"/>
+                <a:ea typeface="Poppins" pitchFamily="34" charset="-122"/>
+                <a:cs typeface="Poppins" pitchFamily="34" charset="-120"/>
+              </a:rPr>
+              <a:t>21</a:t>
+            </a:r>
+            <a:endParaRPr lang="en-US" sz="950" dirty="0"/>
+          </a:p>
+        </p:txBody>
+      </p:sp>
+      <p:sp>
+        <p:nvSpPr>
+          <p:cNvPr id="35" name="Text 33"/>
+          <p:cNvSpPr/>
+          <p:nvPr/>
+        </p:nvSpPr>
+        <p:spPr>
+          <a:xfrm>
+            <a:off x="786384" y="6446520"/>
+            <a:ext cx="5486400" cy="274320"/>
           </a:xfrm>
           <a:prstGeom prst="rect">
             <a:avLst/>
@@ -31925,21 +31711,21 @@
           <a:bodyPr wrap="square" lIns="0" tIns="0" rIns="0" bIns="0" rtlCol="0" anchor="ctr"/>
           <a:lstStyle/>
           <a:p>
-            <a:pPr algn="r" indent="0" marL="0">
-              <a:buNone/>
-            </a:pPr>
-            <a:r>
-              <a:rPr lang="en-US" sz="900" dirty="0">
-                <a:solidFill>
-                  <a:srgbClr val="53565A"/>
-                </a:solidFill>
-                <a:latin typeface="Poppins" pitchFamily="34" charset="0"/>
-                <a:ea typeface="Poppins" pitchFamily="34" charset="-122"/>
-                <a:cs typeface="Poppins" pitchFamily="34" charset="-120"/>
-              </a:rPr>
-              <a:t>21</a:t>
-            </a:r>
-            <a:endParaRPr lang="en-US" sz="900" dirty="0"/>
+            <a:pPr indent="0" marL="0">
+              <a:buNone/>
+            </a:pPr>
+            <a:r>
+              <a:rPr lang="en-US" sz="950" b="1" dirty="0">
+                <a:solidFill>
+                  <a:srgbClr val="00357A"/>
+                </a:solidFill>
+                <a:latin typeface="Poppins" pitchFamily="34" charset="0"/>
+                <a:ea typeface="Poppins" pitchFamily="34" charset="-122"/>
+                <a:cs typeface="Poppins" pitchFamily="34" charset="-120"/>
+              </a:rPr>
+              <a:t>DSUPDT  •  DEVELOPER &amp; GENERAL USAGE GUIDE</a:t>
+            </a:r>
+            <a:endParaRPr lang="en-US" sz="950" dirty="0"/>
           </a:p>
         </p:txBody>
       </p:sp>
@@ -31954,13 +31740,6 @@
 <file path=ppt/slides/slide23.xml><?xml version="1.0" encoding="utf-8"?>
 <p:sld xmlns:a="http://schemas.openxmlformats.org/drawingml/2006/main" xmlns:r="http://schemas.openxmlformats.org/officeDocument/2006/relationships" xmlns:p="http://schemas.openxmlformats.org/presentationml/2006/main">
   <p:cSld name="Slide 23">
-    <p:bg>
-      <p:bgPr>
-        <a:solidFill>
-          <a:srgbClr val="FFFFFF"/>
-        </a:solidFill>
-      </p:bgPr>
-    </p:bg>
     <p:spTree>
       <p:nvGrpSpPr>
         <p:cNvPr id="1" name=""/>
@@ -34401,8 +34180,8 @@
         </p:nvSpPr>
         <p:spPr>
           <a:xfrm>
-            <a:off x="457200" y="6263640"/>
-            <a:ext cx="11247120" cy="274320"/>
+            <a:off x="457200" y="5779008"/>
+            <a:ext cx="9966960" cy="274320"/>
           </a:xfrm>
           <a:prstGeom prst="rect">
             <a:avLst/>
@@ -34432,40 +34211,16 @@
           </a:p>
         </p:txBody>
       </p:sp>
-      <p:pic>
-        <p:nvPicPr>
-          <p:cNvPr id="77" name="Image 0" descr="nsf_ncar_logo_color.png">    </p:cNvPr>
-          <p:cNvPicPr>
-            <a:picLocks noChangeAspect="1"/>
-          </p:cNvPicPr>
-          <p:nvPr/>
-        </p:nvPicPr>
-        <p:blipFill>
-          <a:blip r:embed="rId1"/>
-          <a:stretch>
-            <a:fillRect/>
-          </a:stretch>
-        </p:blipFill>
-        <p:spPr>
-          <a:xfrm>
-            <a:off x="9951415" y="274320"/>
-            <a:ext cx="1874520" cy="512064"/>
-          </a:xfrm>
-          <a:prstGeom prst="rect">
-            <a:avLst/>
-          </a:prstGeom>
-        </p:spPr>
-      </p:pic>
-      <p:sp>
-        <p:nvSpPr>
-          <p:cNvPr id="78" name="Text 75"/>
-          <p:cNvSpPr/>
-          <p:nvPr/>
-        </p:nvSpPr>
-        <p:spPr>
-          <a:xfrm>
-            <a:off x="457200" y="6473952"/>
-            <a:ext cx="7315200" cy="274320"/>
+      <p:sp>
+        <p:nvSpPr>
+          <p:cNvPr id="77" name="Text 75"/>
+          <p:cNvSpPr/>
+          <p:nvPr/>
+        </p:nvSpPr>
+        <p:spPr>
+          <a:xfrm>
+            <a:off x="256032" y="6446520"/>
+            <a:ext cx="365760" cy="274320"/>
           </a:xfrm>
           <a:prstGeom prst="rect">
             <a:avLst/>
@@ -34477,34 +34232,34 @@
           <a:bodyPr wrap="square" lIns="0" tIns="0" rIns="0" bIns="0" rtlCol="0" anchor="ctr"/>
           <a:lstStyle/>
           <a:p>
-            <a:pPr algn="l" indent="0" marL="0">
-              <a:buNone/>
-            </a:pPr>
-            <a:r>
-              <a:rPr lang="en-US" sz="900" dirty="0">
-                <a:solidFill>
-                  <a:srgbClr val="53565A"/>
-                </a:solidFill>
-                <a:latin typeface="Poppins" pitchFamily="34" charset="0"/>
-                <a:ea typeface="Poppins" pitchFamily="34" charset="-122"/>
-                <a:cs typeface="Poppins" pitchFamily="34" charset="-120"/>
-              </a:rPr>
-              <a:t>dsupdt  •  Developer &amp; General Usage Guide</a:t>
-            </a:r>
-            <a:endParaRPr lang="en-US" sz="900" dirty="0"/>
-          </a:p>
-        </p:txBody>
-      </p:sp>
-      <p:sp>
-        <p:nvSpPr>
-          <p:cNvPr id="79" name="Text 76"/>
-          <p:cNvSpPr/>
-          <p:nvPr/>
-        </p:nvSpPr>
-        <p:spPr>
-          <a:xfrm>
-            <a:off x="11368735" y="6473952"/>
-            <a:ext cx="365760" cy="274320"/>
+            <a:pPr indent="0" marL="0">
+              <a:buNone/>
+            </a:pPr>
+            <a:r>
+              <a:rPr lang="en-US" sz="950" b="1" dirty="0">
+                <a:solidFill>
+                  <a:srgbClr val="00357A"/>
+                </a:solidFill>
+                <a:latin typeface="Poppins" pitchFamily="34" charset="0"/>
+                <a:ea typeface="Poppins" pitchFamily="34" charset="-122"/>
+                <a:cs typeface="Poppins" pitchFamily="34" charset="-120"/>
+              </a:rPr>
+              <a:t>22</a:t>
+            </a:r>
+            <a:endParaRPr lang="en-US" sz="950" dirty="0"/>
+          </a:p>
+        </p:txBody>
+      </p:sp>
+      <p:sp>
+        <p:nvSpPr>
+          <p:cNvPr id="78" name="Text 76"/>
+          <p:cNvSpPr/>
+          <p:nvPr/>
+        </p:nvSpPr>
+        <p:spPr>
+          <a:xfrm>
+            <a:off x="786384" y="6446520"/>
+            <a:ext cx="5486400" cy="274320"/>
           </a:xfrm>
           <a:prstGeom prst="rect">
             <a:avLst/>
@@ -34516,21 +34271,21 @@
           <a:bodyPr wrap="square" lIns="0" tIns="0" rIns="0" bIns="0" rtlCol="0" anchor="ctr"/>
           <a:lstStyle/>
           <a:p>
-            <a:pPr algn="r" indent="0" marL="0">
-              <a:buNone/>
-            </a:pPr>
-            <a:r>
-              <a:rPr lang="en-US" sz="900" dirty="0">
-                <a:solidFill>
-                  <a:srgbClr val="53565A"/>
-                </a:solidFill>
-                <a:latin typeface="Poppins" pitchFamily="34" charset="0"/>
-                <a:ea typeface="Poppins" pitchFamily="34" charset="-122"/>
-                <a:cs typeface="Poppins" pitchFamily="34" charset="-120"/>
-              </a:rPr>
-              <a:t>22</a:t>
-            </a:r>
-            <a:endParaRPr lang="en-US" sz="900" dirty="0"/>
+            <a:pPr indent="0" marL="0">
+              <a:buNone/>
+            </a:pPr>
+            <a:r>
+              <a:rPr lang="en-US" sz="950" b="1" dirty="0">
+                <a:solidFill>
+                  <a:srgbClr val="00357A"/>
+                </a:solidFill>
+                <a:latin typeface="Poppins" pitchFamily="34" charset="0"/>
+                <a:ea typeface="Poppins" pitchFamily="34" charset="-122"/>
+                <a:cs typeface="Poppins" pitchFamily="34" charset="-120"/>
+              </a:rPr>
+              <a:t>DSUPDT  •  DEVELOPER &amp; GENERAL USAGE GUIDE</a:t>
+            </a:r>
+            <a:endParaRPr lang="en-US" sz="950" dirty="0"/>
           </a:p>
         </p:txBody>
       </p:sp>
@@ -34545,13 +34300,6 @@
 <file path=ppt/slides/slide24.xml><?xml version="1.0" encoding="utf-8"?>
 <p:sld xmlns:a="http://schemas.openxmlformats.org/drawingml/2006/main" xmlns:r="http://schemas.openxmlformats.org/officeDocument/2006/relationships" xmlns:p="http://schemas.openxmlformats.org/presentationml/2006/main">
   <p:cSld name="Slide 24">
-    <p:bg>
-      <p:bgPr>
-        <a:solidFill>
-          <a:srgbClr val="FFFFFF"/>
-        </a:solidFill>
-      </p:bgPr>
-    </p:bg>
     <p:spTree>
       <p:nvGrpSpPr>
         <p:cNvPr id="1" name=""/>
@@ -35688,40 +35436,16 @@
           </a:p>
         </p:txBody>
       </p:sp>
-      <p:pic>
-        <p:nvPicPr>
-          <p:cNvPr id="34" name="Image 0" descr="nsf_ncar_logo_color.png">    </p:cNvPr>
-          <p:cNvPicPr>
-            <a:picLocks noChangeAspect="1"/>
-          </p:cNvPicPr>
-          <p:nvPr/>
-        </p:nvPicPr>
-        <p:blipFill>
-          <a:blip r:embed="rId1"/>
-          <a:stretch>
-            <a:fillRect/>
-          </a:stretch>
-        </p:blipFill>
-        <p:spPr>
-          <a:xfrm>
-            <a:off x="9951415" y="274320"/>
-            <a:ext cx="1874520" cy="512064"/>
-          </a:xfrm>
-          <a:prstGeom prst="rect">
-            <a:avLst/>
-          </a:prstGeom>
-        </p:spPr>
-      </p:pic>
-      <p:sp>
-        <p:nvSpPr>
-          <p:cNvPr id="35" name="Text 32"/>
-          <p:cNvSpPr/>
-          <p:nvPr/>
-        </p:nvSpPr>
-        <p:spPr>
-          <a:xfrm>
-            <a:off x="457200" y="6473952"/>
-            <a:ext cx="7315200" cy="274320"/>
+      <p:sp>
+        <p:nvSpPr>
+          <p:cNvPr id="34" name="Text 32"/>
+          <p:cNvSpPr/>
+          <p:nvPr/>
+        </p:nvSpPr>
+        <p:spPr>
+          <a:xfrm>
+            <a:off x="256032" y="6446520"/>
+            <a:ext cx="365760" cy="274320"/>
           </a:xfrm>
           <a:prstGeom prst="rect">
             <a:avLst/>
@@ -35733,34 +35457,34 @@
           <a:bodyPr wrap="square" lIns="0" tIns="0" rIns="0" bIns="0" rtlCol="0" anchor="ctr"/>
           <a:lstStyle/>
           <a:p>
-            <a:pPr algn="l" indent="0" marL="0">
-              <a:buNone/>
-            </a:pPr>
-            <a:r>
-              <a:rPr lang="en-US" sz="900" dirty="0">
-                <a:solidFill>
-                  <a:srgbClr val="53565A"/>
-                </a:solidFill>
-                <a:latin typeface="Poppins" pitchFamily="34" charset="0"/>
-                <a:ea typeface="Poppins" pitchFamily="34" charset="-122"/>
-                <a:cs typeface="Poppins" pitchFamily="34" charset="-120"/>
-              </a:rPr>
-              <a:t>dsupdt  •  Developer &amp; General Usage Guide</a:t>
-            </a:r>
-            <a:endParaRPr lang="en-US" sz="900" dirty="0"/>
-          </a:p>
-        </p:txBody>
-      </p:sp>
-      <p:sp>
-        <p:nvSpPr>
-          <p:cNvPr id="36" name="Text 33"/>
-          <p:cNvSpPr/>
-          <p:nvPr/>
-        </p:nvSpPr>
-        <p:spPr>
-          <a:xfrm>
-            <a:off x="11368735" y="6473952"/>
-            <a:ext cx="365760" cy="274320"/>
+            <a:pPr indent="0" marL="0">
+              <a:buNone/>
+            </a:pPr>
+            <a:r>
+              <a:rPr lang="en-US" sz="950" b="1" dirty="0">
+                <a:solidFill>
+                  <a:srgbClr val="00357A"/>
+                </a:solidFill>
+                <a:latin typeface="Poppins" pitchFamily="34" charset="0"/>
+                <a:ea typeface="Poppins" pitchFamily="34" charset="-122"/>
+                <a:cs typeface="Poppins" pitchFamily="34" charset="-120"/>
+              </a:rPr>
+              <a:t>23</a:t>
+            </a:r>
+            <a:endParaRPr lang="en-US" sz="950" dirty="0"/>
+          </a:p>
+        </p:txBody>
+      </p:sp>
+      <p:sp>
+        <p:nvSpPr>
+          <p:cNvPr id="35" name="Text 33"/>
+          <p:cNvSpPr/>
+          <p:nvPr/>
+        </p:nvSpPr>
+        <p:spPr>
+          <a:xfrm>
+            <a:off x="786384" y="6446520"/>
+            <a:ext cx="5486400" cy="274320"/>
           </a:xfrm>
           <a:prstGeom prst="rect">
             <a:avLst/>
@@ -35772,21 +35496,21 @@
           <a:bodyPr wrap="square" lIns="0" tIns="0" rIns="0" bIns="0" rtlCol="0" anchor="ctr"/>
           <a:lstStyle/>
           <a:p>
-            <a:pPr algn="r" indent="0" marL="0">
-              <a:buNone/>
-            </a:pPr>
-            <a:r>
-              <a:rPr lang="en-US" sz="900" dirty="0">
-                <a:solidFill>
-                  <a:srgbClr val="53565A"/>
-                </a:solidFill>
-                <a:latin typeface="Poppins" pitchFamily="34" charset="0"/>
-                <a:ea typeface="Poppins" pitchFamily="34" charset="-122"/>
-                <a:cs typeface="Poppins" pitchFamily="34" charset="-120"/>
-              </a:rPr>
-              <a:t>23</a:t>
-            </a:r>
-            <a:endParaRPr lang="en-US" sz="900" dirty="0"/>
+            <a:pPr indent="0" marL="0">
+              <a:buNone/>
+            </a:pPr>
+            <a:r>
+              <a:rPr lang="en-US" sz="950" b="1" dirty="0">
+                <a:solidFill>
+                  <a:srgbClr val="00357A"/>
+                </a:solidFill>
+                <a:latin typeface="Poppins" pitchFamily="34" charset="0"/>
+                <a:ea typeface="Poppins" pitchFamily="34" charset="-122"/>
+                <a:cs typeface="Poppins" pitchFamily="34" charset="-120"/>
+              </a:rPr>
+              <a:t>DSUPDT  •  DEVELOPER &amp; GENERAL USAGE GUIDE</a:t>
+            </a:r>
+            <a:endParaRPr lang="en-US" sz="950" dirty="0"/>
           </a:p>
         </p:txBody>
       </p:sp>
@@ -35801,13 +35525,6 @@
 <file path=ppt/slides/slide25.xml><?xml version="1.0" encoding="utf-8"?>
 <p:sld xmlns:a="http://schemas.openxmlformats.org/drawingml/2006/main" xmlns:r="http://schemas.openxmlformats.org/officeDocument/2006/relationships" xmlns:p="http://schemas.openxmlformats.org/presentationml/2006/main">
   <p:cSld name="Slide 25">
-    <p:bg>
-      <p:bgPr>
-        <a:solidFill>
-          <a:srgbClr val="FFFFFF"/>
-        </a:solidFill>
-      </p:bgPr>
-    </p:bg>
     <p:spTree>
       <p:nvGrpSpPr>
         <p:cNvPr id="1" name=""/>
@@ -36872,40 +36589,16 @@
           </a:p>
         </p:txBody>
       </p:sp>
-      <p:pic>
-        <p:nvPicPr>
-          <p:cNvPr id="32" name="Image 0" descr="nsf_ncar_logo_color.png">    </p:cNvPr>
-          <p:cNvPicPr>
-            <a:picLocks noChangeAspect="1"/>
-          </p:cNvPicPr>
-          <p:nvPr/>
-        </p:nvPicPr>
-        <p:blipFill>
-          <a:blip r:embed="rId1"/>
-          <a:stretch>
-            <a:fillRect/>
-          </a:stretch>
-        </p:blipFill>
-        <p:spPr>
-          <a:xfrm>
-            <a:off x="9951415" y="274320"/>
-            <a:ext cx="1874520" cy="512064"/>
-          </a:xfrm>
-          <a:prstGeom prst="rect">
-            <a:avLst/>
-          </a:prstGeom>
-        </p:spPr>
-      </p:pic>
-      <p:sp>
-        <p:nvSpPr>
-          <p:cNvPr id="33" name="Text 30"/>
-          <p:cNvSpPr/>
-          <p:nvPr/>
-        </p:nvSpPr>
-        <p:spPr>
-          <a:xfrm>
-            <a:off x="457200" y="6473952"/>
-            <a:ext cx="7315200" cy="274320"/>
+      <p:sp>
+        <p:nvSpPr>
+          <p:cNvPr id="32" name="Text 30"/>
+          <p:cNvSpPr/>
+          <p:nvPr/>
+        </p:nvSpPr>
+        <p:spPr>
+          <a:xfrm>
+            <a:off x="256032" y="6446520"/>
+            <a:ext cx="365760" cy="274320"/>
           </a:xfrm>
           <a:prstGeom prst="rect">
             <a:avLst/>
@@ -36917,34 +36610,34 @@
           <a:bodyPr wrap="square" lIns="0" tIns="0" rIns="0" bIns="0" rtlCol="0" anchor="ctr"/>
           <a:lstStyle/>
           <a:p>
-            <a:pPr algn="l" indent="0" marL="0">
-              <a:buNone/>
-            </a:pPr>
-            <a:r>
-              <a:rPr lang="en-US" sz="900" dirty="0">
-                <a:solidFill>
-                  <a:srgbClr val="53565A"/>
-                </a:solidFill>
-                <a:latin typeface="Poppins" pitchFamily="34" charset="0"/>
-                <a:ea typeface="Poppins" pitchFamily="34" charset="-122"/>
-                <a:cs typeface="Poppins" pitchFamily="34" charset="-120"/>
-              </a:rPr>
-              <a:t>dsupdt  •  Developer &amp; General Usage Guide</a:t>
-            </a:r>
-            <a:endParaRPr lang="en-US" sz="900" dirty="0"/>
-          </a:p>
-        </p:txBody>
-      </p:sp>
-      <p:sp>
-        <p:nvSpPr>
-          <p:cNvPr id="34" name="Text 31"/>
-          <p:cNvSpPr/>
-          <p:nvPr/>
-        </p:nvSpPr>
-        <p:spPr>
-          <a:xfrm>
-            <a:off x="11368735" y="6473952"/>
-            <a:ext cx="365760" cy="274320"/>
+            <a:pPr indent="0" marL="0">
+              <a:buNone/>
+            </a:pPr>
+            <a:r>
+              <a:rPr lang="en-US" sz="950" b="1" dirty="0">
+                <a:solidFill>
+                  <a:srgbClr val="00357A"/>
+                </a:solidFill>
+                <a:latin typeface="Poppins" pitchFamily="34" charset="0"/>
+                <a:ea typeface="Poppins" pitchFamily="34" charset="-122"/>
+                <a:cs typeface="Poppins" pitchFamily="34" charset="-120"/>
+              </a:rPr>
+              <a:t>24</a:t>
+            </a:r>
+            <a:endParaRPr lang="en-US" sz="950" dirty="0"/>
+          </a:p>
+        </p:txBody>
+      </p:sp>
+      <p:sp>
+        <p:nvSpPr>
+          <p:cNvPr id="33" name="Text 31"/>
+          <p:cNvSpPr/>
+          <p:nvPr/>
+        </p:nvSpPr>
+        <p:spPr>
+          <a:xfrm>
+            <a:off x="786384" y="6446520"/>
+            <a:ext cx="5486400" cy="274320"/>
           </a:xfrm>
           <a:prstGeom prst="rect">
             <a:avLst/>
@@ -36956,21 +36649,21 @@
           <a:bodyPr wrap="square" lIns="0" tIns="0" rIns="0" bIns="0" rtlCol="0" anchor="ctr"/>
           <a:lstStyle/>
           <a:p>
-            <a:pPr algn="r" indent="0" marL="0">
-              <a:buNone/>
-            </a:pPr>
-            <a:r>
-              <a:rPr lang="en-US" sz="900" dirty="0">
-                <a:solidFill>
-                  <a:srgbClr val="53565A"/>
-                </a:solidFill>
-                <a:latin typeface="Poppins" pitchFamily="34" charset="0"/>
-                <a:ea typeface="Poppins" pitchFamily="34" charset="-122"/>
-                <a:cs typeface="Poppins" pitchFamily="34" charset="-120"/>
-              </a:rPr>
-              <a:t>24</a:t>
-            </a:r>
-            <a:endParaRPr lang="en-US" sz="900" dirty="0"/>
+            <a:pPr indent="0" marL="0">
+              <a:buNone/>
+            </a:pPr>
+            <a:r>
+              <a:rPr lang="en-US" sz="950" b="1" dirty="0">
+                <a:solidFill>
+                  <a:srgbClr val="00357A"/>
+                </a:solidFill>
+                <a:latin typeface="Poppins" pitchFamily="34" charset="0"/>
+                <a:ea typeface="Poppins" pitchFamily="34" charset="-122"/>
+                <a:cs typeface="Poppins" pitchFamily="34" charset="-120"/>
+              </a:rPr>
+              <a:t>DSUPDT  •  DEVELOPER &amp; GENERAL USAGE GUIDE</a:t>
+            </a:r>
+            <a:endParaRPr lang="en-US" sz="950" dirty="0"/>
           </a:p>
         </p:txBody>
       </p:sp>
@@ -36988,7 +36681,7 @@
     <p:bg>
       <p:bgPr>
         <a:solidFill>
-          <a:srgbClr val="011837"/>
+          <a:srgbClr val="0057C2"/>
         </a:solidFill>
       </p:bgPr>
     </p:bg>
@@ -37008,7 +36701,7 @@
       </p:grpSpPr>
       <p:pic>
         <p:nvPicPr>
-          <p:cNvPr id="2" name="Image 0" descr="nsf_ncar_logo_white.png">    </p:cNvPr>
+          <p:cNvPr id="2" name="Image 0" descr="interior_bg.png">    </p:cNvPr>
           <p:cNvPicPr>
             <a:picLocks noChangeAspect="1"/>
           </p:cNvPicPr>
@@ -37022,8 +36715,8 @@
         </p:blipFill>
         <p:spPr>
           <a:xfrm>
-            <a:off x="9951415" y="274320"/>
-            <a:ext cx="1874520" cy="512064"/>
+            <a:off x="0" y="0"/>
+            <a:ext cx="12191695" cy="6858000"/>
           </a:xfrm>
           <a:prstGeom prst="rect">
             <a:avLst/>
@@ -37046,31 +36739,95 @@
         </p:blipFill>
         <p:spPr>
           <a:xfrm>
-            <a:off x="10088575" y="896112"/>
-            <a:ext cx="1737360" cy="877824"/>
+            <a:off x="612648" y="365760"/>
+            <a:ext cx="1024128" cy="521208"/>
           </a:xfrm>
           <a:prstGeom prst="rect">
             <a:avLst/>
           </a:prstGeom>
         </p:spPr>
       </p:pic>
-      <p:sp>
-        <p:nvSpPr>
-          <p:cNvPr id="4" name="Shape 0"/>
-          <p:cNvSpPr/>
-          <p:nvPr/>
-        </p:nvSpPr>
-        <p:spPr>
-          <a:xfrm>
-            <a:off x="9235440" y="4297680"/>
-            <a:ext cx="2743200" cy="2743200"/>
-          </a:xfrm>
-          <a:prstGeom prst="ellipse">
-            <a:avLst/>
-          </a:prstGeom>
-          <a:ln w="12700">
+      <p:pic>
+        <p:nvPicPr>
+          <p:cNvPr id="4" name="Image 2" descr="nsf_ncar_logo_white.png">    </p:cNvPr>
+          <p:cNvPicPr>
+            <a:picLocks noChangeAspect="1"/>
+          </p:cNvPicPr>
+          <p:nvPr/>
+        </p:nvPicPr>
+        <p:blipFill>
+          <a:blip r:embed="rId3"/>
+          <a:stretch>
+            <a:fillRect/>
+          </a:stretch>
+        </p:blipFill>
+        <p:spPr>
+          <a:xfrm>
+            <a:off x="9683496" y="393192"/>
+            <a:ext cx="1892808" cy="521208"/>
+          </a:xfrm>
+          <a:prstGeom prst="rect">
+            <a:avLst/>
+          </a:prstGeom>
+        </p:spPr>
+      </p:pic>
+      <p:sp>
+        <p:nvSpPr>
+          <p:cNvPr id="5" name="Text 0"/>
+          <p:cNvSpPr/>
+          <p:nvPr/>
+        </p:nvSpPr>
+        <p:spPr>
+          <a:xfrm>
+            <a:off x="256032" y="6446520"/>
+            <a:ext cx="365760" cy="274320"/>
+          </a:xfrm>
+          <a:prstGeom prst="rect">
+            <a:avLst/>
+          </a:prstGeom>
+          <a:noFill/>
+          <a:ln/>
+        </p:spPr>
+        <p:txBody>
+          <a:bodyPr wrap="square" lIns="0" tIns="0" rIns="0" bIns="0" rtlCol="0" anchor="ctr"/>
+          <a:lstStyle/>
+          <a:p>
+            <a:pPr indent="0" marL="0">
+              <a:buNone/>
+            </a:pPr>
+            <a:r>
+              <a:rPr lang="en-US" sz="950" b="1" dirty="0">
+                <a:solidFill>
+                  <a:srgbClr val="FFFFFF"/>
+                </a:solidFill>
+                <a:latin typeface="Poppins" pitchFamily="34" charset="0"/>
+                <a:ea typeface="Poppins" pitchFamily="34" charset="-122"/>
+                <a:cs typeface="Poppins" pitchFamily="34" charset="-120"/>
+              </a:rPr>
+              <a:t>25</a:t>
+            </a:r>
+            <a:endParaRPr lang="en-US" sz="950" dirty="0"/>
+          </a:p>
+        </p:txBody>
+      </p:sp>
+      <p:sp>
+        <p:nvSpPr>
+          <p:cNvPr id="6" name="Shape 1"/>
+          <p:cNvSpPr/>
+          <p:nvPr/>
+        </p:nvSpPr>
+        <p:spPr>
+          <a:xfrm>
+            <a:off x="612648" y="6437376"/>
+            <a:ext cx="0" cy="201168"/>
+          </a:xfrm>
+          <a:prstGeom prst="line">
+            <a:avLst/>
+          </a:prstGeom>
+          <a:noFill/>
+          <a:ln w="9525">
             <a:solidFill>
-              <a:srgbClr val="2C4E7D"/>
+              <a:srgbClr val="FFFFFF"/>
             </a:solidFill>
             <a:prstDash val="solid"/>
           </a:ln>
@@ -37078,41 +36835,589 @@
       </p:sp>
       <p:sp>
         <p:nvSpPr>
-          <p:cNvPr id="5" name="Shape 1"/>
-          <p:cNvSpPr/>
-          <p:nvPr/>
-        </p:nvSpPr>
-        <p:spPr>
-          <a:xfrm>
-            <a:off x="9601200" y="4663440"/>
-            <a:ext cx="2011680" cy="2011680"/>
+          <p:cNvPr id="7" name="Text 2"/>
+          <p:cNvSpPr/>
+          <p:nvPr/>
+        </p:nvSpPr>
+        <p:spPr>
+          <a:xfrm>
+            <a:off x="786384" y="6446520"/>
+            <a:ext cx="5486400" cy="274320"/>
+          </a:xfrm>
+          <a:prstGeom prst="rect">
+            <a:avLst/>
+          </a:prstGeom>
+          <a:noFill/>
+          <a:ln/>
+        </p:spPr>
+        <p:txBody>
+          <a:bodyPr wrap="square" lIns="0" tIns="0" rIns="0" bIns="0" rtlCol="0" anchor="ctr"/>
+          <a:lstStyle/>
+          <a:p>
+            <a:pPr indent="0" marL="0">
+              <a:buNone/>
+            </a:pPr>
+            <a:r>
+              <a:rPr lang="en-US" sz="950" b="1" dirty="0">
+                <a:solidFill>
+                  <a:srgbClr val="FFFFFF"/>
+                </a:solidFill>
+                <a:latin typeface="Poppins" pitchFamily="34" charset="0"/>
+                <a:ea typeface="Poppins" pitchFamily="34" charset="-122"/>
+                <a:cs typeface="Poppins" pitchFamily="34" charset="-120"/>
+              </a:rPr>
+              <a:t>DSUPDT  •  DEVELOPER &amp; GENERAL USAGE GUIDE</a:t>
+            </a:r>
+            <a:endParaRPr lang="en-US" sz="950" dirty="0"/>
+          </a:p>
+        </p:txBody>
+      </p:sp>
+      <p:sp>
+        <p:nvSpPr>
+          <p:cNvPr id="8" name="Text 3"/>
+          <p:cNvSpPr/>
+          <p:nvPr/>
+        </p:nvSpPr>
+        <p:spPr>
+          <a:xfrm>
+            <a:off x="1527048" y="1188720"/>
+            <a:ext cx="7315200" cy="320040"/>
+          </a:xfrm>
+          <a:prstGeom prst="rect">
+            <a:avLst/>
+          </a:prstGeom>
+          <a:noFill/>
+          <a:ln/>
+        </p:spPr>
+        <p:txBody>
+          <a:bodyPr wrap="square" lIns="0" tIns="0" rIns="0" bIns="0" rtlCol="0" anchor="ctr"/>
+          <a:lstStyle/>
+          <a:p>
+            <a:pPr indent="0" marL="0">
+              <a:buNone/>
+            </a:pPr>
+            <a:r>
+              <a:rPr lang="en-US" sz="1300" b="1" spc="200" kern="0" dirty="0">
+                <a:solidFill>
+                  <a:srgbClr val="42C0FF"/>
+                </a:solidFill>
+                <a:latin typeface="Poppins" pitchFamily="34" charset="0"/>
+                <a:ea typeface="Poppins" pitchFamily="34" charset="-122"/>
+                <a:cs typeface="Poppins" pitchFamily="34" charset="-120"/>
+              </a:rPr>
+              <a:t>RECAP</a:t>
+            </a:r>
+            <a:endParaRPr lang="en-US" sz="1300" dirty="0"/>
+          </a:p>
+        </p:txBody>
+      </p:sp>
+      <p:sp>
+        <p:nvSpPr>
+          <p:cNvPr id="9" name="Text 4"/>
+          <p:cNvSpPr/>
+          <p:nvPr/>
+        </p:nvSpPr>
+        <p:spPr>
+          <a:xfrm>
+            <a:off x="1527048" y="1554480"/>
+            <a:ext cx="9144000" cy="731520"/>
+          </a:xfrm>
+          <a:prstGeom prst="rect">
+            <a:avLst/>
+          </a:prstGeom>
+          <a:noFill/>
+          <a:ln/>
+        </p:spPr>
+        <p:txBody>
+          <a:bodyPr wrap="square" lIns="0" tIns="0" rIns="0" bIns="0" rtlCol="0" anchor="ctr"/>
+          <a:lstStyle/>
+          <a:p>
+            <a:pPr indent="0" marL="0">
+              <a:buNone/>
+            </a:pPr>
+            <a:r>
+              <a:rPr lang="en-US" sz="4000" b="1" dirty="0">
+                <a:solidFill>
+                  <a:srgbClr val="FFFFFF"/>
+                </a:solidFill>
+                <a:latin typeface="Poppins" pitchFamily="34" charset="0"/>
+                <a:ea typeface="Poppins" pitchFamily="34" charset="-122"/>
+                <a:cs typeface="Poppins" pitchFamily="34" charset="-120"/>
+              </a:rPr>
+              <a:t>From Config to Archive</a:t>
+            </a:r>
+            <a:endParaRPr lang="en-US" sz="4000" dirty="0"/>
+          </a:p>
+        </p:txBody>
+      </p:sp>
+      <p:sp>
+        <p:nvSpPr>
+          <p:cNvPr id="10" name="Shape 5"/>
+          <p:cNvSpPr/>
+          <p:nvPr/>
+        </p:nvSpPr>
+        <p:spPr>
+          <a:xfrm>
+            <a:off x="1527048" y="2606040"/>
+            <a:ext cx="502920" cy="502920"/>
           </a:xfrm>
           <a:prstGeom prst="ellipse">
             <a:avLst/>
           </a:prstGeom>
+          <a:solidFill>
+            <a:srgbClr val="00357A"/>
+          </a:solidFill>
+          <a:ln/>
+        </p:spPr>
+      </p:sp>
+      <p:sp>
+        <p:nvSpPr>
+          <p:cNvPr id="11" name="Text 6"/>
+          <p:cNvSpPr/>
+          <p:nvPr/>
+        </p:nvSpPr>
+        <p:spPr>
+          <a:xfrm>
+            <a:off x="1527048" y="2606040"/>
+            <a:ext cx="502920" cy="502920"/>
+          </a:xfrm>
+          <a:prstGeom prst="rect">
+            <a:avLst/>
+          </a:prstGeom>
+          <a:noFill/>
+          <a:ln/>
+        </p:spPr>
+        <p:txBody>
+          <a:bodyPr wrap="square" lIns="0" tIns="0" rIns="0" bIns="0" rtlCol="0" anchor="ctr"/>
+          <a:lstStyle/>
+          <a:p>
+            <a:pPr algn="ctr" indent="0" marL="0">
+              <a:buNone/>
+            </a:pPr>
+            <a:r>
+              <a:rPr lang="en-US" sz="1800" b="1" dirty="0">
+                <a:solidFill>
+                  <a:srgbClr val="42C0FF"/>
+                </a:solidFill>
+                <a:latin typeface="Poppins" pitchFamily="34" charset="0"/>
+                <a:ea typeface="Poppins" pitchFamily="34" charset="-122"/>
+                <a:cs typeface="Poppins" pitchFamily="34" charset="-120"/>
+              </a:rPr>
+              <a:t>1</a:t>
+            </a:r>
+            <a:endParaRPr lang="en-US" sz="1800" dirty="0"/>
+          </a:p>
+        </p:txBody>
+      </p:sp>
+      <p:sp>
+        <p:nvSpPr>
+          <p:cNvPr id="12" name="Text 7"/>
+          <p:cNvSpPr/>
+          <p:nvPr/>
+        </p:nvSpPr>
+        <p:spPr>
+          <a:xfrm>
+            <a:off x="2212848" y="2606040"/>
+            <a:ext cx="8458200" cy="502920"/>
+          </a:xfrm>
+          <a:prstGeom prst="rect">
+            <a:avLst/>
+          </a:prstGeom>
+          <a:noFill/>
+          <a:ln/>
+        </p:spPr>
+        <p:txBody>
+          <a:bodyPr wrap="square" lIns="0" tIns="0" rIns="0" bIns="0" rtlCol="0" anchor="ctr"/>
+          <a:lstStyle/>
+          <a:p>
+            <a:pPr indent="0" marL="0">
+              <a:buNone/>
+            </a:pPr>
+            <a:r>
+              <a:rPr lang="en-US" sz="1500" b="1" dirty="0">
+                <a:solidFill>
+                  <a:srgbClr val="FFFFFF"/>
+                </a:solidFill>
+                <a:latin typeface="Poppins" pitchFamily="34" charset="0"/>
+                <a:ea typeface="Poppins" pitchFamily="34" charset="-122"/>
+                <a:cs typeface="Poppins" pitchFamily="34" charset="-120"/>
+              </a:rPr>
+              <a:t>Configure  </a:t>
+            </a:r>
+            <a:pPr indent="0" marL="0">
+              <a:buNone/>
+            </a:pPr>
+            <a:r>
+              <a:rPr lang="en-US" sz="1500" dirty="0">
+                <a:solidFill>
+                  <a:srgbClr val="D5E8FA"/>
+                </a:solidFill>
+                <a:latin typeface="Poppins" pitchFamily="34" charset="0"/>
+                <a:ea typeface="Poppins" pitchFamily="34" charset="-122"/>
+                <a:cs typeface="Poppins" pitchFamily="34" charset="-120"/>
+              </a:rPr>
+              <a:t>three record types: control (dcupdt), local (dlupdt), remote (drupdt)</a:t>
+            </a:r>
+            <a:endParaRPr lang="en-US" sz="1500" dirty="0"/>
+          </a:p>
+        </p:txBody>
+      </p:sp>
+      <p:sp>
+        <p:nvSpPr>
+          <p:cNvPr id="13" name="Shape 8"/>
+          <p:cNvSpPr/>
+          <p:nvPr/>
+        </p:nvSpPr>
+        <p:spPr>
+          <a:xfrm>
+            <a:off x="1527048" y="3319272"/>
+            <a:ext cx="502920" cy="502920"/>
+          </a:xfrm>
+          <a:prstGeom prst="ellipse">
+            <a:avLst/>
+          </a:prstGeom>
+          <a:solidFill>
+            <a:srgbClr val="00357A"/>
+          </a:solidFill>
+          <a:ln/>
+        </p:spPr>
+      </p:sp>
+      <p:sp>
+        <p:nvSpPr>
+          <p:cNvPr id="14" name="Text 9"/>
+          <p:cNvSpPr/>
+          <p:nvPr/>
+        </p:nvSpPr>
+        <p:spPr>
+          <a:xfrm>
+            <a:off x="1527048" y="3319272"/>
+            <a:ext cx="502920" cy="502920"/>
+          </a:xfrm>
+          <a:prstGeom prst="rect">
+            <a:avLst/>
+          </a:prstGeom>
+          <a:noFill/>
+          <a:ln/>
+        </p:spPr>
+        <p:txBody>
+          <a:bodyPr wrap="square" lIns="0" tIns="0" rIns="0" bIns="0" rtlCol="0" anchor="ctr"/>
+          <a:lstStyle/>
+          <a:p>
+            <a:pPr algn="ctr" indent="0" marL="0">
+              <a:buNone/>
+            </a:pPr>
+            <a:r>
+              <a:rPr lang="en-US" sz="1800" b="1" dirty="0">
+                <a:solidFill>
+                  <a:srgbClr val="42C0FF"/>
+                </a:solidFill>
+                <a:latin typeface="Poppins" pitchFamily="34" charset="0"/>
+                <a:ea typeface="Poppins" pitchFamily="34" charset="-122"/>
+                <a:cs typeface="Poppins" pitchFamily="34" charset="-120"/>
+              </a:rPr>
+              <a:t>2</a:t>
+            </a:r>
+            <a:endParaRPr lang="en-US" sz="1800" dirty="0"/>
+          </a:p>
+        </p:txBody>
+      </p:sp>
+      <p:sp>
+        <p:nvSpPr>
+          <p:cNvPr id="15" name="Text 10"/>
+          <p:cNvSpPr/>
+          <p:nvPr/>
+        </p:nvSpPr>
+        <p:spPr>
+          <a:xfrm>
+            <a:off x="2212848" y="3319272"/>
+            <a:ext cx="8458200" cy="502920"/>
+          </a:xfrm>
+          <a:prstGeom prst="rect">
+            <a:avLst/>
+          </a:prstGeom>
+          <a:noFill/>
+          <a:ln/>
+        </p:spPr>
+        <p:txBody>
+          <a:bodyPr wrap="square" lIns="0" tIns="0" rIns="0" bIns="0" rtlCol="0" anchor="ctr"/>
+          <a:lstStyle/>
+          <a:p>
+            <a:pPr indent="0" marL="0">
+              <a:buNone/>
+            </a:pPr>
+            <a:r>
+              <a:rPr lang="en-US" sz="1500" b="1" dirty="0">
+                <a:solidFill>
+                  <a:srgbClr val="FFFFFF"/>
+                </a:solidFill>
+                <a:latin typeface="Poppins" pitchFamily="34" charset="0"/>
+                <a:ea typeface="Poppins" pitchFamily="34" charset="-122"/>
+                <a:cs typeface="Poppins" pitchFamily="34" charset="-120"/>
+              </a:rPr>
+              <a:t>Run  </a:t>
+            </a:r>
+            <a:pPr indent="0" marL="0">
+              <a:buNone/>
+            </a:pPr>
+            <a:r>
+              <a:rPr lang="en-US" sz="1500" dirty="0">
+                <a:solidFill>
+                  <a:srgbClr val="D5E8FA"/>
+                </a:solidFill>
+                <a:latin typeface="Poppins" pitchFamily="34" charset="0"/>
+                <a:ea typeface="Poppins" pitchFamily="34" charset="-122"/>
+                <a:cs typeface="Poppins" pitchFamily="34" charset="-120"/>
+              </a:rPr>
+              <a:t>-UF drives download → build → archive → clean in one command</a:t>
+            </a:r>
+            <a:endParaRPr lang="en-US" sz="1500" dirty="0"/>
+          </a:p>
+        </p:txBody>
+      </p:sp>
+      <p:sp>
+        <p:nvSpPr>
+          <p:cNvPr id="16" name="Shape 11"/>
+          <p:cNvSpPr/>
+          <p:nvPr/>
+        </p:nvSpPr>
+        <p:spPr>
+          <a:xfrm>
+            <a:off x="1527048" y="4032504"/>
+            <a:ext cx="502920" cy="502920"/>
+          </a:xfrm>
+          <a:prstGeom prst="ellipse">
+            <a:avLst/>
+          </a:prstGeom>
+          <a:solidFill>
+            <a:srgbClr val="00357A"/>
+          </a:solidFill>
+          <a:ln/>
+        </p:spPr>
+      </p:sp>
+      <p:sp>
+        <p:nvSpPr>
+          <p:cNvPr id="17" name="Text 12"/>
+          <p:cNvSpPr/>
+          <p:nvPr/>
+        </p:nvSpPr>
+        <p:spPr>
+          <a:xfrm>
+            <a:off x="1527048" y="4032504"/>
+            <a:ext cx="502920" cy="502920"/>
+          </a:xfrm>
+          <a:prstGeom prst="rect">
+            <a:avLst/>
+          </a:prstGeom>
+          <a:noFill/>
+          <a:ln/>
+        </p:spPr>
+        <p:txBody>
+          <a:bodyPr wrap="square" lIns="0" tIns="0" rIns="0" bIns="0" rtlCol="0" anchor="ctr"/>
+          <a:lstStyle/>
+          <a:p>
+            <a:pPr algn="ctr" indent="0" marL="0">
+              <a:buNone/>
+            </a:pPr>
+            <a:r>
+              <a:rPr lang="en-US" sz="1800" b="1" dirty="0">
+                <a:solidFill>
+                  <a:srgbClr val="42C0FF"/>
+                </a:solidFill>
+                <a:latin typeface="Poppins" pitchFamily="34" charset="0"/>
+                <a:ea typeface="Poppins" pitchFamily="34" charset="-122"/>
+                <a:cs typeface="Poppins" pitchFamily="34" charset="-120"/>
+              </a:rPr>
+              <a:t>3</a:t>
+            </a:r>
+            <a:endParaRPr lang="en-US" sz="1800" dirty="0"/>
+          </a:p>
+        </p:txBody>
+      </p:sp>
+      <p:sp>
+        <p:nvSpPr>
+          <p:cNvPr id="18" name="Text 13"/>
+          <p:cNvSpPr/>
+          <p:nvPr/>
+        </p:nvSpPr>
+        <p:spPr>
+          <a:xfrm>
+            <a:off x="2212848" y="4032504"/>
+            <a:ext cx="8458200" cy="502920"/>
+          </a:xfrm>
+          <a:prstGeom prst="rect">
+            <a:avLst/>
+          </a:prstGeom>
+          <a:noFill/>
+          <a:ln/>
+        </p:spPr>
+        <p:txBody>
+          <a:bodyPr wrap="square" lIns="0" tIns="0" rIns="0" bIns="0" rtlCol="0" anchor="ctr"/>
+          <a:lstStyle/>
+          <a:p>
+            <a:pPr indent="0" marL="0">
+              <a:buNone/>
+            </a:pPr>
+            <a:r>
+              <a:rPr lang="en-US" sz="1500" b="1" dirty="0">
+                <a:solidFill>
+                  <a:srgbClr val="FFFFFF"/>
+                </a:solidFill>
+                <a:latin typeface="Poppins" pitchFamily="34" charset="0"/>
+                <a:ea typeface="Poppins" pitchFamily="34" charset="-122"/>
+                <a:cs typeface="Poppins" pitchFamily="34" charset="-120"/>
+              </a:rPr>
+              <a:t>Automate  </a:t>
+            </a:r>
+            <a:pPr indent="0" marL="0">
+              <a:buNone/>
+            </a:pPr>
+            <a:r>
+              <a:rPr lang="en-US" sz="1500" dirty="0">
+                <a:solidFill>
+                  <a:srgbClr val="D5E8FA"/>
+                </a:solidFill>
+                <a:latin typeface="Poppins" pitchFamily="34" charset="0"/>
+                <a:ea typeface="Poppins" pitchFamily="34" charset="-122"/>
+                <a:cs typeface="Poppins" pitchFamily="34" charset="-120"/>
+              </a:rPr>
+              <a:t>link to a control record; dscheck dispatches, retries, and reports</a:t>
+            </a:r>
+            <a:endParaRPr lang="en-US" sz="1500" dirty="0"/>
+          </a:p>
+        </p:txBody>
+      </p:sp>
+      <p:sp>
+        <p:nvSpPr>
+          <p:cNvPr id="19" name="Shape 14"/>
+          <p:cNvSpPr/>
+          <p:nvPr/>
+        </p:nvSpPr>
+        <p:spPr>
+          <a:xfrm>
+            <a:off x="1527048" y="4745736"/>
+            <a:ext cx="502920" cy="502920"/>
+          </a:xfrm>
+          <a:prstGeom prst="ellipse">
+            <a:avLst/>
+          </a:prstGeom>
+          <a:solidFill>
+            <a:srgbClr val="00357A"/>
+          </a:solidFill>
+          <a:ln/>
+        </p:spPr>
+      </p:sp>
+      <p:sp>
+        <p:nvSpPr>
+          <p:cNvPr id="20" name="Text 15"/>
+          <p:cNvSpPr/>
+          <p:nvPr/>
+        </p:nvSpPr>
+        <p:spPr>
+          <a:xfrm>
+            <a:off x="1527048" y="4745736"/>
+            <a:ext cx="502920" cy="502920"/>
+          </a:xfrm>
+          <a:prstGeom prst="rect">
+            <a:avLst/>
+          </a:prstGeom>
+          <a:noFill/>
+          <a:ln/>
+        </p:spPr>
+        <p:txBody>
+          <a:bodyPr wrap="square" lIns="0" tIns="0" rIns="0" bIns="0" rtlCol="0" anchor="ctr"/>
+          <a:lstStyle/>
+          <a:p>
+            <a:pPr algn="ctr" indent="0" marL="0">
+              <a:buNone/>
+            </a:pPr>
+            <a:r>
+              <a:rPr lang="en-US" sz="1800" b="1" dirty="0">
+                <a:solidFill>
+                  <a:srgbClr val="42C0FF"/>
+                </a:solidFill>
+                <a:latin typeface="Poppins" pitchFamily="34" charset="0"/>
+                <a:ea typeface="Poppins" pitchFamily="34" charset="-122"/>
+                <a:cs typeface="Poppins" pitchFamily="34" charset="-120"/>
+              </a:rPr>
+              <a:t>4</a:t>
+            </a:r>
+            <a:endParaRPr lang="en-US" sz="1800" dirty="0"/>
+          </a:p>
+        </p:txBody>
+      </p:sp>
+      <p:sp>
+        <p:nvSpPr>
+          <p:cNvPr id="21" name="Text 16"/>
+          <p:cNvSpPr/>
+          <p:nvPr/>
+        </p:nvSpPr>
+        <p:spPr>
+          <a:xfrm>
+            <a:off x="2212848" y="4745736"/>
+            <a:ext cx="8458200" cy="502920"/>
+          </a:xfrm>
+          <a:prstGeom prst="rect">
+            <a:avLst/>
+          </a:prstGeom>
+          <a:noFill/>
+          <a:ln/>
+        </p:spPr>
+        <p:txBody>
+          <a:bodyPr wrap="square" lIns="0" tIns="0" rIns="0" bIns="0" rtlCol="0" anchor="ctr"/>
+          <a:lstStyle/>
+          <a:p>
+            <a:pPr indent="0" marL="0">
+              <a:buNone/>
+            </a:pPr>
+            <a:r>
+              <a:rPr lang="en-US" sz="1500" b="1" dirty="0">
+                <a:solidFill>
+                  <a:srgbClr val="FFFFFF"/>
+                </a:solidFill>
+                <a:latin typeface="Poppins" pitchFamily="34" charset="0"/>
+                <a:ea typeface="Poppins" pitchFamily="34" charset="-122"/>
+                <a:cs typeface="Poppins" pitchFamily="34" charset="-120"/>
+              </a:rPr>
+              <a:t>Tune  </a:t>
+            </a:r>
+            <a:pPr indent="0" marL="0">
+              <a:buNone/>
+            </a:pPr>
+            <a:r>
+              <a:rPr lang="en-US" sz="1500" dirty="0">
+                <a:solidFill>
+                  <a:srgbClr val="D5E8FA"/>
+                </a:solidFill>
+                <a:latin typeface="Poppins" pitchFamily="34" charset="0"/>
+                <a:ea typeface="Poppins" pitchFamily="34" charset="-122"/>
+                <a:cs typeface="Poppins" pitchFamily="34" charset="-120"/>
+              </a:rPr>
+              <a:t>patterns, valid interval, parallelism, and email controls per record</a:t>
+            </a:r>
+            <a:endParaRPr lang="en-US" sz="1500" dirty="0"/>
+          </a:p>
+        </p:txBody>
+      </p:sp>
+      <p:sp>
+        <p:nvSpPr>
+          <p:cNvPr id="22" name="Shape 17"/>
+          <p:cNvSpPr/>
+          <p:nvPr/>
+        </p:nvSpPr>
+        <p:spPr>
+          <a:xfrm>
+            <a:off x="1527048" y="5532120"/>
+            <a:ext cx="9144000" cy="685800"/>
+          </a:xfrm>
+          <a:prstGeom prst="roundRect">
+            <a:avLst>
+              <a:gd name="adj" fmla="val 13333"/>
+            </a:avLst>
+          </a:prstGeom>
+          <a:solidFill>
+            <a:srgbClr val="00357A"/>
+          </a:solidFill>
           <a:ln w="12700">
-            <a:solidFill>
-              <a:srgbClr val="2C4E7D"/>
-            </a:solidFill>
-            <a:prstDash val="solid"/>
-          </a:ln>
-        </p:spPr>
-      </p:sp>
-      <p:sp>
-        <p:nvSpPr>
-          <p:cNvPr id="6" name="Shape 2"/>
-          <p:cNvSpPr/>
-          <p:nvPr/>
-        </p:nvSpPr>
-        <p:spPr>
-          <a:xfrm>
-            <a:off x="9966960" y="5029200"/>
-            <a:ext cx="1280160" cy="1280160"/>
-          </a:xfrm>
-          <a:prstGeom prst="ellipse">
-            <a:avLst/>
-          </a:prstGeom>
-          <a:ln w="25400">
             <a:solidFill>
               <a:srgbClr val="42C0FF"/>
             </a:solidFill>
@@ -37122,567 +37427,14 @@
       </p:sp>
       <p:sp>
         <p:nvSpPr>
-          <p:cNvPr id="7" name="Text 3"/>
-          <p:cNvSpPr/>
-          <p:nvPr/>
-        </p:nvSpPr>
-        <p:spPr>
-          <a:xfrm>
-            <a:off x="640080" y="685800"/>
-            <a:ext cx="7315200" cy="365760"/>
-          </a:xfrm>
-          <a:prstGeom prst="rect">
-            <a:avLst/>
-          </a:prstGeom>
-          <a:noFill/>
-          <a:ln/>
-        </p:spPr>
-        <p:txBody>
-          <a:bodyPr wrap="square" lIns="0" tIns="0" rIns="0" bIns="0" rtlCol="0" anchor="ctr"/>
-          <a:lstStyle/>
-          <a:p>
-            <a:pPr indent="0" marL="0">
-              <a:buNone/>
-            </a:pPr>
-            <a:r>
-              <a:rPr lang="en-US" sz="1300" b="1" spc="200" kern="0" dirty="0">
-                <a:solidFill>
-                  <a:srgbClr val="42C0FF"/>
-                </a:solidFill>
-                <a:latin typeface="Poppins" pitchFamily="34" charset="0"/>
-                <a:ea typeface="Poppins" pitchFamily="34" charset="-122"/>
-                <a:cs typeface="Poppins" pitchFamily="34" charset="-120"/>
-              </a:rPr>
-              <a:t>Recap</a:t>
-            </a:r>
-            <a:endParaRPr lang="en-US" sz="1300" dirty="0"/>
-          </a:p>
-        </p:txBody>
-      </p:sp>
-      <p:sp>
-        <p:nvSpPr>
-          <p:cNvPr id="8" name="Text 4"/>
-          <p:cNvSpPr/>
-          <p:nvPr/>
-        </p:nvSpPr>
-        <p:spPr>
-          <a:xfrm>
-            <a:off x="640080" y="1051560"/>
-            <a:ext cx="10058400" cy="731520"/>
-          </a:xfrm>
-          <a:prstGeom prst="rect">
-            <a:avLst/>
-          </a:prstGeom>
-          <a:noFill/>
-          <a:ln/>
-        </p:spPr>
-        <p:txBody>
-          <a:bodyPr wrap="square" lIns="0" tIns="0" rIns="0" bIns="0" rtlCol="0" anchor="ctr"/>
-          <a:lstStyle/>
-          <a:p>
-            <a:pPr indent="0" marL="0">
-              <a:buNone/>
-            </a:pPr>
-            <a:r>
-              <a:rPr lang="en-US" sz="3800" b="1" dirty="0">
-                <a:solidFill>
-                  <a:srgbClr val="FFFFFF"/>
-                </a:solidFill>
-                <a:latin typeface="Poppins" pitchFamily="34" charset="0"/>
-                <a:ea typeface="Poppins" pitchFamily="34" charset="-122"/>
-                <a:cs typeface="Poppins" pitchFamily="34" charset="-120"/>
-              </a:rPr>
-              <a:t>From Config to Archive</a:t>
-            </a:r>
-            <a:endParaRPr lang="en-US" sz="3800" dirty="0"/>
-          </a:p>
-        </p:txBody>
-      </p:sp>
-      <p:sp>
-        <p:nvSpPr>
-          <p:cNvPr id="9" name="Shape 5"/>
-          <p:cNvSpPr/>
-          <p:nvPr/>
-        </p:nvSpPr>
-        <p:spPr>
-          <a:xfrm>
-            <a:off x="640080" y="2103120"/>
-            <a:ext cx="502920" cy="502920"/>
-          </a:xfrm>
-          <a:prstGeom prst="ellipse">
-            <a:avLst/>
-          </a:prstGeom>
-          <a:solidFill>
-            <a:srgbClr val="0057C2"/>
-          </a:solidFill>
-          <a:ln/>
-        </p:spPr>
-      </p:sp>
-      <p:sp>
-        <p:nvSpPr>
-          <p:cNvPr id="10" name="Text 6"/>
-          <p:cNvSpPr/>
-          <p:nvPr/>
-        </p:nvSpPr>
-        <p:spPr>
-          <a:xfrm>
-            <a:off x="640080" y="2103120"/>
-            <a:ext cx="502920" cy="502920"/>
-          </a:xfrm>
-          <a:prstGeom prst="rect">
-            <a:avLst/>
-          </a:prstGeom>
-          <a:noFill/>
-          <a:ln/>
-        </p:spPr>
-        <p:txBody>
-          <a:bodyPr wrap="square" lIns="0" tIns="0" rIns="0" bIns="0" rtlCol="0" anchor="ctr"/>
-          <a:lstStyle/>
-          <a:p>
-            <a:pPr algn="ctr" indent="0" marL="0">
-              <a:buNone/>
-            </a:pPr>
-            <a:r>
-              <a:rPr lang="en-US" sz="1800" b="1" dirty="0">
-                <a:solidFill>
-                  <a:srgbClr val="FFFFFF"/>
-                </a:solidFill>
-                <a:latin typeface="Poppins" pitchFamily="34" charset="0"/>
-                <a:ea typeface="Poppins" pitchFamily="34" charset="-122"/>
-                <a:cs typeface="Poppins" pitchFamily="34" charset="-120"/>
-              </a:rPr>
-              <a:t>1</a:t>
-            </a:r>
-            <a:endParaRPr lang="en-US" sz="1800" dirty="0"/>
-          </a:p>
-        </p:txBody>
-      </p:sp>
-      <p:sp>
-        <p:nvSpPr>
-          <p:cNvPr id="11" name="Text 7"/>
-          <p:cNvSpPr/>
-          <p:nvPr/>
-        </p:nvSpPr>
-        <p:spPr>
-          <a:xfrm>
-            <a:off x="1325880" y="2103120"/>
-            <a:ext cx="8686800" cy="502920"/>
-          </a:xfrm>
-          <a:prstGeom prst="rect">
-            <a:avLst/>
-          </a:prstGeom>
-          <a:noFill/>
-          <a:ln/>
-        </p:spPr>
-        <p:txBody>
-          <a:bodyPr wrap="square" lIns="0" tIns="0" rIns="0" bIns="0" rtlCol="0" anchor="ctr"/>
-          <a:lstStyle/>
-          <a:p>
-            <a:pPr indent="0" marL="0">
-              <a:buNone/>
-            </a:pPr>
-            <a:r>
-              <a:rPr lang="en-US" sz="1500" b="1" dirty="0">
-                <a:solidFill>
-                  <a:srgbClr val="FFFFFF"/>
-                </a:solidFill>
-                <a:latin typeface="Poppins" pitchFamily="34" charset="0"/>
-                <a:ea typeface="Poppins" pitchFamily="34" charset="-122"/>
-                <a:cs typeface="Poppins" pitchFamily="34" charset="-120"/>
-              </a:rPr>
-              <a:t>Configure  </a:t>
-            </a:r>
-            <a:pPr indent="0" marL="0">
-              <a:buNone/>
-            </a:pPr>
-            <a:r>
-              <a:rPr lang="en-US" sz="1500" dirty="0">
-                <a:solidFill>
-                  <a:srgbClr val="C3D7EE"/>
-                </a:solidFill>
-                <a:latin typeface="Poppins" pitchFamily="34" charset="0"/>
-                <a:ea typeface="Poppins" pitchFamily="34" charset="-122"/>
-                <a:cs typeface="Poppins" pitchFamily="34" charset="-120"/>
-              </a:rPr>
-              <a:t>three record types: control (dcupdt), local (dlupdt), remote (drupdt)</a:t>
-            </a:r>
-            <a:endParaRPr lang="en-US" sz="1500" dirty="0"/>
-          </a:p>
-        </p:txBody>
-      </p:sp>
-      <p:sp>
-        <p:nvSpPr>
-          <p:cNvPr id="12" name="Shape 8"/>
-          <p:cNvSpPr/>
-          <p:nvPr/>
-        </p:nvSpPr>
-        <p:spPr>
-          <a:xfrm>
-            <a:off x="640080" y="2816352"/>
-            <a:ext cx="502920" cy="502920"/>
-          </a:xfrm>
-          <a:prstGeom prst="ellipse">
-            <a:avLst/>
-          </a:prstGeom>
-          <a:solidFill>
-            <a:srgbClr val="0092DB"/>
-          </a:solidFill>
-          <a:ln/>
-        </p:spPr>
-      </p:sp>
-      <p:sp>
-        <p:nvSpPr>
-          <p:cNvPr id="13" name="Text 9"/>
-          <p:cNvSpPr/>
-          <p:nvPr/>
-        </p:nvSpPr>
-        <p:spPr>
-          <a:xfrm>
-            <a:off x="640080" y="2816352"/>
-            <a:ext cx="502920" cy="502920"/>
-          </a:xfrm>
-          <a:prstGeom prst="rect">
-            <a:avLst/>
-          </a:prstGeom>
-          <a:noFill/>
-          <a:ln/>
-        </p:spPr>
-        <p:txBody>
-          <a:bodyPr wrap="square" lIns="0" tIns="0" rIns="0" bIns="0" rtlCol="0" anchor="ctr"/>
-          <a:lstStyle/>
-          <a:p>
-            <a:pPr algn="ctr" indent="0" marL="0">
-              <a:buNone/>
-            </a:pPr>
-            <a:r>
-              <a:rPr lang="en-US" sz="1800" b="1" dirty="0">
-                <a:solidFill>
-                  <a:srgbClr val="FFFFFF"/>
-                </a:solidFill>
-                <a:latin typeface="Poppins" pitchFamily="34" charset="0"/>
-                <a:ea typeface="Poppins" pitchFamily="34" charset="-122"/>
-                <a:cs typeface="Poppins" pitchFamily="34" charset="-120"/>
-              </a:rPr>
-              <a:t>2</a:t>
-            </a:r>
-            <a:endParaRPr lang="en-US" sz="1800" dirty="0"/>
-          </a:p>
-        </p:txBody>
-      </p:sp>
-      <p:sp>
-        <p:nvSpPr>
-          <p:cNvPr id="14" name="Text 10"/>
-          <p:cNvSpPr/>
-          <p:nvPr/>
-        </p:nvSpPr>
-        <p:spPr>
-          <a:xfrm>
-            <a:off x="1325880" y="2816352"/>
-            <a:ext cx="8686800" cy="502920"/>
-          </a:xfrm>
-          <a:prstGeom prst="rect">
-            <a:avLst/>
-          </a:prstGeom>
-          <a:noFill/>
-          <a:ln/>
-        </p:spPr>
-        <p:txBody>
-          <a:bodyPr wrap="square" lIns="0" tIns="0" rIns="0" bIns="0" rtlCol="0" anchor="ctr"/>
-          <a:lstStyle/>
-          <a:p>
-            <a:pPr indent="0" marL="0">
-              <a:buNone/>
-            </a:pPr>
-            <a:r>
-              <a:rPr lang="en-US" sz="1500" b="1" dirty="0">
-                <a:solidFill>
-                  <a:srgbClr val="FFFFFF"/>
-                </a:solidFill>
-                <a:latin typeface="Poppins" pitchFamily="34" charset="0"/>
-                <a:ea typeface="Poppins" pitchFamily="34" charset="-122"/>
-                <a:cs typeface="Poppins" pitchFamily="34" charset="-120"/>
-              </a:rPr>
-              <a:t>Run  </a:t>
-            </a:r>
-            <a:pPr indent="0" marL="0">
-              <a:buNone/>
-            </a:pPr>
-            <a:r>
-              <a:rPr lang="en-US" sz="1500" dirty="0">
-                <a:solidFill>
-                  <a:srgbClr val="C3D7EE"/>
-                </a:solidFill>
-                <a:latin typeface="Poppins" pitchFamily="34" charset="0"/>
-                <a:ea typeface="Poppins" pitchFamily="34" charset="-122"/>
-                <a:cs typeface="Poppins" pitchFamily="34" charset="-120"/>
-              </a:rPr>
-              <a:t>-UF drives download → build → archive → clean in one command</a:t>
-            </a:r>
-            <a:endParaRPr lang="en-US" sz="1500" dirty="0"/>
-          </a:p>
-        </p:txBody>
-      </p:sp>
-      <p:sp>
-        <p:nvSpPr>
-          <p:cNvPr id="15" name="Shape 11"/>
-          <p:cNvSpPr/>
-          <p:nvPr/>
-        </p:nvSpPr>
-        <p:spPr>
-          <a:xfrm>
-            <a:off x="640080" y="3529584"/>
-            <a:ext cx="502920" cy="502920"/>
-          </a:xfrm>
-          <a:prstGeom prst="ellipse">
-            <a:avLst/>
-          </a:prstGeom>
-          <a:solidFill>
-            <a:srgbClr val="0057C2"/>
-          </a:solidFill>
-          <a:ln/>
-        </p:spPr>
-      </p:sp>
-      <p:sp>
-        <p:nvSpPr>
-          <p:cNvPr id="16" name="Text 12"/>
-          <p:cNvSpPr/>
-          <p:nvPr/>
-        </p:nvSpPr>
-        <p:spPr>
-          <a:xfrm>
-            <a:off x="640080" y="3529584"/>
-            <a:ext cx="502920" cy="502920"/>
-          </a:xfrm>
-          <a:prstGeom prst="rect">
-            <a:avLst/>
-          </a:prstGeom>
-          <a:noFill/>
-          <a:ln/>
-        </p:spPr>
-        <p:txBody>
-          <a:bodyPr wrap="square" lIns="0" tIns="0" rIns="0" bIns="0" rtlCol="0" anchor="ctr"/>
-          <a:lstStyle/>
-          <a:p>
-            <a:pPr algn="ctr" indent="0" marL="0">
-              <a:buNone/>
-            </a:pPr>
-            <a:r>
-              <a:rPr lang="en-US" sz="1800" b="1" dirty="0">
-                <a:solidFill>
-                  <a:srgbClr val="FFFFFF"/>
-                </a:solidFill>
-                <a:latin typeface="Poppins" pitchFamily="34" charset="0"/>
-                <a:ea typeface="Poppins" pitchFamily="34" charset="-122"/>
-                <a:cs typeface="Poppins" pitchFamily="34" charset="-120"/>
-              </a:rPr>
-              <a:t>3</a:t>
-            </a:r>
-            <a:endParaRPr lang="en-US" sz="1800" dirty="0"/>
-          </a:p>
-        </p:txBody>
-      </p:sp>
-      <p:sp>
-        <p:nvSpPr>
-          <p:cNvPr id="17" name="Text 13"/>
-          <p:cNvSpPr/>
-          <p:nvPr/>
-        </p:nvSpPr>
-        <p:spPr>
-          <a:xfrm>
-            <a:off x="1325880" y="3529584"/>
-            <a:ext cx="8686800" cy="502920"/>
-          </a:xfrm>
-          <a:prstGeom prst="rect">
-            <a:avLst/>
-          </a:prstGeom>
-          <a:noFill/>
-          <a:ln/>
-        </p:spPr>
-        <p:txBody>
-          <a:bodyPr wrap="square" lIns="0" tIns="0" rIns="0" bIns="0" rtlCol="0" anchor="ctr"/>
-          <a:lstStyle/>
-          <a:p>
-            <a:pPr indent="0" marL="0">
-              <a:buNone/>
-            </a:pPr>
-            <a:r>
-              <a:rPr lang="en-US" sz="1500" b="1" dirty="0">
-                <a:solidFill>
-                  <a:srgbClr val="FFFFFF"/>
-                </a:solidFill>
-                <a:latin typeface="Poppins" pitchFamily="34" charset="0"/>
-                <a:ea typeface="Poppins" pitchFamily="34" charset="-122"/>
-                <a:cs typeface="Poppins" pitchFamily="34" charset="-120"/>
-              </a:rPr>
-              <a:t>Automate  </a:t>
-            </a:r>
-            <a:pPr indent="0" marL="0">
-              <a:buNone/>
-            </a:pPr>
-            <a:r>
-              <a:rPr lang="en-US" sz="1500" dirty="0">
-                <a:solidFill>
-                  <a:srgbClr val="C3D7EE"/>
-                </a:solidFill>
-                <a:latin typeface="Poppins" pitchFamily="34" charset="0"/>
-                <a:ea typeface="Poppins" pitchFamily="34" charset="-122"/>
-                <a:cs typeface="Poppins" pitchFamily="34" charset="-120"/>
-              </a:rPr>
-              <a:t>link to a control record; dscheck dispatches, retries, and reports</a:t>
-            </a:r>
-            <a:endParaRPr lang="en-US" sz="1500" dirty="0"/>
-          </a:p>
-        </p:txBody>
-      </p:sp>
-      <p:sp>
-        <p:nvSpPr>
-          <p:cNvPr id="18" name="Shape 14"/>
-          <p:cNvSpPr/>
-          <p:nvPr/>
-        </p:nvSpPr>
-        <p:spPr>
-          <a:xfrm>
-            <a:off x="640080" y="4242816"/>
-            <a:ext cx="502920" cy="502920"/>
-          </a:xfrm>
-          <a:prstGeom prst="ellipse">
-            <a:avLst/>
-          </a:prstGeom>
-          <a:solidFill>
-            <a:srgbClr val="0092DB"/>
-          </a:solidFill>
-          <a:ln/>
-        </p:spPr>
-      </p:sp>
-      <p:sp>
-        <p:nvSpPr>
-          <p:cNvPr id="19" name="Text 15"/>
-          <p:cNvSpPr/>
-          <p:nvPr/>
-        </p:nvSpPr>
-        <p:spPr>
-          <a:xfrm>
-            <a:off x="640080" y="4242816"/>
-            <a:ext cx="502920" cy="502920"/>
-          </a:xfrm>
-          <a:prstGeom prst="rect">
-            <a:avLst/>
-          </a:prstGeom>
-          <a:noFill/>
-          <a:ln/>
-        </p:spPr>
-        <p:txBody>
-          <a:bodyPr wrap="square" lIns="0" tIns="0" rIns="0" bIns="0" rtlCol="0" anchor="ctr"/>
-          <a:lstStyle/>
-          <a:p>
-            <a:pPr algn="ctr" indent="0" marL="0">
-              <a:buNone/>
-            </a:pPr>
-            <a:r>
-              <a:rPr lang="en-US" sz="1800" b="1" dirty="0">
-                <a:solidFill>
-                  <a:srgbClr val="FFFFFF"/>
-                </a:solidFill>
-                <a:latin typeface="Poppins" pitchFamily="34" charset="0"/>
-                <a:ea typeface="Poppins" pitchFamily="34" charset="-122"/>
-                <a:cs typeface="Poppins" pitchFamily="34" charset="-120"/>
-              </a:rPr>
-              <a:t>4</a:t>
-            </a:r>
-            <a:endParaRPr lang="en-US" sz="1800" dirty="0"/>
-          </a:p>
-        </p:txBody>
-      </p:sp>
-      <p:sp>
-        <p:nvSpPr>
-          <p:cNvPr id="20" name="Text 16"/>
-          <p:cNvSpPr/>
-          <p:nvPr/>
-        </p:nvSpPr>
-        <p:spPr>
-          <a:xfrm>
-            <a:off x="1325880" y="4242816"/>
-            <a:ext cx="8686800" cy="502920"/>
-          </a:xfrm>
-          <a:prstGeom prst="rect">
-            <a:avLst/>
-          </a:prstGeom>
-          <a:noFill/>
-          <a:ln/>
-        </p:spPr>
-        <p:txBody>
-          <a:bodyPr wrap="square" lIns="0" tIns="0" rIns="0" bIns="0" rtlCol="0" anchor="ctr"/>
-          <a:lstStyle/>
-          <a:p>
-            <a:pPr indent="0" marL="0">
-              <a:buNone/>
-            </a:pPr>
-            <a:r>
-              <a:rPr lang="en-US" sz="1500" b="1" dirty="0">
-                <a:solidFill>
-                  <a:srgbClr val="FFFFFF"/>
-                </a:solidFill>
-                <a:latin typeface="Poppins" pitchFamily="34" charset="0"/>
-                <a:ea typeface="Poppins" pitchFamily="34" charset="-122"/>
-                <a:cs typeface="Poppins" pitchFamily="34" charset="-120"/>
-              </a:rPr>
-              <a:t>Tune  </a:t>
-            </a:r>
-            <a:pPr indent="0" marL="0">
-              <a:buNone/>
-            </a:pPr>
-            <a:r>
-              <a:rPr lang="en-US" sz="1500" dirty="0">
-                <a:solidFill>
-                  <a:srgbClr val="C3D7EE"/>
-                </a:solidFill>
-                <a:latin typeface="Poppins" pitchFamily="34" charset="0"/>
-                <a:ea typeface="Poppins" pitchFamily="34" charset="-122"/>
-                <a:cs typeface="Poppins" pitchFamily="34" charset="-120"/>
-              </a:rPr>
-              <a:t>patterns, valid interval, parallelism, and email controls per record</a:t>
-            </a:r>
-            <a:endParaRPr lang="en-US" sz="1500" dirty="0"/>
-          </a:p>
-        </p:txBody>
-      </p:sp>
-      <p:sp>
-        <p:nvSpPr>
-          <p:cNvPr id="21" name="Shape 17"/>
-          <p:cNvSpPr/>
-          <p:nvPr/>
-        </p:nvSpPr>
-        <p:spPr>
-          <a:xfrm>
-            <a:off x="640080" y="5257800"/>
-            <a:ext cx="10881360" cy="1005840"/>
-          </a:xfrm>
-          <a:prstGeom prst="roundRect">
-            <a:avLst>
-              <a:gd name="adj" fmla="val 9091"/>
-            </a:avLst>
-          </a:prstGeom>
-          <a:solidFill>
-            <a:srgbClr val="0B2A63"/>
-          </a:solidFill>
-          <a:ln w="12700">
-            <a:solidFill>
-              <a:srgbClr val="2C4E7D"/>
-            </a:solidFill>
-            <a:prstDash val="solid"/>
-          </a:ln>
-        </p:spPr>
-      </p:sp>
-      <p:sp>
-        <p:nvSpPr>
-          <p:cNvPr id="22" name="Text 18"/>
-          <p:cNvSpPr/>
-          <p:nvPr/>
-        </p:nvSpPr>
-        <p:spPr>
-          <a:xfrm>
-            <a:off x="868680" y="5257800"/>
-            <a:ext cx="10424160" cy="1005840"/>
+          <p:cNvPr id="23" name="Text 18"/>
+          <p:cNvSpPr/>
+          <p:nvPr/>
+        </p:nvSpPr>
+        <p:spPr>
+          <a:xfrm>
+            <a:off x="1755648" y="5532120"/>
+            <a:ext cx="8686800" cy="685800"/>
           </a:xfrm>
           <a:prstGeom prst="rect">
             <a:avLst/>
@@ -37701,7 +37453,7 @@
               <a:buNone/>
             </a:pPr>
             <a:r>
-              <a:rPr lang="en-US" sz="1300" b="1" dirty="0">
+              <a:rPr lang="en-US" sz="1250" b="1" dirty="0">
                 <a:solidFill>
                   <a:srgbClr val="42C0FF"/>
                 </a:solidFill>
@@ -37718,9 +37470,9 @@
               <a:buNone/>
             </a:pPr>
             <a:r>
-              <a:rPr lang="en-US" sz="1300" dirty="0">
-                <a:solidFill>
-                  <a:srgbClr val="0097A7"/>
+              <a:rPr lang="en-US" sz="1250" dirty="0">
+                <a:solidFill>
+                  <a:srgbClr val="FFFFFF"/>
                 </a:solidFill>
                 <a:latin typeface="Courier New" pitchFamily="34" charset="0"/>
                 <a:ea typeface="Courier New" pitchFamily="34" charset="-122"/>
@@ -37735,15 +37487,15 @@
               <a:buNone/>
             </a:pPr>
             <a:r>
-              <a:rPr lang="en-US" sz="1300" dirty="0">
-                <a:solidFill>
-                  <a:srgbClr val="C3D7EE"/>
-                </a:solidFill>
-                <a:latin typeface="Poppins" pitchFamily="34" charset="0"/>
-                <a:ea typeface="Poppins" pitchFamily="34" charset="-122"/>
-                <a:cs typeface="Poppins" pitchFamily="34" charset="-120"/>
-              </a:rPr>
-              <a:t>   •   full guide: dsupdt.usg   •   docs: </a:t>
+              <a:rPr lang="en-US" sz="1250" dirty="0">
+                <a:solidFill>
+                  <a:srgbClr val="D5E8FA"/>
+                </a:solidFill>
+                <a:latin typeface="Poppins" pitchFamily="34" charset="0"/>
+                <a:ea typeface="Poppins" pitchFamily="34" charset="-122"/>
+                <a:cs typeface="Poppins" pitchFamily="34" charset="-120"/>
+              </a:rPr>
+              <a:t>   •   dsupdt.usg   •   </a:t>
             </a:r>
             <a:pPr indent="0" marL="0">
               <a:lnSpc>
@@ -37752,50 +37504,9 @@
               <a:buNone/>
             </a:pPr>
             <a:r>
-              <a:rPr lang="en-US" sz="1300" u="sng" dirty="0">
-                <a:solidFill>
-                  <a:srgbClr val="C3D7EE"/>
-                </a:solidFill>
-                <a:latin typeface="Poppins" pitchFamily="34" charset="0"/>
-                <a:ea typeface="Poppins" pitchFamily="34" charset="-122"/>
-                <a:cs typeface="Poppins" pitchFamily="34" charset="-120"/>
-                <a:hlinkClick r:id="rId3" invalidUrl="" action="" tgtFrame="" tooltip="" history="1" highlightClick="0" endSnd="0">
-                  <a:extLst>
-                    <a:ext uri="{A12FA001-AC4F-418D-AE19-62706E023703}">
-                      <ahyp:hlinkClr xmlns:ahyp="http://schemas.microsoft.com/office/drawing/2018/hyperlinkcolor" val="tx"/>
-                    </a:ext>
-                  </a:extLst>
-                </a:hlinkClick>
-              </a:rPr>
-              <a:t>gdex-docs-dsupdt.readthedocs.io</a:t>
-            </a:r>
-            <a:pPr indent="0" marL="0">
-              <a:lnSpc>
-                <a:spcPct val="110000"/>
-              </a:lnSpc>
-              <a:buNone/>
-            </a:pPr>
-            <a:r>
-              <a:rPr lang="en-US" sz="1300" dirty="0">
-                <a:solidFill>
-                  <a:srgbClr val="C3D7EE"/>
-                </a:solidFill>
-                <a:latin typeface="Poppins" pitchFamily="34" charset="0"/>
-                <a:ea typeface="Poppins" pitchFamily="34" charset="-122"/>
-                <a:cs typeface="Poppins" pitchFamily="34" charset="-120"/>
-              </a:rPr>
-              <a:t>   •   repo: </a:t>
-            </a:r>
-            <a:pPr indent="0" marL="0">
-              <a:lnSpc>
-                <a:spcPct val="110000"/>
-              </a:lnSpc>
-              <a:buNone/>
-            </a:pPr>
-            <a:r>
-              <a:rPr lang="en-US" sz="1300" u="sng" dirty="0">
-                <a:solidFill>
-                  <a:srgbClr val="C3D7EE"/>
+              <a:rPr lang="en-US" sz="1250" u="sng" dirty="0">
+                <a:solidFill>
+                  <a:srgbClr val="D5E8FA"/>
                 </a:solidFill>
                 <a:latin typeface="Poppins" pitchFamily="34" charset="0"/>
                 <a:ea typeface="Poppins" pitchFamily="34" charset="-122"/>
@@ -37808,9 +37519,50 @@
                   </a:extLst>
                 </a:hlinkClick>
               </a:rPr>
+              <a:t>gdex-docs-dsupdt.readthedocs.io</a:t>
+            </a:r>
+            <a:pPr indent="0" marL="0">
+              <a:lnSpc>
+                <a:spcPct val="110000"/>
+              </a:lnSpc>
+              <a:buNone/>
+            </a:pPr>
+            <a:r>
+              <a:rPr lang="en-US" sz="1250" dirty="0">
+                <a:solidFill>
+                  <a:srgbClr val="D5E8FA"/>
+                </a:solidFill>
+                <a:latin typeface="Poppins" pitchFamily="34" charset="0"/>
+                <a:ea typeface="Poppins" pitchFamily="34" charset="-122"/>
+                <a:cs typeface="Poppins" pitchFamily="34" charset="-120"/>
+              </a:rPr>
+              <a:t>   •   </a:t>
+            </a:r>
+            <a:pPr indent="0" marL="0">
+              <a:lnSpc>
+                <a:spcPct val="110000"/>
+              </a:lnSpc>
+              <a:buNone/>
+            </a:pPr>
+            <a:r>
+              <a:rPr lang="en-US" sz="1250" u="sng" dirty="0">
+                <a:solidFill>
+                  <a:srgbClr val="D5E8FA"/>
+                </a:solidFill>
+                <a:latin typeface="Poppins" pitchFamily="34" charset="0"/>
+                <a:ea typeface="Poppins" pitchFamily="34" charset="-122"/>
+                <a:cs typeface="Poppins" pitchFamily="34" charset="-120"/>
+                <a:hlinkClick r:id="rId5" invalidUrl="" action="" tgtFrame="" tooltip="" history="1" highlightClick="0" endSnd="0">
+                  <a:extLst>
+                    <a:ext uri="{A12FA001-AC4F-418D-AE19-62706E023703}">
+                      <ahyp:hlinkClr xmlns:ahyp="http://schemas.microsoft.com/office/drawing/2018/hyperlinkcolor" val="tx"/>
+                    </a:ext>
+                  </a:extLst>
+                </a:hlinkClick>
+              </a:rPr>
               <a:t>github.com/NCAR/rda-python-dsupdt</a:t>
             </a:r>
-            <a:endParaRPr lang="en-US" sz="1300" dirty="0"/>
+            <a:endParaRPr lang="en-US" sz="1250" dirty="0"/>
           </a:p>
         </p:txBody>
       </p:sp>
@@ -37828,7 +37580,7 @@
     <p:bg>
       <p:bgPr>
         <a:solidFill>
-          <a:srgbClr val="011837"/>
+          <a:srgbClr val="0057C2"/>
         </a:solidFill>
       </p:bgPr>
     </p:bg>
@@ -37848,7 +37600,7 @@
       </p:grpSpPr>
       <p:pic>
         <p:nvPicPr>
-          <p:cNvPr id="2" name="Image 0" descr="nsf_ncar_logo_white.png">    </p:cNvPr>
+          <p:cNvPr id="2" name="Image 0" descr="interior_bg.png">    </p:cNvPr>
           <p:cNvPicPr>
             <a:picLocks noChangeAspect="1"/>
           </p:cNvPicPr>
@@ -37862,8 +37614,8 @@
         </p:blipFill>
         <p:spPr>
           <a:xfrm>
-            <a:off x="9951415" y="274320"/>
-            <a:ext cx="1874520" cy="512064"/>
+            <a:off x="0" y="0"/>
+            <a:ext cx="12191695" cy="6858000"/>
           </a:xfrm>
           <a:prstGeom prst="rect">
             <a:avLst/>
@@ -37886,31 +37638,95 @@
         </p:blipFill>
         <p:spPr>
           <a:xfrm>
-            <a:off x="10088575" y="896112"/>
-            <a:ext cx="1737360" cy="877824"/>
+            <a:off x="612648" y="365760"/>
+            <a:ext cx="1024128" cy="521208"/>
           </a:xfrm>
           <a:prstGeom prst="rect">
             <a:avLst/>
           </a:prstGeom>
         </p:spPr>
       </p:pic>
-      <p:sp>
-        <p:nvSpPr>
-          <p:cNvPr id="4" name="Shape 0"/>
-          <p:cNvSpPr/>
-          <p:nvPr/>
-        </p:nvSpPr>
-        <p:spPr>
-          <a:xfrm>
-            <a:off x="4084168" y="320040"/>
-            <a:ext cx="4023360" cy="4023360"/>
-          </a:xfrm>
-          <a:prstGeom prst="ellipse">
-            <a:avLst/>
-          </a:prstGeom>
-          <a:ln w="12700">
+      <p:pic>
+        <p:nvPicPr>
+          <p:cNvPr id="4" name="Image 2" descr="nsf_ncar_logo_white.png">    </p:cNvPr>
+          <p:cNvPicPr>
+            <a:picLocks noChangeAspect="1"/>
+          </p:cNvPicPr>
+          <p:nvPr/>
+        </p:nvPicPr>
+        <p:blipFill>
+          <a:blip r:embed="rId3"/>
+          <a:stretch>
+            <a:fillRect/>
+          </a:stretch>
+        </p:blipFill>
+        <p:spPr>
+          <a:xfrm>
+            <a:off x="9683496" y="393192"/>
+            <a:ext cx="1892808" cy="521208"/>
+          </a:xfrm>
+          <a:prstGeom prst="rect">
+            <a:avLst/>
+          </a:prstGeom>
+        </p:spPr>
+      </p:pic>
+      <p:sp>
+        <p:nvSpPr>
+          <p:cNvPr id="5" name="Text 0"/>
+          <p:cNvSpPr/>
+          <p:nvPr/>
+        </p:nvSpPr>
+        <p:spPr>
+          <a:xfrm>
+            <a:off x="256032" y="6446520"/>
+            <a:ext cx="365760" cy="274320"/>
+          </a:xfrm>
+          <a:prstGeom prst="rect">
+            <a:avLst/>
+          </a:prstGeom>
+          <a:noFill/>
+          <a:ln/>
+        </p:spPr>
+        <p:txBody>
+          <a:bodyPr wrap="square" lIns="0" tIns="0" rIns="0" bIns="0" rtlCol="0" anchor="ctr"/>
+          <a:lstStyle/>
+          <a:p>
+            <a:pPr indent="0" marL="0">
+              <a:buNone/>
+            </a:pPr>
+            <a:r>
+              <a:rPr lang="en-US" sz="950" b="1" dirty="0">
+                <a:solidFill>
+                  <a:srgbClr val="FFFFFF"/>
+                </a:solidFill>
+                <a:latin typeface="Poppins" pitchFamily="34" charset="0"/>
+                <a:ea typeface="Poppins" pitchFamily="34" charset="-122"/>
+                <a:cs typeface="Poppins" pitchFamily="34" charset="-120"/>
+              </a:rPr>
+              <a:t>26</a:t>
+            </a:r>
+            <a:endParaRPr lang="en-US" sz="950" dirty="0"/>
+          </a:p>
+        </p:txBody>
+      </p:sp>
+      <p:sp>
+        <p:nvSpPr>
+          <p:cNvPr id="6" name="Shape 1"/>
+          <p:cNvSpPr/>
+          <p:nvPr/>
+        </p:nvSpPr>
+        <p:spPr>
+          <a:xfrm>
+            <a:off x="612648" y="6437376"/>
+            <a:ext cx="0" cy="201168"/>
+          </a:xfrm>
+          <a:prstGeom prst="line">
+            <a:avLst/>
+          </a:prstGeom>
+          <a:noFill/>
+          <a:ln w="9525">
             <a:solidFill>
-              <a:srgbClr val="2C4E7D"/>
+              <a:srgbClr val="FFFFFF"/>
             </a:solidFill>
             <a:prstDash val="solid"/>
           </a:ln>
@@ -37918,41 +37734,98 @@
       </p:sp>
       <p:sp>
         <p:nvSpPr>
-          <p:cNvPr id="5" name="Shape 1"/>
-          <p:cNvSpPr/>
-          <p:nvPr/>
-        </p:nvSpPr>
-        <p:spPr>
-          <a:xfrm>
-            <a:off x="4587088" y="822960"/>
-            <a:ext cx="3017520" cy="3017520"/>
-          </a:xfrm>
-          <a:prstGeom prst="ellipse">
-            <a:avLst/>
-          </a:prstGeom>
-          <a:ln w="12700">
-            <a:solidFill>
-              <a:srgbClr val="2C4E7D"/>
-            </a:solidFill>
-            <a:prstDash val="solid"/>
-          </a:ln>
-        </p:spPr>
-      </p:sp>
-      <p:sp>
-        <p:nvSpPr>
-          <p:cNvPr id="6" name="Shape 2"/>
-          <p:cNvSpPr/>
-          <p:nvPr/>
-        </p:nvSpPr>
-        <p:spPr>
-          <a:xfrm>
-            <a:off x="5090008" y="1325880"/>
-            <a:ext cx="2011680" cy="2011680"/>
-          </a:xfrm>
-          <a:prstGeom prst="ellipse">
-            <a:avLst/>
-          </a:prstGeom>
-          <a:ln w="25400">
+          <p:cNvPr id="7" name="Text 2"/>
+          <p:cNvSpPr/>
+          <p:nvPr/>
+        </p:nvSpPr>
+        <p:spPr>
+          <a:xfrm>
+            <a:off x="786384" y="6446520"/>
+            <a:ext cx="5486400" cy="274320"/>
+          </a:xfrm>
+          <a:prstGeom prst="rect">
+            <a:avLst/>
+          </a:prstGeom>
+          <a:noFill/>
+          <a:ln/>
+        </p:spPr>
+        <p:txBody>
+          <a:bodyPr wrap="square" lIns="0" tIns="0" rIns="0" bIns="0" rtlCol="0" anchor="ctr"/>
+          <a:lstStyle/>
+          <a:p>
+            <a:pPr indent="0" marL="0">
+              <a:buNone/>
+            </a:pPr>
+            <a:r>
+              <a:rPr lang="en-US" sz="950" b="1" dirty="0">
+                <a:solidFill>
+                  <a:srgbClr val="FFFFFF"/>
+                </a:solidFill>
+                <a:latin typeface="Poppins" pitchFamily="34" charset="0"/>
+                <a:ea typeface="Poppins" pitchFamily="34" charset="-122"/>
+                <a:cs typeface="Poppins" pitchFamily="34" charset="-120"/>
+              </a:rPr>
+              <a:t>DSUPDT  •  DEVELOPER &amp; GENERAL USAGE GUIDE</a:t>
+            </a:r>
+            <a:endParaRPr lang="en-US" sz="950" dirty="0"/>
+          </a:p>
+        </p:txBody>
+      </p:sp>
+      <p:sp>
+        <p:nvSpPr>
+          <p:cNvPr id="8" name="Text 3"/>
+          <p:cNvSpPr/>
+          <p:nvPr/>
+        </p:nvSpPr>
+        <p:spPr>
+          <a:xfrm>
+            <a:off x="1527048" y="1078992"/>
+            <a:ext cx="9144000" cy="2743200"/>
+          </a:xfrm>
+          <a:prstGeom prst="rect">
+            <a:avLst/>
+          </a:prstGeom>
+          <a:noFill/>
+          <a:ln/>
+        </p:spPr>
+        <p:txBody>
+          <a:bodyPr wrap="square" lIns="0" tIns="0" rIns="0" bIns="0" rtlCol="0" anchor="b"/>
+          <a:lstStyle/>
+          <a:p>
+            <a:pPr indent="0" marL="0">
+              <a:buNone/>
+            </a:pPr>
+            <a:r>
+              <a:rPr lang="en-US" sz="5400" b="1" dirty="0">
+                <a:solidFill>
+                  <a:srgbClr val="FFFFFF"/>
+                </a:solidFill>
+                <a:latin typeface="Poppins" pitchFamily="34" charset="0"/>
+                <a:ea typeface="Poppins" pitchFamily="34" charset="-122"/>
+                <a:cs typeface="Poppins" pitchFamily="34" charset="-120"/>
+              </a:rPr>
+              <a:t>Any Questions?</a:t>
+            </a:r>
+            <a:endParaRPr lang="en-US" sz="5400" dirty="0"/>
+          </a:p>
+        </p:txBody>
+      </p:sp>
+      <p:sp>
+        <p:nvSpPr>
+          <p:cNvPr id="9" name="Shape 4"/>
+          <p:cNvSpPr/>
+          <p:nvPr/>
+        </p:nvSpPr>
+        <p:spPr>
+          <a:xfrm>
+            <a:off x="1527048" y="4160520"/>
+            <a:ext cx="804672" cy="0"/>
+          </a:xfrm>
+          <a:prstGeom prst="line">
+            <a:avLst/>
+          </a:prstGeom>
+          <a:noFill/>
+          <a:ln w="38100">
             <a:solidFill>
               <a:srgbClr val="42C0FF"/>
             </a:solidFill>
@@ -37962,34 +37835,14 @@
       </p:sp>
       <p:sp>
         <p:nvSpPr>
-          <p:cNvPr id="7" name="Shape 3"/>
-          <p:cNvSpPr/>
-          <p:nvPr/>
-        </p:nvSpPr>
-        <p:spPr>
-          <a:xfrm>
-            <a:off x="5592928" y="1828800"/>
-            <a:ext cx="1005840" cy="1005840"/>
-          </a:xfrm>
-          <a:prstGeom prst="ellipse">
-            <a:avLst/>
-          </a:prstGeom>
-          <a:solidFill>
-            <a:srgbClr val="42C0FF"/>
-          </a:solidFill>
-          <a:ln/>
-        </p:spPr>
-      </p:sp>
-      <p:sp>
-        <p:nvSpPr>
-          <p:cNvPr id="8" name="Text 4"/>
-          <p:cNvSpPr/>
-          <p:nvPr/>
-        </p:nvSpPr>
-        <p:spPr>
-          <a:xfrm>
-            <a:off x="5592928" y="1828800"/>
-            <a:ext cx="1005840" cy="1005840"/>
+          <p:cNvPr id="10" name="Text 5"/>
+          <p:cNvSpPr/>
+          <p:nvPr/>
+        </p:nvSpPr>
+        <p:spPr>
+          <a:xfrm>
+            <a:off x="1527048" y="4434840"/>
+            <a:ext cx="9144000" cy="457200"/>
           </a:xfrm>
           <a:prstGeom prst="rect">
             <a:avLst/>
@@ -38001,124 +37854,46 @@
           <a:bodyPr wrap="square" lIns="0" tIns="0" rIns="0" bIns="0" rtlCol="0" anchor="ctr"/>
           <a:lstStyle/>
           <a:p>
-            <a:pPr algn="ctr" indent="0" marL="0">
-              <a:buNone/>
-            </a:pPr>
-            <a:r>
-              <a:rPr lang="en-US" sz="4600" b="1" dirty="0">
-                <a:solidFill>
-                  <a:srgbClr val="011837"/>
-                </a:solidFill>
-                <a:latin typeface="Poppins" pitchFamily="34" charset="0"/>
-                <a:ea typeface="Poppins" pitchFamily="34" charset="-122"/>
-                <a:cs typeface="Poppins" pitchFamily="34" charset="-120"/>
-              </a:rPr>
-              <a:t>?</a:t>
-            </a:r>
-            <a:endParaRPr lang="en-US" sz="4600" dirty="0"/>
-          </a:p>
-        </p:txBody>
-      </p:sp>
-      <p:sp>
-        <p:nvSpPr>
-          <p:cNvPr id="9" name="Text 5"/>
-          <p:cNvSpPr/>
-          <p:nvPr/>
-        </p:nvSpPr>
-        <p:spPr>
-          <a:xfrm>
-            <a:off x="457200" y="3246120"/>
-            <a:ext cx="11274552" cy="822960"/>
-          </a:xfrm>
-          <a:prstGeom prst="rect">
-            <a:avLst/>
-          </a:prstGeom>
-          <a:noFill/>
-          <a:ln/>
-        </p:spPr>
-        <p:txBody>
-          <a:bodyPr wrap="square" lIns="0" tIns="0" rIns="0" bIns="0" rtlCol="0" anchor="ctr"/>
-          <a:lstStyle/>
-          <a:p>
-            <a:pPr algn="ctr" indent="0" marL="0">
-              <a:buNone/>
-            </a:pPr>
-            <a:r>
-              <a:rPr lang="en-US" sz="5200" b="1" dirty="0">
-                <a:solidFill>
-                  <a:srgbClr val="FFFFFF"/>
-                </a:solidFill>
-                <a:latin typeface="Poppins" pitchFamily="34" charset="0"/>
-                <a:ea typeface="Poppins" pitchFamily="34" charset="-122"/>
-                <a:cs typeface="Poppins" pitchFamily="34" charset="-120"/>
-              </a:rPr>
-              <a:t>Any Questions?</a:t>
-            </a:r>
-            <a:endParaRPr lang="en-US" sz="5200" dirty="0"/>
-          </a:p>
-        </p:txBody>
-      </p:sp>
-      <p:sp>
-        <p:nvSpPr>
-          <p:cNvPr id="10" name="Text 6"/>
-          <p:cNvSpPr/>
-          <p:nvPr/>
-        </p:nvSpPr>
-        <p:spPr>
-          <a:xfrm>
-            <a:off x="457200" y="4160520"/>
-            <a:ext cx="11274552" cy="457200"/>
-          </a:xfrm>
-          <a:prstGeom prst="rect">
-            <a:avLst/>
-          </a:prstGeom>
-          <a:noFill/>
-          <a:ln/>
-        </p:spPr>
-        <p:txBody>
-          <a:bodyPr wrap="square" lIns="0" tIns="0" rIns="0" bIns="0" rtlCol="0" anchor="ctr"/>
-          <a:lstStyle/>
-          <a:p>
-            <a:pPr algn="ctr" indent="0" marL="0">
-              <a:buNone/>
-            </a:pPr>
-            <a:r>
-              <a:rPr lang="en-US" sz="1800" i="1" dirty="0">
-                <a:solidFill>
-                  <a:srgbClr val="C3D7EE"/>
-                </a:solidFill>
-                <a:latin typeface="Poppins" pitchFamily="34" charset="0"/>
-                <a:ea typeface="Poppins" pitchFamily="34" charset="-122"/>
-                <a:cs typeface="Poppins" pitchFamily="34" charset="-120"/>
-              </a:rPr>
-              <a:t>Thank you</a:t>
-            </a:r>
-            <a:endParaRPr lang="en-US" sz="1800" dirty="0"/>
-          </a:p>
-        </p:txBody>
-      </p:sp>
-      <p:sp>
-        <p:nvSpPr>
-          <p:cNvPr id="11" name="Shape 7"/>
-          <p:cNvSpPr/>
-          <p:nvPr/>
-        </p:nvSpPr>
-        <p:spPr>
-          <a:xfrm>
-            <a:off x="1752448" y="5074920"/>
-            <a:ext cx="8686800" cy="822960"/>
+            <a:pPr indent="0" marL="0">
+              <a:buNone/>
+            </a:pPr>
+            <a:r>
+              <a:rPr lang="en-US" sz="1600" dirty="0">
+                <a:solidFill>
+                  <a:srgbClr val="D5E8FA"/>
+                </a:solidFill>
+                <a:latin typeface="Poppins" pitchFamily="34" charset="0"/>
+                <a:ea typeface="Poppins" pitchFamily="34" charset="-122"/>
+                <a:cs typeface="Poppins" pitchFamily="34" charset="-120"/>
+              </a:rPr>
+              <a:t>Thank you — dsupdt keeps the operational datasets current, every day.</a:t>
+            </a:r>
+            <a:endParaRPr lang="en-US" sz="1600" dirty="0"/>
+          </a:p>
+        </p:txBody>
+      </p:sp>
+      <p:sp>
+        <p:nvSpPr>
+          <p:cNvPr id="11" name="Shape 6"/>
+          <p:cNvSpPr/>
+          <p:nvPr/>
+        </p:nvSpPr>
+        <p:spPr>
+          <a:xfrm>
+            <a:off x="1527048" y="5166360"/>
+            <a:ext cx="9144000" cy="685800"/>
           </a:xfrm>
           <a:prstGeom prst="roundRect">
             <a:avLst>
-              <a:gd name="adj" fmla="val 11111"/>
+              <a:gd name="adj" fmla="val 13333"/>
             </a:avLst>
           </a:prstGeom>
           <a:solidFill>
-            <a:srgbClr val="0B2A63"/>
+            <a:srgbClr val="00357A"/>
           </a:solidFill>
           <a:ln w="12700">
             <a:solidFill>
-              <a:srgbClr val="2C4E7D"/>
+              <a:srgbClr val="42C0FF"/>
             </a:solidFill>
             <a:prstDash val="solid"/>
           </a:ln>
@@ -38126,14 +37901,14 @@
       </p:sp>
       <p:sp>
         <p:nvSpPr>
-          <p:cNvPr id="12" name="Text 8"/>
-          <p:cNvSpPr/>
-          <p:nvPr/>
-        </p:nvSpPr>
-        <p:spPr>
-          <a:xfrm>
-            <a:off x="1752448" y="5074920"/>
-            <a:ext cx="8686800" cy="822960"/>
+          <p:cNvPr id="12" name="Text 7"/>
+          <p:cNvSpPr/>
+          <p:nvPr/>
+        </p:nvSpPr>
+        <p:spPr>
+          <a:xfrm>
+            <a:off x="1755648" y="5166360"/>
+            <a:ext cx="8686800" cy="685800"/>
           </a:xfrm>
           <a:prstGeom prst="rect">
             <a:avLst/>
@@ -38145,13 +37920,27 @@
           <a:bodyPr wrap="square" lIns="0" tIns="0" rIns="0" bIns="0" rtlCol="0" anchor="ctr"/>
           <a:lstStyle/>
           <a:p>
-            <a:pPr algn="ctr" indent="0" marL="0">
-              <a:buNone/>
-            </a:pPr>
-            <a:r>
-              <a:rPr lang="en-US" sz="1300" dirty="0">
-                <a:solidFill>
-                  <a:srgbClr val="0097A7"/>
+            <a:pPr indent="0" marL="0">
+              <a:buNone/>
+            </a:pPr>
+            <a:r>
+              <a:rPr lang="en-US" sz="1250" dirty="0">
+                <a:solidFill>
+                  <a:srgbClr val="D5E8FA"/>
+                </a:solidFill>
+                <a:latin typeface="Poppins" pitchFamily="34" charset="0"/>
+                <a:ea typeface="Poppins" pitchFamily="34" charset="-122"/>
+                <a:cs typeface="Poppins" pitchFamily="34" charset="-120"/>
+              </a:rPr>
+              <a:t>Zaihua Ji   •   zji@ucar.edu   •   </a:t>
+            </a:r>
+            <a:pPr indent="0" marL="0">
+              <a:buNone/>
+            </a:pPr>
+            <a:r>
+              <a:rPr lang="en-US" sz="1250" dirty="0">
+                <a:solidFill>
+                  <a:srgbClr val="FFFFFF"/>
                 </a:solidFill>
                 <a:latin typeface="Courier New" pitchFamily="34" charset="0"/>
                 <a:ea typeface="Courier New" pitchFamily="34" charset="-122"/>
@@ -38159,13 +37948,13 @@
               </a:rPr>
               <a:t>dsupdt -h &lt;OPT&gt;</a:t>
             </a:r>
-            <a:pPr algn="ctr" indent="0" marL="0">
-              <a:buNone/>
-            </a:pPr>
-            <a:r>
-              <a:rPr lang="en-US" sz="1300" dirty="0">
-                <a:solidFill>
-                  <a:srgbClr val="C3D7EE"/>
+            <a:pPr indent="0" marL="0">
+              <a:buNone/>
+            </a:pPr>
+            <a:r>
+              <a:rPr lang="en-US" sz="1250" dirty="0">
+                <a:solidFill>
+                  <a:srgbClr val="D5E8FA"/>
                 </a:solidFill>
                 <a:latin typeface="Poppins" pitchFamily="34" charset="0"/>
                 <a:ea typeface="Poppins" pitchFamily="34" charset="-122"/>
@@ -38173,18 +37962,18 @@
               </a:rPr>
               <a:t>   •   dsupdt.usg   •   </a:t>
             </a:r>
-            <a:pPr algn="ctr" indent="0" marL="0">
-              <a:buNone/>
-            </a:pPr>
-            <a:r>
-              <a:rPr lang="en-US" sz="1300" u="sng" dirty="0">
-                <a:solidFill>
-                  <a:srgbClr val="C3D7EE"/>
-                </a:solidFill>
-                <a:latin typeface="Poppins" pitchFamily="34" charset="0"/>
-                <a:ea typeface="Poppins" pitchFamily="34" charset="-122"/>
-                <a:cs typeface="Poppins" pitchFamily="34" charset="-120"/>
-                <a:hlinkClick r:id="rId3" invalidUrl="" action="" tgtFrame="" tooltip="" history="1" highlightClick="0" endSnd="0">
+            <a:pPr indent="0" marL="0">
+              <a:buNone/>
+            </a:pPr>
+            <a:r>
+              <a:rPr lang="en-US" sz="1250" u="sng" dirty="0">
+                <a:solidFill>
+                  <a:srgbClr val="D5E8FA"/>
+                </a:solidFill>
+                <a:latin typeface="Poppins" pitchFamily="34" charset="0"/>
+                <a:ea typeface="Poppins" pitchFamily="34" charset="-122"/>
+                <a:cs typeface="Poppins" pitchFamily="34" charset="-120"/>
+                <a:hlinkClick r:id="rId4" invalidUrl="" action="" tgtFrame="" tooltip="" history="1" highlightClick="0" endSnd="0">
                   <a:extLst>
                     <a:ext uri="{A12FA001-AC4F-418D-AE19-62706E023703}">
                       <ahyp:hlinkClr xmlns:ahyp="http://schemas.microsoft.com/office/drawing/2018/hyperlinkcolor" val="tx"/>
@@ -38194,7 +37983,7 @@
               </a:rPr>
               <a:t>github.com/NCAR/rda-python-dsupdt</a:t>
             </a:r>
-            <a:endParaRPr lang="en-US" sz="1300" dirty="0"/>
+            <a:endParaRPr lang="en-US" sz="1250" dirty="0"/>
           </a:p>
         </p:txBody>
       </p:sp>
@@ -38209,13 +37998,6 @@
 <file path=ppt/slides/slide3.xml><?xml version="1.0" encoding="utf-8"?>
 <p:sld xmlns:a="http://schemas.openxmlformats.org/drawingml/2006/main" xmlns:r="http://schemas.openxmlformats.org/officeDocument/2006/relationships" xmlns:p="http://schemas.openxmlformats.org/presentationml/2006/main">
   <p:cSld name="Slide 3">
-    <p:bg>
-      <p:bgPr>
-        <a:solidFill>
-          <a:srgbClr val="FFFFFF"/>
-        </a:solidFill>
-      </p:bgPr>
-    </p:bg>
     <p:spTree>
       <p:nvGrpSpPr>
         <p:cNvPr id="1" name=""/>
@@ -39286,8 +39068,8 @@
         </p:nvSpPr>
         <p:spPr>
           <a:xfrm>
-            <a:off x="457200" y="5989320"/>
-            <a:ext cx="11274552" cy="365760"/>
+            <a:off x="457200" y="5870448"/>
+            <a:ext cx="9966960" cy="365760"/>
           </a:xfrm>
           <a:prstGeom prst="rect">
             <a:avLst/>
@@ -39415,40 +39197,16 @@
           </a:p>
         </p:txBody>
       </p:sp>
-      <p:pic>
-        <p:nvPicPr>
-          <p:cNvPr id="33" name="Image 0" descr="nsf_ncar_logo_color.png">    </p:cNvPr>
-          <p:cNvPicPr>
-            <a:picLocks noChangeAspect="1"/>
-          </p:cNvPicPr>
-          <p:nvPr/>
-        </p:nvPicPr>
-        <p:blipFill>
-          <a:blip r:embed="rId4"/>
-          <a:stretch>
-            <a:fillRect/>
-          </a:stretch>
-        </p:blipFill>
-        <p:spPr>
-          <a:xfrm>
-            <a:off x="9951415" y="274320"/>
-            <a:ext cx="1874520" cy="512064"/>
-          </a:xfrm>
-          <a:prstGeom prst="rect">
-            <a:avLst/>
-          </a:prstGeom>
-        </p:spPr>
-      </p:pic>
-      <p:sp>
-        <p:nvSpPr>
-          <p:cNvPr id="34" name="Text 31"/>
-          <p:cNvSpPr/>
-          <p:nvPr/>
-        </p:nvSpPr>
-        <p:spPr>
-          <a:xfrm>
-            <a:off x="457200" y="6473952"/>
-            <a:ext cx="7315200" cy="274320"/>
+      <p:sp>
+        <p:nvSpPr>
+          <p:cNvPr id="33" name="Text 31"/>
+          <p:cNvSpPr/>
+          <p:nvPr/>
+        </p:nvSpPr>
+        <p:spPr>
+          <a:xfrm>
+            <a:off x="256032" y="6446520"/>
+            <a:ext cx="365760" cy="274320"/>
           </a:xfrm>
           <a:prstGeom prst="rect">
             <a:avLst/>
@@ -39460,34 +39218,34 @@
           <a:bodyPr wrap="square" lIns="0" tIns="0" rIns="0" bIns="0" rtlCol="0" anchor="ctr"/>
           <a:lstStyle/>
           <a:p>
-            <a:pPr algn="l" indent="0" marL="0">
-              <a:buNone/>
-            </a:pPr>
-            <a:r>
-              <a:rPr lang="en-US" sz="900" dirty="0">
-                <a:solidFill>
-                  <a:srgbClr val="53565A"/>
-                </a:solidFill>
-                <a:latin typeface="Poppins" pitchFamily="34" charset="0"/>
-                <a:ea typeface="Poppins" pitchFamily="34" charset="-122"/>
-                <a:cs typeface="Poppins" pitchFamily="34" charset="-120"/>
-              </a:rPr>
-              <a:t>dsupdt  •  Developer &amp; General Usage Guide</a:t>
-            </a:r>
-            <a:endParaRPr lang="en-US" sz="900" dirty="0"/>
-          </a:p>
-        </p:txBody>
-      </p:sp>
-      <p:sp>
-        <p:nvSpPr>
-          <p:cNvPr id="35" name="Text 32"/>
-          <p:cNvSpPr/>
-          <p:nvPr/>
-        </p:nvSpPr>
-        <p:spPr>
-          <a:xfrm>
-            <a:off x="11368735" y="6473952"/>
-            <a:ext cx="365760" cy="274320"/>
+            <a:pPr indent="0" marL="0">
+              <a:buNone/>
+            </a:pPr>
+            <a:r>
+              <a:rPr lang="en-US" sz="950" b="1" dirty="0">
+                <a:solidFill>
+                  <a:srgbClr val="00357A"/>
+                </a:solidFill>
+                <a:latin typeface="Poppins" pitchFamily="34" charset="0"/>
+                <a:ea typeface="Poppins" pitchFamily="34" charset="-122"/>
+                <a:cs typeface="Poppins" pitchFamily="34" charset="-120"/>
+              </a:rPr>
+              <a:t>2</a:t>
+            </a:r>
+            <a:endParaRPr lang="en-US" sz="950" dirty="0"/>
+          </a:p>
+        </p:txBody>
+      </p:sp>
+      <p:sp>
+        <p:nvSpPr>
+          <p:cNvPr id="34" name="Text 32"/>
+          <p:cNvSpPr/>
+          <p:nvPr/>
+        </p:nvSpPr>
+        <p:spPr>
+          <a:xfrm>
+            <a:off x="786384" y="6446520"/>
+            <a:ext cx="5486400" cy="274320"/>
           </a:xfrm>
           <a:prstGeom prst="rect">
             <a:avLst/>
@@ -39499,21 +39257,21 @@
           <a:bodyPr wrap="square" lIns="0" tIns="0" rIns="0" bIns="0" rtlCol="0" anchor="ctr"/>
           <a:lstStyle/>
           <a:p>
-            <a:pPr algn="r" indent="0" marL="0">
-              <a:buNone/>
-            </a:pPr>
-            <a:r>
-              <a:rPr lang="en-US" sz="900" dirty="0">
-                <a:solidFill>
-                  <a:srgbClr val="53565A"/>
-                </a:solidFill>
-                <a:latin typeface="Poppins" pitchFamily="34" charset="0"/>
-                <a:ea typeface="Poppins" pitchFamily="34" charset="-122"/>
-                <a:cs typeface="Poppins" pitchFamily="34" charset="-120"/>
-              </a:rPr>
-              <a:t>2</a:t>
-            </a:r>
-            <a:endParaRPr lang="en-US" sz="900" dirty="0"/>
+            <a:pPr indent="0" marL="0">
+              <a:buNone/>
+            </a:pPr>
+            <a:r>
+              <a:rPr lang="en-US" sz="950" b="1" dirty="0">
+                <a:solidFill>
+                  <a:srgbClr val="00357A"/>
+                </a:solidFill>
+                <a:latin typeface="Poppins" pitchFamily="34" charset="0"/>
+                <a:ea typeface="Poppins" pitchFamily="34" charset="-122"/>
+                <a:cs typeface="Poppins" pitchFamily="34" charset="-120"/>
+              </a:rPr>
+              <a:t>DSUPDT  •  DEVELOPER &amp; GENERAL USAGE GUIDE</a:t>
+            </a:r>
+            <a:endParaRPr lang="en-US" sz="950" dirty="0"/>
           </a:p>
         </p:txBody>
       </p:sp>
@@ -39528,13 +39286,6 @@
 <file path=ppt/slides/slide4.xml><?xml version="1.0" encoding="utf-8"?>
 <p:sld xmlns:a="http://schemas.openxmlformats.org/drawingml/2006/main" xmlns:r="http://schemas.openxmlformats.org/officeDocument/2006/relationships" xmlns:p="http://schemas.openxmlformats.org/presentationml/2006/main">
   <p:cSld name="Slide 4">
-    <p:bg>
-      <p:bgPr>
-        <a:solidFill>
-          <a:srgbClr val="FFFFFF"/>
-        </a:solidFill>
-      </p:bgPr>
-    </p:bg>
     <p:spTree>
       <p:nvGrpSpPr>
         <p:cNvPr id="1" name=""/>
@@ -40950,40 +40701,16 @@
           </a:p>
         </p:txBody>
       </p:sp>
-      <p:pic>
-        <p:nvPicPr>
-          <p:cNvPr id="37" name="Image 0" descr="nsf_ncar_logo_color.png">    </p:cNvPr>
-          <p:cNvPicPr>
-            <a:picLocks noChangeAspect="1"/>
-          </p:cNvPicPr>
-          <p:nvPr/>
-        </p:nvPicPr>
-        <p:blipFill>
-          <a:blip r:embed="rId1"/>
-          <a:stretch>
-            <a:fillRect/>
-          </a:stretch>
-        </p:blipFill>
-        <p:spPr>
-          <a:xfrm>
-            <a:off x="9951415" y="274320"/>
-            <a:ext cx="1874520" cy="512064"/>
-          </a:xfrm>
-          <a:prstGeom prst="rect">
-            <a:avLst/>
-          </a:prstGeom>
-        </p:spPr>
-      </p:pic>
-      <p:sp>
-        <p:nvSpPr>
-          <p:cNvPr id="38" name="Text 35"/>
-          <p:cNvSpPr/>
-          <p:nvPr/>
-        </p:nvSpPr>
-        <p:spPr>
-          <a:xfrm>
-            <a:off x="457200" y="6473952"/>
-            <a:ext cx="7315200" cy="274320"/>
+      <p:sp>
+        <p:nvSpPr>
+          <p:cNvPr id="37" name="Text 35"/>
+          <p:cNvSpPr/>
+          <p:nvPr/>
+        </p:nvSpPr>
+        <p:spPr>
+          <a:xfrm>
+            <a:off x="256032" y="6446520"/>
+            <a:ext cx="365760" cy="274320"/>
           </a:xfrm>
           <a:prstGeom prst="rect">
             <a:avLst/>
@@ -40995,34 +40722,34 @@
           <a:bodyPr wrap="square" lIns="0" tIns="0" rIns="0" bIns="0" rtlCol="0" anchor="ctr"/>
           <a:lstStyle/>
           <a:p>
-            <a:pPr algn="l" indent="0" marL="0">
-              <a:buNone/>
-            </a:pPr>
-            <a:r>
-              <a:rPr lang="en-US" sz="900" dirty="0">
-                <a:solidFill>
-                  <a:srgbClr val="53565A"/>
-                </a:solidFill>
-                <a:latin typeface="Poppins" pitchFamily="34" charset="0"/>
-                <a:ea typeface="Poppins" pitchFamily="34" charset="-122"/>
-                <a:cs typeface="Poppins" pitchFamily="34" charset="-120"/>
-              </a:rPr>
-              <a:t>dsupdt  •  Developer &amp; General Usage Guide</a:t>
-            </a:r>
-            <a:endParaRPr lang="en-US" sz="900" dirty="0"/>
-          </a:p>
-        </p:txBody>
-      </p:sp>
-      <p:sp>
-        <p:nvSpPr>
-          <p:cNvPr id="39" name="Text 36"/>
-          <p:cNvSpPr/>
-          <p:nvPr/>
-        </p:nvSpPr>
-        <p:spPr>
-          <a:xfrm>
-            <a:off x="11368735" y="6473952"/>
-            <a:ext cx="365760" cy="274320"/>
+            <a:pPr indent="0" marL="0">
+              <a:buNone/>
+            </a:pPr>
+            <a:r>
+              <a:rPr lang="en-US" sz="950" b="1" dirty="0">
+                <a:solidFill>
+                  <a:srgbClr val="00357A"/>
+                </a:solidFill>
+                <a:latin typeface="Poppins" pitchFamily="34" charset="0"/>
+                <a:ea typeface="Poppins" pitchFamily="34" charset="-122"/>
+                <a:cs typeface="Poppins" pitchFamily="34" charset="-120"/>
+              </a:rPr>
+              <a:t>3</a:t>
+            </a:r>
+            <a:endParaRPr lang="en-US" sz="950" dirty="0"/>
+          </a:p>
+        </p:txBody>
+      </p:sp>
+      <p:sp>
+        <p:nvSpPr>
+          <p:cNvPr id="38" name="Text 36"/>
+          <p:cNvSpPr/>
+          <p:nvPr/>
+        </p:nvSpPr>
+        <p:spPr>
+          <a:xfrm>
+            <a:off x="786384" y="6446520"/>
+            <a:ext cx="5486400" cy="274320"/>
           </a:xfrm>
           <a:prstGeom prst="rect">
             <a:avLst/>
@@ -41034,21 +40761,21 @@
           <a:bodyPr wrap="square" lIns="0" tIns="0" rIns="0" bIns="0" rtlCol="0" anchor="ctr"/>
           <a:lstStyle/>
           <a:p>
-            <a:pPr algn="r" indent="0" marL="0">
-              <a:buNone/>
-            </a:pPr>
-            <a:r>
-              <a:rPr lang="en-US" sz="900" dirty="0">
-                <a:solidFill>
-                  <a:srgbClr val="53565A"/>
-                </a:solidFill>
-                <a:latin typeface="Poppins" pitchFamily="34" charset="0"/>
-                <a:ea typeface="Poppins" pitchFamily="34" charset="-122"/>
-                <a:cs typeface="Poppins" pitchFamily="34" charset="-120"/>
-              </a:rPr>
-              <a:t>3</a:t>
-            </a:r>
-            <a:endParaRPr lang="en-US" sz="900" dirty="0"/>
+            <a:pPr indent="0" marL="0">
+              <a:buNone/>
+            </a:pPr>
+            <a:r>
+              <a:rPr lang="en-US" sz="950" b="1" dirty="0">
+                <a:solidFill>
+                  <a:srgbClr val="00357A"/>
+                </a:solidFill>
+                <a:latin typeface="Poppins" pitchFamily="34" charset="0"/>
+                <a:ea typeface="Poppins" pitchFamily="34" charset="-122"/>
+                <a:cs typeface="Poppins" pitchFamily="34" charset="-120"/>
+              </a:rPr>
+              <a:t>DSUPDT  •  DEVELOPER &amp; GENERAL USAGE GUIDE</a:t>
+            </a:r>
+            <a:endParaRPr lang="en-US" sz="950" dirty="0"/>
           </a:p>
         </p:txBody>
       </p:sp>
@@ -41063,13 +40790,6 @@
 <file path=ppt/slides/slide5.xml><?xml version="1.0" encoding="utf-8"?>
 <p:sld xmlns:a="http://schemas.openxmlformats.org/drawingml/2006/main" xmlns:r="http://schemas.openxmlformats.org/officeDocument/2006/relationships" xmlns:p="http://schemas.openxmlformats.org/presentationml/2006/main">
   <p:cSld name="Slide 5">
-    <p:bg>
-      <p:bgPr>
-        <a:solidFill>
-          <a:srgbClr val="FFFFFF"/>
-        </a:solidFill>
-      </p:bgPr>
-    </p:bg>
     <p:spTree>
       <p:nvGrpSpPr>
         <p:cNvPr id="1" name=""/>
@@ -42019,8 +41739,8 @@
         </p:nvSpPr>
         <p:spPr>
           <a:xfrm>
-            <a:off x="457200" y="5897880"/>
-            <a:ext cx="11247120" cy="365760"/>
+            <a:off x="457200" y="5815584"/>
+            <a:ext cx="9966960" cy="365760"/>
           </a:xfrm>
           <a:prstGeom prst="rect">
             <a:avLst/>
@@ -42106,40 +41826,16 @@
           </a:p>
         </p:txBody>
       </p:sp>
-      <p:pic>
-        <p:nvPicPr>
-          <p:cNvPr id="23" name="Image 0" descr="nsf_ncar_logo_color.png">    </p:cNvPr>
-          <p:cNvPicPr>
-            <a:picLocks noChangeAspect="1"/>
-          </p:cNvPicPr>
-          <p:nvPr/>
-        </p:nvPicPr>
-        <p:blipFill>
-          <a:blip r:embed="rId1"/>
-          <a:stretch>
-            <a:fillRect/>
-          </a:stretch>
-        </p:blipFill>
-        <p:spPr>
-          <a:xfrm>
-            <a:off x="9951415" y="274320"/>
-            <a:ext cx="1874520" cy="512064"/>
-          </a:xfrm>
-          <a:prstGeom prst="rect">
-            <a:avLst/>
-          </a:prstGeom>
-        </p:spPr>
-      </p:pic>
-      <p:sp>
-        <p:nvSpPr>
-          <p:cNvPr id="24" name="Text 21"/>
-          <p:cNvSpPr/>
-          <p:nvPr/>
-        </p:nvSpPr>
-        <p:spPr>
-          <a:xfrm>
-            <a:off x="457200" y="6473952"/>
-            <a:ext cx="7315200" cy="274320"/>
+      <p:sp>
+        <p:nvSpPr>
+          <p:cNvPr id="23" name="Text 21"/>
+          <p:cNvSpPr/>
+          <p:nvPr/>
+        </p:nvSpPr>
+        <p:spPr>
+          <a:xfrm>
+            <a:off x="256032" y="6446520"/>
+            <a:ext cx="365760" cy="274320"/>
           </a:xfrm>
           <a:prstGeom prst="rect">
             <a:avLst/>
@@ -42151,34 +41847,34 @@
           <a:bodyPr wrap="square" lIns="0" tIns="0" rIns="0" bIns="0" rtlCol="0" anchor="ctr"/>
           <a:lstStyle/>
           <a:p>
-            <a:pPr algn="l" indent="0" marL="0">
-              <a:buNone/>
-            </a:pPr>
-            <a:r>
-              <a:rPr lang="en-US" sz="900" dirty="0">
-                <a:solidFill>
-                  <a:srgbClr val="53565A"/>
-                </a:solidFill>
-                <a:latin typeface="Poppins" pitchFamily="34" charset="0"/>
-                <a:ea typeface="Poppins" pitchFamily="34" charset="-122"/>
-                <a:cs typeface="Poppins" pitchFamily="34" charset="-120"/>
-              </a:rPr>
-              <a:t>dsupdt  •  Developer &amp; General Usage Guide</a:t>
-            </a:r>
-            <a:endParaRPr lang="en-US" sz="900" dirty="0"/>
-          </a:p>
-        </p:txBody>
-      </p:sp>
-      <p:sp>
-        <p:nvSpPr>
-          <p:cNvPr id="25" name="Text 22"/>
-          <p:cNvSpPr/>
-          <p:nvPr/>
-        </p:nvSpPr>
-        <p:spPr>
-          <a:xfrm>
-            <a:off x="11368735" y="6473952"/>
-            <a:ext cx="365760" cy="274320"/>
+            <a:pPr indent="0" marL="0">
+              <a:buNone/>
+            </a:pPr>
+            <a:r>
+              <a:rPr lang="en-US" sz="950" b="1" dirty="0">
+                <a:solidFill>
+                  <a:srgbClr val="00357A"/>
+                </a:solidFill>
+                <a:latin typeface="Poppins" pitchFamily="34" charset="0"/>
+                <a:ea typeface="Poppins" pitchFamily="34" charset="-122"/>
+                <a:cs typeface="Poppins" pitchFamily="34" charset="-120"/>
+              </a:rPr>
+              <a:t>4</a:t>
+            </a:r>
+            <a:endParaRPr lang="en-US" sz="950" dirty="0"/>
+          </a:p>
+        </p:txBody>
+      </p:sp>
+      <p:sp>
+        <p:nvSpPr>
+          <p:cNvPr id="24" name="Text 22"/>
+          <p:cNvSpPr/>
+          <p:nvPr/>
+        </p:nvSpPr>
+        <p:spPr>
+          <a:xfrm>
+            <a:off x="786384" y="6446520"/>
+            <a:ext cx="5486400" cy="274320"/>
           </a:xfrm>
           <a:prstGeom prst="rect">
             <a:avLst/>
@@ -42190,21 +41886,21 @@
           <a:bodyPr wrap="square" lIns="0" tIns="0" rIns="0" bIns="0" rtlCol="0" anchor="ctr"/>
           <a:lstStyle/>
           <a:p>
-            <a:pPr algn="r" indent="0" marL="0">
-              <a:buNone/>
-            </a:pPr>
-            <a:r>
-              <a:rPr lang="en-US" sz="900" dirty="0">
-                <a:solidFill>
-                  <a:srgbClr val="53565A"/>
-                </a:solidFill>
-                <a:latin typeface="Poppins" pitchFamily="34" charset="0"/>
-                <a:ea typeface="Poppins" pitchFamily="34" charset="-122"/>
-                <a:cs typeface="Poppins" pitchFamily="34" charset="-120"/>
-              </a:rPr>
-              <a:t>4</a:t>
-            </a:r>
-            <a:endParaRPr lang="en-US" sz="900" dirty="0"/>
+            <a:pPr indent="0" marL="0">
+              <a:buNone/>
+            </a:pPr>
+            <a:r>
+              <a:rPr lang="en-US" sz="950" b="1" dirty="0">
+                <a:solidFill>
+                  <a:srgbClr val="00357A"/>
+                </a:solidFill>
+                <a:latin typeface="Poppins" pitchFamily="34" charset="0"/>
+                <a:ea typeface="Poppins" pitchFamily="34" charset="-122"/>
+                <a:cs typeface="Poppins" pitchFamily="34" charset="-120"/>
+              </a:rPr>
+              <a:t>DSUPDT  •  DEVELOPER &amp; GENERAL USAGE GUIDE</a:t>
+            </a:r>
+            <a:endParaRPr lang="en-US" sz="950" dirty="0"/>
           </a:p>
         </p:txBody>
       </p:sp>
@@ -42219,13 +41915,6 @@
 <file path=ppt/slides/slide6.xml><?xml version="1.0" encoding="utf-8"?>
 <p:sld xmlns:a="http://schemas.openxmlformats.org/drawingml/2006/main" xmlns:r="http://schemas.openxmlformats.org/officeDocument/2006/relationships" xmlns:p="http://schemas.openxmlformats.org/presentationml/2006/main">
   <p:cSld name="Slide 6">
-    <p:bg>
-      <p:bgPr>
-        <a:solidFill>
-          <a:srgbClr val="FFFFFF"/>
-        </a:solidFill>
-      </p:bgPr>
-    </p:bg>
     <p:spTree>
       <p:nvGrpSpPr>
         <p:cNvPr id="1" name=""/>
@@ -43113,40 +42802,16 @@
           </a:p>
         </p:txBody>
       </p:sp>
-      <p:pic>
-        <p:nvPicPr>
-          <p:cNvPr id="23" name="Image 0" descr="nsf_ncar_logo_color.png">    </p:cNvPr>
-          <p:cNvPicPr>
-            <a:picLocks noChangeAspect="1"/>
-          </p:cNvPicPr>
-          <p:nvPr/>
-        </p:nvPicPr>
-        <p:blipFill>
-          <a:blip r:embed="rId1"/>
-          <a:stretch>
-            <a:fillRect/>
-          </a:stretch>
-        </p:blipFill>
-        <p:spPr>
-          <a:xfrm>
-            <a:off x="9951415" y="274320"/>
-            <a:ext cx="1874520" cy="512064"/>
-          </a:xfrm>
-          <a:prstGeom prst="rect">
-            <a:avLst/>
-          </a:prstGeom>
-        </p:spPr>
-      </p:pic>
-      <p:sp>
-        <p:nvSpPr>
-          <p:cNvPr id="24" name="Text 21"/>
-          <p:cNvSpPr/>
-          <p:nvPr/>
-        </p:nvSpPr>
-        <p:spPr>
-          <a:xfrm>
-            <a:off x="457200" y="6473952"/>
-            <a:ext cx="7315200" cy="274320"/>
+      <p:sp>
+        <p:nvSpPr>
+          <p:cNvPr id="23" name="Text 21"/>
+          <p:cNvSpPr/>
+          <p:nvPr/>
+        </p:nvSpPr>
+        <p:spPr>
+          <a:xfrm>
+            <a:off x="256032" y="6446520"/>
+            <a:ext cx="365760" cy="274320"/>
           </a:xfrm>
           <a:prstGeom prst="rect">
             <a:avLst/>
@@ -43158,34 +42823,34 @@
           <a:bodyPr wrap="square" lIns="0" tIns="0" rIns="0" bIns="0" rtlCol="0" anchor="ctr"/>
           <a:lstStyle/>
           <a:p>
-            <a:pPr algn="l" indent="0" marL="0">
-              <a:buNone/>
-            </a:pPr>
-            <a:r>
-              <a:rPr lang="en-US" sz="900" dirty="0">
-                <a:solidFill>
-                  <a:srgbClr val="53565A"/>
-                </a:solidFill>
-                <a:latin typeface="Poppins" pitchFamily="34" charset="0"/>
-                <a:ea typeface="Poppins" pitchFamily="34" charset="-122"/>
-                <a:cs typeface="Poppins" pitchFamily="34" charset="-120"/>
-              </a:rPr>
-              <a:t>dsupdt  •  Developer &amp; General Usage Guide</a:t>
-            </a:r>
-            <a:endParaRPr lang="en-US" sz="900" dirty="0"/>
-          </a:p>
-        </p:txBody>
-      </p:sp>
-      <p:sp>
-        <p:nvSpPr>
-          <p:cNvPr id="25" name="Text 22"/>
-          <p:cNvSpPr/>
-          <p:nvPr/>
-        </p:nvSpPr>
-        <p:spPr>
-          <a:xfrm>
-            <a:off x="11368735" y="6473952"/>
-            <a:ext cx="365760" cy="274320"/>
+            <a:pPr indent="0" marL="0">
+              <a:buNone/>
+            </a:pPr>
+            <a:r>
+              <a:rPr lang="en-US" sz="950" b="1" dirty="0">
+                <a:solidFill>
+                  <a:srgbClr val="00357A"/>
+                </a:solidFill>
+                <a:latin typeface="Poppins" pitchFamily="34" charset="0"/>
+                <a:ea typeface="Poppins" pitchFamily="34" charset="-122"/>
+                <a:cs typeface="Poppins" pitchFamily="34" charset="-120"/>
+              </a:rPr>
+              <a:t>5</a:t>
+            </a:r>
+            <a:endParaRPr lang="en-US" sz="950" dirty="0"/>
+          </a:p>
+        </p:txBody>
+      </p:sp>
+      <p:sp>
+        <p:nvSpPr>
+          <p:cNvPr id="24" name="Text 22"/>
+          <p:cNvSpPr/>
+          <p:nvPr/>
+        </p:nvSpPr>
+        <p:spPr>
+          <a:xfrm>
+            <a:off x="786384" y="6446520"/>
+            <a:ext cx="5486400" cy="274320"/>
           </a:xfrm>
           <a:prstGeom prst="rect">
             <a:avLst/>
@@ -43197,21 +42862,21 @@
           <a:bodyPr wrap="square" lIns="0" tIns="0" rIns="0" bIns="0" rtlCol="0" anchor="ctr"/>
           <a:lstStyle/>
           <a:p>
-            <a:pPr algn="r" indent="0" marL="0">
-              <a:buNone/>
-            </a:pPr>
-            <a:r>
-              <a:rPr lang="en-US" sz="900" dirty="0">
-                <a:solidFill>
-                  <a:srgbClr val="53565A"/>
-                </a:solidFill>
-                <a:latin typeface="Poppins" pitchFamily="34" charset="0"/>
-                <a:ea typeface="Poppins" pitchFamily="34" charset="-122"/>
-                <a:cs typeface="Poppins" pitchFamily="34" charset="-120"/>
-              </a:rPr>
-              <a:t>5</a:t>
-            </a:r>
-            <a:endParaRPr lang="en-US" sz="900" dirty="0"/>
+            <a:pPr indent="0" marL="0">
+              <a:buNone/>
+            </a:pPr>
+            <a:r>
+              <a:rPr lang="en-US" sz="950" b="1" dirty="0">
+                <a:solidFill>
+                  <a:srgbClr val="00357A"/>
+                </a:solidFill>
+                <a:latin typeface="Poppins" pitchFamily="34" charset="0"/>
+                <a:ea typeface="Poppins" pitchFamily="34" charset="-122"/>
+                <a:cs typeface="Poppins" pitchFamily="34" charset="-120"/>
+              </a:rPr>
+              <a:t>DSUPDT  •  DEVELOPER &amp; GENERAL USAGE GUIDE</a:t>
+            </a:r>
+            <a:endParaRPr lang="en-US" sz="950" dirty="0"/>
           </a:p>
         </p:txBody>
       </p:sp>
@@ -43226,13 +42891,6 @@
 <file path=ppt/slides/slide7.xml><?xml version="1.0" encoding="utf-8"?>
 <p:sld xmlns:a="http://schemas.openxmlformats.org/drawingml/2006/main" xmlns:r="http://schemas.openxmlformats.org/officeDocument/2006/relationships" xmlns:p="http://schemas.openxmlformats.org/presentationml/2006/main">
   <p:cSld name="Slide 7">
-    <p:bg>
-      <p:bgPr>
-        <a:solidFill>
-          <a:srgbClr val="FFFFFF"/>
-        </a:solidFill>
-      </p:bgPr>
-    </p:bg>
     <p:spTree>
       <p:nvGrpSpPr>
         <p:cNvPr id="1" name=""/>
@@ -44491,8 +44149,8 @@
         </p:nvSpPr>
         <p:spPr>
           <a:xfrm>
-            <a:off x="457200" y="5943600"/>
-            <a:ext cx="11247120" cy="365760"/>
+            <a:off x="457200" y="5815584"/>
+            <a:ext cx="9966960" cy="365760"/>
           </a:xfrm>
           <a:prstGeom prst="rect">
             <a:avLst/>
@@ -44508,7 +44166,7 @@
               <a:buNone/>
             </a:pPr>
             <a:r>
-              <a:rPr lang="en-US" sz="1300" b="1" dirty="0">
+              <a:rPr lang="en-US" sz="1150" b="1" dirty="0">
                 <a:solidFill>
                   <a:srgbClr val="C25E00"/>
                 </a:solidFill>
@@ -44522,7 +44180,7 @@
               <a:buNone/>
             </a:pPr>
             <a:r>
-              <a:rPr lang="en-US" sz="1300" dirty="0">
+              <a:rPr lang="en-US" sz="1150" dirty="0">
                 <a:solidFill>
                   <a:srgbClr val="00357A"/>
                 </a:solidFill>
@@ -44536,7 +44194,7 @@
               <a:buNone/>
             </a:pPr>
             <a:r>
-              <a:rPr lang="en-US" sz="1300" b="1" dirty="0">
+              <a:rPr lang="en-US" sz="1150" b="1" dirty="0">
                 <a:solidFill>
                   <a:srgbClr val="00357A"/>
                 </a:solidFill>
@@ -44550,7 +44208,7 @@
               <a:buNone/>
             </a:pPr>
             <a:r>
-              <a:rPr lang="en-US" sz="1300" dirty="0">
+              <a:rPr lang="en-US" sz="1150" dirty="0">
                 <a:solidFill>
                   <a:srgbClr val="00357A"/>
                 </a:solidFill>
@@ -44564,7 +44222,7 @@
               <a:buNone/>
             </a:pPr>
             <a:r>
-              <a:rPr lang="en-US" sz="1300" b="1" dirty="0">
+              <a:rPr lang="en-US" sz="1150" b="1" dirty="0">
                 <a:solidFill>
                   <a:srgbClr val="00357A"/>
                 </a:solidFill>
@@ -44578,7 +44236,7 @@
               <a:buNone/>
             </a:pPr>
             <a:r>
-              <a:rPr lang="en-US" sz="1300" dirty="0">
+              <a:rPr lang="en-US" sz="1150" dirty="0">
                 <a:solidFill>
                   <a:srgbClr val="00357A"/>
                 </a:solidFill>
@@ -44592,7 +44250,7 @@
               <a:buNone/>
             </a:pPr>
             <a:r>
-              <a:rPr lang="en-US" sz="1300" b="1" dirty="0">
+              <a:rPr lang="en-US" sz="1150" b="1" dirty="0">
                 <a:solidFill>
                   <a:srgbClr val="00357A"/>
                 </a:solidFill>
@@ -44606,7 +44264,7 @@
               <a:buNone/>
             </a:pPr>
             <a:r>
-              <a:rPr lang="en-US" sz="1300" dirty="0">
+              <a:rPr lang="en-US" sz="1150" dirty="0">
                 <a:solidFill>
                   <a:srgbClr val="00357A"/>
                 </a:solidFill>
@@ -44616,44 +44274,20 @@
               </a:rPr>
               <a:t>  on Get actions to list records across all of your datasets.</a:t>
             </a:r>
-            <a:endParaRPr lang="en-US" sz="1300" dirty="0"/>
-          </a:p>
-        </p:txBody>
-      </p:sp>
-      <p:pic>
-        <p:nvPicPr>
-          <p:cNvPr id="41" name="Image 0" descr="nsf_ncar_logo_color.png">    </p:cNvPr>
-          <p:cNvPicPr>
-            <a:picLocks noChangeAspect="1"/>
-          </p:cNvPicPr>
-          <p:nvPr/>
-        </p:nvPicPr>
-        <p:blipFill>
-          <a:blip r:embed="rId1"/>
-          <a:stretch>
-            <a:fillRect/>
-          </a:stretch>
-        </p:blipFill>
-        <p:spPr>
-          <a:xfrm>
-            <a:off x="9951415" y="274320"/>
-            <a:ext cx="1874520" cy="512064"/>
-          </a:xfrm>
-          <a:prstGeom prst="rect">
-            <a:avLst/>
-          </a:prstGeom>
-        </p:spPr>
-      </p:pic>
-      <p:sp>
-        <p:nvSpPr>
-          <p:cNvPr id="42" name="Text 39"/>
-          <p:cNvSpPr/>
-          <p:nvPr/>
-        </p:nvSpPr>
-        <p:spPr>
-          <a:xfrm>
-            <a:off x="457200" y="6473952"/>
-            <a:ext cx="7315200" cy="274320"/>
+            <a:endParaRPr lang="en-US" sz="1150" dirty="0"/>
+          </a:p>
+        </p:txBody>
+      </p:sp>
+      <p:sp>
+        <p:nvSpPr>
+          <p:cNvPr id="41" name="Text 39"/>
+          <p:cNvSpPr/>
+          <p:nvPr/>
+        </p:nvSpPr>
+        <p:spPr>
+          <a:xfrm>
+            <a:off x="256032" y="6446520"/>
+            <a:ext cx="365760" cy="274320"/>
           </a:xfrm>
           <a:prstGeom prst="rect">
             <a:avLst/>
@@ -44665,34 +44299,34 @@
           <a:bodyPr wrap="square" lIns="0" tIns="0" rIns="0" bIns="0" rtlCol="0" anchor="ctr"/>
           <a:lstStyle/>
           <a:p>
-            <a:pPr algn="l" indent="0" marL="0">
-              <a:buNone/>
-            </a:pPr>
-            <a:r>
-              <a:rPr lang="en-US" sz="900" dirty="0">
-                <a:solidFill>
-                  <a:srgbClr val="53565A"/>
-                </a:solidFill>
-                <a:latin typeface="Poppins" pitchFamily="34" charset="0"/>
-                <a:ea typeface="Poppins" pitchFamily="34" charset="-122"/>
-                <a:cs typeface="Poppins" pitchFamily="34" charset="-120"/>
-              </a:rPr>
-              <a:t>dsupdt  •  Developer &amp; General Usage Guide</a:t>
-            </a:r>
-            <a:endParaRPr lang="en-US" sz="900" dirty="0"/>
-          </a:p>
-        </p:txBody>
-      </p:sp>
-      <p:sp>
-        <p:nvSpPr>
-          <p:cNvPr id="43" name="Text 40"/>
-          <p:cNvSpPr/>
-          <p:nvPr/>
-        </p:nvSpPr>
-        <p:spPr>
-          <a:xfrm>
-            <a:off x="11368735" y="6473952"/>
-            <a:ext cx="365760" cy="274320"/>
+            <a:pPr indent="0" marL="0">
+              <a:buNone/>
+            </a:pPr>
+            <a:r>
+              <a:rPr lang="en-US" sz="950" b="1" dirty="0">
+                <a:solidFill>
+                  <a:srgbClr val="00357A"/>
+                </a:solidFill>
+                <a:latin typeface="Poppins" pitchFamily="34" charset="0"/>
+                <a:ea typeface="Poppins" pitchFamily="34" charset="-122"/>
+                <a:cs typeface="Poppins" pitchFamily="34" charset="-120"/>
+              </a:rPr>
+              <a:t>6</a:t>
+            </a:r>
+            <a:endParaRPr lang="en-US" sz="950" dirty="0"/>
+          </a:p>
+        </p:txBody>
+      </p:sp>
+      <p:sp>
+        <p:nvSpPr>
+          <p:cNvPr id="42" name="Text 40"/>
+          <p:cNvSpPr/>
+          <p:nvPr/>
+        </p:nvSpPr>
+        <p:spPr>
+          <a:xfrm>
+            <a:off x="786384" y="6446520"/>
+            <a:ext cx="5486400" cy="274320"/>
           </a:xfrm>
           <a:prstGeom prst="rect">
             <a:avLst/>
@@ -44704,21 +44338,21 @@
           <a:bodyPr wrap="square" lIns="0" tIns="0" rIns="0" bIns="0" rtlCol="0" anchor="ctr"/>
           <a:lstStyle/>
           <a:p>
-            <a:pPr algn="r" indent="0" marL="0">
-              <a:buNone/>
-            </a:pPr>
-            <a:r>
-              <a:rPr lang="en-US" sz="900" dirty="0">
-                <a:solidFill>
-                  <a:srgbClr val="53565A"/>
-                </a:solidFill>
-                <a:latin typeface="Poppins" pitchFamily="34" charset="0"/>
-                <a:ea typeface="Poppins" pitchFamily="34" charset="-122"/>
-                <a:cs typeface="Poppins" pitchFamily="34" charset="-120"/>
-              </a:rPr>
-              <a:t>6</a:t>
-            </a:r>
-            <a:endParaRPr lang="en-US" sz="900" dirty="0"/>
+            <a:pPr indent="0" marL="0">
+              <a:buNone/>
+            </a:pPr>
+            <a:r>
+              <a:rPr lang="en-US" sz="950" b="1" dirty="0">
+                <a:solidFill>
+                  <a:srgbClr val="00357A"/>
+                </a:solidFill>
+                <a:latin typeface="Poppins" pitchFamily="34" charset="0"/>
+                <a:ea typeface="Poppins" pitchFamily="34" charset="-122"/>
+                <a:cs typeface="Poppins" pitchFamily="34" charset="-120"/>
+              </a:rPr>
+              <a:t>DSUPDT  •  DEVELOPER &amp; GENERAL USAGE GUIDE</a:t>
+            </a:r>
+            <a:endParaRPr lang="en-US" sz="950" dirty="0"/>
           </a:p>
         </p:txBody>
       </p:sp>
@@ -44733,13 +44367,6 @@
 <file path=ppt/slides/slide8.xml><?xml version="1.0" encoding="utf-8"?>
 <p:sld xmlns:a="http://schemas.openxmlformats.org/drawingml/2006/main" xmlns:r="http://schemas.openxmlformats.org/officeDocument/2006/relationships" xmlns:p="http://schemas.openxmlformats.org/presentationml/2006/main">
   <p:cSld name="Slide 8">
-    <p:bg>
-      <p:bgPr>
-        <a:solidFill>
-          <a:srgbClr val="FFFFFF"/>
-        </a:solidFill>
-      </p:bgPr>
-    </p:bg>
     <p:spTree>
       <p:nvGrpSpPr>
         <p:cNvPr id="1" name=""/>
@@ -46050,40 +45677,16 @@
           </a:p>
         </p:txBody>
       </p:sp>
-      <p:pic>
-        <p:nvPicPr>
-          <p:cNvPr id="39" name="Image 0" descr="nsf_ncar_logo_color.png">    </p:cNvPr>
-          <p:cNvPicPr>
-            <a:picLocks noChangeAspect="1"/>
-          </p:cNvPicPr>
-          <p:nvPr/>
-        </p:nvPicPr>
-        <p:blipFill>
-          <a:blip r:embed="rId1"/>
-          <a:stretch>
-            <a:fillRect/>
-          </a:stretch>
-        </p:blipFill>
-        <p:spPr>
-          <a:xfrm>
-            <a:off x="9951415" y="274320"/>
-            <a:ext cx="1874520" cy="512064"/>
-          </a:xfrm>
-          <a:prstGeom prst="rect">
-            <a:avLst/>
-          </a:prstGeom>
-        </p:spPr>
-      </p:pic>
-      <p:sp>
-        <p:nvSpPr>
-          <p:cNvPr id="40" name="Text 37"/>
-          <p:cNvSpPr/>
-          <p:nvPr/>
-        </p:nvSpPr>
-        <p:spPr>
-          <a:xfrm>
-            <a:off x="457200" y="6473952"/>
-            <a:ext cx="7315200" cy="274320"/>
+      <p:sp>
+        <p:nvSpPr>
+          <p:cNvPr id="39" name="Text 37"/>
+          <p:cNvSpPr/>
+          <p:nvPr/>
+        </p:nvSpPr>
+        <p:spPr>
+          <a:xfrm>
+            <a:off x="256032" y="6446520"/>
+            <a:ext cx="365760" cy="274320"/>
           </a:xfrm>
           <a:prstGeom prst="rect">
             <a:avLst/>
@@ -46095,34 +45698,34 @@
           <a:bodyPr wrap="square" lIns="0" tIns="0" rIns="0" bIns="0" rtlCol="0" anchor="ctr"/>
           <a:lstStyle/>
           <a:p>
-            <a:pPr algn="l" indent="0" marL="0">
-              <a:buNone/>
-            </a:pPr>
-            <a:r>
-              <a:rPr lang="en-US" sz="900" dirty="0">
-                <a:solidFill>
-                  <a:srgbClr val="53565A"/>
-                </a:solidFill>
-                <a:latin typeface="Poppins" pitchFamily="34" charset="0"/>
-                <a:ea typeface="Poppins" pitchFamily="34" charset="-122"/>
-                <a:cs typeface="Poppins" pitchFamily="34" charset="-120"/>
-              </a:rPr>
-              <a:t>dsupdt  •  Developer &amp; General Usage Guide</a:t>
-            </a:r>
-            <a:endParaRPr lang="en-US" sz="900" dirty="0"/>
-          </a:p>
-        </p:txBody>
-      </p:sp>
-      <p:sp>
-        <p:nvSpPr>
-          <p:cNvPr id="41" name="Text 38"/>
-          <p:cNvSpPr/>
-          <p:nvPr/>
-        </p:nvSpPr>
-        <p:spPr>
-          <a:xfrm>
-            <a:off x="11368735" y="6473952"/>
-            <a:ext cx="365760" cy="274320"/>
+            <a:pPr indent="0" marL="0">
+              <a:buNone/>
+            </a:pPr>
+            <a:r>
+              <a:rPr lang="en-US" sz="950" b="1" dirty="0">
+                <a:solidFill>
+                  <a:srgbClr val="00357A"/>
+                </a:solidFill>
+                <a:latin typeface="Poppins" pitchFamily="34" charset="0"/>
+                <a:ea typeface="Poppins" pitchFamily="34" charset="-122"/>
+                <a:cs typeface="Poppins" pitchFamily="34" charset="-120"/>
+              </a:rPr>
+              <a:t>7</a:t>
+            </a:r>
+            <a:endParaRPr lang="en-US" sz="950" dirty="0"/>
+          </a:p>
+        </p:txBody>
+      </p:sp>
+      <p:sp>
+        <p:nvSpPr>
+          <p:cNvPr id="40" name="Text 38"/>
+          <p:cNvSpPr/>
+          <p:nvPr/>
+        </p:nvSpPr>
+        <p:spPr>
+          <a:xfrm>
+            <a:off x="786384" y="6446520"/>
+            <a:ext cx="5486400" cy="274320"/>
           </a:xfrm>
           <a:prstGeom prst="rect">
             <a:avLst/>
@@ -46134,21 +45737,21 @@
           <a:bodyPr wrap="square" lIns="0" tIns="0" rIns="0" bIns="0" rtlCol="0" anchor="ctr"/>
           <a:lstStyle/>
           <a:p>
-            <a:pPr algn="r" indent="0" marL="0">
-              <a:buNone/>
-            </a:pPr>
-            <a:r>
-              <a:rPr lang="en-US" sz="900" dirty="0">
-                <a:solidFill>
-                  <a:srgbClr val="53565A"/>
-                </a:solidFill>
-                <a:latin typeface="Poppins" pitchFamily="34" charset="0"/>
-                <a:ea typeface="Poppins" pitchFamily="34" charset="-122"/>
-                <a:cs typeface="Poppins" pitchFamily="34" charset="-120"/>
-              </a:rPr>
-              <a:t>7</a:t>
-            </a:r>
-            <a:endParaRPr lang="en-US" sz="900" dirty="0"/>
+            <a:pPr indent="0" marL="0">
+              <a:buNone/>
+            </a:pPr>
+            <a:r>
+              <a:rPr lang="en-US" sz="950" b="1" dirty="0">
+                <a:solidFill>
+                  <a:srgbClr val="00357A"/>
+                </a:solidFill>
+                <a:latin typeface="Poppins" pitchFamily="34" charset="0"/>
+                <a:ea typeface="Poppins" pitchFamily="34" charset="-122"/>
+                <a:cs typeface="Poppins" pitchFamily="34" charset="-120"/>
+              </a:rPr>
+              <a:t>DSUPDT  •  DEVELOPER &amp; GENERAL USAGE GUIDE</a:t>
+            </a:r>
+            <a:endParaRPr lang="en-US" sz="950" dirty="0"/>
           </a:p>
         </p:txBody>
       </p:sp>
@@ -46163,13 +45766,6 @@
 <file path=ppt/slides/slide9.xml><?xml version="1.0" encoding="utf-8"?>
 <p:sld xmlns:a="http://schemas.openxmlformats.org/drawingml/2006/main" xmlns:r="http://schemas.openxmlformats.org/officeDocument/2006/relationships" xmlns:p="http://schemas.openxmlformats.org/presentationml/2006/main">
   <p:cSld name="Slide 9">
-    <p:bg>
-      <p:bgPr>
-        <a:solidFill>
-          <a:srgbClr val="FFFFFF"/>
-        </a:solidFill>
-      </p:bgPr>
-    </p:bg>
     <p:spTree>
       <p:nvGrpSpPr>
         <p:cNvPr id="1" name=""/>
@@ -47344,40 +46940,16 @@
           </a:p>
         </p:txBody>
       </p:sp>
-      <p:pic>
-        <p:nvPicPr>
-          <p:cNvPr id="32" name="Image 0" descr="nsf_ncar_logo_color.png">    </p:cNvPr>
-          <p:cNvPicPr>
-            <a:picLocks noChangeAspect="1"/>
-          </p:cNvPicPr>
-          <p:nvPr/>
-        </p:nvPicPr>
-        <p:blipFill>
-          <a:blip r:embed="rId1"/>
-          <a:stretch>
-            <a:fillRect/>
-          </a:stretch>
-        </p:blipFill>
-        <p:spPr>
-          <a:xfrm>
-            <a:off x="9951415" y="274320"/>
-            <a:ext cx="1874520" cy="512064"/>
-          </a:xfrm>
-          <a:prstGeom prst="rect">
-            <a:avLst/>
-          </a:prstGeom>
-        </p:spPr>
-      </p:pic>
-      <p:sp>
-        <p:nvSpPr>
-          <p:cNvPr id="33" name="Text 30"/>
-          <p:cNvSpPr/>
-          <p:nvPr/>
-        </p:nvSpPr>
-        <p:spPr>
-          <a:xfrm>
-            <a:off x="457200" y="6473952"/>
-            <a:ext cx="7315200" cy="274320"/>
+      <p:sp>
+        <p:nvSpPr>
+          <p:cNvPr id="32" name="Text 30"/>
+          <p:cNvSpPr/>
+          <p:nvPr/>
+        </p:nvSpPr>
+        <p:spPr>
+          <a:xfrm>
+            <a:off x="256032" y="6446520"/>
+            <a:ext cx="365760" cy="274320"/>
           </a:xfrm>
           <a:prstGeom prst="rect">
             <a:avLst/>
@@ -47389,34 +46961,34 @@
           <a:bodyPr wrap="square" lIns="0" tIns="0" rIns="0" bIns="0" rtlCol="0" anchor="ctr"/>
           <a:lstStyle/>
           <a:p>
-            <a:pPr algn="l" indent="0" marL="0">
-              <a:buNone/>
-            </a:pPr>
-            <a:r>
-              <a:rPr lang="en-US" sz="900" dirty="0">
-                <a:solidFill>
-                  <a:srgbClr val="53565A"/>
-                </a:solidFill>
-                <a:latin typeface="Poppins" pitchFamily="34" charset="0"/>
-                <a:ea typeface="Poppins" pitchFamily="34" charset="-122"/>
-                <a:cs typeface="Poppins" pitchFamily="34" charset="-120"/>
-              </a:rPr>
-              <a:t>dsupdt  •  Developer &amp; General Usage Guide</a:t>
-            </a:r>
-            <a:endParaRPr lang="en-US" sz="900" dirty="0"/>
-          </a:p>
-        </p:txBody>
-      </p:sp>
-      <p:sp>
-        <p:nvSpPr>
-          <p:cNvPr id="34" name="Text 31"/>
-          <p:cNvSpPr/>
-          <p:nvPr/>
-        </p:nvSpPr>
-        <p:spPr>
-          <a:xfrm>
-            <a:off x="11368735" y="6473952"/>
-            <a:ext cx="365760" cy="274320"/>
+            <a:pPr indent="0" marL="0">
+              <a:buNone/>
+            </a:pPr>
+            <a:r>
+              <a:rPr lang="en-US" sz="950" b="1" dirty="0">
+                <a:solidFill>
+                  <a:srgbClr val="00357A"/>
+                </a:solidFill>
+                <a:latin typeface="Poppins" pitchFamily="34" charset="0"/>
+                <a:ea typeface="Poppins" pitchFamily="34" charset="-122"/>
+                <a:cs typeface="Poppins" pitchFamily="34" charset="-120"/>
+              </a:rPr>
+              <a:t>8</a:t>
+            </a:r>
+            <a:endParaRPr lang="en-US" sz="950" dirty="0"/>
+          </a:p>
+        </p:txBody>
+      </p:sp>
+      <p:sp>
+        <p:nvSpPr>
+          <p:cNvPr id="33" name="Text 31"/>
+          <p:cNvSpPr/>
+          <p:nvPr/>
+        </p:nvSpPr>
+        <p:spPr>
+          <a:xfrm>
+            <a:off x="786384" y="6446520"/>
+            <a:ext cx="5486400" cy="274320"/>
           </a:xfrm>
           <a:prstGeom prst="rect">
             <a:avLst/>
@@ -47428,21 +47000,21 @@
           <a:bodyPr wrap="square" lIns="0" tIns="0" rIns="0" bIns="0" rtlCol="0" anchor="ctr"/>
           <a:lstStyle/>
           <a:p>
-            <a:pPr algn="r" indent="0" marL="0">
-              <a:buNone/>
-            </a:pPr>
-            <a:r>
-              <a:rPr lang="en-US" sz="900" dirty="0">
-                <a:solidFill>
-                  <a:srgbClr val="53565A"/>
-                </a:solidFill>
-                <a:latin typeface="Poppins" pitchFamily="34" charset="0"/>
-                <a:ea typeface="Poppins" pitchFamily="34" charset="-122"/>
-                <a:cs typeface="Poppins" pitchFamily="34" charset="-120"/>
-              </a:rPr>
-              <a:t>8</a:t>
-            </a:r>
-            <a:endParaRPr lang="en-US" sz="900" dirty="0"/>
+            <a:pPr indent="0" marL="0">
+              <a:buNone/>
+            </a:pPr>
+            <a:r>
+              <a:rPr lang="en-US" sz="950" b="1" dirty="0">
+                <a:solidFill>
+                  <a:srgbClr val="00357A"/>
+                </a:solidFill>
+                <a:latin typeface="Poppins" pitchFamily="34" charset="0"/>
+                <a:ea typeface="Poppins" pitchFamily="34" charset="-122"/>
+                <a:cs typeface="Poppins" pitchFamily="34" charset="-120"/>
+              </a:rPr>
+              <a:t>DSUPDT  •  DEVELOPER &amp; GENERAL USAGE GUIDE</a:t>
+            </a:r>
+            <a:endParaRPr lang="en-US" sz="950" dirty="0"/>
           </a:p>
         </p:txBody>
       </p:sp>

--- a/docs/slides/dsupdt_guide.pptx
+++ b/docs/slides/dsupdt_guide.pptx
@@ -5451,7 +5451,7 @@
                           <a:ea typeface="Poppins" pitchFamily="34" charset="-122"/>
                           <a:cs typeface="Poppins" pitchFamily="34" charset="-120"/>
                         </a:rPr>
-                        <a:t>how long remote files stay valid</a:t>
+                        <a:t>validating window for re-checking archived files</a:t>
                       </a:r>
                       <a:endParaRPr lang="en-US" sz="1250" dirty="0">
                         <a:latin typeface="Poppins" charset="0"/>
@@ -5863,7 +5863,7 @@
                           <a:ea typeface="Poppins" pitchFamily="34" charset="-122"/>
                           <a:cs typeface="Poppins" pitchFamily="34" charset="-120"/>
                         </a:rPr>
-                        <a:t>preset modes: B C E F G M N O Y Z</a:t>
+                        <a:t>one letter per preset Mode option: A B C E F G M N O Y Z — see “Key Mode Options at a Glance”</a:t>
                       </a:r>
                       <a:endParaRPr lang="en-US" sz="1250" dirty="0">
                         <a:latin typeface="Poppins" charset="0"/>
@@ -31834,22 +31834,3907 @@
       </p:sp>
       <p:sp>
         <p:nvSpPr>
-          <p:cNvPr id="4" name="Shape 2"/>
-          <p:cNvSpPr/>
-          <p:nvPr/>
-        </p:nvSpPr>
-        <p:spPr>
-          <a:xfrm>
-            <a:off x="457200" y="1600200"/>
-            <a:ext cx="3703320" cy="566928"/>
+          <p:cNvPr id="4" name="Text 2"/>
+          <p:cNvSpPr/>
+          <p:nvPr/>
+        </p:nvSpPr>
+        <p:spPr>
+          <a:xfrm>
+            <a:off x="457200" y="1344168"/>
+            <a:ext cx="11247120" cy="292608"/>
+          </a:xfrm>
+          <a:prstGeom prst="rect">
+            <a:avLst/>
+          </a:prstGeom>
+          <a:noFill/>
+          <a:ln/>
+        </p:spPr>
+        <p:txBody>
+          <a:bodyPr wrap="square" lIns="0" tIns="0" rIns="0" bIns="0" rtlCol="0" anchor="ctr"/>
+          <a:lstStyle/>
+          <a:p>
+            <a:pPr indent="0" marL="0">
+              <a:buNone/>
+            </a:pPr>
+            <a:r>
+              <a:rPr lang="en-US" sz="1300" dirty="0">
+                <a:solidFill>
+                  <a:srgbClr val="00357A"/>
+                </a:solidFill>
+                <a:latin typeface="Poppins" pitchFamily="34" charset="0"/>
+                <a:ea typeface="Poppins" pitchFamily="34" charset="-122"/>
+                <a:cs typeface="Poppins" pitchFamily="34" charset="-120"/>
+              </a:rPr>
+              <a:t>Every mode below can be given on the command line.  The left group can also be </a:t>
+            </a:r>
+            <a:pPr indent="0" marL="0">
+              <a:buNone/>
+            </a:pPr>
+            <a:r>
+              <a:rPr lang="en-US" sz="1300" b="1" dirty="0">
+                <a:solidFill>
+                  <a:srgbClr val="0057C2"/>
+                </a:solidFill>
+                <a:latin typeface="Poppins" pitchFamily="34" charset="0"/>
+                <a:ea typeface="Poppins" pitchFamily="34" charset="-122"/>
+                <a:cs typeface="Poppins" pitchFamily="34" charset="-120"/>
+              </a:rPr>
+              <a:t>preset per control record</a:t>
+            </a:r>
+            <a:pPr indent="0" marL="0">
+              <a:buNone/>
+            </a:pPr>
+            <a:r>
+              <a:rPr lang="en-US" sz="1300" dirty="0">
+                <a:solidFill>
+                  <a:srgbClr val="00357A"/>
+                </a:solidFill>
+                <a:latin typeface="Poppins" pitchFamily="34" charset="0"/>
+                <a:ea typeface="Poppins" pitchFamily="34" charset="-122"/>
+                <a:cs typeface="Poppins" pitchFamily="34" charset="-120"/>
+              </a:rPr>
+              <a:t> — each is one letter of </a:t>
+            </a:r>
+            <a:pPr indent="0" marL="0">
+              <a:buNone/>
+            </a:pPr>
+            <a:r>
+              <a:rPr lang="en-US" sz="1300" b="1" dirty="0">
+                <a:solidFill>
+                  <a:srgbClr val="0057C2"/>
+                </a:solidFill>
+                <a:latin typeface="Courier New" pitchFamily="34" charset="0"/>
+                <a:ea typeface="Courier New" pitchFamily="34" charset="-122"/>
+                <a:cs typeface="Courier New" pitchFamily="34" charset="-120"/>
+              </a:rPr>
+              <a:t>-UC</a:t>
+            </a:r>
+            <a:pPr indent="0" marL="0">
+              <a:buNone/>
+            </a:pPr>
+            <a:r>
+              <a:rPr lang="en-US" sz="1300" dirty="0">
+                <a:solidFill>
+                  <a:srgbClr val="00357A"/>
+                </a:solidFill>
+                <a:latin typeface="Poppins" pitchFamily="34" charset="0"/>
+                <a:ea typeface="Poppins" pitchFamily="34" charset="-122"/>
+                <a:cs typeface="Poppins" pitchFamily="34" charset="-120"/>
+              </a:rPr>
+              <a:t> (UpdateControl) on the </a:t>
+            </a:r>
+            <a:pPr indent="0" marL="0">
+              <a:buNone/>
+            </a:pPr>
+            <a:r>
+              <a:rPr lang="en-US" sz="1300" b="1" dirty="0">
+                <a:solidFill>
+                  <a:srgbClr val="00357A"/>
+                </a:solidFill>
+                <a:latin typeface="Courier New" pitchFamily="34" charset="0"/>
+                <a:ea typeface="Courier New" pitchFamily="34" charset="-122"/>
+                <a:cs typeface="Courier New" pitchFamily="34" charset="-120"/>
+              </a:rPr>
+              <a:t>-SC</a:t>
+            </a:r>
+            <a:pPr indent="0" marL="0">
+              <a:buNone/>
+            </a:pPr>
+            <a:r>
+              <a:rPr lang="en-US" sz="1300" dirty="0">
+                <a:solidFill>
+                  <a:srgbClr val="00357A"/>
+                </a:solidFill>
+                <a:latin typeface="Poppins" pitchFamily="34" charset="0"/>
+                <a:ea typeface="Poppins" pitchFamily="34" charset="-122"/>
+                <a:cs typeface="Poppins" pitchFamily="34" charset="-120"/>
+              </a:rPr>
+              <a:t> record.</a:t>
+            </a:r>
+            <a:endParaRPr lang="en-US" sz="1300" dirty="0"/>
+          </a:p>
+        </p:txBody>
+      </p:sp>
+      <p:sp>
+        <p:nvSpPr>
+          <p:cNvPr id="5" name="Shape 3"/>
+          <p:cNvSpPr/>
+          <p:nvPr/>
+        </p:nvSpPr>
+        <p:spPr>
+          <a:xfrm>
+            <a:off x="457200" y="1737360"/>
+            <a:ext cx="5532120" cy="329184"/>
           </a:xfrm>
           <a:prstGeom prst="roundRect">
             <a:avLst>
-              <a:gd name="adj" fmla="val 9677"/>
+              <a:gd name="adj" fmla="val 13889"/>
+            </a:avLst>
+          </a:prstGeom>
+          <a:solidFill>
+            <a:srgbClr val="0057C2"/>
+          </a:solidFill>
+          <a:ln/>
+        </p:spPr>
+      </p:sp>
+      <p:sp>
+        <p:nvSpPr>
+          <p:cNvPr id="6" name="Text 4"/>
+          <p:cNvSpPr/>
+          <p:nvPr/>
+        </p:nvSpPr>
+        <p:spPr>
+          <a:xfrm>
+            <a:off x="585216" y="1737360"/>
+            <a:ext cx="5276088" cy="329184"/>
+          </a:xfrm>
+          <a:prstGeom prst="rect">
+            <a:avLst/>
+          </a:prstGeom>
+          <a:noFill/>
+          <a:ln/>
+        </p:spPr>
+        <p:txBody>
+          <a:bodyPr wrap="square" lIns="0" tIns="0" rIns="0" bIns="0" rtlCol="0" anchor="ctr"/>
+          <a:lstStyle/>
+          <a:p>
+            <a:pPr indent="0" marL="0">
+              <a:buNone/>
+            </a:pPr>
+            <a:r>
+              <a:rPr lang="en-US" sz="1200" b="1" dirty="0">
+                <a:solidFill>
+                  <a:srgbClr val="FFFFFF"/>
+                </a:solidFill>
+                <a:latin typeface="Poppins" pitchFamily="34" charset="0"/>
+                <a:ea typeface="Poppins" pitchFamily="34" charset="-122"/>
+                <a:cs typeface="Poppins" pitchFamily="34" charset="-120"/>
+              </a:rPr>
+              <a:t>PRESETTABLE VIA  -UC  IN THE CONTROL RECORD</a:t>
+            </a:r>
+            <a:endParaRPr lang="en-US" sz="1200" dirty="0"/>
+          </a:p>
+        </p:txBody>
+      </p:sp>
+      <p:sp>
+        <p:nvSpPr>
+          <p:cNvPr id="7" name="Shape 5"/>
+          <p:cNvSpPr/>
+          <p:nvPr/>
+        </p:nvSpPr>
+        <p:spPr>
+          <a:xfrm>
+            <a:off x="457200" y="2139696"/>
+            <a:ext cx="5532120" cy="310896"/>
+          </a:xfrm>
+          <a:prstGeom prst="roundRect">
+            <a:avLst>
+              <a:gd name="adj" fmla="val 14706"/>
             </a:avLst>
           </a:prstGeom>
           <a:solidFill>
             <a:srgbClr val="DCEBF7"/>
+          </a:solidFill>
+          <a:ln w="9525">
+            <a:solidFill>
+              <a:srgbClr val="A9D6F2"/>
+            </a:solidFill>
+            <a:prstDash val="solid"/>
+          </a:ln>
+        </p:spPr>
+      </p:sp>
+      <p:sp>
+        <p:nvSpPr>
+          <p:cNvPr id="8" name="Shape 6"/>
+          <p:cNvSpPr/>
+          <p:nvPr/>
+        </p:nvSpPr>
+        <p:spPr>
+          <a:xfrm>
+            <a:off x="539496" y="2157984"/>
+            <a:ext cx="310896" cy="274320"/>
+          </a:xfrm>
+          <a:prstGeom prst="roundRect">
+            <a:avLst>
+              <a:gd name="adj" fmla="val 16667"/>
+            </a:avLst>
+          </a:prstGeom>
+          <a:solidFill>
+            <a:srgbClr val="C25E00"/>
+          </a:solidFill>
+          <a:ln/>
+        </p:spPr>
+      </p:sp>
+      <p:sp>
+        <p:nvSpPr>
+          <p:cNvPr id="9" name="Text 7"/>
+          <p:cNvSpPr/>
+          <p:nvPr/>
+        </p:nvSpPr>
+        <p:spPr>
+          <a:xfrm>
+            <a:off x="539496" y="2157984"/>
+            <a:ext cx="310896" cy="274320"/>
+          </a:xfrm>
+          <a:prstGeom prst="rect">
+            <a:avLst/>
+          </a:prstGeom>
+          <a:noFill/>
+          <a:ln/>
+        </p:spPr>
+        <p:txBody>
+          <a:bodyPr wrap="square" lIns="0" tIns="0" rIns="0" bIns="0" rtlCol="0" anchor="ctr"/>
+          <a:lstStyle/>
+          <a:p>
+            <a:pPr algn="ctr" indent="0" marL="0">
+              <a:buNone/>
+            </a:pPr>
+            <a:r>
+              <a:rPr lang="en-US" sz="1150" b="1" dirty="0">
+                <a:solidFill>
+                  <a:srgbClr val="FFFFFF"/>
+                </a:solidFill>
+                <a:latin typeface="Courier New" pitchFamily="34" charset="0"/>
+                <a:ea typeface="Courier New" pitchFamily="34" charset="-122"/>
+                <a:cs typeface="Courier New" pitchFamily="34" charset="-120"/>
+              </a:rPr>
+              <a:t>A</a:t>
+            </a:r>
+            <a:endParaRPr lang="en-US" sz="1150" dirty="0"/>
+          </a:p>
+        </p:txBody>
+      </p:sp>
+      <p:sp>
+        <p:nvSpPr>
+          <p:cNvPr id="10" name="Text 8"/>
+          <p:cNvSpPr/>
+          <p:nvPr/>
+        </p:nvSpPr>
+        <p:spPr>
+          <a:xfrm>
+            <a:off x="886968" y="2139696"/>
+            <a:ext cx="219456" cy="310896"/>
+          </a:xfrm>
+          <a:prstGeom prst="rect">
+            <a:avLst/>
+          </a:prstGeom>
+          <a:noFill/>
+          <a:ln/>
+        </p:spPr>
+        <p:txBody>
+          <a:bodyPr wrap="square" lIns="0" tIns="0" rIns="0" bIns="0" rtlCol="0" anchor="ctr"/>
+          <a:lstStyle/>
+          <a:p>
+            <a:pPr algn="ctr" indent="0" marL="0">
+              <a:buNone/>
+            </a:pPr>
+            <a:r>
+              <a:rPr lang="en-US" sz="1100" b="1" dirty="0">
+                <a:solidFill>
+                  <a:srgbClr val="53565A"/>
+                </a:solidFill>
+                <a:latin typeface="Poppins" pitchFamily="34" charset="0"/>
+                <a:ea typeface="Poppins" pitchFamily="34" charset="-122"/>
+                <a:cs typeface="Poppins" pitchFamily="34" charset="-120"/>
+              </a:rPr>
+              <a:t>→</a:t>
+            </a:r>
+            <a:endParaRPr lang="en-US" sz="1100" dirty="0"/>
+          </a:p>
+        </p:txBody>
+      </p:sp>
+      <p:sp>
+        <p:nvSpPr>
+          <p:cNvPr id="11" name="Shape 9"/>
+          <p:cNvSpPr/>
+          <p:nvPr/>
+        </p:nvSpPr>
+        <p:spPr>
+          <a:xfrm>
+            <a:off x="1133856" y="2157984"/>
+            <a:ext cx="713232" cy="274320"/>
+          </a:xfrm>
+          <a:prstGeom prst="roundRect">
+            <a:avLst>
+              <a:gd name="adj" fmla="val 16667"/>
+            </a:avLst>
+          </a:prstGeom>
+          <a:solidFill>
+            <a:srgbClr val="0057C2"/>
+          </a:solidFill>
+          <a:ln/>
+        </p:spPr>
+      </p:sp>
+      <p:sp>
+        <p:nvSpPr>
+          <p:cNvPr id="12" name="Text 10"/>
+          <p:cNvSpPr/>
+          <p:nvPr/>
+        </p:nvSpPr>
+        <p:spPr>
+          <a:xfrm>
+            <a:off x="1133856" y="2157984"/>
+            <a:ext cx="713232" cy="274320"/>
+          </a:xfrm>
+          <a:prstGeom prst="rect">
+            <a:avLst/>
+          </a:prstGeom>
+          <a:noFill/>
+          <a:ln/>
+        </p:spPr>
+        <p:txBody>
+          <a:bodyPr wrap="square" lIns="0" tIns="0" rIns="0" bIns="0" rtlCol="0" anchor="ctr"/>
+          <a:lstStyle/>
+          <a:p>
+            <a:pPr algn="ctr" indent="0" marL="0">
+              <a:buNone/>
+            </a:pPr>
+            <a:r>
+              <a:rPr lang="en-US" sz="1150" b="1" dirty="0">
+                <a:solidFill>
+                  <a:srgbClr val="FFFFFF"/>
+                </a:solidFill>
+                <a:latin typeface="Courier New" pitchFamily="34" charset="0"/>
+                <a:ea typeface="Courier New" pitchFamily="34" charset="-122"/>
+                <a:cs typeface="Courier New" pitchFamily="34" charset="-120"/>
+              </a:rPr>
+              <a:t>-CA</a:t>
+            </a:r>
+            <a:endParaRPr lang="en-US" sz="1150" dirty="0"/>
+          </a:p>
+        </p:txBody>
+      </p:sp>
+      <p:sp>
+        <p:nvSpPr>
+          <p:cNvPr id="13" name="Text 11"/>
+          <p:cNvSpPr/>
+          <p:nvPr/>
+        </p:nvSpPr>
+        <p:spPr>
+          <a:xfrm>
+            <a:off x="1938528" y="2139696"/>
+            <a:ext cx="3959352" cy="310896"/>
+          </a:xfrm>
+          <a:prstGeom prst="rect">
+            <a:avLst/>
+          </a:prstGeom>
+          <a:noFill/>
+          <a:ln/>
+        </p:spPr>
+        <p:txBody>
+          <a:bodyPr wrap="square" lIns="0" tIns="0" rIns="0" bIns="0" rtlCol="0" anchor="ctr"/>
+          <a:lstStyle/>
+          <a:p>
+            <a:pPr indent="0" marL="0">
+              <a:buNone/>
+            </a:pPr>
+            <a:r>
+              <a:rPr lang="en-US" sz="1100" dirty="0">
+                <a:solidFill>
+                  <a:srgbClr val="00357A"/>
+                </a:solidFill>
+                <a:latin typeface="Poppins" pitchFamily="34" charset="0"/>
+                <a:ea typeface="Poppins" pitchFamily="34" charset="-122"/>
+                <a:cs typeface="Poppins" pitchFamily="34" charset="-120"/>
+              </a:rPr>
+              <a:t>check all remote files, not just the first missing</a:t>
+            </a:r>
+            <a:endParaRPr lang="en-US" sz="1100" dirty="0"/>
+          </a:p>
+        </p:txBody>
+      </p:sp>
+      <p:sp>
+        <p:nvSpPr>
+          <p:cNvPr id="14" name="Shape 12"/>
+          <p:cNvSpPr/>
+          <p:nvPr/>
+        </p:nvSpPr>
+        <p:spPr>
+          <a:xfrm>
+            <a:off x="457200" y="2487168"/>
+            <a:ext cx="5532120" cy="310896"/>
+          </a:xfrm>
+          <a:prstGeom prst="roundRect">
+            <a:avLst>
+              <a:gd name="adj" fmla="val 14706"/>
+            </a:avLst>
+          </a:prstGeom>
+          <a:solidFill>
+            <a:srgbClr val="FFFFFF"/>
+          </a:solidFill>
+          <a:ln w="9525">
+            <a:solidFill>
+              <a:srgbClr val="A9D6F2"/>
+            </a:solidFill>
+            <a:prstDash val="solid"/>
+          </a:ln>
+        </p:spPr>
+      </p:sp>
+      <p:sp>
+        <p:nvSpPr>
+          <p:cNvPr id="15" name="Shape 13"/>
+          <p:cNvSpPr/>
+          <p:nvPr/>
+        </p:nvSpPr>
+        <p:spPr>
+          <a:xfrm>
+            <a:off x="539496" y="2505456"/>
+            <a:ext cx="310896" cy="274320"/>
+          </a:xfrm>
+          <a:prstGeom prst="roundRect">
+            <a:avLst>
+              <a:gd name="adj" fmla="val 16667"/>
+            </a:avLst>
+          </a:prstGeom>
+          <a:solidFill>
+            <a:srgbClr val="C25E00"/>
+          </a:solidFill>
+          <a:ln/>
+        </p:spPr>
+      </p:sp>
+      <p:sp>
+        <p:nvSpPr>
+          <p:cNvPr id="16" name="Text 14"/>
+          <p:cNvSpPr/>
+          <p:nvPr/>
+        </p:nvSpPr>
+        <p:spPr>
+          <a:xfrm>
+            <a:off x="539496" y="2505456"/>
+            <a:ext cx="310896" cy="274320"/>
+          </a:xfrm>
+          <a:prstGeom prst="rect">
+            <a:avLst/>
+          </a:prstGeom>
+          <a:noFill/>
+          <a:ln/>
+        </p:spPr>
+        <p:txBody>
+          <a:bodyPr wrap="square" lIns="0" tIns="0" rIns="0" bIns="0" rtlCol="0" anchor="ctr"/>
+          <a:lstStyle/>
+          <a:p>
+            <a:pPr algn="ctr" indent="0" marL="0">
+              <a:buNone/>
+            </a:pPr>
+            <a:r>
+              <a:rPr lang="en-US" sz="1150" b="1" dirty="0">
+                <a:solidFill>
+                  <a:srgbClr val="FFFFFF"/>
+                </a:solidFill>
+                <a:latin typeface="Courier New" pitchFamily="34" charset="0"/>
+                <a:ea typeface="Courier New" pitchFamily="34" charset="-122"/>
+                <a:cs typeface="Courier New" pitchFamily="34" charset="-120"/>
+              </a:rPr>
+              <a:t>B</a:t>
+            </a:r>
+            <a:endParaRPr lang="en-US" sz="1150" dirty="0"/>
+          </a:p>
+        </p:txBody>
+      </p:sp>
+      <p:sp>
+        <p:nvSpPr>
+          <p:cNvPr id="17" name="Text 15"/>
+          <p:cNvSpPr/>
+          <p:nvPr/>
+        </p:nvSpPr>
+        <p:spPr>
+          <a:xfrm>
+            <a:off x="886968" y="2487168"/>
+            <a:ext cx="219456" cy="310896"/>
+          </a:xfrm>
+          <a:prstGeom prst="rect">
+            <a:avLst/>
+          </a:prstGeom>
+          <a:noFill/>
+          <a:ln/>
+        </p:spPr>
+        <p:txBody>
+          <a:bodyPr wrap="square" lIns="0" tIns="0" rIns="0" bIns="0" rtlCol="0" anchor="ctr"/>
+          <a:lstStyle/>
+          <a:p>
+            <a:pPr algn="ctr" indent="0" marL="0">
+              <a:buNone/>
+            </a:pPr>
+            <a:r>
+              <a:rPr lang="en-US" sz="1100" b="1" dirty="0">
+                <a:solidFill>
+                  <a:srgbClr val="53565A"/>
+                </a:solidFill>
+                <a:latin typeface="Poppins" pitchFamily="34" charset="0"/>
+                <a:ea typeface="Poppins" pitchFamily="34" charset="-122"/>
+                <a:cs typeface="Poppins" pitchFamily="34" charset="-120"/>
+              </a:rPr>
+              <a:t>→</a:t>
+            </a:r>
+            <a:endParaRPr lang="en-US" sz="1100" dirty="0"/>
+          </a:p>
+        </p:txBody>
+      </p:sp>
+      <p:sp>
+        <p:nvSpPr>
+          <p:cNvPr id="18" name="Shape 16"/>
+          <p:cNvSpPr/>
+          <p:nvPr/>
+        </p:nvSpPr>
+        <p:spPr>
+          <a:xfrm>
+            <a:off x="1133856" y="2505456"/>
+            <a:ext cx="713232" cy="274320"/>
+          </a:xfrm>
+          <a:prstGeom prst="roundRect">
+            <a:avLst>
+              <a:gd name="adj" fmla="val 16667"/>
+            </a:avLst>
+          </a:prstGeom>
+          <a:solidFill>
+            <a:srgbClr val="0057C2"/>
+          </a:solidFill>
+          <a:ln/>
+        </p:spPr>
+      </p:sp>
+      <p:sp>
+        <p:nvSpPr>
+          <p:cNvPr id="19" name="Text 17"/>
+          <p:cNvSpPr/>
+          <p:nvPr/>
+        </p:nvSpPr>
+        <p:spPr>
+          <a:xfrm>
+            <a:off x="1133856" y="2505456"/>
+            <a:ext cx="713232" cy="274320"/>
+          </a:xfrm>
+          <a:prstGeom prst="rect">
+            <a:avLst/>
+          </a:prstGeom>
+          <a:noFill/>
+          <a:ln/>
+        </p:spPr>
+        <p:txBody>
+          <a:bodyPr wrap="square" lIns="0" tIns="0" rIns="0" bIns="0" rtlCol="0" anchor="ctr"/>
+          <a:lstStyle/>
+          <a:p>
+            <a:pPr algn="ctr" indent="0" marL="0">
+              <a:buNone/>
+            </a:pPr>
+            <a:r>
+              <a:rPr lang="en-US" sz="1150" b="1" dirty="0">
+                <a:solidFill>
+                  <a:srgbClr val="FFFFFF"/>
+                </a:solidFill>
+                <a:latin typeface="Courier New" pitchFamily="34" charset="0"/>
+                <a:ea typeface="Courier New" pitchFamily="34" charset="-122"/>
+                <a:cs typeface="Courier New" pitchFamily="34" charset="-120"/>
+              </a:rPr>
+              <a:t>-UB</a:t>
+            </a:r>
+            <a:endParaRPr lang="en-US" sz="1150" dirty="0"/>
+          </a:p>
+        </p:txBody>
+      </p:sp>
+      <p:sp>
+        <p:nvSpPr>
+          <p:cNvPr id="20" name="Text 18"/>
+          <p:cNvSpPr/>
+          <p:nvPr/>
+        </p:nvSpPr>
+        <p:spPr>
+          <a:xfrm>
+            <a:off x="1938528" y="2487168"/>
+            <a:ext cx="3959352" cy="310896"/>
+          </a:xfrm>
+          <a:prstGeom prst="rect">
+            <a:avLst/>
+          </a:prstGeom>
+          <a:noFill/>
+          <a:ln/>
+        </p:spPr>
+        <p:txBody>
+          <a:bodyPr wrap="square" lIns="0" tIns="0" rIns="0" bIns="0" rtlCol="0" anchor="ctr"/>
+          <a:lstStyle/>
+          <a:p>
+            <a:pPr indent="0" marL="0">
+              <a:buNone/>
+            </a:pPr>
+            <a:r>
+              <a:rPr lang="en-US" sz="1100" dirty="0">
+                <a:solidFill>
+                  <a:srgbClr val="00357A"/>
+                </a:solidFill>
+                <a:latin typeface="Poppins" pitchFamily="34" charset="0"/>
+                <a:ea typeface="Poppins" pitchFamily="34" charset="-122"/>
+                <a:cs typeface="Poppins" pitchFamily="34" charset="-120"/>
+              </a:rPr>
+              <a:t>use period begin time for patterns</a:t>
+            </a:r>
+            <a:endParaRPr lang="en-US" sz="1100" dirty="0"/>
+          </a:p>
+        </p:txBody>
+      </p:sp>
+      <p:sp>
+        <p:nvSpPr>
+          <p:cNvPr id="21" name="Shape 19"/>
+          <p:cNvSpPr/>
+          <p:nvPr/>
+        </p:nvSpPr>
+        <p:spPr>
+          <a:xfrm>
+            <a:off x="457200" y="2834640"/>
+            <a:ext cx="5532120" cy="310896"/>
+          </a:xfrm>
+          <a:prstGeom prst="roundRect">
+            <a:avLst>
+              <a:gd name="adj" fmla="val 14706"/>
+            </a:avLst>
+          </a:prstGeom>
+          <a:solidFill>
+            <a:srgbClr val="DCEBF7"/>
+          </a:solidFill>
+          <a:ln w="9525">
+            <a:solidFill>
+              <a:srgbClr val="A9D6F2"/>
+            </a:solidFill>
+            <a:prstDash val="solid"/>
+          </a:ln>
+        </p:spPr>
+      </p:sp>
+      <p:sp>
+        <p:nvSpPr>
+          <p:cNvPr id="22" name="Shape 20"/>
+          <p:cNvSpPr/>
+          <p:nvPr/>
+        </p:nvSpPr>
+        <p:spPr>
+          <a:xfrm>
+            <a:off x="539496" y="2852928"/>
+            <a:ext cx="310896" cy="274320"/>
+          </a:xfrm>
+          <a:prstGeom prst="roundRect">
+            <a:avLst>
+              <a:gd name="adj" fmla="val 16667"/>
+            </a:avLst>
+          </a:prstGeom>
+          <a:solidFill>
+            <a:srgbClr val="C25E00"/>
+          </a:solidFill>
+          <a:ln/>
+        </p:spPr>
+      </p:sp>
+      <p:sp>
+        <p:nvSpPr>
+          <p:cNvPr id="23" name="Text 21"/>
+          <p:cNvSpPr/>
+          <p:nvPr/>
+        </p:nvSpPr>
+        <p:spPr>
+          <a:xfrm>
+            <a:off x="539496" y="2852928"/>
+            <a:ext cx="310896" cy="274320"/>
+          </a:xfrm>
+          <a:prstGeom prst="rect">
+            <a:avLst/>
+          </a:prstGeom>
+          <a:noFill/>
+          <a:ln/>
+        </p:spPr>
+        <p:txBody>
+          <a:bodyPr wrap="square" lIns="0" tIns="0" rIns="0" bIns="0" rtlCol="0" anchor="ctr"/>
+          <a:lstStyle/>
+          <a:p>
+            <a:pPr algn="ctr" indent="0" marL="0">
+              <a:buNone/>
+            </a:pPr>
+            <a:r>
+              <a:rPr lang="en-US" sz="1150" b="1" dirty="0">
+                <a:solidFill>
+                  <a:srgbClr val="FFFFFF"/>
+                </a:solidFill>
+                <a:latin typeface="Courier New" pitchFamily="34" charset="0"/>
+                <a:ea typeface="Courier New" pitchFamily="34" charset="-122"/>
+                <a:cs typeface="Courier New" pitchFamily="34" charset="-120"/>
+              </a:rPr>
+              <a:t>C</a:t>
+            </a:r>
+            <a:endParaRPr lang="en-US" sz="1150" dirty="0"/>
+          </a:p>
+        </p:txBody>
+      </p:sp>
+      <p:sp>
+        <p:nvSpPr>
+          <p:cNvPr id="24" name="Text 22"/>
+          <p:cNvSpPr/>
+          <p:nvPr/>
+        </p:nvSpPr>
+        <p:spPr>
+          <a:xfrm>
+            <a:off x="886968" y="2834640"/>
+            <a:ext cx="219456" cy="310896"/>
+          </a:xfrm>
+          <a:prstGeom prst="rect">
+            <a:avLst/>
+          </a:prstGeom>
+          <a:noFill/>
+          <a:ln/>
+        </p:spPr>
+        <p:txBody>
+          <a:bodyPr wrap="square" lIns="0" tIns="0" rIns="0" bIns="0" rtlCol="0" anchor="ctr"/>
+          <a:lstStyle/>
+          <a:p>
+            <a:pPr algn="ctr" indent="0" marL="0">
+              <a:buNone/>
+            </a:pPr>
+            <a:r>
+              <a:rPr lang="en-US" sz="1100" b="1" dirty="0">
+                <a:solidFill>
+                  <a:srgbClr val="53565A"/>
+                </a:solidFill>
+                <a:latin typeface="Poppins" pitchFamily="34" charset="0"/>
+                <a:ea typeface="Poppins" pitchFamily="34" charset="-122"/>
+                <a:cs typeface="Poppins" pitchFamily="34" charset="-120"/>
+              </a:rPr>
+              <a:t>→</a:t>
+            </a:r>
+            <a:endParaRPr lang="en-US" sz="1100" dirty="0"/>
+          </a:p>
+        </p:txBody>
+      </p:sp>
+      <p:sp>
+        <p:nvSpPr>
+          <p:cNvPr id="25" name="Shape 23"/>
+          <p:cNvSpPr/>
+          <p:nvPr/>
+        </p:nvSpPr>
+        <p:spPr>
+          <a:xfrm>
+            <a:off x="1133856" y="2852928"/>
+            <a:ext cx="713232" cy="274320"/>
+          </a:xfrm>
+          <a:prstGeom prst="roundRect">
+            <a:avLst>
+              <a:gd name="adj" fmla="val 16667"/>
+            </a:avLst>
+          </a:prstGeom>
+          <a:solidFill>
+            <a:srgbClr val="0057C2"/>
+          </a:solidFill>
+          <a:ln/>
+        </p:spPr>
+      </p:sp>
+      <p:sp>
+        <p:nvSpPr>
+          <p:cNvPr id="26" name="Text 24"/>
+          <p:cNvSpPr/>
+          <p:nvPr/>
+        </p:nvSpPr>
+        <p:spPr>
+          <a:xfrm>
+            <a:off x="1133856" y="2852928"/>
+            <a:ext cx="713232" cy="274320"/>
+          </a:xfrm>
+          <a:prstGeom prst="rect">
+            <a:avLst/>
+          </a:prstGeom>
+          <a:noFill/>
+          <a:ln/>
+        </p:spPr>
+        <p:txBody>
+          <a:bodyPr wrap="square" lIns="0" tIns="0" rIns="0" bIns="0" rtlCol="0" anchor="ctr"/>
+          <a:lstStyle/>
+          <a:p>
+            <a:pPr algn="ctr" indent="0" marL="0">
+              <a:buNone/>
+            </a:pPr>
+            <a:r>
+              <a:rPr lang="en-US" sz="1150" b="1" dirty="0">
+                <a:solidFill>
+                  <a:srgbClr val="FFFFFF"/>
+                </a:solidFill>
+                <a:latin typeface="Courier New" pitchFamily="34" charset="0"/>
+                <a:ea typeface="Courier New" pitchFamily="34" charset="-122"/>
+                <a:cs typeface="Courier New" pitchFamily="34" charset="-120"/>
+              </a:rPr>
+              <a:t>-CP</a:t>
+            </a:r>
+            <a:endParaRPr lang="en-US" sz="1150" dirty="0"/>
+          </a:p>
+        </p:txBody>
+      </p:sp>
+      <p:sp>
+        <p:nvSpPr>
+          <p:cNvPr id="27" name="Text 25"/>
+          <p:cNvSpPr/>
+          <p:nvPr/>
+        </p:nvSpPr>
+        <p:spPr>
+          <a:xfrm>
+            <a:off x="1938528" y="2834640"/>
+            <a:ext cx="3959352" cy="310896"/>
+          </a:xfrm>
+          <a:prstGeom prst="rect">
+            <a:avLst/>
+          </a:prstGeom>
+          <a:noFill/>
+          <a:ln/>
+        </p:spPr>
+        <p:txBody>
+          <a:bodyPr wrap="square" lIns="0" tIns="0" rIns="0" bIns="0" rtlCol="0" anchor="ctr"/>
+          <a:lstStyle/>
+          <a:p>
+            <a:pPr indent="0" marL="0">
+              <a:buNone/>
+            </a:pPr>
+            <a:r>
+              <a:rPr lang="en-US" sz="1100" dirty="0">
+                <a:solidFill>
+                  <a:srgbClr val="00357A"/>
+                </a:solidFill>
+                <a:latin typeface="Poppins" pitchFamily="34" charset="0"/>
+                <a:ea typeface="Poppins" pitchFamily="34" charset="-122"/>
+                <a:cs typeface="Poppins" pitchFamily="34" charset="-120"/>
+              </a:rPr>
+              <a:t>allow current, not-yet-due period</a:t>
+            </a:r>
+            <a:endParaRPr lang="en-US" sz="1100" dirty="0"/>
+          </a:p>
+        </p:txBody>
+      </p:sp>
+      <p:sp>
+        <p:nvSpPr>
+          <p:cNvPr id="28" name="Shape 26"/>
+          <p:cNvSpPr/>
+          <p:nvPr/>
+        </p:nvSpPr>
+        <p:spPr>
+          <a:xfrm>
+            <a:off x="457200" y="3182112"/>
+            <a:ext cx="5532120" cy="310896"/>
+          </a:xfrm>
+          <a:prstGeom prst="roundRect">
+            <a:avLst>
+              <a:gd name="adj" fmla="val 14706"/>
+            </a:avLst>
+          </a:prstGeom>
+          <a:solidFill>
+            <a:srgbClr val="FFFFFF"/>
+          </a:solidFill>
+          <a:ln w="9525">
+            <a:solidFill>
+              <a:srgbClr val="A9D6F2"/>
+            </a:solidFill>
+            <a:prstDash val="solid"/>
+          </a:ln>
+        </p:spPr>
+      </p:sp>
+      <p:sp>
+        <p:nvSpPr>
+          <p:cNvPr id="29" name="Shape 27"/>
+          <p:cNvSpPr/>
+          <p:nvPr/>
+        </p:nvSpPr>
+        <p:spPr>
+          <a:xfrm>
+            <a:off x="539496" y="3200400"/>
+            <a:ext cx="310896" cy="274320"/>
+          </a:xfrm>
+          <a:prstGeom prst="roundRect">
+            <a:avLst>
+              <a:gd name="adj" fmla="val 16667"/>
+            </a:avLst>
+          </a:prstGeom>
+          <a:solidFill>
+            <a:srgbClr val="C25E00"/>
+          </a:solidFill>
+          <a:ln/>
+        </p:spPr>
+      </p:sp>
+      <p:sp>
+        <p:nvSpPr>
+          <p:cNvPr id="30" name="Text 28"/>
+          <p:cNvSpPr/>
+          <p:nvPr/>
+        </p:nvSpPr>
+        <p:spPr>
+          <a:xfrm>
+            <a:off x="539496" y="3200400"/>
+            <a:ext cx="310896" cy="274320"/>
+          </a:xfrm>
+          <a:prstGeom prst="rect">
+            <a:avLst/>
+          </a:prstGeom>
+          <a:noFill/>
+          <a:ln/>
+        </p:spPr>
+        <p:txBody>
+          <a:bodyPr wrap="square" lIns="0" tIns="0" rIns="0" bIns="0" rtlCol="0" anchor="ctr"/>
+          <a:lstStyle/>
+          <a:p>
+            <a:pPr algn="ctr" indent="0" marL="0">
+              <a:buNone/>
+            </a:pPr>
+            <a:r>
+              <a:rPr lang="en-US" sz="1150" b="1" dirty="0">
+                <a:solidFill>
+                  <a:srgbClr val="FFFFFF"/>
+                </a:solidFill>
+                <a:latin typeface="Courier New" pitchFamily="34" charset="0"/>
+                <a:ea typeface="Courier New" pitchFamily="34" charset="-122"/>
+                <a:cs typeface="Courier New" pitchFamily="34" charset="-120"/>
+              </a:rPr>
+              <a:t>E</a:t>
+            </a:r>
+            <a:endParaRPr lang="en-US" sz="1150" dirty="0"/>
+          </a:p>
+        </p:txBody>
+      </p:sp>
+      <p:sp>
+        <p:nvSpPr>
+          <p:cNvPr id="31" name="Text 29"/>
+          <p:cNvSpPr/>
+          <p:nvPr/>
+        </p:nvSpPr>
+        <p:spPr>
+          <a:xfrm>
+            <a:off x="886968" y="3182112"/>
+            <a:ext cx="219456" cy="310896"/>
+          </a:xfrm>
+          <a:prstGeom prst="rect">
+            <a:avLst/>
+          </a:prstGeom>
+          <a:noFill/>
+          <a:ln/>
+        </p:spPr>
+        <p:txBody>
+          <a:bodyPr wrap="square" lIns="0" tIns="0" rIns="0" bIns="0" rtlCol="0" anchor="ctr"/>
+          <a:lstStyle/>
+          <a:p>
+            <a:pPr algn="ctr" indent="0" marL="0">
+              <a:buNone/>
+            </a:pPr>
+            <a:r>
+              <a:rPr lang="en-US" sz="1100" b="1" dirty="0">
+                <a:solidFill>
+                  <a:srgbClr val="53565A"/>
+                </a:solidFill>
+                <a:latin typeface="Poppins" pitchFamily="34" charset="0"/>
+                <a:ea typeface="Poppins" pitchFamily="34" charset="-122"/>
+                <a:cs typeface="Poppins" pitchFamily="34" charset="-120"/>
+              </a:rPr>
+              <a:t>→</a:t>
+            </a:r>
+            <a:endParaRPr lang="en-US" sz="1100" dirty="0"/>
+          </a:p>
+        </p:txBody>
+      </p:sp>
+      <p:sp>
+        <p:nvSpPr>
+          <p:cNvPr id="32" name="Shape 30"/>
+          <p:cNvSpPr/>
+          <p:nvPr/>
+        </p:nvSpPr>
+        <p:spPr>
+          <a:xfrm>
+            <a:off x="1133856" y="3200400"/>
+            <a:ext cx="713232" cy="274320"/>
+          </a:xfrm>
+          <a:prstGeom prst="roundRect">
+            <a:avLst>
+              <a:gd name="adj" fmla="val 16667"/>
+            </a:avLst>
+          </a:prstGeom>
+          <a:solidFill>
+            <a:srgbClr val="0057C2"/>
+          </a:solidFill>
+          <a:ln/>
+        </p:spPr>
+      </p:sp>
+      <p:sp>
+        <p:nvSpPr>
+          <p:cNvPr id="33" name="Text 31"/>
+          <p:cNvSpPr/>
+          <p:nvPr/>
+        </p:nvSpPr>
+        <p:spPr>
+          <a:xfrm>
+            <a:off x="1133856" y="3200400"/>
+            <a:ext cx="713232" cy="274320"/>
+          </a:xfrm>
+          <a:prstGeom prst="rect">
+            <a:avLst/>
+          </a:prstGeom>
+          <a:noFill/>
+          <a:ln/>
+        </p:spPr>
+        <p:txBody>
+          <a:bodyPr wrap="square" lIns="0" tIns="0" rIns="0" bIns="0" rtlCol="0" anchor="ctr"/>
+          <a:lstStyle/>
+          <a:p>
+            <a:pPr algn="ctr" indent="0" marL="0">
+              <a:buNone/>
+            </a:pPr>
+            <a:r>
+              <a:rPr lang="en-US" sz="1150" b="1" dirty="0">
+                <a:solidFill>
+                  <a:srgbClr val="FFFFFF"/>
+                </a:solidFill>
+                <a:latin typeface="Courier New" pitchFamily="34" charset="0"/>
+                <a:ea typeface="Courier New" pitchFamily="34" charset="-122"/>
+                <a:cs typeface="Courier New" pitchFamily="34" charset="-120"/>
+              </a:rPr>
+              <a:t>-RE</a:t>
+            </a:r>
+            <a:endParaRPr lang="en-US" sz="1150" dirty="0"/>
+          </a:p>
+        </p:txBody>
+      </p:sp>
+      <p:sp>
+        <p:nvSpPr>
+          <p:cNvPr id="34" name="Text 32"/>
+          <p:cNvSpPr/>
+          <p:nvPr/>
+        </p:nvSpPr>
+        <p:spPr>
+          <a:xfrm>
+            <a:off x="1938528" y="3182112"/>
+            <a:ext cx="3959352" cy="310896"/>
+          </a:xfrm>
+          <a:prstGeom prst="rect">
+            <a:avLst/>
+          </a:prstGeom>
+          <a:noFill/>
+          <a:ln/>
+        </p:spPr>
+        <p:txBody>
+          <a:bodyPr wrap="square" lIns="0" tIns="0" rIns="0" bIns="0" rtlCol="0" anchor="ctr"/>
+          <a:lstStyle/>
+          <a:p>
+            <a:pPr indent="0" marL="0">
+              <a:buNone/>
+            </a:pPr>
+            <a:r>
+              <a:rPr lang="en-US" sz="1100" dirty="0">
+                <a:solidFill>
+                  <a:srgbClr val="00357A"/>
+                </a:solidFill>
+                <a:latin typeface="Poppins" pitchFamily="34" charset="0"/>
+                <a:ea typeface="Poppins" pitchFamily="34" charset="-122"/>
+                <a:cs typeface="Poppins" pitchFamily="34" charset="-120"/>
+              </a:rPr>
+              <a:t>reset end date/hour from file time</a:t>
+            </a:r>
+            <a:endParaRPr lang="en-US" sz="1100" dirty="0"/>
+          </a:p>
+        </p:txBody>
+      </p:sp>
+      <p:sp>
+        <p:nvSpPr>
+          <p:cNvPr id="35" name="Shape 33"/>
+          <p:cNvSpPr/>
+          <p:nvPr/>
+        </p:nvSpPr>
+        <p:spPr>
+          <a:xfrm>
+            <a:off x="457200" y="3529584"/>
+            <a:ext cx="5532120" cy="310896"/>
+          </a:xfrm>
+          <a:prstGeom prst="roundRect">
+            <a:avLst>
+              <a:gd name="adj" fmla="val 14706"/>
+            </a:avLst>
+          </a:prstGeom>
+          <a:solidFill>
+            <a:srgbClr val="DCEBF7"/>
+          </a:solidFill>
+          <a:ln w="9525">
+            <a:solidFill>
+              <a:srgbClr val="A9D6F2"/>
+            </a:solidFill>
+            <a:prstDash val="solid"/>
+          </a:ln>
+        </p:spPr>
+      </p:sp>
+      <p:sp>
+        <p:nvSpPr>
+          <p:cNvPr id="36" name="Shape 34"/>
+          <p:cNvSpPr/>
+          <p:nvPr/>
+        </p:nvSpPr>
+        <p:spPr>
+          <a:xfrm>
+            <a:off x="539496" y="3547872"/>
+            <a:ext cx="310896" cy="274320"/>
+          </a:xfrm>
+          <a:prstGeom prst="roundRect">
+            <a:avLst>
+              <a:gd name="adj" fmla="val 16667"/>
+            </a:avLst>
+          </a:prstGeom>
+          <a:solidFill>
+            <a:srgbClr val="C25E00"/>
+          </a:solidFill>
+          <a:ln/>
+        </p:spPr>
+      </p:sp>
+      <p:sp>
+        <p:nvSpPr>
+          <p:cNvPr id="37" name="Text 35"/>
+          <p:cNvSpPr/>
+          <p:nvPr/>
+        </p:nvSpPr>
+        <p:spPr>
+          <a:xfrm>
+            <a:off x="539496" y="3547872"/>
+            <a:ext cx="310896" cy="274320"/>
+          </a:xfrm>
+          <a:prstGeom prst="rect">
+            <a:avLst/>
+          </a:prstGeom>
+          <a:noFill/>
+          <a:ln/>
+        </p:spPr>
+        <p:txBody>
+          <a:bodyPr wrap="square" lIns="0" tIns="0" rIns="0" bIns="0" rtlCol="0" anchor="ctr"/>
+          <a:lstStyle/>
+          <a:p>
+            <a:pPr algn="ctr" indent="0" marL="0">
+              <a:buNone/>
+            </a:pPr>
+            <a:r>
+              <a:rPr lang="en-US" sz="1150" b="1" dirty="0">
+                <a:solidFill>
+                  <a:srgbClr val="FFFFFF"/>
+                </a:solidFill>
+                <a:latin typeface="Courier New" pitchFamily="34" charset="0"/>
+                <a:ea typeface="Courier New" pitchFamily="34" charset="-122"/>
+                <a:cs typeface="Courier New" pitchFamily="34" charset="-120"/>
+              </a:rPr>
+              <a:t>F</a:t>
+            </a:r>
+            <a:endParaRPr lang="en-US" sz="1150" dirty="0"/>
+          </a:p>
+        </p:txBody>
+      </p:sp>
+      <p:sp>
+        <p:nvSpPr>
+          <p:cNvPr id="38" name="Text 36"/>
+          <p:cNvSpPr/>
+          <p:nvPr/>
+        </p:nvSpPr>
+        <p:spPr>
+          <a:xfrm>
+            <a:off x="886968" y="3529584"/>
+            <a:ext cx="219456" cy="310896"/>
+          </a:xfrm>
+          <a:prstGeom prst="rect">
+            <a:avLst/>
+          </a:prstGeom>
+          <a:noFill/>
+          <a:ln/>
+        </p:spPr>
+        <p:txBody>
+          <a:bodyPr wrap="square" lIns="0" tIns="0" rIns="0" bIns="0" rtlCol="0" anchor="ctr"/>
+          <a:lstStyle/>
+          <a:p>
+            <a:pPr algn="ctr" indent="0" marL="0">
+              <a:buNone/>
+            </a:pPr>
+            <a:r>
+              <a:rPr lang="en-US" sz="1100" b="1" dirty="0">
+                <a:solidFill>
+                  <a:srgbClr val="53565A"/>
+                </a:solidFill>
+                <a:latin typeface="Poppins" pitchFamily="34" charset="0"/>
+                <a:ea typeface="Poppins" pitchFamily="34" charset="-122"/>
+                <a:cs typeface="Poppins" pitchFamily="34" charset="-120"/>
+              </a:rPr>
+              <a:t>→</a:t>
+            </a:r>
+            <a:endParaRPr lang="en-US" sz="1100" dirty="0"/>
+          </a:p>
+        </p:txBody>
+      </p:sp>
+      <p:sp>
+        <p:nvSpPr>
+          <p:cNvPr id="39" name="Shape 37"/>
+          <p:cNvSpPr/>
+          <p:nvPr/>
+        </p:nvSpPr>
+        <p:spPr>
+          <a:xfrm>
+            <a:off x="1133856" y="3547872"/>
+            <a:ext cx="713232" cy="274320"/>
+          </a:xfrm>
+          <a:prstGeom prst="roundRect">
+            <a:avLst>
+              <a:gd name="adj" fmla="val 16667"/>
+            </a:avLst>
+          </a:prstGeom>
+          <a:solidFill>
+            <a:srgbClr val="0057C2"/>
+          </a:solidFill>
+          <a:ln/>
+        </p:spPr>
+      </p:sp>
+      <p:sp>
+        <p:nvSpPr>
+          <p:cNvPr id="40" name="Text 38"/>
+          <p:cNvSpPr/>
+          <p:nvPr/>
+        </p:nvSpPr>
+        <p:spPr>
+          <a:xfrm>
+            <a:off x="1133856" y="3547872"/>
+            <a:ext cx="713232" cy="274320"/>
+          </a:xfrm>
+          <a:prstGeom prst="rect">
+            <a:avLst/>
+          </a:prstGeom>
+          <a:noFill/>
+          <a:ln/>
+        </p:spPr>
+        <p:txBody>
+          <a:bodyPr wrap="square" lIns="0" tIns="0" rIns="0" bIns="0" rtlCol="0" anchor="ctr"/>
+          <a:lstStyle/>
+          <a:p>
+            <a:pPr algn="ctr" indent="0" marL="0">
+              <a:buNone/>
+            </a:pPr>
+            <a:r>
+              <a:rPr lang="en-US" sz="1150" b="1" dirty="0">
+                <a:solidFill>
+                  <a:srgbClr val="FFFFFF"/>
+                </a:solidFill>
+                <a:latin typeface="Courier New" pitchFamily="34" charset="0"/>
+                <a:ea typeface="Courier New" pitchFamily="34" charset="-122"/>
+                <a:cs typeface="Courier New" pitchFamily="34" charset="-120"/>
+              </a:rPr>
+              <a:t>-FU</a:t>
+            </a:r>
+            <a:endParaRPr lang="en-US" sz="1150" dirty="0"/>
+          </a:p>
+        </p:txBody>
+      </p:sp>
+      <p:sp>
+        <p:nvSpPr>
+          <p:cNvPr id="41" name="Text 39"/>
+          <p:cNvSpPr/>
+          <p:nvPr/>
+        </p:nvSpPr>
+        <p:spPr>
+          <a:xfrm>
+            <a:off x="1938528" y="3529584"/>
+            <a:ext cx="3959352" cy="310896"/>
+          </a:xfrm>
+          <a:prstGeom prst="rect">
+            <a:avLst/>
+          </a:prstGeom>
+          <a:noFill/>
+          <a:ln/>
+        </p:spPr>
+        <p:txBody>
+          <a:bodyPr wrap="square" lIns="0" tIns="0" rIns="0" bIns="0" rtlCol="0" anchor="ctr"/>
+          <a:lstStyle/>
+          <a:p>
+            <a:pPr indent="0" marL="0">
+              <a:buNone/>
+            </a:pPr>
+            <a:r>
+              <a:rPr lang="en-US" sz="1100" dirty="0">
+                <a:solidFill>
+                  <a:srgbClr val="00357A"/>
+                </a:solidFill>
+                <a:latin typeface="Poppins" pitchFamily="34" charset="0"/>
+                <a:ea typeface="Poppins" pitchFamily="34" charset="-122"/>
+                <a:cs typeface="Poppins" pitchFamily="34" charset="-120"/>
+              </a:rPr>
+              <a:t>force one update even if not due</a:t>
+            </a:r>
+            <a:endParaRPr lang="en-US" sz="1100" dirty="0"/>
+          </a:p>
+        </p:txBody>
+      </p:sp>
+      <p:sp>
+        <p:nvSpPr>
+          <p:cNvPr id="42" name="Shape 40"/>
+          <p:cNvSpPr/>
+          <p:nvPr/>
+        </p:nvSpPr>
+        <p:spPr>
+          <a:xfrm>
+            <a:off x="457200" y="3877056"/>
+            <a:ext cx="5532120" cy="310896"/>
+          </a:xfrm>
+          <a:prstGeom prst="roundRect">
+            <a:avLst>
+              <a:gd name="adj" fmla="val 14706"/>
+            </a:avLst>
+          </a:prstGeom>
+          <a:solidFill>
+            <a:srgbClr val="FFFFFF"/>
+          </a:solidFill>
+          <a:ln w="9525">
+            <a:solidFill>
+              <a:srgbClr val="A9D6F2"/>
+            </a:solidFill>
+            <a:prstDash val="solid"/>
+          </a:ln>
+        </p:spPr>
+      </p:sp>
+      <p:sp>
+        <p:nvSpPr>
+          <p:cNvPr id="43" name="Shape 41"/>
+          <p:cNvSpPr/>
+          <p:nvPr/>
+        </p:nvSpPr>
+        <p:spPr>
+          <a:xfrm>
+            <a:off x="539496" y="3895344"/>
+            <a:ext cx="310896" cy="274320"/>
+          </a:xfrm>
+          <a:prstGeom prst="roundRect">
+            <a:avLst>
+              <a:gd name="adj" fmla="val 16667"/>
+            </a:avLst>
+          </a:prstGeom>
+          <a:solidFill>
+            <a:srgbClr val="C25E00"/>
+          </a:solidFill>
+          <a:ln/>
+        </p:spPr>
+      </p:sp>
+      <p:sp>
+        <p:nvSpPr>
+          <p:cNvPr id="44" name="Text 42"/>
+          <p:cNvSpPr/>
+          <p:nvPr/>
+        </p:nvSpPr>
+        <p:spPr>
+          <a:xfrm>
+            <a:off x="539496" y="3895344"/>
+            <a:ext cx="310896" cy="274320"/>
+          </a:xfrm>
+          <a:prstGeom prst="rect">
+            <a:avLst/>
+          </a:prstGeom>
+          <a:noFill/>
+          <a:ln/>
+        </p:spPr>
+        <p:txBody>
+          <a:bodyPr wrap="square" lIns="0" tIns="0" rIns="0" bIns="0" rtlCol="0" anchor="ctr"/>
+          <a:lstStyle/>
+          <a:p>
+            <a:pPr algn="ctr" indent="0" marL="0">
+              <a:buNone/>
+            </a:pPr>
+            <a:r>
+              <a:rPr lang="en-US" sz="1150" b="1" dirty="0">
+                <a:solidFill>
+                  <a:srgbClr val="FFFFFF"/>
+                </a:solidFill>
+                <a:latin typeface="Courier New" pitchFamily="34" charset="0"/>
+                <a:ea typeface="Courier New" pitchFamily="34" charset="-122"/>
+                <a:cs typeface="Courier New" pitchFamily="34" charset="-120"/>
+              </a:rPr>
+              <a:t>G</a:t>
+            </a:r>
+            <a:endParaRPr lang="en-US" sz="1150" dirty="0"/>
+          </a:p>
+        </p:txBody>
+      </p:sp>
+      <p:sp>
+        <p:nvSpPr>
+          <p:cNvPr id="45" name="Text 43"/>
+          <p:cNvSpPr/>
+          <p:nvPr/>
+        </p:nvSpPr>
+        <p:spPr>
+          <a:xfrm>
+            <a:off x="886968" y="3877056"/>
+            <a:ext cx="219456" cy="310896"/>
+          </a:xfrm>
+          <a:prstGeom prst="rect">
+            <a:avLst/>
+          </a:prstGeom>
+          <a:noFill/>
+          <a:ln/>
+        </p:spPr>
+        <p:txBody>
+          <a:bodyPr wrap="square" lIns="0" tIns="0" rIns="0" bIns="0" rtlCol="0" anchor="ctr"/>
+          <a:lstStyle/>
+          <a:p>
+            <a:pPr algn="ctr" indent="0" marL="0">
+              <a:buNone/>
+            </a:pPr>
+            <a:r>
+              <a:rPr lang="en-US" sz="1100" b="1" dirty="0">
+                <a:solidFill>
+                  <a:srgbClr val="53565A"/>
+                </a:solidFill>
+                <a:latin typeface="Poppins" pitchFamily="34" charset="0"/>
+                <a:ea typeface="Poppins" pitchFamily="34" charset="-122"/>
+                <a:cs typeface="Poppins" pitchFamily="34" charset="-120"/>
+              </a:rPr>
+              <a:t>→</a:t>
+            </a:r>
+            <a:endParaRPr lang="en-US" sz="1100" dirty="0"/>
+          </a:p>
+        </p:txBody>
+      </p:sp>
+      <p:sp>
+        <p:nvSpPr>
+          <p:cNvPr id="46" name="Shape 44"/>
+          <p:cNvSpPr/>
+          <p:nvPr/>
+        </p:nvSpPr>
+        <p:spPr>
+          <a:xfrm>
+            <a:off x="1133856" y="3895344"/>
+            <a:ext cx="713232" cy="274320"/>
+          </a:xfrm>
+          <a:prstGeom prst="roundRect">
+            <a:avLst>
+              <a:gd name="adj" fmla="val 16667"/>
+            </a:avLst>
+          </a:prstGeom>
+          <a:solidFill>
+            <a:srgbClr val="0057C2"/>
+          </a:solidFill>
+          <a:ln/>
+        </p:spPr>
+      </p:sp>
+      <p:sp>
+        <p:nvSpPr>
+          <p:cNvPr id="47" name="Text 45"/>
+          <p:cNvSpPr/>
+          <p:nvPr/>
+        </p:nvSpPr>
+        <p:spPr>
+          <a:xfrm>
+            <a:off x="1133856" y="3895344"/>
+            <a:ext cx="713232" cy="274320"/>
+          </a:xfrm>
+          <a:prstGeom prst="rect">
+            <a:avLst/>
+          </a:prstGeom>
+          <a:noFill/>
+          <a:ln/>
+        </p:spPr>
+        <p:txBody>
+          <a:bodyPr wrap="square" lIns="0" tIns="0" rIns="0" bIns="0" rtlCol="0" anchor="ctr"/>
+          <a:lstStyle/>
+          <a:p>
+            <a:pPr algn="ctr" indent="0" marL="0">
+              <a:buNone/>
+            </a:pPr>
+            <a:r>
+              <a:rPr lang="en-US" sz="1150" b="1" dirty="0">
+                <a:solidFill>
+                  <a:srgbClr val="FFFFFF"/>
+                </a:solidFill>
+                <a:latin typeface="Courier New" pitchFamily="34" charset="0"/>
+                <a:ea typeface="Courier New" pitchFamily="34" charset="-122"/>
+                <a:cs typeface="Courier New" pitchFamily="34" charset="-120"/>
+              </a:rPr>
+              <a:t>-GZ</a:t>
+            </a:r>
+            <a:endParaRPr lang="en-US" sz="1150" dirty="0"/>
+          </a:p>
+        </p:txBody>
+      </p:sp>
+      <p:sp>
+        <p:nvSpPr>
+          <p:cNvPr id="48" name="Text 46"/>
+          <p:cNvSpPr/>
+          <p:nvPr/>
+        </p:nvSpPr>
+        <p:spPr>
+          <a:xfrm>
+            <a:off x="1938528" y="3877056"/>
+            <a:ext cx="3959352" cy="310896"/>
+          </a:xfrm>
+          <a:prstGeom prst="rect">
+            <a:avLst/>
+          </a:prstGeom>
+          <a:noFill/>
+          <a:ln/>
+        </p:spPr>
+        <p:txBody>
+          <a:bodyPr wrap="square" lIns="0" tIns="0" rIns="0" bIns="0" rtlCol="0" anchor="ctr"/>
+          <a:lstStyle/>
+          <a:p>
+            <a:pPr indent="0" marL="0">
+              <a:buNone/>
+            </a:pPr>
+            <a:r>
+              <a:rPr lang="en-US" sz="1100" dirty="0">
+                <a:solidFill>
+                  <a:srgbClr val="00357A"/>
+                </a:solidFill>
+                <a:latin typeface="Poppins" pitchFamily="34" charset="0"/>
+                <a:ea typeface="Poppins" pitchFamily="34" charset="-122"/>
+                <a:cs typeface="Poppins" pitchFamily="34" charset="-120"/>
+              </a:rPr>
+              <a:t>use GMT as controlling time</a:t>
+            </a:r>
+            <a:endParaRPr lang="en-US" sz="1100" dirty="0"/>
+          </a:p>
+        </p:txBody>
+      </p:sp>
+      <p:sp>
+        <p:nvSpPr>
+          <p:cNvPr id="49" name="Shape 47"/>
+          <p:cNvSpPr/>
+          <p:nvPr/>
+        </p:nvSpPr>
+        <p:spPr>
+          <a:xfrm>
+            <a:off x="457200" y="4224528"/>
+            <a:ext cx="5532120" cy="310896"/>
+          </a:xfrm>
+          <a:prstGeom prst="roundRect">
+            <a:avLst>
+              <a:gd name="adj" fmla="val 14706"/>
+            </a:avLst>
+          </a:prstGeom>
+          <a:solidFill>
+            <a:srgbClr val="DCEBF7"/>
+          </a:solidFill>
+          <a:ln w="9525">
+            <a:solidFill>
+              <a:srgbClr val="A9D6F2"/>
+            </a:solidFill>
+            <a:prstDash val="solid"/>
+          </a:ln>
+        </p:spPr>
+      </p:sp>
+      <p:sp>
+        <p:nvSpPr>
+          <p:cNvPr id="50" name="Shape 48"/>
+          <p:cNvSpPr/>
+          <p:nvPr/>
+        </p:nvSpPr>
+        <p:spPr>
+          <a:xfrm>
+            <a:off x="539496" y="4242816"/>
+            <a:ext cx="310896" cy="274320"/>
+          </a:xfrm>
+          <a:prstGeom prst="roundRect">
+            <a:avLst>
+              <a:gd name="adj" fmla="val 16667"/>
+            </a:avLst>
+          </a:prstGeom>
+          <a:solidFill>
+            <a:srgbClr val="C25E00"/>
+          </a:solidFill>
+          <a:ln/>
+        </p:spPr>
+      </p:sp>
+      <p:sp>
+        <p:nvSpPr>
+          <p:cNvPr id="51" name="Text 49"/>
+          <p:cNvSpPr/>
+          <p:nvPr/>
+        </p:nvSpPr>
+        <p:spPr>
+          <a:xfrm>
+            <a:off x="539496" y="4242816"/>
+            <a:ext cx="310896" cy="274320"/>
+          </a:xfrm>
+          <a:prstGeom prst="rect">
+            <a:avLst/>
+          </a:prstGeom>
+          <a:noFill/>
+          <a:ln/>
+        </p:spPr>
+        <p:txBody>
+          <a:bodyPr wrap="square" lIns="0" tIns="0" rIns="0" bIns="0" rtlCol="0" anchor="ctr"/>
+          <a:lstStyle/>
+          <a:p>
+            <a:pPr algn="ctr" indent="0" marL="0">
+              <a:buNone/>
+            </a:pPr>
+            <a:r>
+              <a:rPr lang="en-US" sz="1150" b="1" dirty="0">
+                <a:solidFill>
+                  <a:srgbClr val="FFFFFF"/>
+                </a:solidFill>
+                <a:latin typeface="Courier New" pitchFamily="34" charset="0"/>
+                <a:ea typeface="Courier New" pitchFamily="34" charset="-122"/>
+                <a:cs typeface="Courier New" pitchFamily="34" charset="-120"/>
+              </a:rPr>
+              <a:t>M</a:t>
+            </a:r>
+            <a:endParaRPr lang="en-US" sz="1150" dirty="0"/>
+          </a:p>
+        </p:txBody>
+      </p:sp>
+      <p:sp>
+        <p:nvSpPr>
+          <p:cNvPr id="52" name="Text 50"/>
+          <p:cNvSpPr/>
+          <p:nvPr/>
+        </p:nvSpPr>
+        <p:spPr>
+          <a:xfrm>
+            <a:off x="886968" y="4224528"/>
+            <a:ext cx="219456" cy="310896"/>
+          </a:xfrm>
+          <a:prstGeom prst="rect">
+            <a:avLst/>
+          </a:prstGeom>
+          <a:noFill/>
+          <a:ln/>
+        </p:spPr>
+        <p:txBody>
+          <a:bodyPr wrap="square" lIns="0" tIns="0" rIns="0" bIns="0" rtlCol="0" anchor="ctr"/>
+          <a:lstStyle/>
+          <a:p>
+            <a:pPr algn="ctr" indent="0" marL="0">
+              <a:buNone/>
+            </a:pPr>
+            <a:r>
+              <a:rPr lang="en-US" sz="1100" b="1" dirty="0">
+                <a:solidFill>
+                  <a:srgbClr val="53565A"/>
+                </a:solidFill>
+                <a:latin typeface="Poppins" pitchFamily="34" charset="0"/>
+                <a:ea typeface="Poppins" pitchFamily="34" charset="-122"/>
+                <a:cs typeface="Poppins" pitchFamily="34" charset="-120"/>
+              </a:rPr>
+              <a:t>→</a:t>
+            </a:r>
+            <a:endParaRPr lang="en-US" sz="1100" dirty="0"/>
+          </a:p>
+        </p:txBody>
+      </p:sp>
+      <p:sp>
+        <p:nvSpPr>
+          <p:cNvPr id="53" name="Shape 51"/>
+          <p:cNvSpPr/>
+          <p:nvPr/>
+        </p:nvSpPr>
+        <p:spPr>
+          <a:xfrm>
+            <a:off x="1133856" y="4242816"/>
+            <a:ext cx="713232" cy="274320"/>
+          </a:xfrm>
+          <a:prstGeom prst="roundRect">
+            <a:avLst>
+              <a:gd name="adj" fmla="val 16667"/>
+            </a:avLst>
+          </a:prstGeom>
+          <a:solidFill>
+            <a:srgbClr val="0057C2"/>
+          </a:solidFill>
+          <a:ln/>
+        </p:spPr>
+      </p:sp>
+      <p:sp>
+        <p:nvSpPr>
+          <p:cNvPr id="54" name="Text 52"/>
+          <p:cNvSpPr/>
+          <p:nvPr/>
+        </p:nvSpPr>
+        <p:spPr>
+          <a:xfrm>
+            <a:off x="1133856" y="4242816"/>
+            <a:ext cx="713232" cy="274320"/>
+          </a:xfrm>
+          <a:prstGeom prst="rect">
+            <a:avLst/>
+          </a:prstGeom>
+          <a:noFill/>
+          <a:ln/>
+        </p:spPr>
+        <p:txBody>
+          <a:bodyPr wrap="square" lIns="0" tIns="0" rIns="0" bIns="0" rtlCol="0" anchor="ctr"/>
+          <a:lstStyle/>
+          <a:p>
+            <a:pPr algn="ctr" indent="0" marL="0">
+              <a:buNone/>
+            </a:pPr>
+            <a:r>
+              <a:rPr lang="en-US" sz="1150" b="1" dirty="0">
+                <a:solidFill>
+                  <a:srgbClr val="FFFFFF"/>
+                </a:solidFill>
+                <a:latin typeface="Courier New" pitchFamily="34" charset="0"/>
+                <a:ea typeface="Courier New" pitchFamily="34" charset="-122"/>
+                <a:cs typeface="Courier New" pitchFamily="34" charset="-120"/>
+              </a:rPr>
+              <a:t>-MU</a:t>
+            </a:r>
+            <a:endParaRPr lang="en-US" sz="1150" dirty="0"/>
+          </a:p>
+        </p:txBody>
+      </p:sp>
+      <p:sp>
+        <p:nvSpPr>
+          <p:cNvPr id="55" name="Text 53"/>
+          <p:cNvSpPr/>
+          <p:nvPr/>
+        </p:nvSpPr>
+        <p:spPr>
+          <a:xfrm>
+            <a:off x="1938528" y="4224528"/>
+            <a:ext cx="3959352" cy="310896"/>
+          </a:xfrm>
+          <a:prstGeom prst="rect">
+            <a:avLst/>
+          </a:prstGeom>
+          <a:noFill/>
+          <a:ln/>
+        </p:spPr>
+        <p:txBody>
+          <a:bodyPr wrap="square" lIns="0" tIns="0" rIns="0" bIns="0" rtlCol="0" anchor="ctr"/>
+          <a:lstStyle/>
+          <a:p>
+            <a:pPr indent="0" marL="0">
+              <a:buNone/>
+            </a:pPr>
+            <a:r>
+              <a:rPr lang="en-US" sz="1100" dirty="0">
+                <a:solidFill>
+                  <a:srgbClr val="00357A"/>
+                </a:solidFill>
+                <a:latin typeface="Poppins" pitchFamily="34" charset="0"/>
+                <a:ea typeface="Poppins" pitchFamily="34" charset="-122"/>
+                <a:cs typeface="Poppins" pitchFamily="34" charset="-120"/>
+              </a:rPr>
+              <a:t>process all elapsed periods</a:t>
+            </a:r>
+            <a:endParaRPr lang="en-US" sz="1100" dirty="0"/>
+          </a:p>
+        </p:txBody>
+      </p:sp>
+      <p:sp>
+        <p:nvSpPr>
+          <p:cNvPr id="56" name="Shape 54"/>
+          <p:cNvSpPr/>
+          <p:nvPr/>
+        </p:nvSpPr>
+        <p:spPr>
+          <a:xfrm>
+            <a:off x="457200" y="4572000"/>
+            <a:ext cx="5532120" cy="310896"/>
+          </a:xfrm>
+          <a:prstGeom prst="roundRect">
+            <a:avLst>
+              <a:gd name="adj" fmla="val 14706"/>
+            </a:avLst>
+          </a:prstGeom>
+          <a:solidFill>
+            <a:srgbClr val="FFFFFF"/>
+          </a:solidFill>
+          <a:ln w="9525">
+            <a:solidFill>
+              <a:srgbClr val="A9D6F2"/>
+            </a:solidFill>
+            <a:prstDash val="solid"/>
+          </a:ln>
+        </p:spPr>
+      </p:sp>
+      <p:sp>
+        <p:nvSpPr>
+          <p:cNvPr id="57" name="Shape 55"/>
+          <p:cNvSpPr/>
+          <p:nvPr/>
+        </p:nvSpPr>
+        <p:spPr>
+          <a:xfrm>
+            <a:off x="539496" y="4590288"/>
+            <a:ext cx="310896" cy="274320"/>
+          </a:xfrm>
+          <a:prstGeom prst="roundRect">
+            <a:avLst>
+              <a:gd name="adj" fmla="val 16667"/>
+            </a:avLst>
+          </a:prstGeom>
+          <a:solidFill>
+            <a:srgbClr val="C25E00"/>
+          </a:solidFill>
+          <a:ln/>
+        </p:spPr>
+      </p:sp>
+      <p:sp>
+        <p:nvSpPr>
+          <p:cNvPr id="58" name="Text 56"/>
+          <p:cNvSpPr/>
+          <p:nvPr/>
+        </p:nvSpPr>
+        <p:spPr>
+          <a:xfrm>
+            <a:off x="539496" y="4590288"/>
+            <a:ext cx="310896" cy="274320"/>
+          </a:xfrm>
+          <a:prstGeom prst="rect">
+            <a:avLst/>
+          </a:prstGeom>
+          <a:noFill/>
+          <a:ln/>
+        </p:spPr>
+        <p:txBody>
+          <a:bodyPr wrap="square" lIns="0" tIns="0" rIns="0" bIns="0" rtlCol="0" anchor="ctr"/>
+          <a:lstStyle/>
+          <a:p>
+            <a:pPr algn="ctr" indent="0" marL="0">
+              <a:buNone/>
+            </a:pPr>
+            <a:r>
+              <a:rPr lang="en-US" sz="1150" b="1" dirty="0">
+                <a:solidFill>
+                  <a:srgbClr val="FFFFFF"/>
+                </a:solidFill>
+                <a:latin typeface="Courier New" pitchFamily="34" charset="0"/>
+                <a:ea typeface="Courier New" pitchFamily="34" charset="-122"/>
+                <a:cs typeface="Courier New" pitchFamily="34" charset="-120"/>
+              </a:rPr>
+              <a:t>N</a:t>
+            </a:r>
+            <a:endParaRPr lang="en-US" sz="1150" dirty="0"/>
+          </a:p>
+        </p:txBody>
+      </p:sp>
+      <p:sp>
+        <p:nvSpPr>
+          <p:cNvPr id="59" name="Text 57"/>
+          <p:cNvSpPr/>
+          <p:nvPr/>
+        </p:nvSpPr>
+        <p:spPr>
+          <a:xfrm>
+            <a:off x="886968" y="4572000"/>
+            <a:ext cx="219456" cy="310896"/>
+          </a:xfrm>
+          <a:prstGeom prst="rect">
+            <a:avLst/>
+          </a:prstGeom>
+          <a:noFill/>
+          <a:ln/>
+        </p:spPr>
+        <p:txBody>
+          <a:bodyPr wrap="square" lIns="0" tIns="0" rIns="0" bIns="0" rtlCol="0" anchor="ctr"/>
+          <a:lstStyle/>
+          <a:p>
+            <a:pPr algn="ctr" indent="0" marL="0">
+              <a:buNone/>
+            </a:pPr>
+            <a:r>
+              <a:rPr lang="en-US" sz="1100" b="1" dirty="0">
+                <a:solidFill>
+                  <a:srgbClr val="53565A"/>
+                </a:solidFill>
+                <a:latin typeface="Poppins" pitchFamily="34" charset="0"/>
+                <a:ea typeface="Poppins" pitchFamily="34" charset="-122"/>
+                <a:cs typeface="Poppins" pitchFamily="34" charset="-120"/>
+              </a:rPr>
+              <a:t>→</a:t>
+            </a:r>
+            <a:endParaRPr lang="en-US" sz="1100" dirty="0"/>
+          </a:p>
+        </p:txBody>
+      </p:sp>
+      <p:sp>
+        <p:nvSpPr>
+          <p:cNvPr id="60" name="Shape 58"/>
+          <p:cNvSpPr/>
+          <p:nvPr/>
+        </p:nvSpPr>
+        <p:spPr>
+          <a:xfrm>
+            <a:off x="1133856" y="4590288"/>
+            <a:ext cx="713232" cy="274320"/>
+          </a:xfrm>
+          <a:prstGeom prst="roundRect">
+            <a:avLst>
+              <a:gd name="adj" fmla="val 16667"/>
+            </a:avLst>
+          </a:prstGeom>
+          <a:solidFill>
+            <a:srgbClr val="0057C2"/>
+          </a:solidFill>
+          <a:ln/>
+        </p:spPr>
+      </p:sp>
+      <p:sp>
+        <p:nvSpPr>
+          <p:cNvPr id="61" name="Text 59"/>
+          <p:cNvSpPr/>
+          <p:nvPr/>
+        </p:nvSpPr>
+        <p:spPr>
+          <a:xfrm>
+            <a:off x="1133856" y="4590288"/>
+            <a:ext cx="713232" cy="274320"/>
+          </a:xfrm>
+          <a:prstGeom prst="rect">
+            <a:avLst/>
+          </a:prstGeom>
+          <a:noFill/>
+          <a:ln/>
+        </p:spPr>
+        <p:txBody>
+          <a:bodyPr wrap="square" lIns="0" tIns="0" rIns="0" bIns="0" rtlCol="0" anchor="ctr"/>
+          <a:lstStyle/>
+          <a:p>
+            <a:pPr algn="ctr" indent="0" marL="0">
+              <a:buNone/>
+            </a:pPr>
+            <a:r>
+              <a:rPr lang="en-US" sz="1150" b="1" dirty="0">
+                <a:solidFill>
+                  <a:srgbClr val="FFFFFF"/>
+                </a:solidFill>
+                <a:latin typeface="Courier New" pitchFamily="34" charset="0"/>
+                <a:ea typeface="Courier New" pitchFamily="34" charset="-122"/>
+                <a:cs typeface="Courier New" pitchFamily="34" charset="-120"/>
+              </a:rPr>
+              <a:t>-CN</a:t>
+            </a:r>
+            <a:endParaRPr lang="en-US" sz="1150" dirty="0"/>
+          </a:p>
+        </p:txBody>
+      </p:sp>
+      <p:sp>
+        <p:nvSpPr>
+          <p:cNvPr id="62" name="Text 60"/>
+          <p:cNvSpPr/>
+          <p:nvPr/>
+        </p:nvSpPr>
+        <p:spPr>
+          <a:xfrm>
+            <a:off x="1938528" y="4572000"/>
+            <a:ext cx="3959352" cy="310896"/>
+          </a:xfrm>
+          <a:prstGeom prst="rect">
+            <a:avLst/>
+          </a:prstGeom>
+          <a:noFill/>
+          <a:ln/>
+        </p:spPr>
+        <p:txBody>
+          <a:bodyPr wrap="square" lIns="0" tIns="0" rIns="0" bIns="0" rtlCol="0" anchor="ctr"/>
+          <a:lstStyle/>
+          <a:p>
+            <a:pPr indent="0" marL="0">
+              <a:buNone/>
+            </a:pPr>
+            <a:r>
+              <a:rPr lang="en-US" sz="1100" dirty="0">
+                <a:solidFill>
+                  <a:srgbClr val="00357A"/>
+                </a:solidFill>
+                <a:latin typeface="Poppins" pitchFamily="34" charset="0"/>
+                <a:ea typeface="Poppins" pitchFamily="34" charset="-122"/>
+                <a:cs typeface="Poppins" pitchFamily="34" charset="-120"/>
+              </a:rPr>
+              <a:t>re-download only if changed on server</a:t>
+            </a:r>
+            <a:endParaRPr lang="en-US" sz="1100" dirty="0"/>
+          </a:p>
+        </p:txBody>
+      </p:sp>
+      <p:sp>
+        <p:nvSpPr>
+          <p:cNvPr id="63" name="Shape 61"/>
+          <p:cNvSpPr/>
+          <p:nvPr/>
+        </p:nvSpPr>
+        <p:spPr>
+          <a:xfrm>
+            <a:off x="457200" y="4919472"/>
+            <a:ext cx="5532120" cy="310896"/>
+          </a:xfrm>
+          <a:prstGeom prst="roundRect">
+            <a:avLst>
+              <a:gd name="adj" fmla="val 14706"/>
+            </a:avLst>
+          </a:prstGeom>
+          <a:solidFill>
+            <a:srgbClr val="DCEBF7"/>
+          </a:solidFill>
+          <a:ln w="9525">
+            <a:solidFill>
+              <a:srgbClr val="A9D6F2"/>
+            </a:solidFill>
+            <a:prstDash val="solid"/>
+          </a:ln>
+        </p:spPr>
+      </p:sp>
+      <p:sp>
+        <p:nvSpPr>
+          <p:cNvPr id="64" name="Shape 62"/>
+          <p:cNvSpPr/>
+          <p:nvPr/>
+        </p:nvSpPr>
+        <p:spPr>
+          <a:xfrm>
+            <a:off x="539496" y="4937760"/>
+            <a:ext cx="310896" cy="274320"/>
+          </a:xfrm>
+          <a:prstGeom prst="roundRect">
+            <a:avLst>
+              <a:gd name="adj" fmla="val 16667"/>
+            </a:avLst>
+          </a:prstGeom>
+          <a:solidFill>
+            <a:srgbClr val="C25E00"/>
+          </a:solidFill>
+          <a:ln/>
+        </p:spPr>
+      </p:sp>
+      <p:sp>
+        <p:nvSpPr>
+          <p:cNvPr id="65" name="Text 63"/>
+          <p:cNvSpPr/>
+          <p:nvPr/>
+        </p:nvSpPr>
+        <p:spPr>
+          <a:xfrm>
+            <a:off x="539496" y="4937760"/>
+            <a:ext cx="310896" cy="274320"/>
+          </a:xfrm>
+          <a:prstGeom prst="rect">
+            <a:avLst/>
+          </a:prstGeom>
+          <a:noFill/>
+          <a:ln/>
+        </p:spPr>
+        <p:txBody>
+          <a:bodyPr wrap="square" lIns="0" tIns="0" rIns="0" bIns="0" rtlCol="0" anchor="ctr"/>
+          <a:lstStyle/>
+          <a:p>
+            <a:pPr algn="ctr" indent="0" marL="0">
+              <a:buNone/>
+            </a:pPr>
+            <a:r>
+              <a:rPr lang="en-US" sz="1150" b="1" dirty="0">
+                <a:solidFill>
+                  <a:srgbClr val="FFFFFF"/>
+                </a:solidFill>
+                <a:latin typeface="Courier New" pitchFamily="34" charset="0"/>
+                <a:ea typeface="Courier New" pitchFamily="34" charset="-122"/>
+                <a:cs typeface="Courier New" pitchFamily="34" charset="-120"/>
+              </a:rPr>
+              <a:t>O</a:t>
+            </a:r>
+            <a:endParaRPr lang="en-US" sz="1150" dirty="0"/>
+          </a:p>
+        </p:txBody>
+      </p:sp>
+      <p:sp>
+        <p:nvSpPr>
+          <p:cNvPr id="66" name="Text 64"/>
+          <p:cNvSpPr/>
+          <p:nvPr/>
+        </p:nvSpPr>
+        <p:spPr>
+          <a:xfrm>
+            <a:off x="886968" y="4919472"/>
+            <a:ext cx="219456" cy="310896"/>
+          </a:xfrm>
+          <a:prstGeom prst="rect">
+            <a:avLst/>
+          </a:prstGeom>
+          <a:noFill/>
+          <a:ln/>
+        </p:spPr>
+        <p:txBody>
+          <a:bodyPr wrap="square" lIns="0" tIns="0" rIns="0" bIns="0" rtlCol="0" anchor="ctr"/>
+          <a:lstStyle/>
+          <a:p>
+            <a:pPr algn="ctr" indent="0" marL="0">
+              <a:buNone/>
+            </a:pPr>
+            <a:r>
+              <a:rPr lang="en-US" sz="1100" b="1" dirty="0">
+                <a:solidFill>
+                  <a:srgbClr val="53565A"/>
+                </a:solidFill>
+                <a:latin typeface="Poppins" pitchFamily="34" charset="0"/>
+                <a:ea typeface="Poppins" pitchFamily="34" charset="-122"/>
+                <a:cs typeface="Poppins" pitchFamily="34" charset="-120"/>
+              </a:rPr>
+              <a:t>→</a:t>
+            </a:r>
+            <a:endParaRPr lang="en-US" sz="1100" dirty="0"/>
+          </a:p>
+        </p:txBody>
+      </p:sp>
+      <p:sp>
+        <p:nvSpPr>
+          <p:cNvPr id="67" name="Shape 65"/>
+          <p:cNvSpPr/>
+          <p:nvPr/>
+        </p:nvSpPr>
+        <p:spPr>
+          <a:xfrm>
+            <a:off x="1133856" y="4937760"/>
+            <a:ext cx="713232" cy="274320"/>
+          </a:xfrm>
+          <a:prstGeom prst="roundRect">
+            <a:avLst>
+              <a:gd name="adj" fmla="val 16667"/>
+            </a:avLst>
+          </a:prstGeom>
+          <a:solidFill>
+            <a:srgbClr val="0057C2"/>
+          </a:solidFill>
+          <a:ln/>
+        </p:spPr>
+      </p:sp>
+      <p:sp>
+        <p:nvSpPr>
+          <p:cNvPr id="68" name="Text 66"/>
+          <p:cNvSpPr/>
+          <p:nvPr/>
+        </p:nvSpPr>
+        <p:spPr>
+          <a:xfrm>
+            <a:off x="1133856" y="4937760"/>
+            <a:ext cx="713232" cy="274320"/>
+          </a:xfrm>
+          <a:prstGeom prst="rect">
+            <a:avLst/>
+          </a:prstGeom>
+          <a:noFill/>
+          <a:ln/>
+        </p:spPr>
+        <p:txBody>
+          <a:bodyPr wrap="square" lIns="0" tIns="0" rIns="0" bIns="0" rtlCol="0" anchor="ctr"/>
+          <a:lstStyle/>
+          <a:p>
+            <a:pPr algn="ctr" indent="0" marL="0">
+              <a:buNone/>
+            </a:pPr>
+            <a:r>
+              <a:rPr lang="en-US" sz="1150" b="1" dirty="0">
+                <a:solidFill>
+                  <a:srgbClr val="FFFFFF"/>
+                </a:solidFill>
+                <a:latin typeface="Courier New" pitchFamily="34" charset="0"/>
+                <a:ea typeface="Courier New" pitchFamily="34" charset="-122"/>
+                <a:cs typeface="Courier New" pitchFamily="34" charset="-120"/>
+              </a:rPr>
+              <a:t>-MO</a:t>
+            </a:r>
+            <a:endParaRPr lang="en-US" sz="1150" dirty="0"/>
+          </a:p>
+        </p:txBody>
+      </p:sp>
+      <p:sp>
+        <p:nvSpPr>
+          <p:cNvPr id="69" name="Text 67"/>
+          <p:cNvSpPr/>
+          <p:nvPr/>
+        </p:nvSpPr>
+        <p:spPr>
+          <a:xfrm>
+            <a:off x="1938528" y="4919472"/>
+            <a:ext cx="3959352" cy="310896"/>
+          </a:xfrm>
+          <a:prstGeom prst="rect">
+            <a:avLst/>
+          </a:prstGeom>
+          <a:noFill/>
+          <a:ln/>
+        </p:spPr>
+        <p:txBody>
+          <a:bodyPr wrap="square" lIns="0" tIns="0" rIns="0" bIns="0" rtlCol="0" anchor="ctr"/>
+          <a:lstStyle/>
+          <a:p>
+            <a:pPr indent="0" marL="0">
+              <a:buNone/>
+            </a:pPr>
+            <a:r>
+              <a:rPr lang="en-US" sz="1100" dirty="0">
+                <a:solidFill>
+                  <a:srgbClr val="00357A"/>
+                </a:solidFill>
+                <a:latin typeface="Poppins" pitchFamily="34" charset="0"/>
+                <a:ea typeface="Poppins" pitchFamily="34" charset="-122"/>
+                <a:cs typeface="Poppins" pitchFamily="34" charset="-120"/>
+              </a:rPr>
+              <a:t>only not-yet-archived periods</a:t>
+            </a:r>
+            <a:endParaRPr lang="en-US" sz="1100" dirty="0"/>
+          </a:p>
+        </p:txBody>
+      </p:sp>
+      <p:sp>
+        <p:nvSpPr>
+          <p:cNvPr id="70" name="Shape 68"/>
+          <p:cNvSpPr/>
+          <p:nvPr/>
+        </p:nvSpPr>
+        <p:spPr>
+          <a:xfrm>
+            <a:off x="457200" y="5266944"/>
+            <a:ext cx="5532120" cy="310896"/>
+          </a:xfrm>
+          <a:prstGeom prst="roundRect">
+            <a:avLst>
+              <a:gd name="adj" fmla="val 14706"/>
+            </a:avLst>
+          </a:prstGeom>
+          <a:solidFill>
+            <a:srgbClr val="FFFFFF"/>
+          </a:solidFill>
+          <a:ln w="9525">
+            <a:solidFill>
+              <a:srgbClr val="A9D6F2"/>
+            </a:solidFill>
+            <a:prstDash val="solid"/>
+          </a:ln>
+        </p:spPr>
+      </p:sp>
+      <p:sp>
+        <p:nvSpPr>
+          <p:cNvPr id="71" name="Shape 69"/>
+          <p:cNvSpPr/>
+          <p:nvPr/>
+        </p:nvSpPr>
+        <p:spPr>
+          <a:xfrm>
+            <a:off x="539496" y="5285232"/>
+            <a:ext cx="310896" cy="274320"/>
+          </a:xfrm>
+          <a:prstGeom prst="roundRect">
+            <a:avLst>
+              <a:gd name="adj" fmla="val 16667"/>
+            </a:avLst>
+          </a:prstGeom>
+          <a:solidFill>
+            <a:srgbClr val="C25E00"/>
+          </a:solidFill>
+          <a:ln/>
+        </p:spPr>
+      </p:sp>
+      <p:sp>
+        <p:nvSpPr>
+          <p:cNvPr id="72" name="Text 70"/>
+          <p:cNvSpPr/>
+          <p:nvPr/>
+        </p:nvSpPr>
+        <p:spPr>
+          <a:xfrm>
+            <a:off x="539496" y="5285232"/>
+            <a:ext cx="310896" cy="274320"/>
+          </a:xfrm>
+          <a:prstGeom prst="rect">
+            <a:avLst/>
+          </a:prstGeom>
+          <a:noFill/>
+          <a:ln/>
+        </p:spPr>
+        <p:txBody>
+          <a:bodyPr wrap="square" lIns="0" tIns="0" rIns="0" bIns="0" rtlCol="0" anchor="ctr"/>
+          <a:lstStyle/>
+          <a:p>
+            <a:pPr algn="ctr" indent="0" marL="0">
+              <a:buNone/>
+            </a:pPr>
+            <a:r>
+              <a:rPr lang="en-US" sz="1150" b="1" dirty="0">
+                <a:solidFill>
+                  <a:srgbClr val="FFFFFF"/>
+                </a:solidFill>
+                <a:latin typeface="Courier New" pitchFamily="34" charset="0"/>
+                <a:ea typeface="Courier New" pitchFamily="34" charset="-122"/>
+                <a:cs typeface="Courier New" pitchFamily="34" charset="-120"/>
+              </a:rPr>
+              <a:t>Y</a:t>
+            </a:r>
+            <a:endParaRPr lang="en-US" sz="1150" dirty="0"/>
+          </a:p>
+        </p:txBody>
+      </p:sp>
+      <p:sp>
+        <p:nvSpPr>
+          <p:cNvPr id="73" name="Text 71"/>
+          <p:cNvSpPr/>
+          <p:nvPr/>
+        </p:nvSpPr>
+        <p:spPr>
+          <a:xfrm>
+            <a:off x="886968" y="5266944"/>
+            <a:ext cx="219456" cy="310896"/>
+          </a:xfrm>
+          <a:prstGeom prst="rect">
+            <a:avLst/>
+          </a:prstGeom>
+          <a:noFill/>
+          <a:ln/>
+        </p:spPr>
+        <p:txBody>
+          <a:bodyPr wrap="square" lIns="0" tIns="0" rIns="0" bIns="0" rtlCol="0" anchor="ctr"/>
+          <a:lstStyle/>
+          <a:p>
+            <a:pPr algn="ctr" indent="0" marL="0">
+              <a:buNone/>
+            </a:pPr>
+            <a:r>
+              <a:rPr lang="en-US" sz="1100" b="1" dirty="0">
+                <a:solidFill>
+                  <a:srgbClr val="53565A"/>
+                </a:solidFill>
+                <a:latin typeface="Poppins" pitchFamily="34" charset="0"/>
+                <a:ea typeface="Poppins" pitchFamily="34" charset="-122"/>
+                <a:cs typeface="Poppins" pitchFamily="34" charset="-120"/>
+              </a:rPr>
+              <a:t>→</a:t>
+            </a:r>
+            <a:endParaRPr lang="en-US" sz="1100" dirty="0"/>
+          </a:p>
+        </p:txBody>
+      </p:sp>
+      <p:sp>
+        <p:nvSpPr>
+          <p:cNvPr id="74" name="Shape 72"/>
+          <p:cNvSpPr/>
+          <p:nvPr/>
+        </p:nvSpPr>
+        <p:spPr>
+          <a:xfrm>
+            <a:off x="1133856" y="5285232"/>
+            <a:ext cx="713232" cy="274320"/>
+          </a:xfrm>
+          <a:prstGeom prst="roundRect">
+            <a:avLst>
+              <a:gd name="adj" fmla="val 16667"/>
+            </a:avLst>
+          </a:prstGeom>
+          <a:solidFill>
+            <a:srgbClr val="0057C2"/>
+          </a:solidFill>
+          <a:ln/>
+        </p:spPr>
+      </p:sp>
+      <p:sp>
+        <p:nvSpPr>
+          <p:cNvPr id="75" name="Text 73"/>
+          <p:cNvSpPr/>
+          <p:nvPr/>
+        </p:nvSpPr>
+        <p:spPr>
+          <a:xfrm>
+            <a:off x="1133856" y="5285232"/>
+            <a:ext cx="713232" cy="274320"/>
+          </a:xfrm>
+          <a:prstGeom prst="rect">
+            <a:avLst/>
+          </a:prstGeom>
+          <a:noFill/>
+          <a:ln/>
+        </p:spPr>
+        <p:txBody>
+          <a:bodyPr wrap="square" lIns="0" tIns="0" rIns="0" bIns="0" rtlCol="0" anchor="ctr"/>
+          <a:lstStyle/>
+          <a:p>
+            <a:pPr algn="ctr" indent="0" marL="0">
+              <a:buNone/>
+            </a:pPr>
+            <a:r>
+              <a:rPr lang="en-US" sz="1150" b="1" dirty="0">
+                <a:solidFill>
+                  <a:srgbClr val="FFFFFF"/>
+                </a:solidFill>
+                <a:latin typeface="Courier New" pitchFamily="34" charset="0"/>
+                <a:ea typeface="Courier New" pitchFamily="34" charset="-122"/>
+                <a:cs typeface="Courier New" pitchFamily="34" charset="-120"/>
+              </a:rPr>
+              <a:t>-NY</a:t>
+            </a:r>
+            <a:endParaRPr lang="en-US" sz="1150" dirty="0"/>
+          </a:p>
+        </p:txBody>
+      </p:sp>
+      <p:sp>
+        <p:nvSpPr>
+          <p:cNvPr id="76" name="Text 74"/>
+          <p:cNvSpPr/>
+          <p:nvPr/>
+        </p:nvSpPr>
+        <p:spPr>
+          <a:xfrm>
+            <a:off x="1938528" y="5266944"/>
+            <a:ext cx="3959352" cy="310896"/>
+          </a:xfrm>
+          <a:prstGeom prst="rect">
+            <a:avLst/>
+          </a:prstGeom>
+          <a:noFill/>
+          <a:ln/>
+        </p:spPr>
+        <p:txBody>
+          <a:bodyPr wrap="square" lIns="0" tIns="0" rIns="0" bIns="0" rtlCol="0" anchor="ctr"/>
+          <a:lstStyle/>
+          <a:p>
+            <a:pPr indent="0" marL="0">
+              <a:buNone/>
+            </a:pPr>
+            <a:r>
+              <a:rPr lang="en-US" sz="1100" dirty="0">
+                <a:solidFill>
+                  <a:srgbClr val="00357A"/>
+                </a:solidFill>
+                <a:latin typeface="Poppins" pitchFamily="34" charset="0"/>
+                <a:ea typeface="Poppins" pitchFamily="34" charset="-122"/>
+                <a:cs typeface="Poppins" pitchFamily="34" charset="-120"/>
+              </a:rPr>
+              <a:t>skip Feb 29 in leap years</a:t>
+            </a:r>
+            <a:endParaRPr lang="en-US" sz="1100" dirty="0"/>
+          </a:p>
+        </p:txBody>
+      </p:sp>
+      <p:sp>
+        <p:nvSpPr>
+          <p:cNvPr id="77" name="Shape 75"/>
+          <p:cNvSpPr/>
+          <p:nvPr/>
+        </p:nvSpPr>
+        <p:spPr>
+          <a:xfrm>
+            <a:off x="457200" y="5614416"/>
+            <a:ext cx="5532120" cy="310896"/>
+          </a:xfrm>
+          <a:prstGeom prst="roundRect">
+            <a:avLst>
+              <a:gd name="adj" fmla="val 14706"/>
+            </a:avLst>
+          </a:prstGeom>
+          <a:solidFill>
+            <a:srgbClr val="DCEBF7"/>
+          </a:solidFill>
+          <a:ln w="9525">
+            <a:solidFill>
+              <a:srgbClr val="A9D6F2"/>
+            </a:solidFill>
+            <a:prstDash val="solid"/>
+          </a:ln>
+        </p:spPr>
+      </p:sp>
+      <p:sp>
+        <p:nvSpPr>
+          <p:cNvPr id="78" name="Shape 76"/>
+          <p:cNvSpPr/>
+          <p:nvPr/>
+        </p:nvSpPr>
+        <p:spPr>
+          <a:xfrm>
+            <a:off x="539496" y="5632704"/>
+            <a:ext cx="310896" cy="274320"/>
+          </a:xfrm>
+          <a:prstGeom prst="roundRect">
+            <a:avLst>
+              <a:gd name="adj" fmla="val 16667"/>
+            </a:avLst>
+          </a:prstGeom>
+          <a:solidFill>
+            <a:srgbClr val="C25E00"/>
+          </a:solidFill>
+          <a:ln/>
+        </p:spPr>
+      </p:sp>
+      <p:sp>
+        <p:nvSpPr>
+          <p:cNvPr id="79" name="Text 77"/>
+          <p:cNvSpPr/>
+          <p:nvPr/>
+        </p:nvSpPr>
+        <p:spPr>
+          <a:xfrm>
+            <a:off x="539496" y="5632704"/>
+            <a:ext cx="310896" cy="274320"/>
+          </a:xfrm>
+          <a:prstGeom prst="rect">
+            <a:avLst/>
+          </a:prstGeom>
+          <a:noFill/>
+          <a:ln/>
+        </p:spPr>
+        <p:txBody>
+          <a:bodyPr wrap="square" lIns="0" tIns="0" rIns="0" bIns="0" rtlCol="0" anchor="ctr"/>
+          <a:lstStyle/>
+          <a:p>
+            <a:pPr algn="ctr" indent="0" marL="0">
+              <a:buNone/>
+            </a:pPr>
+            <a:r>
+              <a:rPr lang="en-US" sz="1150" b="1" dirty="0">
+                <a:solidFill>
+                  <a:srgbClr val="FFFFFF"/>
+                </a:solidFill>
+                <a:latin typeface="Courier New" pitchFamily="34" charset="0"/>
+                <a:ea typeface="Courier New" pitchFamily="34" charset="-122"/>
+                <a:cs typeface="Courier New" pitchFamily="34" charset="-120"/>
+              </a:rPr>
+              <a:t>Z</a:t>
+            </a:r>
+            <a:endParaRPr lang="en-US" sz="1150" dirty="0"/>
+          </a:p>
+        </p:txBody>
+      </p:sp>
+      <p:sp>
+        <p:nvSpPr>
+          <p:cNvPr id="80" name="Text 78"/>
+          <p:cNvSpPr/>
+          <p:nvPr/>
+        </p:nvSpPr>
+        <p:spPr>
+          <a:xfrm>
+            <a:off x="886968" y="5614416"/>
+            <a:ext cx="219456" cy="310896"/>
+          </a:xfrm>
+          <a:prstGeom prst="rect">
+            <a:avLst/>
+          </a:prstGeom>
+          <a:noFill/>
+          <a:ln/>
+        </p:spPr>
+        <p:txBody>
+          <a:bodyPr wrap="square" lIns="0" tIns="0" rIns="0" bIns="0" rtlCol="0" anchor="ctr"/>
+          <a:lstStyle/>
+          <a:p>
+            <a:pPr algn="ctr" indent="0" marL="0">
+              <a:buNone/>
+            </a:pPr>
+            <a:r>
+              <a:rPr lang="en-US" sz="1100" b="1" dirty="0">
+                <a:solidFill>
+                  <a:srgbClr val="53565A"/>
+                </a:solidFill>
+                <a:latin typeface="Poppins" pitchFamily="34" charset="0"/>
+                <a:ea typeface="Poppins" pitchFamily="34" charset="-122"/>
+                <a:cs typeface="Poppins" pitchFamily="34" charset="-120"/>
+              </a:rPr>
+              <a:t>→</a:t>
+            </a:r>
+            <a:endParaRPr lang="en-US" sz="1100" dirty="0"/>
+          </a:p>
+        </p:txBody>
+      </p:sp>
+      <p:sp>
+        <p:nvSpPr>
+          <p:cNvPr id="81" name="Shape 79"/>
+          <p:cNvSpPr/>
+          <p:nvPr/>
+        </p:nvSpPr>
+        <p:spPr>
+          <a:xfrm>
+            <a:off x="1133856" y="5632704"/>
+            <a:ext cx="713232" cy="274320"/>
+          </a:xfrm>
+          <a:prstGeom prst="roundRect">
+            <a:avLst>
+              <a:gd name="adj" fmla="val 16667"/>
+            </a:avLst>
+          </a:prstGeom>
+          <a:solidFill>
+            <a:srgbClr val="0057C2"/>
+          </a:solidFill>
+          <a:ln/>
+        </p:spPr>
+      </p:sp>
+      <p:sp>
+        <p:nvSpPr>
+          <p:cNvPr id="82" name="Text 80"/>
+          <p:cNvSpPr/>
+          <p:nvPr/>
+        </p:nvSpPr>
+        <p:spPr>
+          <a:xfrm>
+            <a:off x="1133856" y="5632704"/>
+            <a:ext cx="713232" cy="274320"/>
+          </a:xfrm>
+          <a:prstGeom prst="rect">
+            <a:avLst/>
+          </a:prstGeom>
+          <a:noFill/>
+          <a:ln/>
+        </p:spPr>
+        <p:txBody>
+          <a:bodyPr wrap="square" lIns="0" tIns="0" rIns="0" bIns="0" rtlCol="0" anchor="ctr"/>
+          <a:lstStyle/>
+          <a:p>
+            <a:pPr algn="ctr" indent="0" marL="0">
+              <a:buNone/>
+            </a:pPr>
+            <a:r>
+              <a:rPr lang="en-US" sz="1150" b="1" dirty="0">
+                <a:solidFill>
+                  <a:srgbClr val="FFFFFF"/>
+                </a:solidFill>
+                <a:latin typeface="Courier New" pitchFamily="34" charset="0"/>
+                <a:ea typeface="Courier New" pitchFamily="34" charset="-122"/>
+                <a:cs typeface="Courier New" pitchFamily="34" charset="-120"/>
+              </a:rPr>
+              <a:t>-VS 0</a:t>
+            </a:r>
+            <a:endParaRPr lang="en-US" sz="1150" dirty="0"/>
+          </a:p>
+        </p:txBody>
+      </p:sp>
+      <p:sp>
+        <p:nvSpPr>
+          <p:cNvPr id="83" name="Text 81"/>
+          <p:cNvSpPr/>
+          <p:nvPr/>
+        </p:nvSpPr>
+        <p:spPr>
+          <a:xfrm>
+            <a:off x="1938528" y="5614416"/>
+            <a:ext cx="3959352" cy="310896"/>
+          </a:xfrm>
+          <a:prstGeom prst="rect">
+            <a:avLst/>
+          </a:prstGeom>
+          <a:noFill/>
+          <a:ln/>
+        </p:spPr>
+        <p:txBody>
+          <a:bodyPr wrap="square" lIns="0" tIns="0" rIns="0" bIns="0" rtlCol="0" anchor="ctr"/>
+          <a:lstStyle/>
+          <a:p>
+            <a:pPr indent="0" marL="0">
+              <a:buNone/>
+            </a:pPr>
+            <a:r>
+              <a:rPr lang="en-US" sz="1100" dirty="0">
+                <a:solidFill>
+                  <a:srgbClr val="00357A"/>
+                </a:solidFill>
+                <a:latin typeface="Poppins" pitchFamily="34" charset="0"/>
+                <a:ea typeface="Poppins" pitchFamily="34" charset="-122"/>
+                <a:cs typeface="Poppins" pitchFamily="34" charset="-120"/>
+              </a:rPr>
+              <a:t>treat zero-byte files as valid</a:t>
+            </a:r>
+            <a:endParaRPr lang="en-US" sz="1100" dirty="0"/>
+          </a:p>
+        </p:txBody>
+      </p:sp>
+      <p:sp>
+        <p:nvSpPr>
+          <p:cNvPr id="84" name="Shape 82"/>
+          <p:cNvSpPr/>
+          <p:nvPr/>
+        </p:nvSpPr>
+        <p:spPr>
+          <a:xfrm>
+            <a:off x="6199632" y="1737360"/>
+            <a:ext cx="5532120" cy="329184"/>
+          </a:xfrm>
+          <a:prstGeom prst="roundRect">
+            <a:avLst>
+              <a:gd name="adj" fmla="val 13889"/>
+            </a:avLst>
+          </a:prstGeom>
+          <a:solidFill>
+            <a:srgbClr val="0092DB"/>
+          </a:solidFill>
+          <a:ln/>
+        </p:spPr>
+      </p:sp>
+      <p:sp>
+        <p:nvSpPr>
+          <p:cNvPr id="85" name="Text 83"/>
+          <p:cNvSpPr/>
+          <p:nvPr/>
+        </p:nvSpPr>
+        <p:spPr>
+          <a:xfrm>
+            <a:off x="6327648" y="1737360"/>
+            <a:ext cx="5276088" cy="329184"/>
+          </a:xfrm>
+          <a:prstGeom prst="rect">
+            <a:avLst/>
+          </a:prstGeom>
+          <a:noFill/>
+          <a:ln/>
+        </p:spPr>
+        <p:txBody>
+          <a:bodyPr wrap="square" lIns="0" tIns="0" rIns="0" bIns="0" rtlCol="0" anchor="ctr"/>
+          <a:lstStyle/>
+          <a:p>
+            <a:pPr indent="0" marL="0">
+              <a:buNone/>
+            </a:pPr>
+            <a:r>
+              <a:rPr lang="en-US" sz="1200" b="1" dirty="0">
+                <a:solidFill>
+                  <a:srgbClr val="FFFFFF"/>
+                </a:solidFill>
+                <a:latin typeface="Poppins" pitchFamily="34" charset="0"/>
+                <a:ea typeface="Poppins" pitchFamily="34" charset="-122"/>
+                <a:cs typeface="Poppins" pitchFamily="34" charset="-120"/>
+              </a:rPr>
+              <a:t>COMMAND LINE ONLY</a:t>
+            </a:r>
+            <a:endParaRPr lang="en-US" sz="1200" dirty="0"/>
+          </a:p>
+        </p:txBody>
+      </p:sp>
+      <p:sp>
+        <p:nvSpPr>
+          <p:cNvPr id="86" name="Shape 84"/>
+          <p:cNvSpPr/>
+          <p:nvPr/>
+        </p:nvSpPr>
+        <p:spPr>
+          <a:xfrm>
+            <a:off x="6199632" y="2139696"/>
+            <a:ext cx="5532120" cy="310896"/>
+          </a:xfrm>
+          <a:prstGeom prst="roundRect">
+            <a:avLst>
+              <a:gd name="adj" fmla="val 14706"/>
+            </a:avLst>
+          </a:prstGeom>
+          <a:solidFill>
+            <a:srgbClr val="DCEBF7"/>
+          </a:solidFill>
+          <a:ln w="9525">
+            <a:solidFill>
+              <a:srgbClr val="A9D6F2"/>
+            </a:solidFill>
+            <a:prstDash val="solid"/>
+          </a:ln>
+        </p:spPr>
+      </p:sp>
+      <p:sp>
+        <p:nvSpPr>
+          <p:cNvPr id="87" name="Shape 85"/>
+          <p:cNvSpPr/>
+          <p:nvPr/>
+        </p:nvSpPr>
+        <p:spPr>
+          <a:xfrm>
+            <a:off x="6281928" y="2157984"/>
+            <a:ext cx="713232" cy="274320"/>
+          </a:xfrm>
+          <a:prstGeom prst="roundRect">
+            <a:avLst>
+              <a:gd name="adj" fmla="val 16667"/>
+            </a:avLst>
+          </a:prstGeom>
+          <a:solidFill>
+            <a:srgbClr val="0092DB"/>
+          </a:solidFill>
+          <a:ln/>
+        </p:spPr>
+      </p:sp>
+      <p:sp>
+        <p:nvSpPr>
+          <p:cNvPr id="88" name="Text 86"/>
+          <p:cNvSpPr/>
+          <p:nvPr/>
+        </p:nvSpPr>
+        <p:spPr>
+          <a:xfrm>
+            <a:off x="6281928" y="2157984"/>
+            <a:ext cx="713232" cy="274320"/>
+          </a:xfrm>
+          <a:prstGeom prst="rect">
+            <a:avLst/>
+          </a:prstGeom>
+          <a:noFill/>
+          <a:ln/>
+        </p:spPr>
+        <p:txBody>
+          <a:bodyPr wrap="square" lIns="0" tIns="0" rIns="0" bIns="0" rtlCol="0" anchor="ctr"/>
+          <a:lstStyle/>
+          <a:p>
+            <a:pPr algn="ctr" indent="0" marL="0">
+              <a:buNone/>
+            </a:pPr>
+            <a:r>
+              <a:rPr lang="en-US" sz="1150" b="1" dirty="0">
+                <a:solidFill>
+                  <a:srgbClr val="FFFFFF"/>
+                </a:solidFill>
+                <a:latin typeface="Courier New" pitchFamily="34" charset="0"/>
+                <a:ea typeface="Courier New" pitchFamily="34" charset="-122"/>
+                <a:cs typeface="Courier New" pitchFamily="34" charset="-120"/>
+              </a:rPr>
+              <a:t>-RA</a:t>
+            </a:r>
+            <a:endParaRPr lang="en-US" sz="1150" dirty="0"/>
+          </a:p>
+        </p:txBody>
+      </p:sp>
+      <p:sp>
+        <p:nvSpPr>
+          <p:cNvPr id="89" name="Text 87"/>
+          <p:cNvSpPr/>
+          <p:nvPr/>
+        </p:nvSpPr>
+        <p:spPr>
+          <a:xfrm>
+            <a:off x="7086600" y="2139696"/>
+            <a:ext cx="4553712" cy="310896"/>
+          </a:xfrm>
+          <a:prstGeom prst="rect">
+            <a:avLst/>
+          </a:prstGeom>
+          <a:noFill/>
+          <a:ln/>
+        </p:spPr>
+        <p:txBody>
+          <a:bodyPr wrap="square" lIns="0" tIns="0" rIns="0" bIns="0" rtlCol="0" anchor="ctr"/>
+          <a:lstStyle/>
+          <a:p>
+            <a:pPr indent="0" marL="0">
+              <a:buNone/>
+            </a:pPr>
+            <a:r>
+              <a:rPr lang="en-US" sz="1100" dirty="0">
+                <a:solidFill>
+                  <a:srgbClr val="00357A"/>
+                </a:solidFill>
+                <a:latin typeface="Poppins" pitchFamily="34" charset="0"/>
+                <a:ea typeface="Poppins" pitchFamily="34" charset="-122"/>
+                <a:cs typeface="Poppins" pitchFamily="34" charset="-120"/>
+              </a:rPr>
+              <a:t>force re-archive via dsarch</a:t>
+            </a:r>
+            <a:endParaRPr lang="en-US" sz="1100" dirty="0"/>
+          </a:p>
+        </p:txBody>
+      </p:sp>
+      <p:sp>
+        <p:nvSpPr>
+          <p:cNvPr id="90" name="Shape 88"/>
+          <p:cNvSpPr/>
+          <p:nvPr/>
+        </p:nvSpPr>
+        <p:spPr>
+          <a:xfrm>
+            <a:off x="6199632" y="2487168"/>
+            <a:ext cx="5532120" cy="310896"/>
+          </a:xfrm>
+          <a:prstGeom prst="roundRect">
+            <a:avLst>
+              <a:gd name="adj" fmla="val 14706"/>
+            </a:avLst>
+          </a:prstGeom>
+          <a:solidFill>
+            <a:srgbClr val="FFFFFF"/>
+          </a:solidFill>
+          <a:ln w="9525">
+            <a:solidFill>
+              <a:srgbClr val="A9D6F2"/>
+            </a:solidFill>
+            <a:prstDash val="solid"/>
+          </a:ln>
+        </p:spPr>
+      </p:sp>
+      <p:sp>
+        <p:nvSpPr>
+          <p:cNvPr id="91" name="Shape 89"/>
+          <p:cNvSpPr/>
+          <p:nvPr/>
+        </p:nvSpPr>
+        <p:spPr>
+          <a:xfrm>
+            <a:off x="6281928" y="2505456"/>
+            <a:ext cx="713232" cy="274320"/>
+          </a:xfrm>
+          <a:prstGeom prst="roundRect">
+            <a:avLst>
+              <a:gd name="adj" fmla="val 16667"/>
+            </a:avLst>
+          </a:prstGeom>
+          <a:solidFill>
+            <a:srgbClr val="0092DB"/>
+          </a:solidFill>
+          <a:ln/>
+        </p:spPr>
+      </p:sp>
+      <p:sp>
+        <p:nvSpPr>
+          <p:cNvPr id="92" name="Text 90"/>
+          <p:cNvSpPr/>
+          <p:nvPr/>
+        </p:nvSpPr>
+        <p:spPr>
+          <a:xfrm>
+            <a:off x="6281928" y="2505456"/>
+            <a:ext cx="713232" cy="274320"/>
+          </a:xfrm>
+          <a:prstGeom prst="rect">
+            <a:avLst/>
+          </a:prstGeom>
+          <a:noFill/>
+          <a:ln/>
+        </p:spPr>
+        <p:txBody>
+          <a:bodyPr wrap="square" lIns="0" tIns="0" rIns="0" bIns="0" rtlCol="0" anchor="ctr"/>
+          <a:lstStyle/>
+          <a:p>
+            <a:pPr algn="ctr" indent="0" marL="0">
+              <a:buNone/>
+            </a:pPr>
+            <a:r>
+              <a:rPr lang="en-US" sz="1150" b="1" dirty="0">
+                <a:solidFill>
+                  <a:srgbClr val="FFFFFF"/>
+                </a:solidFill>
+                <a:latin typeface="Courier New" pitchFamily="34" charset="0"/>
+                <a:ea typeface="Courier New" pitchFamily="34" charset="-122"/>
+                <a:cs typeface="Courier New" pitchFamily="34" charset="-120"/>
+              </a:rPr>
+              <a:t>-RD</a:t>
+            </a:r>
+            <a:endParaRPr lang="en-US" sz="1150" dirty="0"/>
+          </a:p>
+        </p:txBody>
+      </p:sp>
+      <p:sp>
+        <p:nvSpPr>
+          <p:cNvPr id="93" name="Text 91"/>
+          <p:cNvSpPr/>
+          <p:nvPr/>
+        </p:nvSpPr>
+        <p:spPr>
+          <a:xfrm>
+            <a:off x="7086600" y="2487168"/>
+            <a:ext cx="4553712" cy="310896"/>
+          </a:xfrm>
+          <a:prstGeom prst="rect">
+            <a:avLst/>
+          </a:prstGeom>
+          <a:noFill/>
+          <a:ln/>
+        </p:spPr>
+        <p:txBody>
+          <a:bodyPr wrap="square" lIns="0" tIns="0" rIns="0" bIns="0" rtlCol="0" anchor="ctr"/>
+          <a:lstStyle/>
+          <a:p>
+            <a:pPr indent="0" marL="0">
+              <a:buNone/>
+            </a:pPr>
+            <a:r>
+              <a:rPr lang="en-US" sz="1100" dirty="0">
+                <a:solidFill>
+                  <a:srgbClr val="00357A"/>
+                </a:solidFill>
+                <a:latin typeface="Poppins" pitchFamily="34" charset="0"/>
+                <a:ea typeface="Poppins" pitchFamily="34" charset="-122"/>
+                <a:cs typeface="Poppins" pitchFamily="34" charset="-120"/>
+              </a:rPr>
+              <a:t>re-download existing remote file</a:t>
+            </a:r>
+            <a:endParaRPr lang="en-US" sz="1100" dirty="0"/>
+          </a:p>
+        </p:txBody>
+      </p:sp>
+      <p:sp>
+        <p:nvSpPr>
+          <p:cNvPr id="94" name="Shape 92"/>
+          <p:cNvSpPr/>
+          <p:nvPr/>
+        </p:nvSpPr>
+        <p:spPr>
+          <a:xfrm>
+            <a:off x="6199632" y="2834640"/>
+            <a:ext cx="5532120" cy="310896"/>
+          </a:xfrm>
+          <a:prstGeom prst="roundRect">
+            <a:avLst>
+              <a:gd name="adj" fmla="val 14706"/>
+            </a:avLst>
+          </a:prstGeom>
+          <a:solidFill>
+            <a:srgbClr val="DCEBF7"/>
+          </a:solidFill>
+          <a:ln w="9525">
+            <a:solidFill>
+              <a:srgbClr val="A9D6F2"/>
+            </a:solidFill>
+            <a:prstDash val="solid"/>
+          </a:ln>
+        </p:spPr>
+      </p:sp>
+      <p:sp>
+        <p:nvSpPr>
+          <p:cNvPr id="95" name="Shape 93"/>
+          <p:cNvSpPr/>
+          <p:nvPr/>
+        </p:nvSpPr>
+        <p:spPr>
+          <a:xfrm>
+            <a:off x="6281928" y="2852928"/>
+            <a:ext cx="713232" cy="274320"/>
+          </a:xfrm>
+          <a:prstGeom prst="roundRect">
+            <a:avLst>
+              <a:gd name="adj" fmla="val 16667"/>
+            </a:avLst>
+          </a:prstGeom>
+          <a:solidFill>
+            <a:srgbClr val="0092DB"/>
+          </a:solidFill>
+          <a:ln/>
+        </p:spPr>
+      </p:sp>
+      <p:sp>
+        <p:nvSpPr>
+          <p:cNvPr id="96" name="Text 94"/>
+          <p:cNvSpPr/>
+          <p:nvPr/>
+        </p:nvSpPr>
+        <p:spPr>
+          <a:xfrm>
+            <a:off x="6281928" y="2852928"/>
+            <a:ext cx="713232" cy="274320"/>
+          </a:xfrm>
+          <a:prstGeom prst="rect">
+            <a:avLst/>
+          </a:prstGeom>
+          <a:noFill/>
+          <a:ln/>
+        </p:spPr>
+        <p:txBody>
+          <a:bodyPr wrap="square" lIns="0" tIns="0" rIns="0" bIns="0" rtlCol="0" anchor="ctr"/>
+          <a:lstStyle/>
+          <a:p>
+            <a:pPr algn="ctr" indent="0" marL="0">
+              <a:buNone/>
+            </a:pPr>
+            <a:r>
+              <a:rPr lang="en-US" sz="1150" b="1" dirty="0">
+                <a:solidFill>
+                  <a:srgbClr val="FFFFFF"/>
+                </a:solidFill>
+                <a:latin typeface="Courier New" pitchFamily="34" charset="0"/>
+                <a:ea typeface="Courier New" pitchFamily="34" charset="-122"/>
+                <a:cs typeface="Courier New" pitchFamily="34" charset="-120"/>
+              </a:rPr>
+              <a:t>-IE</a:t>
+            </a:r>
+            <a:endParaRPr lang="en-US" sz="1150" dirty="0"/>
+          </a:p>
+        </p:txBody>
+      </p:sp>
+      <p:sp>
+        <p:nvSpPr>
+          <p:cNvPr id="97" name="Text 95"/>
+          <p:cNvSpPr/>
+          <p:nvPr/>
+        </p:nvSpPr>
+        <p:spPr>
+          <a:xfrm>
+            <a:off x="7086600" y="2834640"/>
+            <a:ext cx="4553712" cy="310896"/>
+          </a:xfrm>
+          <a:prstGeom prst="rect">
+            <a:avLst/>
+          </a:prstGeom>
+          <a:noFill/>
+          <a:ln/>
+        </p:spPr>
+        <p:txBody>
+          <a:bodyPr wrap="square" lIns="0" tIns="0" rIns="0" bIns="0" rtlCol="0" anchor="ctr"/>
+          <a:lstStyle/>
+          <a:p>
+            <a:pPr indent="0" marL="0">
+              <a:buNone/>
+            </a:pPr>
+            <a:r>
+              <a:rPr lang="en-US" sz="1100" dirty="0">
+                <a:solidFill>
+                  <a:srgbClr val="00357A"/>
+                </a:solidFill>
+                <a:latin typeface="Poppins" pitchFamily="34" charset="0"/>
+                <a:ea typeface="Poppins" pitchFamily="34" charset="-122"/>
+                <a:cs typeface="Poppins" pitchFamily="34" charset="-120"/>
+              </a:rPr>
+              <a:t>skip errors, continue (with -MU)</a:t>
+            </a:r>
+            <a:endParaRPr lang="en-US" sz="1100" dirty="0"/>
+          </a:p>
+        </p:txBody>
+      </p:sp>
+      <p:sp>
+        <p:nvSpPr>
+          <p:cNvPr id="98" name="Shape 96"/>
+          <p:cNvSpPr/>
+          <p:nvPr/>
+        </p:nvSpPr>
+        <p:spPr>
+          <a:xfrm>
+            <a:off x="6199632" y="3182112"/>
+            <a:ext cx="5532120" cy="310896"/>
+          </a:xfrm>
+          <a:prstGeom prst="roundRect">
+            <a:avLst>
+              <a:gd name="adj" fmla="val 14706"/>
+            </a:avLst>
+          </a:prstGeom>
+          <a:solidFill>
+            <a:srgbClr val="FFFFFF"/>
+          </a:solidFill>
+          <a:ln w="9525">
+            <a:solidFill>
+              <a:srgbClr val="A9D6F2"/>
+            </a:solidFill>
+            <a:prstDash val="solid"/>
+          </a:ln>
+        </p:spPr>
+      </p:sp>
+      <p:sp>
+        <p:nvSpPr>
+          <p:cNvPr id="99" name="Shape 97"/>
+          <p:cNvSpPr/>
+          <p:nvPr/>
+        </p:nvSpPr>
+        <p:spPr>
+          <a:xfrm>
+            <a:off x="6281928" y="3200400"/>
+            <a:ext cx="713232" cy="274320"/>
+          </a:xfrm>
+          <a:prstGeom prst="roundRect">
+            <a:avLst>
+              <a:gd name="adj" fmla="val 16667"/>
+            </a:avLst>
+          </a:prstGeom>
+          <a:solidFill>
+            <a:srgbClr val="0092DB"/>
+          </a:solidFill>
+          <a:ln/>
+        </p:spPr>
+      </p:sp>
+      <p:sp>
+        <p:nvSpPr>
+          <p:cNvPr id="100" name="Text 98"/>
+          <p:cNvSpPr/>
+          <p:nvPr/>
+        </p:nvSpPr>
+        <p:spPr>
+          <a:xfrm>
+            <a:off x="6281928" y="3200400"/>
+            <a:ext cx="713232" cy="274320"/>
+          </a:xfrm>
+          <a:prstGeom prst="rect">
+            <a:avLst/>
+          </a:prstGeom>
+          <a:noFill/>
+          <a:ln/>
+        </p:spPr>
+        <p:txBody>
+          <a:bodyPr wrap="square" lIns="0" tIns="0" rIns="0" bIns="0" rtlCol="0" anchor="ctr"/>
+          <a:lstStyle/>
+          <a:p>
+            <a:pPr algn="ctr" indent="0" marL="0">
+              <a:buNone/>
+            </a:pPr>
+            <a:r>
+              <a:rPr lang="en-US" sz="1150" b="1" dirty="0">
+                <a:solidFill>
+                  <a:srgbClr val="FFFFFF"/>
+                </a:solidFill>
+                <a:latin typeface="Courier New" pitchFamily="34" charset="0"/>
+                <a:ea typeface="Courier New" pitchFamily="34" charset="-122"/>
+                <a:cs typeface="Courier New" pitchFamily="34" charset="-120"/>
+              </a:rPr>
+              <a:t>-QE</a:t>
+            </a:r>
+            <a:endParaRPr lang="en-US" sz="1150" dirty="0"/>
+          </a:p>
+        </p:txBody>
+      </p:sp>
+      <p:sp>
+        <p:nvSpPr>
+          <p:cNvPr id="101" name="Text 99"/>
+          <p:cNvSpPr/>
+          <p:nvPr/>
+        </p:nvSpPr>
+        <p:spPr>
+          <a:xfrm>
+            <a:off x="7086600" y="3182112"/>
+            <a:ext cx="4553712" cy="310896"/>
+          </a:xfrm>
+          <a:prstGeom prst="rect">
+            <a:avLst/>
+          </a:prstGeom>
+          <a:noFill/>
+          <a:ln/>
+        </p:spPr>
+        <p:txBody>
+          <a:bodyPr wrap="square" lIns="0" tIns="0" rIns="0" bIns="0" rtlCol="0" anchor="ctr"/>
+          <a:lstStyle/>
+          <a:p>
+            <a:pPr indent="0" marL="0">
+              <a:buNone/>
+            </a:pPr>
+            <a:r>
+              <a:rPr lang="en-US" sz="1100" dirty="0">
+                <a:solidFill>
+                  <a:srgbClr val="00357A"/>
+                </a:solidFill>
+                <a:latin typeface="Poppins" pitchFamily="34" charset="0"/>
+                <a:ea typeface="Poppins" pitchFamily="34" charset="-122"/>
+                <a:cs typeface="Poppins" pitchFamily="34" charset="-120"/>
+              </a:rPr>
+              <a:t>quit dataset on first error</a:t>
+            </a:r>
+            <a:endParaRPr lang="en-US" sz="1100" dirty="0"/>
+          </a:p>
+        </p:txBody>
+      </p:sp>
+      <p:sp>
+        <p:nvSpPr>
+          <p:cNvPr id="102" name="Shape 100"/>
+          <p:cNvSpPr/>
+          <p:nvPr/>
+        </p:nvSpPr>
+        <p:spPr>
+          <a:xfrm>
+            <a:off x="6199632" y="3529584"/>
+            <a:ext cx="5532120" cy="310896"/>
+          </a:xfrm>
+          <a:prstGeom prst="roundRect">
+            <a:avLst>
+              <a:gd name="adj" fmla="val 14706"/>
+            </a:avLst>
+          </a:prstGeom>
+          <a:solidFill>
+            <a:srgbClr val="DCEBF7"/>
+          </a:solidFill>
+          <a:ln w="9525">
+            <a:solidFill>
+              <a:srgbClr val="A9D6F2"/>
+            </a:solidFill>
+            <a:prstDash val="solid"/>
+          </a:ln>
+        </p:spPr>
+      </p:sp>
+      <p:sp>
+        <p:nvSpPr>
+          <p:cNvPr id="103" name="Shape 101"/>
+          <p:cNvSpPr/>
+          <p:nvPr/>
+        </p:nvSpPr>
+        <p:spPr>
+          <a:xfrm>
+            <a:off x="6281928" y="3547872"/>
+            <a:ext cx="713232" cy="274320"/>
+          </a:xfrm>
+          <a:prstGeom prst="roundRect">
+            <a:avLst>
+              <a:gd name="adj" fmla="val 16667"/>
+            </a:avLst>
+          </a:prstGeom>
+          <a:solidFill>
+            <a:srgbClr val="0092DB"/>
+          </a:solidFill>
+          <a:ln/>
+        </p:spPr>
+      </p:sp>
+      <p:sp>
+        <p:nvSpPr>
+          <p:cNvPr id="104" name="Text 102"/>
+          <p:cNvSpPr/>
+          <p:nvPr/>
+        </p:nvSpPr>
+        <p:spPr>
+          <a:xfrm>
+            <a:off x="6281928" y="3547872"/>
+            <a:ext cx="713232" cy="274320"/>
+          </a:xfrm>
+          <a:prstGeom prst="rect">
+            <a:avLst/>
+          </a:prstGeom>
+          <a:noFill/>
+          <a:ln/>
+        </p:spPr>
+        <p:txBody>
+          <a:bodyPr wrap="square" lIns="0" tIns="0" rIns="0" bIns="0" rtlCol="0" anchor="ctr"/>
+          <a:lstStyle/>
+          <a:p>
+            <a:pPr algn="ctr" indent="0" marL="0">
+              <a:buNone/>
+            </a:pPr>
+            <a:r>
+              <a:rPr lang="en-US" sz="1150" b="1" dirty="0">
+                <a:solidFill>
+                  <a:srgbClr val="FFFFFF"/>
+                </a:solidFill>
+                <a:latin typeface="Courier New" pitchFamily="34" charset="0"/>
+                <a:ea typeface="Courier New" pitchFamily="34" charset="-122"/>
+                <a:cs typeface="Courier New" pitchFamily="34" charset="-120"/>
+              </a:rPr>
+              <a:t>-KR</a:t>
+            </a:r>
+            <a:endParaRPr lang="en-US" sz="1150" dirty="0"/>
+          </a:p>
+        </p:txBody>
+      </p:sp>
+      <p:sp>
+        <p:nvSpPr>
+          <p:cNvPr id="105" name="Text 103"/>
+          <p:cNvSpPr/>
+          <p:nvPr/>
+        </p:nvSpPr>
+        <p:spPr>
+          <a:xfrm>
+            <a:off x="7086600" y="3529584"/>
+            <a:ext cx="4553712" cy="310896"/>
+          </a:xfrm>
+          <a:prstGeom prst="rect">
+            <a:avLst/>
+          </a:prstGeom>
+          <a:noFill/>
+          <a:ln/>
+        </p:spPr>
+        <p:txBody>
+          <a:bodyPr wrap="square" lIns="0" tIns="0" rIns="0" bIns="0" rtlCol="0" anchor="ctr"/>
+          <a:lstStyle/>
+          <a:p>
+            <a:pPr indent="0" marL="0">
+              <a:buNone/>
+            </a:pPr>
+            <a:r>
+              <a:rPr lang="en-US" sz="1100" dirty="0">
+                <a:solidFill>
+                  <a:srgbClr val="00357A"/>
+                </a:solidFill>
+                <a:latin typeface="Poppins" pitchFamily="34" charset="0"/>
+                <a:ea typeface="Poppins" pitchFamily="34" charset="-122"/>
+                <a:cs typeface="Poppins" pitchFamily="34" charset="-120"/>
+              </a:rPr>
+              <a:t>keep remote file (copy, not move)</a:t>
+            </a:r>
+            <a:endParaRPr lang="en-US" sz="1100" dirty="0"/>
+          </a:p>
+        </p:txBody>
+      </p:sp>
+      <p:sp>
+        <p:nvSpPr>
+          <p:cNvPr id="106" name="Shape 104"/>
+          <p:cNvSpPr/>
+          <p:nvPr/>
+        </p:nvSpPr>
+        <p:spPr>
+          <a:xfrm>
+            <a:off x="6199632" y="3877056"/>
+            <a:ext cx="5532120" cy="310896"/>
+          </a:xfrm>
+          <a:prstGeom prst="roundRect">
+            <a:avLst>
+              <a:gd name="adj" fmla="val 14706"/>
+            </a:avLst>
+          </a:prstGeom>
+          <a:solidFill>
+            <a:srgbClr val="FFFFFF"/>
+          </a:solidFill>
+          <a:ln w="9525">
+            <a:solidFill>
+              <a:srgbClr val="A9D6F2"/>
+            </a:solidFill>
+            <a:prstDash val="solid"/>
+          </a:ln>
+        </p:spPr>
+      </p:sp>
+      <p:sp>
+        <p:nvSpPr>
+          <p:cNvPr id="107" name="Shape 105"/>
+          <p:cNvSpPr/>
+          <p:nvPr/>
+        </p:nvSpPr>
+        <p:spPr>
+          <a:xfrm>
+            <a:off x="6281928" y="3895344"/>
+            <a:ext cx="713232" cy="274320"/>
+          </a:xfrm>
+          <a:prstGeom prst="roundRect">
+            <a:avLst>
+              <a:gd name="adj" fmla="val 16667"/>
+            </a:avLst>
+          </a:prstGeom>
+          <a:solidFill>
+            <a:srgbClr val="0092DB"/>
+          </a:solidFill>
+          <a:ln/>
+        </p:spPr>
+      </p:sp>
+      <p:sp>
+        <p:nvSpPr>
+          <p:cNvPr id="108" name="Text 106"/>
+          <p:cNvSpPr/>
+          <p:nvPr/>
+        </p:nvSpPr>
+        <p:spPr>
+          <a:xfrm>
+            <a:off x="6281928" y="3895344"/>
+            <a:ext cx="713232" cy="274320"/>
+          </a:xfrm>
+          <a:prstGeom prst="rect">
+            <a:avLst/>
+          </a:prstGeom>
+          <a:noFill/>
+          <a:ln/>
+        </p:spPr>
+        <p:txBody>
+          <a:bodyPr wrap="square" lIns="0" tIns="0" rIns="0" bIns="0" rtlCol="0" anchor="ctr"/>
+          <a:lstStyle/>
+          <a:p>
+            <a:pPr algn="ctr" indent="0" marL="0">
+              <a:buNone/>
+            </a:pPr>
+            <a:r>
+              <a:rPr lang="en-US" sz="1150" b="1" dirty="0">
+                <a:solidFill>
+                  <a:srgbClr val="FFFFFF"/>
+                </a:solidFill>
+                <a:latin typeface="Courier New" pitchFamily="34" charset="0"/>
+                <a:ea typeface="Courier New" pitchFamily="34" charset="-122"/>
+                <a:cs typeface="Courier New" pitchFamily="34" charset="-120"/>
+              </a:rPr>
+              <a:t>-KS</a:t>
+            </a:r>
+            <a:endParaRPr lang="en-US" sz="1150" dirty="0"/>
+          </a:p>
+        </p:txBody>
+      </p:sp>
+      <p:sp>
+        <p:nvSpPr>
+          <p:cNvPr id="109" name="Text 107"/>
+          <p:cNvSpPr/>
+          <p:nvPr/>
+        </p:nvSpPr>
+        <p:spPr>
+          <a:xfrm>
+            <a:off x="7086600" y="3877056"/>
+            <a:ext cx="4553712" cy="310896"/>
+          </a:xfrm>
+          <a:prstGeom prst="rect">
+            <a:avLst/>
+          </a:prstGeom>
+          <a:noFill/>
+          <a:ln/>
+        </p:spPr>
+        <p:txBody>
+          <a:bodyPr wrap="square" lIns="0" tIns="0" rIns="0" bIns="0" rtlCol="0" anchor="ctr"/>
+          <a:lstStyle/>
+          <a:p>
+            <a:pPr indent="0" marL="0">
+              <a:buNone/>
+            </a:pPr>
+            <a:r>
+              <a:rPr lang="en-US" sz="1100" dirty="0">
+                <a:solidFill>
+                  <a:srgbClr val="00357A"/>
+                </a:solidFill>
+                <a:latin typeface="Poppins" pitchFamily="34" charset="0"/>
+                <a:ea typeface="Poppins" pitchFamily="34" charset="-122"/>
+                <a:cs typeface="Poppins" pitchFamily="34" charset="-120"/>
+              </a:rPr>
+              <a:t>keep server file (copy, not move)</a:t>
+            </a:r>
+            <a:endParaRPr lang="en-US" sz="1100" dirty="0"/>
+          </a:p>
+        </p:txBody>
+      </p:sp>
+      <p:sp>
+        <p:nvSpPr>
+          <p:cNvPr id="110" name="Shape 108"/>
+          <p:cNvSpPr/>
+          <p:nvPr/>
+        </p:nvSpPr>
+        <p:spPr>
+          <a:xfrm>
+            <a:off x="6199632" y="4224528"/>
+            <a:ext cx="5532120" cy="310896"/>
+          </a:xfrm>
+          <a:prstGeom prst="roundRect">
+            <a:avLst>
+              <a:gd name="adj" fmla="val 14706"/>
+            </a:avLst>
+          </a:prstGeom>
+          <a:solidFill>
+            <a:srgbClr val="DCEBF7"/>
+          </a:solidFill>
+          <a:ln w="9525">
+            <a:solidFill>
+              <a:srgbClr val="A9D6F2"/>
+            </a:solidFill>
+            <a:prstDash val="solid"/>
+          </a:ln>
+        </p:spPr>
+      </p:sp>
+      <p:sp>
+        <p:nvSpPr>
+          <p:cNvPr id="111" name="Shape 109"/>
+          <p:cNvSpPr/>
+          <p:nvPr/>
+        </p:nvSpPr>
+        <p:spPr>
+          <a:xfrm>
+            <a:off x="6281928" y="4242816"/>
+            <a:ext cx="713232" cy="274320"/>
+          </a:xfrm>
+          <a:prstGeom prst="roundRect">
+            <a:avLst>
+              <a:gd name="adj" fmla="val 16667"/>
+            </a:avLst>
+          </a:prstGeom>
+          <a:solidFill>
+            <a:srgbClr val="0092DB"/>
+          </a:solidFill>
+          <a:ln/>
+        </p:spPr>
+      </p:sp>
+      <p:sp>
+        <p:nvSpPr>
+          <p:cNvPr id="112" name="Text 110"/>
+          <p:cNvSpPr/>
+          <p:nvPr/>
+        </p:nvSpPr>
+        <p:spPr>
+          <a:xfrm>
+            <a:off x="6281928" y="4242816"/>
+            <a:ext cx="713232" cy="274320"/>
+          </a:xfrm>
+          <a:prstGeom prst="rect">
+            <a:avLst/>
+          </a:prstGeom>
+          <a:noFill/>
+          <a:ln/>
+        </p:spPr>
+        <p:txBody>
+          <a:bodyPr wrap="square" lIns="0" tIns="0" rIns="0" bIns="0" rtlCol="0" anchor="ctr"/>
+          <a:lstStyle/>
+          <a:p>
+            <a:pPr algn="ctr" indent="0" marL="0">
+              <a:buNone/>
+            </a:pPr>
+            <a:r>
+              <a:rPr lang="en-US" sz="1150" b="1" dirty="0">
+                <a:solidFill>
+                  <a:srgbClr val="FFFFFF"/>
+                </a:solidFill>
+                <a:latin typeface="Courier New" pitchFamily="34" charset="0"/>
+                <a:ea typeface="Courier New" pitchFamily="34" charset="-122"/>
+                <a:cs typeface="Courier New" pitchFamily="34" charset="-120"/>
+              </a:rPr>
+              <a:t>-UT</a:t>
+            </a:r>
+            <a:endParaRPr lang="en-US" sz="1150" dirty="0"/>
+          </a:p>
+        </p:txBody>
+      </p:sp>
+      <p:sp>
+        <p:nvSpPr>
+          <p:cNvPr id="113" name="Text 111"/>
+          <p:cNvSpPr/>
+          <p:nvPr/>
+        </p:nvSpPr>
+        <p:spPr>
+          <a:xfrm>
+            <a:off x="7086600" y="4224528"/>
+            <a:ext cx="4553712" cy="310896"/>
+          </a:xfrm>
+          <a:prstGeom prst="rect">
+            <a:avLst/>
+          </a:prstGeom>
+          <a:noFill/>
+          <a:ln/>
+        </p:spPr>
+        <p:txBody>
+          <a:bodyPr wrap="square" lIns="0" tIns="0" rIns="0" bIns="0" rtlCol="0" anchor="ctr"/>
+          <a:lstStyle/>
+          <a:p>
+            <a:pPr indent="0" marL="0">
+              <a:buNone/>
+            </a:pPr>
+            <a:r>
+              <a:rPr lang="en-US" sz="1100" dirty="0">
+                <a:solidFill>
+                  <a:srgbClr val="00357A"/>
+                </a:solidFill>
+                <a:latin typeface="Poppins" pitchFamily="34" charset="0"/>
+                <a:ea typeface="Poppins" pitchFamily="34" charset="-122"/>
+                <a:cs typeface="Poppins" pitchFamily="34" charset="-120"/>
+              </a:rPr>
+              <a:t>force end/next-due time advance</a:t>
+            </a:r>
+            <a:endParaRPr lang="en-US" sz="1100" dirty="0"/>
+          </a:p>
+        </p:txBody>
+      </p:sp>
+      <p:sp>
+        <p:nvSpPr>
+          <p:cNvPr id="114" name="Shape 112"/>
+          <p:cNvSpPr/>
+          <p:nvPr/>
+        </p:nvSpPr>
+        <p:spPr>
+          <a:xfrm>
+            <a:off x="6199632" y="4572000"/>
+            <a:ext cx="5532120" cy="310896"/>
+          </a:xfrm>
+          <a:prstGeom prst="roundRect">
+            <a:avLst>
+              <a:gd name="adj" fmla="val 14706"/>
+            </a:avLst>
+          </a:prstGeom>
+          <a:solidFill>
+            <a:srgbClr val="FFFFFF"/>
+          </a:solidFill>
+          <a:ln w="9525">
+            <a:solidFill>
+              <a:srgbClr val="A9D6F2"/>
+            </a:solidFill>
+            <a:prstDash val="solid"/>
+          </a:ln>
+        </p:spPr>
+      </p:sp>
+      <p:sp>
+        <p:nvSpPr>
+          <p:cNvPr id="115" name="Shape 113"/>
+          <p:cNvSpPr/>
+          <p:nvPr/>
+        </p:nvSpPr>
+        <p:spPr>
+          <a:xfrm>
+            <a:off x="6281928" y="4590288"/>
+            <a:ext cx="713232" cy="274320"/>
+          </a:xfrm>
+          <a:prstGeom prst="roundRect">
+            <a:avLst>
+              <a:gd name="adj" fmla="val 16667"/>
+            </a:avLst>
+          </a:prstGeom>
+          <a:solidFill>
+            <a:srgbClr val="0092DB"/>
+          </a:solidFill>
+          <a:ln/>
+        </p:spPr>
+      </p:sp>
+      <p:sp>
+        <p:nvSpPr>
+          <p:cNvPr id="116" name="Text 114"/>
+          <p:cNvSpPr/>
+          <p:nvPr/>
+        </p:nvSpPr>
+        <p:spPr>
+          <a:xfrm>
+            <a:off x="6281928" y="4590288"/>
+            <a:ext cx="713232" cy="274320"/>
+          </a:xfrm>
+          <a:prstGeom prst="rect">
+            <a:avLst/>
+          </a:prstGeom>
+          <a:noFill/>
+          <a:ln/>
+        </p:spPr>
+        <p:txBody>
+          <a:bodyPr wrap="square" lIns="0" tIns="0" rIns="0" bIns="0" rtlCol="0" anchor="ctr"/>
+          <a:lstStyle/>
+          <a:p>
+            <a:pPr algn="ctr" indent="0" marL="0">
+              <a:buNone/>
+            </a:pPr>
+            <a:r>
+              <a:rPr lang="en-US" sz="1150" b="1" dirty="0">
+                <a:solidFill>
+                  <a:srgbClr val="FFFFFF"/>
+                </a:solidFill>
+                <a:latin typeface="Courier New" pitchFamily="34" charset="0"/>
+                <a:ea typeface="Courier New" pitchFamily="34" charset="-122"/>
+                <a:cs typeface="Courier New" pitchFamily="34" charset="-120"/>
+              </a:rPr>
+              <a:t>-BG</a:t>
+            </a:r>
+            <a:endParaRPr lang="en-US" sz="1150" dirty="0"/>
+          </a:p>
+        </p:txBody>
+      </p:sp>
+      <p:sp>
+        <p:nvSpPr>
+          <p:cNvPr id="117" name="Text 115"/>
+          <p:cNvSpPr/>
+          <p:nvPr/>
+        </p:nvSpPr>
+        <p:spPr>
+          <a:xfrm>
+            <a:off x="7086600" y="4572000"/>
+            <a:ext cx="4553712" cy="310896"/>
+          </a:xfrm>
+          <a:prstGeom prst="rect">
+            <a:avLst/>
+          </a:prstGeom>
+          <a:noFill/>
+          <a:ln/>
+        </p:spPr>
+        <p:txBody>
+          <a:bodyPr wrap="square" lIns="0" tIns="0" rIns="0" bIns="0" rtlCol="0" anchor="ctr"/>
+          <a:lstStyle/>
+          <a:p>
+            <a:pPr indent="0" marL="0">
+              <a:buNone/>
+            </a:pPr>
+            <a:r>
+              <a:rPr lang="en-US" sz="1100" dirty="0">
+                <a:solidFill>
+                  <a:srgbClr val="00357A"/>
+                </a:solidFill>
+                <a:latin typeface="Poppins" pitchFamily="34" charset="0"/>
+                <a:ea typeface="Poppins" pitchFamily="34" charset="-122"/>
+                <a:cs typeface="Poppins" pitchFamily="34" charset="-120"/>
+              </a:rPr>
+              <a:t>background; suppress screen output</a:t>
+            </a:r>
+            <a:endParaRPr lang="en-US" sz="1100" dirty="0"/>
+          </a:p>
+        </p:txBody>
+      </p:sp>
+      <p:sp>
+        <p:nvSpPr>
+          <p:cNvPr id="118" name="Shape 116"/>
+          <p:cNvSpPr/>
+          <p:nvPr/>
+        </p:nvSpPr>
+        <p:spPr>
+          <a:xfrm>
+            <a:off x="6199632" y="4919472"/>
+            <a:ext cx="5532120" cy="310896"/>
+          </a:xfrm>
+          <a:prstGeom prst="roundRect">
+            <a:avLst>
+              <a:gd name="adj" fmla="val 14706"/>
+            </a:avLst>
+          </a:prstGeom>
+          <a:solidFill>
+            <a:srgbClr val="DCEBF7"/>
+          </a:solidFill>
+          <a:ln w="9525">
+            <a:solidFill>
+              <a:srgbClr val="A9D6F2"/>
+            </a:solidFill>
+            <a:prstDash val="solid"/>
+          </a:ln>
+        </p:spPr>
+      </p:sp>
+      <p:sp>
+        <p:nvSpPr>
+          <p:cNvPr id="119" name="Shape 117"/>
+          <p:cNvSpPr/>
+          <p:nvPr/>
+        </p:nvSpPr>
+        <p:spPr>
+          <a:xfrm>
+            <a:off x="6281928" y="4937760"/>
+            <a:ext cx="713232" cy="274320"/>
+          </a:xfrm>
+          <a:prstGeom prst="roundRect">
+            <a:avLst>
+              <a:gd name="adj" fmla="val 16667"/>
+            </a:avLst>
+          </a:prstGeom>
+          <a:solidFill>
+            <a:srgbClr val="0092DB"/>
+          </a:solidFill>
+          <a:ln/>
+        </p:spPr>
+      </p:sp>
+      <p:sp>
+        <p:nvSpPr>
+          <p:cNvPr id="120" name="Text 118"/>
+          <p:cNvSpPr/>
+          <p:nvPr/>
+        </p:nvSpPr>
+        <p:spPr>
+          <a:xfrm>
+            <a:off x="6281928" y="4937760"/>
+            <a:ext cx="713232" cy="274320"/>
+          </a:xfrm>
+          <a:prstGeom prst="rect">
+            <a:avLst/>
+          </a:prstGeom>
+          <a:noFill/>
+          <a:ln/>
+        </p:spPr>
+        <p:txBody>
+          <a:bodyPr wrap="square" lIns="0" tIns="0" rIns="0" bIns="0" rtlCol="0" anchor="ctr"/>
+          <a:lstStyle/>
+          <a:p>
+            <a:pPr algn="ctr" indent="0" marL="0">
+              <a:buNone/>
+            </a:pPr>
+            <a:r>
+              <a:rPr lang="en-US" sz="1150" b="1" dirty="0">
+                <a:solidFill>
+                  <a:srgbClr val="FFFFFF"/>
+                </a:solidFill>
+                <a:latin typeface="Courier New" pitchFamily="34" charset="0"/>
+                <a:ea typeface="Courier New" pitchFamily="34" charset="-122"/>
+                <a:cs typeface="Courier New" pitchFamily="34" charset="-120"/>
+              </a:rPr>
+              <a:t>-NE</a:t>
+            </a:r>
+            <a:endParaRPr lang="en-US" sz="1150" dirty="0"/>
+          </a:p>
+        </p:txBody>
+      </p:sp>
+      <p:sp>
+        <p:nvSpPr>
+          <p:cNvPr id="121" name="Text 119"/>
+          <p:cNvSpPr/>
+          <p:nvPr/>
+        </p:nvSpPr>
+        <p:spPr>
+          <a:xfrm>
+            <a:off x="7086600" y="4919472"/>
+            <a:ext cx="4553712" cy="310896"/>
+          </a:xfrm>
+          <a:prstGeom prst="rect">
+            <a:avLst/>
+          </a:prstGeom>
+          <a:noFill/>
+          <a:ln/>
+        </p:spPr>
+        <p:txBody>
+          <a:bodyPr wrap="square" lIns="0" tIns="0" rIns="0" bIns="0" rtlCol="0" anchor="ctr"/>
+          <a:lstStyle/>
+          <a:p>
+            <a:pPr indent="0" marL="0">
+              <a:buNone/>
+            </a:pPr>
+            <a:r>
+              <a:rPr lang="en-US" sz="1100" dirty="0">
+                <a:solidFill>
+                  <a:srgbClr val="00357A"/>
+                </a:solidFill>
+                <a:latin typeface="Poppins" pitchFamily="34" charset="0"/>
+                <a:ea typeface="Poppins" pitchFamily="34" charset="-122"/>
+                <a:cs typeface="Poppins" pitchFamily="34" charset="-120"/>
+              </a:rPr>
+              <a:t>suppress notification email</a:t>
+            </a:r>
+            <a:endParaRPr lang="en-US" sz="1100" dirty="0"/>
+          </a:p>
+        </p:txBody>
+      </p:sp>
+      <p:sp>
+        <p:nvSpPr>
+          <p:cNvPr id="122" name="Shape 120"/>
+          <p:cNvSpPr/>
+          <p:nvPr/>
+        </p:nvSpPr>
+        <p:spPr>
+          <a:xfrm>
+            <a:off x="6199632" y="5321808"/>
+            <a:ext cx="5532120" cy="621792"/>
+          </a:xfrm>
+          <a:prstGeom prst="roundRect">
+            <a:avLst>
+              <a:gd name="adj" fmla="val 7353"/>
+            </a:avLst>
+          </a:prstGeom>
+          <a:solidFill>
+            <a:srgbClr val="C7E4F5"/>
           </a:solidFill>
           <a:ln w="12700">
             <a:solidFill>
@@ -31861,36 +35746,14 @@
       </p:sp>
       <p:sp>
         <p:nvSpPr>
-          <p:cNvPr id="5" name="Shape 3"/>
-          <p:cNvSpPr/>
-          <p:nvPr/>
-        </p:nvSpPr>
-        <p:spPr>
-          <a:xfrm>
-            <a:off x="548640" y="1719072"/>
-            <a:ext cx="777240" cy="329184"/>
-          </a:xfrm>
-          <a:prstGeom prst="roundRect">
-            <a:avLst>
-              <a:gd name="adj" fmla="val 13889"/>
-            </a:avLst>
-          </a:prstGeom>
-          <a:solidFill>
-            <a:srgbClr val="0057C2"/>
-          </a:solidFill>
-          <a:ln/>
-        </p:spPr>
-      </p:sp>
-      <p:sp>
-        <p:nvSpPr>
-          <p:cNvPr id="6" name="Text 4"/>
-          <p:cNvSpPr/>
-          <p:nvPr/>
-        </p:nvSpPr>
-        <p:spPr>
-          <a:xfrm>
-            <a:off x="548640" y="1719072"/>
-            <a:ext cx="777240" cy="329184"/>
+          <p:cNvPr id="123" name="Text 121"/>
+          <p:cNvSpPr/>
+          <p:nvPr/>
+        </p:nvSpPr>
+        <p:spPr>
+          <a:xfrm>
+            <a:off x="6345936" y="5321808"/>
+            <a:ext cx="5239512" cy="621792"/>
           </a:xfrm>
           <a:prstGeom prst="rect">
             <a:avLst/>
@@ -31902,53 +35765,48 @@
           <a:bodyPr wrap="square" lIns="0" tIns="0" rIns="0" bIns="0" rtlCol="0" anchor="ctr"/>
           <a:lstStyle/>
           <a:p>
-            <a:pPr algn="ctr" indent="0" marL="0">
-              <a:buNone/>
-            </a:pPr>
-            <a:r>
-              <a:rPr lang="en-US" sz="1200" b="1" dirty="0">
-                <a:solidFill>
-                  <a:srgbClr val="FFFFFF"/>
+            <a:pPr indent="0" marL="0">
+              <a:lnSpc>
+                <a:spcPct val="105000"/>
+              </a:lnSpc>
+              <a:buNone/>
+            </a:pPr>
+            <a:r>
+              <a:rPr lang="en-US" sz="1100" b="1" dirty="0">
+                <a:solidFill>
+                  <a:srgbClr val="0057C2"/>
+                </a:solidFill>
+                <a:latin typeface="Poppins" pitchFamily="34" charset="0"/>
+                <a:ea typeface="Poppins" pitchFamily="34" charset="-122"/>
+                <a:cs typeface="Poppins" pitchFamily="34" charset="-120"/>
+              </a:rPr>
+              <a:t>Other control-record presets:  </a:t>
+            </a:r>
+            <a:pPr indent="0" marL="0">
+              <a:lnSpc>
+                <a:spcPct val="105000"/>
+              </a:lnSpc>
+              <a:buNone/>
+            </a:pPr>
+            <a:r>
+              <a:rPr lang="en-US" sz="1100" b="1" dirty="0">
+                <a:solidFill>
+                  <a:srgbClr val="00357A"/>
                 </a:solidFill>
                 <a:latin typeface="Courier New" pitchFamily="34" charset="0"/>
                 <a:ea typeface="Courier New" pitchFamily="34" charset="-122"/>
                 <a:cs typeface="Courier New" pitchFamily="34" charset="-120"/>
               </a:rPr>
-              <a:t>-MU</a:t>
-            </a:r>
-            <a:endParaRPr lang="en-US" sz="1200" dirty="0"/>
-          </a:p>
-        </p:txBody>
-      </p:sp>
-      <p:sp>
-        <p:nvSpPr>
-          <p:cNvPr id="7" name="Text 5"/>
-          <p:cNvSpPr/>
-          <p:nvPr/>
-        </p:nvSpPr>
-        <p:spPr>
-          <a:xfrm>
-            <a:off x="1417320" y="1600200"/>
-            <a:ext cx="2651760" cy="566928"/>
-          </a:xfrm>
-          <a:prstGeom prst="rect">
-            <a:avLst/>
-          </a:prstGeom>
-          <a:noFill/>
-          <a:ln/>
-        </p:spPr>
-        <p:txBody>
-          <a:bodyPr wrap="square" lIns="0" tIns="0" rIns="0" bIns="0" rtlCol="0" anchor="ctr"/>
-          <a:lstStyle/>
-          <a:p>
+              <a:t>-MC</a:t>
+            </a:r>
             <a:pPr indent="0" marL="0">
               <a:lnSpc>
-                <a:spcPct val="95000"/>
+                <a:spcPct val="105000"/>
               </a:lnSpc>
               <a:buNone/>
             </a:pPr>
             <a:r>
-              <a:rPr lang="en-US" sz="1150" dirty="0">
+              <a:rPr lang="en-US" sz="1100" dirty="0">
                 <a:solidFill>
                   <a:srgbClr val="00357A"/>
                 </a:solidFill>
@@ -31956,129 +35814,33 @@
                 <a:ea typeface="Poppins" pitchFamily="34" charset="-122"/>
                 <a:cs typeface="Poppins" pitchFamily="34" charset="-120"/>
               </a:rPr>
-              <a:t>process all elapsed periods</a:t>
-            </a:r>
-            <a:endParaRPr lang="en-US" sz="1150" dirty="0"/>
-          </a:p>
-        </p:txBody>
-      </p:sp>
-      <p:sp>
-        <p:nvSpPr>
-          <p:cNvPr id="8" name="Shape 6"/>
-          <p:cNvSpPr/>
-          <p:nvPr/>
-        </p:nvSpPr>
-        <p:spPr>
-          <a:xfrm>
-            <a:off x="4242816" y="1600200"/>
-            <a:ext cx="3703320" cy="566928"/>
-          </a:xfrm>
-          <a:prstGeom prst="roundRect">
-            <a:avLst>
-              <a:gd name="adj" fmla="val 9677"/>
-            </a:avLst>
-          </a:prstGeom>
-          <a:solidFill>
-            <a:srgbClr val="DCEBF7"/>
-          </a:solidFill>
-          <a:ln w="12700">
-            <a:solidFill>
-              <a:srgbClr val="A9D6F2"/>
-            </a:solidFill>
-            <a:prstDash val="solid"/>
-          </a:ln>
-        </p:spPr>
-      </p:sp>
-      <p:sp>
-        <p:nvSpPr>
-          <p:cNvPr id="9" name="Shape 7"/>
-          <p:cNvSpPr/>
-          <p:nvPr/>
-        </p:nvSpPr>
-        <p:spPr>
-          <a:xfrm>
-            <a:off x="4334256" y="1719072"/>
-            <a:ext cx="777240" cy="329184"/>
-          </a:xfrm>
-          <a:prstGeom prst="roundRect">
-            <a:avLst>
-              <a:gd name="adj" fmla="val 13889"/>
-            </a:avLst>
-          </a:prstGeom>
-          <a:solidFill>
-            <a:srgbClr val="0057C2"/>
-          </a:solidFill>
-          <a:ln/>
-        </p:spPr>
-      </p:sp>
-      <p:sp>
-        <p:nvSpPr>
-          <p:cNvPr id="10" name="Text 8"/>
-          <p:cNvSpPr/>
-          <p:nvPr/>
-        </p:nvSpPr>
-        <p:spPr>
-          <a:xfrm>
-            <a:off x="4334256" y="1719072"/>
-            <a:ext cx="777240" cy="329184"/>
-          </a:xfrm>
-          <a:prstGeom prst="rect">
-            <a:avLst/>
-          </a:prstGeom>
-          <a:noFill/>
-          <a:ln/>
-        </p:spPr>
-        <p:txBody>
-          <a:bodyPr wrap="square" lIns="0" tIns="0" rIns="0" bIns="0" rtlCol="0" anchor="ctr"/>
-          <a:lstStyle/>
-          <a:p>
-            <a:pPr algn="ctr" indent="0" marL="0">
-              <a:buNone/>
-            </a:pPr>
-            <a:r>
-              <a:rPr lang="en-US" sz="1200" b="1" dirty="0">
-                <a:solidFill>
-                  <a:srgbClr val="FFFFFF"/>
+              <a:t> email level, </a:t>
+            </a:r>
+            <a:pPr indent="0" marL="0">
+              <a:lnSpc>
+                <a:spcPct val="105000"/>
+              </a:lnSpc>
+              <a:buNone/>
+            </a:pPr>
+            <a:r>
+              <a:rPr lang="en-US" sz="1100" b="1" dirty="0">
+                <a:solidFill>
+                  <a:srgbClr val="00357A"/>
                 </a:solidFill>
                 <a:latin typeface="Courier New" pitchFamily="34" charset="0"/>
                 <a:ea typeface="Courier New" pitchFamily="34" charset="-122"/>
                 <a:cs typeface="Courier New" pitchFamily="34" charset="-120"/>
               </a:rPr>
-              <a:t>-FU</a:t>
-            </a:r>
-            <a:endParaRPr lang="en-US" sz="1200" dirty="0"/>
-          </a:p>
-        </p:txBody>
-      </p:sp>
-      <p:sp>
-        <p:nvSpPr>
-          <p:cNvPr id="11" name="Text 9"/>
-          <p:cNvSpPr/>
-          <p:nvPr/>
-        </p:nvSpPr>
-        <p:spPr>
-          <a:xfrm>
-            <a:off x="5202936" y="1600200"/>
-            <a:ext cx="2651760" cy="566928"/>
-          </a:xfrm>
-          <a:prstGeom prst="rect">
-            <a:avLst/>
-          </a:prstGeom>
-          <a:noFill/>
-          <a:ln/>
-        </p:spPr>
-        <p:txBody>
-          <a:bodyPr wrap="square" lIns="0" tIns="0" rIns="0" bIns="0" rtlCol="0" anchor="ctr"/>
-          <a:lstStyle/>
-          <a:p>
+              <a:t>-EC</a:t>
+            </a:r>
             <a:pPr indent="0" marL="0">
               <a:lnSpc>
-                <a:spcPct val="95000"/>
+                <a:spcPct val="105000"/>
               </a:lnSpc>
               <a:buNone/>
             </a:pPr>
             <a:r>
-              <a:rPr lang="en-US" sz="1150" dirty="0">
+              <a:rPr lang="en-US" sz="1100" dirty="0">
                 <a:solidFill>
                   <a:srgbClr val="00357A"/>
                 </a:solidFill>
@@ -32086,129 +35848,33 @@
                 <a:ea typeface="Poppins" pitchFamily="34" charset="-122"/>
                 <a:cs typeface="Poppins" pitchFamily="34" charset="-120"/>
               </a:rPr>
-              <a:t>force one update even if not due</a:t>
-            </a:r>
-            <a:endParaRPr lang="en-US" sz="1150" dirty="0"/>
-          </a:p>
-        </p:txBody>
-      </p:sp>
-      <p:sp>
-        <p:nvSpPr>
-          <p:cNvPr id="12" name="Shape 10"/>
-          <p:cNvSpPr/>
-          <p:nvPr/>
-        </p:nvSpPr>
-        <p:spPr>
-          <a:xfrm>
-            <a:off x="8028432" y="1600200"/>
-            <a:ext cx="3703320" cy="566928"/>
-          </a:xfrm>
-          <a:prstGeom prst="roundRect">
-            <a:avLst>
-              <a:gd name="adj" fmla="val 9677"/>
-            </a:avLst>
-          </a:prstGeom>
-          <a:solidFill>
-            <a:srgbClr val="DCEBF7"/>
-          </a:solidFill>
-          <a:ln w="12700">
-            <a:solidFill>
-              <a:srgbClr val="A9D6F2"/>
-            </a:solidFill>
-            <a:prstDash val="solid"/>
-          </a:ln>
-        </p:spPr>
-      </p:sp>
-      <p:sp>
-        <p:nvSpPr>
-          <p:cNvPr id="13" name="Shape 11"/>
-          <p:cNvSpPr/>
-          <p:nvPr/>
-        </p:nvSpPr>
-        <p:spPr>
-          <a:xfrm>
-            <a:off x="8119872" y="1719072"/>
-            <a:ext cx="777240" cy="329184"/>
-          </a:xfrm>
-          <a:prstGeom prst="roundRect">
-            <a:avLst>
-              <a:gd name="adj" fmla="val 13889"/>
-            </a:avLst>
-          </a:prstGeom>
-          <a:solidFill>
-            <a:srgbClr val="0057C2"/>
-          </a:solidFill>
-          <a:ln/>
-        </p:spPr>
-      </p:sp>
-      <p:sp>
-        <p:nvSpPr>
-          <p:cNvPr id="14" name="Text 12"/>
-          <p:cNvSpPr/>
-          <p:nvPr/>
-        </p:nvSpPr>
-        <p:spPr>
-          <a:xfrm>
-            <a:off x="8119872" y="1719072"/>
-            <a:ext cx="777240" cy="329184"/>
-          </a:xfrm>
-          <a:prstGeom prst="rect">
-            <a:avLst/>
-          </a:prstGeom>
-          <a:noFill/>
-          <a:ln/>
-        </p:spPr>
-        <p:txBody>
-          <a:bodyPr wrap="square" lIns="0" tIns="0" rIns="0" bIns="0" rtlCol="0" anchor="ctr"/>
-          <a:lstStyle/>
-          <a:p>
-            <a:pPr algn="ctr" indent="0" marL="0">
-              <a:buNone/>
-            </a:pPr>
-            <a:r>
-              <a:rPr lang="en-US" sz="1200" b="1" dirty="0">
-                <a:solidFill>
-                  <a:srgbClr val="FFFFFF"/>
+              <a:t> error control, </a:t>
+            </a:r>
+            <a:pPr indent="0" marL="0">
+              <a:lnSpc>
+                <a:spcPct val="105000"/>
+              </a:lnSpc>
+              <a:buNone/>
+            </a:pPr>
+            <a:r>
+              <a:rPr lang="en-US" sz="1100" b="1" dirty="0">
+                <a:solidFill>
+                  <a:srgbClr val="00357A"/>
                 </a:solidFill>
                 <a:latin typeface="Courier New" pitchFamily="34" charset="0"/>
                 <a:ea typeface="Courier New" pitchFamily="34" charset="-122"/>
                 <a:cs typeface="Courier New" pitchFamily="34" charset="-120"/>
               </a:rPr>
-              <a:t>-CP</a:t>
-            </a:r>
-            <a:endParaRPr lang="en-US" sz="1200" dirty="0"/>
-          </a:p>
-        </p:txBody>
-      </p:sp>
-      <p:sp>
-        <p:nvSpPr>
-          <p:cNvPr id="15" name="Text 13"/>
-          <p:cNvSpPr/>
-          <p:nvPr/>
-        </p:nvSpPr>
-        <p:spPr>
-          <a:xfrm>
-            <a:off x="8988552" y="1600200"/>
-            <a:ext cx="2651760" cy="566928"/>
-          </a:xfrm>
-          <a:prstGeom prst="rect">
-            <a:avLst/>
-          </a:prstGeom>
-          <a:noFill/>
-          <a:ln/>
-        </p:spPr>
-        <p:txBody>
-          <a:bodyPr wrap="square" lIns="0" tIns="0" rIns="0" bIns="0" rtlCol="0" anchor="ctr"/>
-          <a:lstStyle/>
-          <a:p>
+              <a:t>-KF</a:t>
+            </a:r>
             <a:pPr indent="0" marL="0">
               <a:lnSpc>
-                <a:spcPct val="95000"/>
+                <a:spcPct val="105000"/>
               </a:lnSpc>
               <a:buNone/>
             </a:pPr>
             <a:r>
-              <a:rPr lang="en-US" sz="1150" dirty="0">
+              <a:rPr lang="en-US" sz="1100" dirty="0">
                 <a:solidFill>
                   <a:srgbClr val="00357A"/>
                 </a:solidFill>
@@ -32216,129 +35882,33 @@
                 <a:ea typeface="Poppins" pitchFamily="34" charset="-122"/>
                 <a:cs typeface="Poppins" pitchFamily="34" charset="-120"/>
               </a:rPr>
-              <a:t>allow current, not-yet-due period</a:t>
-            </a:r>
-            <a:endParaRPr lang="en-US" sz="1150" dirty="0"/>
-          </a:p>
-        </p:txBody>
-      </p:sp>
-      <p:sp>
-        <p:nvSpPr>
-          <p:cNvPr id="16" name="Shape 14"/>
-          <p:cNvSpPr/>
-          <p:nvPr/>
-        </p:nvSpPr>
-        <p:spPr>
-          <a:xfrm>
-            <a:off x="457200" y="2276856"/>
-            <a:ext cx="3703320" cy="566928"/>
-          </a:xfrm>
-          <a:prstGeom prst="roundRect">
-            <a:avLst>
-              <a:gd name="adj" fmla="val 9677"/>
-            </a:avLst>
-          </a:prstGeom>
-          <a:solidFill>
-            <a:srgbClr val="FFFFFF"/>
-          </a:solidFill>
-          <a:ln w="12700">
-            <a:solidFill>
-              <a:srgbClr val="A9D6F2"/>
-            </a:solidFill>
-            <a:prstDash val="solid"/>
-          </a:ln>
-        </p:spPr>
-      </p:sp>
-      <p:sp>
-        <p:nvSpPr>
-          <p:cNvPr id="17" name="Shape 15"/>
-          <p:cNvSpPr/>
-          <p:nvPr/>
-        </p:nvSpPr>
-        <p:spPr>
-          <a:xfrm>
-            <a:off x="548640" y="2395728"/>
-            <a:ext cx="777240" cy="329184"/>
-          </a:xfrm>
-          <a:prstGeom prst="roundRect">
-            <a:avLst>
-              <a:gd name="adj" fmla="val 13889"/>
-            </a:avLst>
-          </a:prstGeom>
-          <a:solidFill>
-            <a:srgbClr val="0057C2"/>
-          </a:solidFill>
-          <a:ln/>
-        </p:spPr>
-      </p:sp>
-      <p:sp>
-        <p:nvSpPr>
-          <p:cNvPr id="18" name="Text 16"/>
-          <p:cNvSpPr/>
-          <p:nvPr/>
-        </p:nvSpPr>
-        <p:spPr>
-          <a:xfrm>
-            <a:off x="548640" y="2395728"/>
-            <a:ext cx="777240" cy="329184"/>
-          </a:xfrm>
-          <a:prstGeom prst="rect">
-            <a:avLst/>
-          </a:prstGeom>
-          <a:noFill/>
-          <a:ln/>
-        </p:spPr>
-        <p:txBody>
-          <a:bodyPr wrap="square" lIns="0" tIns="0" rIns="0" bIns="0" rtlCol="0" anchor="ctr"/>
-          <a:lstStyle/>
-          <a:p>
-            <a:pPr algn="ctr" indent="0" marL="0">
-              <a:buNone/>
-            </a:pPr>
-            <a:r>
-              <a:rPr lang="en-US" sz="1200" b="1" dirty="0">
-                <a:solidFill>
-                  <a:srgbClr val="FFFFFF"/>
+              <a:t> keep-file — set once on </a:t>
+            </a:r>
+            <a:pPr indent="0" marL="0">
+              <a:lnSpc>
+                <a:spcPct val="105000"/>
+              </a:lnSpc>
+              <a:buNone/>
+            </a:pPr>
+            <a:r>
+              <a:rPr lang="en-US" sz="1100" b="1" dirty="0">
+                <a:solidFill>
+                  <a:srgbClr val="00357A"/>
                 </a:solidFill>
                 <a:latin typeface="Courier New" pitchFamily="34" charset="0"/>
                 <a:ea typeface="Courier New" pitchFamily="34" charset="-122"/>
                 <a:cs typeface="Courier New" pitchFamily="34" charset="-120"/>
               </a:rPr>
-              <a:t>-MO</a:t>
-            </a:r>
-            <a:endParaRPr lang="en-US" sz="1200" dirty="0"/>
-          </a:p>
-        </p:txBody>
-      </p:sp>
-      <p:sp>
-        <p:nvSpPr>
-          <p:cNvPr id="19" name="Text 17"/>
-          <p:cNvSpPr/>
-          <p:nvPr/>
-        </p:nvSpPr>
-        <p:spPr>
-          <a:xfrm>
-            <a:off x="1417320" y="2276856"/>
-            <a:ext cx="2651760" cy="566928"/>
-          </a:xfrm>
-          <a:prstGeom prst="rect">
-            <a:avLst/>
-          </a:prstGeom>
-          <a:noFill/>
-          <a:ln/>
-        </p:spPr>
-        <p:txBody>
-          <a:bodyPr wrap="square" lIns="0" tIns="0" rIns="0" bIns="0" rtlCol="0" anchor="ctr"/>
-          <a:lstStyle/>
-          <a:p>
+              <a:t>-SC</a:t>
+            </a:r>
             <a:pPr indent="0" marL="0">
               <a:lnSpc>
-                <a:spcPct val="95000"/>
+                <a:spcPct val="105000"/>
               </a:lnSpc>
               <a:buNone/>
             </a:pPr>
             <a:r>
-              <a:rPr lang="en-US" sz="1150" dirty="0">
+              <a:rPr lang="en-US" sz="1100" dirty="0">
                 <a:solidFill>
                   <a:srgbClr val="00357A"/>
                 </a:solidFill>
@@ -32346,1874 +35916,15 @@
                 <a:ea typeface="Poppins" pitchFamily="34" charset="-122"/>
                 <a:cs typeface="Poppins" pitchFamily="34" charset="-120"/>
               </a:rPr>
-              <a:t>only not-yet-archived periods</a:t>
-            </a:r>
-            <a:endParaRPr lang="en-US" sz="1150" dirty="0"/>
-          </a:p>
-        </p:txBody>
-      </p:sp>
-      <p:sp>
-        <p:nvSpPr>
-          <p:cNvPr id="20" name="Shape 18"/>
-          <p:cNvSpPr/>
-          <p:nvPr/>
-        </p:nvSpPr>
-        <p:spPr>
-          <a:xfrm>
-            <a:off x="4242816" y="2276856"/>
-            <a:ext cx="3703320" cy="566928"/>
-          </a:xfrm>
-          <a:prstGeom prst="roundRect">
-            <a:avLst>
-              <a:gd name="adj" fmla="val 9677"/>
-            </a:avLst>
-          </a:prstGeom>
-          <a:solidFill>
-            <a:srgbClr val="FFFFFF"/>
-          </a:solidFill>
-          <a:ln w="12700">
-            <a:solidFill>
-              <a:srgbClr val="A9D6F2"/>
-            </a:solidFill>
-            <a:prstDash val="solid"/>
-          </a:ln>
-        </p:spPr>
-      </p:sp>
-      <p:sp>
-        <p:nvSpPr>
-          <p:cNvPr id="21" name="Shape 19"/>
-          <p:cNvSpPr/>
-          <p:nvPr/>
-        </p:nvSpPr>
-        <p:spPr>
-          <a:xfrm>
-            <a:off x="4334256" y="2395728"/>
-            <a:ext cx="777240" cy="329184"/>
-          </a:xfrm>
-          <a:prstGeom prst="roundRect">
-            <a:avLst>
-              <a:gd name="adj" fmla="val 13889"/>
-            </a:avLst>
-          </a:prstGeom>
-          <a:solidFill>
-            <a:srgbClr val="0057C2"/>
-          </a:solidFill>
-          <a:ln/>
-        </p:spPr>
-      </p:sp>
-      <p:sp>
-        <p:nvSpPr>
-          <p:cNvPr id="22" name="Text 20"/>
-          <p:cNvSpPr/>
-          <p:nvPr/>
-        </p:nvSpPr>
-        <p:spPr>
-          <a:xfrm>
-            <a:off x="4334256" y="2395728"/>
-            <a:ext cx="777240" cy="329184"/>
-          </a:xfrm>
-          <a:prstGeom prst="rect">
-            <a:avLst/>
-          </a:prstGeom>
-          <a:noFill/>
-          <a:ln/>
-        </p:spPr>
-        <p:txBody>
-          <a:bodyPr wrap="square" lIns="0" tIns="0" rIns="0" bIns="0" rtlCol="0" anchor="ctr"/>
-          <a:lstStyle/>
-          <a:p>
-            <a:pPr algn="ctr" indent="0" marL="0">
-              <a:buNone/>
-            </a:pPr>
-            <a:r>
-              <a:rPr lang="en-US" sz="1200" b="1" dirty="0">
-                <a:solidFill>
-                  <a:srgbClr val="FFFFFF"/>
-                </a:solidFill>
-                <a:latin typeface="Courier New" pitchFamily="34" charset="0"/>
-                <a:ea typeface="Courier New" pitchFamily="34" charset="-122"/>
-                <a:cs typeface="Courier New" pitchFamily="34" charset="-120"/>
-              </a:rPr>
-              <a:t>-RA</a:t>
-            </a:r>
-            <a:endParaRPr lang="en-US" sz="1200" dirty="0"/>
-          </a:p>
-        </p:txBody>
-      </p:sp>
-      <p:sp>
-        <p:nvSpPr>
-          <p:cNvPr id="23" name="Text 21"/>
-          <p:cNvSpPr/>
-          <p:nvPr/>
-        </p:nvSpPr>
-        <p:spPr>
-          <a:xfrm>
-            <a:off x="5202936" y="2276856"/>
-            <a:ext cx="2651760" cy="566928"/>
-          </a:xfrm>
-          <a:prstGeom prst="rect">
-            <a:avLst/>
-          </a:prstGeom>
-          <a:noFill/>
-          <a:ln/>
-        </p:spPr>
-        <p:txBody>
-          <a:bodyPr wrap="square" lIns="0" tIns="0" rIns="0" bIns="0" rtlCol="0" anchor="ctr"/>
-          <a:lstStyle/>
-          <a:p>
-            <a:pPr indent="0" marL="0">
-              <a:lnSpc>
-                <a:spcPct val="95000"/>
-              </a:lnSpc>
-              <a:buNone/>
-            </a:pPr>
-            <a:r>
-              <a:rPr lang="en-US" sz="1150" dirty="0">
-                <a:solidFill>
-                  <a:srgbClr val="00357A"/>
-                </a:solidFill>
-                <a:latin typeface="Poppins" pitchFamily="34" charset="0"/>
-                <a:ea typeface="Poppins" pitchFamily="34" charset="-122"/>
-                <a:cs typeface="Poppins" pitchFamily="34" charset="-120"/>
-              </a:rPr>
-              <a:t>force re-archive via dsarch</a:t>
-            </a:r>
-            <a:endParaRPr lang="en-US" sz="1150" dirty="0"/>
-          </a:p>
-        </p:txBody>
-      </p:sp>
-      <p:sp>
-        <p:nvSpPr>
-          <p:cNvPr id="24" name="Shape 22"/>
-          <p:cNvSpPr/>
-          <p:nvPr/>
-        </p:nvSpPr>
-        <p:spPr>
-          <a:xfrm>
-            <a:off x="8028432" y="2276856"/>
-            <a:ext cx="3703320" cy="566928"/>
-          </a:xfrm>
-          <a:prstGeom prst="roundRect">
-            <a:avLst>
-              <a:gd name="adj" fmla="val 9677"/>
-            </a:avLst>
-          </a:prstGeom>
-          <a:solidFill>
-            <a:srgbClr val="FFFFFF"/>
-          </a:solidFill>
-          <a:ln w="12700">
-            <a:solidFill>
-              <a:srgbClr val="A9D6F2"/>
-            </a:solidFill>
-            <a:prstDash val="solid"/>
-          </a:ln>
-        </p:spPr>
-      </p:sp>
-      <p:sp>
-        <p:nvSpPr>
-          <p:cNvPr id="25" name="Shape 23"/>
-          <p:cNvSpPr/>
-          <p:nvPr/>
-        </p:nvSpPr>
-        <p:spPr>
-          <a:xfrm>
-            <a:off x="8119872" y="2395728"/>
-            <a:ext cx="777240" cy="329184"/>
-          </a:xfrm>
-          <a:prstGeom prst="roundRect">
-            <a:avLst>
-              <a:gd name="adj" fmla="val 13889"/>
-            </a:avLst>
-          </a:prstGeom>
-          <a:solidFill>
-            <a:srgbClr val="0057C2"/>
-          </a:solidFill>
-          <a:ln/>
-        </p:spPr>
-      </p:sp>
-      <p:sp>
-        <p:nvSpPr>
-          <p:cNvPr id="26" name="Text 24"/>
-          <p:cNvSpPr/>
-          <p:nvPr/>
-        </p:nvSpPr>
-        <p:spPr>
-          <a:xfrm>
-            <a:off x="8119872" y="2395728"/>
-            <a:ext cx="777240" cy="329184"/>
-          </a:xfrm>
-          <a:prstGeom prst="rect">
-            <a:avLst/>
-          </a:prstGeom>
-          <a:noFill/>
-          <a:ln/>
-        </p:spPr>
-        <p:txBody>
-          <a:bodyPr wrap="square" lIns="0" tIns="0" rIns="0" bIns="0" rtlCol="0" anchor="ctr"/>
-          <a:lstStyle/>
-          <a:p>
-            <a:pPr algn="ctr" indent="0" marL="0">
-              <a:buNone/>
-            </a:pPr>
-            <a:r>
-              <a:rPr lang="en-US" sz="1200" b="1" dirty="0">
-                <a:solidFill>
-                  <a:srgbClr val="FFFFFF"/>
-                </a:solidFill>
-                <a:latin typeface="Courier New" pitchFamily="34" charset="0"/>
-                <a:ea typeface="Courier New" pitchFamily="34" charset="-122"/>
-                <a:cs typeface="Courier New" pitchFamily="34" charset="-120"/>
-              </a:rPr>
-              <a:t>-RD</a:t>
-            </a:r>
-            <a:endParaRPr lang="en-US" sz="1200" dirty="0"/>
-          </a:p>
-        </p:txBody>
-      </p:sp>
-      <p:sp>
-        <p:nvSpPr>
-          <p:cNvPr id="27" name="Text 25"/>
-          <p:cNvSpPr/>
-          <p:nvPr/>
-        </p:nvSpPr>
-        <p:spPr>
-          <a:xfrm>
-            <a:off x="8988552" y="2276856"/>
-            <a:ext cx="2651760" cy="566928"/>
-          </a:xfrm>
-          <a:prstGeom prst="rect">
-            <a:avLst/>
-          </a:prstGeom>
-          <a:noFill/>
-          <a:ln/>
-        </p:spPr>
-        <p:txBody>
-          <a:bodyPr wrap="square" lIns="0" tIns="0" rIns="0" bIns="0" rtlCol="0" anchor="ctr"/>
-          <a:lstStyle/>
-          <a:p>
-            <a:pPr indent="0" marL="0">
-              <a:lnSpc>
-                <a:spcPct val="95000"/>
-              </a:lnSpc>
-              <a:buNone/>
-            </a:pPr>
-            <a:r>
-              <a:rPr lang="en-US" sz="1150" dirty="0">
-                <a:solidFill>
-                  <a:srgbClr val="00357A"/>
-                </a:solidFill>
-                <a:latin typeface="Poppins" pitchFamily="34" charset="0"/>
-                <a:ea typeface="Poppins" pitchFamily="34" charset="-122"/>
-                <a:cs typeface="Poppins" pitchFamily="34" charset="-120"/>
-              </a:rPr>
-              <a:t>re-download existing remote file</a:t>
-            </a:r>
-            <a:endParaRPr lang="en-US" sz="1150" dirty="0"/>
-          </a:p>
-        </p:txBody>
-      </p:sp>
-      <p:sp>
-        <p:nvSpPr>
-          <p:cNvPr id="28" name="Shape 26"/>
-          <p:cNvSpPr/>
-          <p:nvPr/>
-        </p:nvSpPr>
-        <p:spPr>
-          <a:xfrm>
-            <a:off x="457200" y="2953512"/>
-            <a:ext cx="3703320" cy="566928"/>
-          </a:xfrm>
-          <a:prstGeom prst="roundRect">
-            <a:avLst>
-              <a:gd name="adj" fmla="val 9677"/>
-            </a:avLst>
-          </a:prstGeom>
-          <a:solidFill>
-            <a:srgbClr val="DCEBF7"/>
-          </a:solidFill>
-          <a:ln w="12700">
-            <a:solidFill>
-              <a:srgbClr val="A9D6F2"/>
-            </a:solidFill>
-            <a:prstDash val="solid"/>
-          </a:ln>
-        </p:spPr>
-      </p:sp>
-      <p:sp>
-        <p:nvSpPr>
-          <p:cNvPr id="29" name="Shape 27"/>
-          <p:cNvSpPr/>
-          <p:nvPr/>
-        </p:nvSpPr>
-        <p:spPr>
-          <a:xfrm>
-            <a:off x="548640" y="3072384"/>
-            <a:ext cx="777240" cy="329184"/>
-          </a:xfrm>
-          <a:prstGeom prst="roundRect">
-            <a:avLst>
-              <a:gd name="adj" fmla="val 13889"/>
-            </a:avLst>
-          </a:prstGeom>
-          <a:solidFill>
-            <a:srgbClr val="0057C2"/>
-          </a:solidFill>
-          <a:ln/>
-        </p:spPr>
-      </p:sp>
-      <p:sp>
-        <p:nvSpPr>
-          <p:cNvPr id="30" name="Text 28"/>
-          <p:cNvSpPr/>
-          <p:nvPr/>
-        </p:nvSpPr>
-        <p:spPr>
-          <a:xfrm>
-            <a:off x="548640" y="3072384"/>
-            <a:ext cx="777240" cy="329184"/>
-          </a:xfrm>
-          <a:prstGeom prst="rect">
-            <a:avLst/>
-          </a:prstGeom>
-          <a:noFill/>
-          <a:ln/>
-        </p:spPr>
-        <p:txBody>
-          <a:bodyPr wrap="square" lIns="0" tIns="0" rIns="0" bIns="0" rtlCol="0" anchor="ctr"/>
-          <a:lstStyle/>
-          <a:p>
-            <a:pPr algn="ctr" indent="0" marL="0">
-              <a:buNone/>
-            </a:pPr>
-            <a:r>
-              <a:rPr lang="en-US" sz="1200" b="1" dirty="0">
-                <a:solidFill>
-                  <a:srgbClr val="FFFFFF"/>
-                </a:solidFill>
-                <a:latin typeface="Courier New" pitchFamily="34" charset="0"/>
-                <a:ea typeface="Courier New" pitchFamily="34" charset="-122"/>
-                <a:cs typeface="Courier New" pitchFamily="34" charset="-120"/>
-              </a:rPr>
-              <a:t>-CN</a:t>
-            </a:r>
-            <a:endParaRPr lang="en-US" sz="1200" dirty="0"/>
-          </a:p>
-        </p:txBody>
-      </p:sp>
-      <p:sp>
-        <p:nvSpPr>
-          <p:cNvPr id="31" name="Text 29"/>
-          <p:cNvSpPr/>
-          <p:nvPr/>
-        </p:nvSpPr>
-        <p:spPr>
-          <a:xfrm>
-            <a:off x="1417320" y="2953512"/>
-            <a:ext cx="2651760" cy="566928"/>
-          </a:xfrm>
-          <a:prstGeom prst="rect">
-            <a:avLst/>
-          </a:prstGeom>
-          <a:noFill/>
-          <a:ln/>
-        </p:spPr>
-        <p:txBody>
-          <a:bodyPr wrap="square" lIns="0" tIns="0" rIns="0" bIns="0" rtlCol="0" anchor="ctr"/>
-          <a:lstStyle/>
-          <a:p>
-            <a:pPr indent="0" marL="0">
-              <a:lnSpc>
-                <a:spcPct val="95000"/>
-              </a:lnSpc>
-              <a:buNone/>
-            </a:pPr>
-            <a:r>
-              <a:rPr lang="en-US" sz="1150" dirty="0">
-                <a:solidFill>
-                  <a:srgbClr val="00357A"/>
-                </a:solidFill>
-                <a:latin typeface="Poppins" pitchFamily="34" charset="0"/>
-                <a:ea typeface="Poppins" pitchFamily="34" charset="-122"/>
-                <a:cs typeface="Poppins" pitchFamily="34" charset="-120"/>
-              </a:rPr>
-              <a:t>re-download if changed on server</a:t>
-            </a:r>
-            <a:endParaRPr lang="en-US" sz="1150" dirty="0"/>
-          </a:p>
-        </p:txBody>
-      </p:sp>
-      <p:sp>
-        <p:nvSpPr>
-          <p:cNvPr id="32" name="Shape 30"/>
-          <p:cNvSpPr/>
-          <p:nvPr/>
-        </p:nvSpPr>
-        <p:spPr>
-          <a:xfrm>
-            <a:off x="4242816" y="2953512"/>
-            <a:ext cx="3703320" cy="566928"/>
-          </a:xfrm>
-          <a:prstGeom prst="roundRect">
-            <a:avLst>
-              <a:gd name="adj" fmla="val 9677"/>
-            </a:avLst>
-          </a:prstGeom>
-          <a:solidFill>
-            <a:srgbClr val="DCEBF7"/>
-          </a:solidFill>
-          <a:ln w="12700">
-            <a:solidFill>
-              <a:srgbClr val="A9D6F2"/>
-            </a:solidFill>
-            <a:prstDash val="solid"/>
-          </a:ln>
-        </p:spPr>
-      </p:sp>
-      <p:sp>
-        <p:nvSpPr>
-          <p:cNvPr id="33" name="Shape 31"/>
-          <p:cNvSpPr/>
-          <p:nvPr/>
-        </p:nvSpPr>
-        <p:spPr>
-          <a:xfrm>
-            <a:off x="4334256" y="3072384"/>
-            <a:ext cx="777240" cy="329184"/>
-          </a:xfrm>
-          <a:prstGeom prst="roundRect">
-            <a:avLst>
-              <a:gd name="adj" fmla="val 13889"/>
-            </a:avLst>
-          </a:prstGeom>
-          <a:solidFill>
-            <a:srgbClr val="0057C2"/>
-          </a:solidFill>
-          <a:ln/>
-        </p:spPr>
-      </p:sp>
-      <p:sp>
-        <p:nvSpPr>
-          <p:cNvPr id="34" name="Text 32"/>
-          <p:cNvSpPr/>
-          <p:nvPr/>
-        </p:nvSpPr>
-        <p:spPr>
-          <a:xfrm>
-            <a:off x="4334256" y="3072384"/>
-            <a:ext cx="777240" cy="329184"/>
-          </a:xfrm>
-          <a:prstGeom prst="rect">
-            <a:avLst/>
-          </a:prstGeom>
-          <a:noFill/>
-          <a:ln/>
-        </p:spPr>
-        <p:txBody>
-          <a:bodyPr wrap="square" lIns="0" tIns="0" rIns="0" bIns="0" rtlCol="0" anchor="ctr"/>
-          <a:lstStyle/>
-          <a:p>
-            <a:pPr algn="ctr" indent="0" marL="0">
-              <a:buNone/>
-            </a:pPr>
-            <a:r>
-              <a:rPr lang="en-US" sz="1200" b="1" dirty="0">
-                <a:solidFill>
-                  <a:srgbClr val="FFFFFF"/>
-                </a:solidFill>
-                <a:latin typeface="Courier New" pitchFamily="34" charset="0"/>
-                <a:ea typeface="Courier New" pitchFamily="34" charset="-122"/>
-                <a:cs typeface="Courier New" pitchFamily="34" charset="-120"/>
-              </a:rPr>
-              <a:t>-RE</a:t>
-            </a:r>
-            <a:endParaRPr lang="en-US" sz="1200" dirty="0"/>
-          </a:p>
-        </p:txBody>
-      </p:sp>
-      <p:sp>
-        <p:nvSpPr>
-          <p:cNvPr id="35" name="Text 33"/>
-          <p:cNvSpPr/>
-          <p:nvPr/>
-        </p:nvSpPr>
-        <p:spPr>
-          <a:xfrm>
-            <a:off x="5202936" y="2953512"/>
-            <a:ext cx="2651760" cy="566928"/>
-          </a:xfrm>
-          <a:prstGeom prst="rect">
-            <a:avLst/>
-          </a:prstGeom>
-          <a:noFill/>
-          <a:ln/>
-        </p:spPr>
-        <p:txBody>
-          <a:bodyPr wrap="square" lIns="0" tIns="0" rIns="0" bIns="0" rtlCol="0" anchor="ctr"/>
-          <a:lstStyle/>
-          <a:p>
-            <a:pPr indent="0" marL="0">
-              <a:lnSpc>
-                <a:spcPct val="95000"/>
-              </a:lnSpc>
-              <a:buNone/>
-            </a:pPr>
-            <a:r>
-              <a:rPr lang="en-US" sz="1150" dirty="0">
-                <a:solidFill>
-                  <a:srgbClr val="00357A"/>
-                </a:solidFill>
-                <a:latin typeface="Poppins" pitchFamily="34" charset="0"/>
-                <a:ea typeface="Poppins" pitchFamily="34" charset="-122"/>
-                <a:cs typeface="Poppins" pitchFamily="34" charset="-120"/>
-              </a:rPr>
-              <a:t>reset end date/hour from file time</a:t>
-            </a:r>
-            <a:endParaRPr lang="en-US" sz="1150" dirty="0"/>
-          </a:p>
-        </p:txBody>
-      </p:sp>
-      <p:sp>
-        <p:nvSpPr>
-          <p:cNvPr id="36" name="Shape 34"/>
-          <p:cNvSpPr/>
-          <p:nvPr/>
-        </p:nvSpPr>
-        <p:spPr>
-          <a:xfrm>
-            <a:off x="8028432" y="2953512"/>
-            <a:ext cx="3703320" cy="566928"/>
-          </a:xfrm>
-          <a:prstGeom prst="roundRect">
-            <a:avLst>
-              <a:gd name="adj" fmla="val 9677"/>
-            </a:avLst>
-          </a:prstGeom>
-          <a:solidFill>
-            <a:srgbClr val="DCEBF7"/>
-          </a:solidFill>
-          <a:ln w="12700">
-            <a:solidFill>
-              <a:srgbClr val="A9D6F2"/>
-            </a:solidFill>
-            <a:prstDash val="solid"/>
-          </a:ln>
-        </p:spPr>
-      </p:sp>
-      <p:sp>
-        <p:nvSpPr>
-          <p:cNvPr id="37" name="Shape 35"/>
-          <p:cNvSpPr/>
-          <p:nvPr/>
-        </p:nvSpPr>
-        <p:spPr>
-          <a:xfrm>
-            <a:off x="8119872" y="3072384"/>
-            <a:ext cx="777240" cy="329184"/>
-          </a:xfrm>
-          <a:prstGeom prst="roundRect">
-            <a:avLst>
-              <a:gd name="adj" fmla="val 13889"/>
-            </a:avLst>
-          </a:prstGeom>
-          <a:solidFill>
-            <a:srgbClr val="0057C2"/>
-          </a:solidFill>
-          <a:ln/>
-        </p:spPr>
-      </p:sp>
-      <p:sp>
-        <p:nvSpPr>
-          <p:cNvPr id="38" name="Text 36"/>
-          <p:cNvSpPr/>
-          <p:nvPr/>
-        </p:nvSpPr>
-        <p:spPr>
-          <a:xfrm>
-            <a:off x="8119872" y="3072384"/>
-            <a:ext cx="777240" cy="329184"/>
-          </a:xfrm>
-          <a:prstGeom prst="rect">
-            <a:avLst/>
-          </a:prstGeom>
-          <a:noFill/>
-          <a:ln/>
-        </p:spPr>
-        <p:txBody>
-          <a:bodyPr wrap="square" lIns="0" tIns="0" rIns="0" bIns="0" rtlCol="0" anchor="ctr"/>
-          <a:lstStyle/>
-          <a:p>
-            <a:pPr algn="ctr" indent="0" marL="0">
-              <a:buNone/>
-            </a:pPr>
-            <a:r>
-              <a:rPr lang="en-US" sz="1200" b="1" dirty="0">
-                <a:solidFill>
-                  <a:srgbClr val="FFFFFF"/>
-                </a:solidFill>
-                <a:latin typeface="Courier New" pitchFamily="34" charset="0"/>
-                <a:ea typeface="Courier New" pitchFamily="34" charset="-122"/>
-                <a:cs typeface="Courier New" pitchFamily="34" charset="-120"/>
-              </a:rPr>
-              <a:t>-IE</a:t>
-            </a:r>
-            <a:endParaRPr lang="en-US" sz="1200" dirty="0"/>
-          </a:p>
-        </p:txBody>
-      </p:sp>
-      <p:sp>
-        <p:nvSpPr>
-          <p:cNvPr id="39" name="Text 37"/>
-          <p:cNvSpPr/>
-          <p:nvPr/>
-        </p:nvSpPr>
-        <p:spPr>
-          <a:xfrm>
-            <a:off x="8988552" y="2953512"/>
-            <a:ext cx="2651760" cy="566928"/>
-          </a:xfrm>
-          <a:prstGeom prst="rect">
-            <a:avLst/>
-          </a:prstGeom>
-          <a:noFill/>
-          <a:ln/>
-        </p:spPr>
-        <p:txBody>
-          <a:bodyPr wrap="square" lIns="0" tIns="0" rIns="0" bIns="0" rtlCol="0" anchor="ctr"/>
-          <a:lstStyle/>
-          <a:p>
-            <a:pPr indent="0" marL="0">
-              <a:lnSpc>
-                <a:spcPct val="95000"/>
-              </a:lnSpc>
-              <a:buNone/>
-            </a:pPr>
-            <a:r>
-              <a:rPr lang="en-US" sz="1150" dirty="0">
-                <a:solidFill>
-                  <a:srgbClr val="00357A"/>
-                </a:solidFill>
-                <a:latin typeface="Poppins" pitchFamily="34" charset="0"/>
-                <a:ea typeface="Poppins" pitchFamily="34" charset="-122"/>
-                <a:cs typeface="Poppins" pitchFamily="34" charset="-120"/>
-              </a:rPr>
-              <a:t>skip errors, continue (with -MU)</a:t>
-            </a:r>
-            <a:endParaRPr lang="en-US" sz="1150" dirty="0"/>
-          </a:p>
-        </p:txBody>
-      </p:sp>
-      <p:sp>
-        <p:nvSpPr>
-          <p:cNvPr id="40" name="Shape 38"/>
-          <p:cNvSpPr/>
-          <p:nvPr/>
-        </p:nvSpPr>
-        <p:spPr>
-          <a:xfrm>
-            <a:off x="457200" y="3630168"/>
-            <a:ext cx="3703320" cy="566928"/>
-          </a:xfrm>
-          <a:prstGeom prst="roundRect">
-            <a:avLst>
-              <a:gd name="adj" fmla="val 9677"/>
-            </a:avLst>
-          </a:prstGeom>
-          <a:solidFill>
-            <a:srgbClr val="FFFFFF"/>
-          </a:solidFill>
-          <a:ln w="12700">
-            <a:solidFill>
-              <a:srgbClr val="A9D6F2"/>
-            </a:solidFill>
-            <a:prstDash val="solid"/>
-          </a:ln>
-        </p:spPr>
-      </p:sp>
-      <p:sp>
-        <p:nvSpPr>
-          <p:cNvPr id="41" name="Shape 39"/>
-          <p:cNvSpPr/>
-          <p:nvPr/>
-        </p:nvSpPr>
-        <p:spPr>
-          <a:xfrm>
-            <a:off x="548640" y="3749040"/>
-            <a:ext cx="777240" cy="329184"/>
-          </a:xfrm>
-          <a:prstGeom prst="roundRect">
-            <a:avLst>
-              <a:gd name="adj" fmla="val 13889"/>
-            </a:avLst>
-          </a:prstGeom>
-          <a:solidFill>
-            <a:srgbClr val="0057C2"/>
-          </a:solidFill>
-          <a:ln/>
-        </p:spPr>
-      </p:sp>
-      <p:sp>
-        <p:nvSpPr>
-          <p:cNvPr id="42" name="Text 40"/>
-          <p:cNvSpPr/>
-          <p:nvPr/>
-        </p:nvSpPr>
-        <p:spPr>
-          <a:xfrm>
-            <a:off x="548640" y="3749040"/>
-            <a:ext cx="777240" cy="329184"/>
-          </a:xfrm>
-          <a:prstGeom prst="rect">
-            <a:avLst/>
-          </a:prstGeom>
-          <a:noFill/>
-          <a:ln/>
-        </p:spPr>
-        <p:txBody>
-          <a:bodyPr wrap="square" lIns="0" tIns="0" rIns="0" bIns="0" rtlCol="0" anchor="ctr"/>
-          <a:lstStyle/>
-          <a:p>
-            <a:pPr algn="ctr" indent="0" marL="0">
-              <a:buNone/>
-            </a:pPr>
-            <a:r>
-              <a:rPr lang="en-US" sz="1200" b="1" dirty="0">
-                <a:solidFill>
-                  <a:srgbClr val="FFFFFF"/>
-                </a:solidFill>
-                <a:latin typeface="Courier New" pitchFamily="34" charset="0"/>
-                <a:ea typeface="Courier New" pitchFamily="34" charset="-122"/>
-                <a:cs typeface="Courier New" pitchFamily="34" charset="-120"/>
-              </a:rPr>
-              <a:t>-QE</a:t>
-            </a:r>
-            <a:endParaRPr lang="en-US" sz="1200" dirty="0"/>
-          </a:p>
-        </p:txBody>
-      </p:sp>
-      <p:sp>
-        <p:nvSpPr>
-          <p:cNvPr id="43" name="Text 41"/>
-          <p:cNvSpPr/>
-          <p:nvPr/>
-        </p:nvSpPr>
-        <p:spPr>
-          <a:xfrm>
-            <a:off x="1417320" y="3630168"/>
-            <a:ext cx="2651760" cy="566928"/>
-          </a:xfrm>
-          <a:prstGeom prst="rect">
-            <a:avLst/>
-          </a:prstGeom>
-          <a:noFill/>
-          <a:ln/>
-        </p:spPr>
-        <p:txBody>
-          <a:bodyPr wrap="square" lIns="0" tIns="0" rIns="0" bIns="0" rtlCol="0" anchor="ctr"/>
-          <a:lstStyle/>
-          <a:p>
-            <a:pPr indent="0" marL="0">
-              <a:lnSpc>
-                <a:spcPct val="95000"/>
-              </a:lnSpc>
-              <a:buNone/>
-            </a:pPr>
-            <a:r>
-              <a:rPr lang="en-US" sz="1150" dirty="0">
-                <a:solidFill>
-                  <a:srgbClr val="00357A"/>
-                </a:solidFill>
-                <a:latin typeface="Poppins" pitchFamily="34" charset="0"/>
-                <a:ea typeface="Poppins" pitchFamily="34" charset="-122"/>
-                <a:cs typeface="Poppins" pitchFamily="34" charset="-120"/>
-              </a:rPr>
-              <a:t>quit dataset on first error</a:t>
-            </a:r>
-            <a:endParaRPr lang="en-US" sz="1150" dirty="0"/>
-          </a:p>
-        </p:txBody>
-      </p:sp>
-      <p:sp>
-        <p:nvSpPr>
-          <p:cNvPr id="44" name="Shape 42"/>
-          <p:cNvSpPr/>
-          <p:nvPr/>
-        </p:nvSpPr>
-        <p:spPr>
-          <a:xfrm>
-            <a:off x="4242816" y="3630168"/>
-            <a:ext cx="3703320" cy="566928"/>
-          </a:xfrm>
-          <a:prstGeom prst="roundRect">
-            <a:avLst>
-              <a:gd name="adj" fmla="val 9677"/>
-            </a:avLst>
-          </a:prstGeom>
-          <a:solidFill>
-            <a:srgbClr val="FFFFFF"/>
-          </a:solidFill>
-          <a:ln w="12700">
-            <a:solidFill>
-              <a:srgbClr val="A9D6F2"/>
-            </a:solidFill>
-            <a:prstDash val="solid"/>
-          </a:ln>
-        </p:spPr>
-      </p:sp>
-      <p:sp>
-        <p:nvSpPr>
-          <p:cNvPr id="45" name="Shape 43"/>
-          <p:cNvSpPr/>
-          <p:nvPr/>
-        </p:nvSpPr>
-        <p:spPr>
-          <a:xfrm>
-            <a:off x="4334256" y="3749040"/>
-            <a:ext cx="777240" cy="329184"/>
-          </a:xfrm>
-          <a:prstGeom prst="roundRect">
-            <a:avLst>
-              <a:gd name="adj" fmla="val 13889"/>
-            </a:avLst>
-          </a:prstGeom>
-          <a:solidFill>
-            <a:srgbClr val="0057C2"/>
-          </a:solidFill>
-          <a:ln/>
-        </p:spPr>
-      </p:sp>
-      <p:sp>
-        <p:nvSpPr>
-          <p:cNvPr id="46" name="Text 44"/>
-          <p:cNvSpPr/>
-          <p:nvPr/>
-        </p:nvSpPr>
-        <p:spPr>
-          <a:xfrm>
-            <a:off x="4334256" y="3749040"/>
-            <a:ext cx="777240" cy="329184"/>
-          </a:xfrm>
-          <a:prstGeom prst="rect">
-            <a:avLst/>
-          </a:prstGeom>
-          <a:noFill/>
-          <a:ln/>
-        </p:spPr>
-        <p:txBody>
-          <a:bodyPr wrap="square" lIns="0" tIns="0" rIns="0" bIns="0" rtlCol="0" anchor="ctr"/>
-          <a:lstStyle/>
-          <a:p>
-            <a:pPr algn="ctr" indent="0" marL="0">
-              <a:buNone/>
-            </a:pPr>
-            <a:r>
-              <a:rPr lang="en-US" sz="1200" b="1" dirty="0">
-                <a:solidFill>
-                  <a:srgbClr val="FFFFFF"/>
-                </a:solidFill>
-                <a:latin typeface="Courier New" pitchFamily="34" charset="0"/>
-                <a:ea typeface="Courier New" pitchFamily="34" charset="-122"/>
-                <a:cs typeface="Courier New" pitchFamily="34" charset="-120"/>
-              </a:rPr>
-              <a:t>-GZ</a:t>
-            </a:r>
-            <a:endParaRPr lang="en-US" sz="1200" dirty="0"/>
-          </a:p>
-        </p:txBody>
-      </p:sp>
-      <p:sp>
-        <p:nvSpPr>
-          <p:cNvPr id="47" name="Text 45"/>
-          <p:cNvSpPr/>
-          <p:nvPr/>
-        </p:nvSpPr>
-        <p:spPr>
-          <a:xfrm>
-            <a:off x="5202936" y="3630168"/>
-            <a:ext cx="2651760" cy="566928"/>
-          </a:xfrm>
-          <a:prstGeom prst="rect">
-            <a:avLst/>
-          </a:prstGeom>
-          <a:noFill/>
-          <a:ln/>
-        </p:spPr>
-        <p:txBody>
-          <a:bodyPr wrap="square" lIns="0" tIns="0" rIns="0" bIns="0" rtlCol="0" anchor="ctr"/>
-          <a:lstStyle/>
-          <a:p>
-            <a:pPr indent="0" marL="0">
-              <a:lnSpc>
-                <a:spcPct val="95000"/>
-              </a:lnSpc>
-              <a:buNone/>
-            </a:pPr>
-            <a:r>
-              <a:rPr lang="en-US" sz="1150" dirty="0">
-                <a:solidFill>
-                  <a:srgbClr val="00357A"/>
-                </a:solidFill>
-                <a:latin typeface="Poppins" pitchFamily="34" charset="0"/>
-                <a:ea typeface="Poppins" pitchFamily="34" charset="-122"/>
-                <a:cs typeface="Poppins" pitchFamily="34" charset="-120"/>
-              </a:rPr>
-              <a:t>use GMT as controlling time</a:t>
-            </a:r>
-            <a:endParaRPr lang="en-US" sz="1150" dirty="0"/>
-          </a:p>
-        </p:txBody>
-      </p:sp>
-      <p:sp>
-        <p:nvSpPr>
-          <p:cNvPr id="48" name="Shape 46"/>
-          <p:cNvSpPr/>
-          <p:nvPr/>
-        </p:nvSpPr>
-        <p:spPr>
-          <a:xfrm>
-            <a:off x="8028432" y="3630168"/>
-            <a:ext cx="3703320" cy="566928"/>
-          </a:xfrm>
-          <a:prstGeom prst="roundRect">
-            <a:avLst>
-              <a:gd name="adj" fmla="val 9677"/>
-            </a:avLst>
-          </a:prstGeom>
-          <a:solidFill>
-            <a:srgbClr val="FFFFFF"/>
-          </a:solidFill>
-          <a:ln w="12700">
-            <a:solidFill>
-              <a:srgbClr val="A9D6F2"/>
-            </a:solidFill>
-            <a:prstDash val="solid"/>
-          </a:ln>
-        </p:spPr>
-      </p:sp>
-      <p:sp>
-        <p:nvSpPr>
-          <p:cNvPr id="49" name="Shape 47"/>
-          <p:cNvSpPr/>
-          <p:nvPr/>
-        </p:nvSpPr>
-        <p:spPr>
-          <a:xfrm>
-            <a:off x="8119872" y="3749040"/>
-            <a:ext cx="777240" cy="329184"/>
-          </a:xfrm>
-          <a:prstGeom prst="roundRect">
-            <a:avLst>
-              <a:gd name="adj" fmla="val 13889"/>
-            </a:avLst>
-          </a:prstGeom>
-          <a:solidFill>
-            <a:srgbClr val="0057C2"/>
-          </a:solidFill>
-          <a:ln/>
-        </p:spPr>
-      </p:sp>
-      <p:sp>
-        <p:nvSpPr>
-          <p:cNvPr id="50" name="Text 48"/>
-          <p:cNvSpPr/>
-          <p:nvPr/>
-        </p:nvSpPr>
-        <p:spPr>
-          <a:xfrm>
-            <a:off x="8119872" y="3749040"/>
-            <a:ext cx="777240" cy="329184"/>
-          </a:xfrm>
-          <a:prstGeom prst="rect">
-            <a:avLst/>
-          </a:prstGeom>
-          <a:noFill/>
-          <a:ln/>
-        </p:spPr>
-        <p:txBody>
-          <a:bodyPr wrap="square" lIns="0" tIns="0" rIns="0" bIns="0" rtlCol="0" anchor="ctr"/>
-          <a:lstStyle/>
-          <a:p>
-            <a:pPr algn="ctr" indent="0" marL="0">
-              <a:buNone/>
-            </a:pPr>
-            <a:r>
-              <a:rPr lang="en-US" sz="1200" b="1" dirty="0">
-                <a:solidFill>
-                  <a:srgbClr val="FFFFFF"/>
-                </a:solidFill>
-                <a:latin typeface="Courier New" pitchFamily="34" charset="0"/>
-                <a:ea typeface="Courier New" pitchFamily="34" charset="-122"/>
-                <a:cs typeface="Courier New" pitchFamily="34" charset="-120"/>
-              </a:rPr>
-              <a:t>-NY</a:t>
-            </a:r>
-            <a:endParaRPr lang="en-US" sz="1200" dirty="0"/>
-          </a:p>
-        </p:txBody>
-      </p:sp>
-      <p:sp>
-        <p:nvSpPr>
-          <p:cNvPr id="51" name="Text 49"/>
-          <p:cNvSpPr/>
-          <p:nvPr/>
-        </p:nvSpPr>
-        <p:spPr>
-          <a:xfrm>
-            <a:off x="8988552" y="3630168"/>
-            <a:ext cx="2651760" cy="566928"/>
-          </a:xfrm>
-          <a:prstGeom prst="rect">
-            <a:avLst/>
-          </a:prstGeom>
-          <a:noFill/>
-          <a:ln/>
-        </p:spPr>
-        <p:txBody>
-          <a:bodyPr wrap="square" lIns="0" tIns="0" rIns="0" bIns="0" rtlCol="0" anchor="ctr"/>
-          <a:lstStyle/>
-          <a:p>
-            <a:pPr indent="0" marL="0">
-              <a:lnSpc>
-                <a:spcPct val="95000"/>
-              </a:lnSpc>
-              <a:buNone/>
-            </a:pPr>
-            <a:r>
-              <a:rPr lang="en-US" sz="1150" dirty="0">
-                <a:solidFill>
-                  <a:srgbClr val="00357A"/>
-                </a:solidFill>
-                <a:latin typeface="Poppins" pitchFamily="34" charset="0"/>
-                <a:ea typeface="Poppins" pitchFamily="34" charset="-122"/>
-                <a:cs typeface="Poppins" pitchFamily="34" charset="-120"/>
-              </a:rPr>
-              <a:t>skip Feb 29 in leap years</a:t>
-            </a:r>
-            <a:endParaRPr lang="en-US" sz="1150" dirty="0"/>
-          </a:p>
-        </p:txBody>
-      </p:sp>
-      <p:sp>
-        <p:nvSpPr>
-          <p:cNvPr id="52" name="Shape 50"/>
-          <p:cNvSpPr/>
-          <p:nvPr/>
-        </p:nvSpPr>
-        <p:spPr>
-          <a:xfrm>
-            <a:off x="457200" y="4306824"/>
-            <a:ext cx="3703320" cy="566928"/>
-          </a:xfrm>
-          <a:prstGeom prst="roundRect">
-            <a:avLst>
-              <a:gd name="adj" fmla="val 9677"/>
-            </a:avLst>
-          </a:prstGeom>
-          <a:solidFill>
-            <a:srgbClr val="DCEBF7"/>
-          </a:solidFill>
-          <a:ln w="12700">
-            <a:solidFill>
-              <a:srgbClr val="A9D6F2"/>
-            </a:solidFill>
-            <a:prstDash val="solid"/>
-          </a:ln>
-        </p:spPr>
-      </p:sp>
-      <p:sp>
-        <p:nvSpPr>
-          <p:cNvPr id="53" name="Shape 51"/>
-          <p:cNvSpPr/>
-          <p:nvPr/>
-        </p:nvSpPr>
-        <p:spPr>
-          <a:xfrm>
-            <a:off x="548640" y="4425696"/>
-            <a:ext cx="777240" cy="329184"/>
-          </a:xfrm>
-          <a:prstGeom prst="roundRect">
-            <a:avLst>
-              <a:gd name="adj" fmla="val 13889"/>
-            </a:avLst>
-          </a:prstGeom>
-          <a:solidFill>
-            <a:srgbClr val="0057C2"/>
-          </a:solidFill>
-          <a:ln/>
-        </p:spPr>
-      </p:sp>
-      <p:sp>
-        <p:nvSpPr>
-          <p:cNvPr id="54" name="Text 52"/>
-          <p:cNvSpPr/>
-          <p:nvPr/>
-        </p:nvSpPr>
-        <p:spPr>
-          <a:xfrm>
-            <a:off x="548640" y="4425696"/>
-            <a:ext cx="777240" cy="329184"/>
-          </a:xfrm>
-          <a:prstGeom prst="rect">
-            <a:avLst/>
-          </a:prstGeom>
-          <a:noFill/>
-          <a:ln/>
-        </p:spPr>
-        <p:txBody>
-          <a:bodyPr wrap="square" lIns="0" tIns="0" rIns="0" bIns="0" rtlCol="0" anchor="ctr"/>
-          <a:lstStyle/>
-          <a:p>
-            <a:pPr algn="ctr" indent="0" marL="0">
-              <a:buNone/>
-            </a:pPr>
-            <a:r>
-              <a:rPr lang="en-US" sz="1200" b="1" dirty="0">
-                <a:solidFill>
-                  <a:srgbClr val="FFFFFF"/>
-                </a:solidFill>
-                <a:latin typeface="Courier New" pitchFamily="34" charset="0"/>
-                <a:ea typeface="Courier New" pitchFamily="34" charset="-122"/>
-                <a:cs typeface="Courier New" pitchFamily="34" charset="-120"/>
-              </a:rPr>
-              <a:t>-KR</a:t>
-            </a:r>
-            <a:endParaRPr lang="en-US" sz="1200" dirty="0"/>
-          </a:p>
-        </p:txBody>
-      </p:sp>
-      <p:sp>
-        <p:nvSpPr>
-          <p:cNvPr id="55" name="Text 53"/>
-          <p:cNvSpPr/>
-          <p:nvPr/>
-        </p:nvSpPr>
-        <p:spPr>
-          <a:xfrm>
-            <a:off x="1417320" y="4306824"/>
-            <a:ext cx="2651760" cy="566928"/>
-          </a:xfrm>
-          <a:prstGeom prst="rect">
-            <a:avLst/>
-          </a:prstGeom>
-          <a:noFill/>
-          <a:ln/>
-        </p:spPr>
-        <p:txBody>
-          <a:bodyPr wrap="square" lIns="0" tIns="0" rIns="0" bIns="0" rtlCol="0" anchor="ctr"/>
-          <a:lstStyle/>
-          <a:p>
-            <a:pPr indent="0" marL="0">
-              <a:lnSpc>
-                <a:spcPct val="95000"/>
-              </a:lnSpc>
-              <a:buNone/>
-            </a:pPr>
-            <a:r>
-              <a:rPr lang="en-US" sz="1150" dirty="0">
-                <a:solidFill>
-                  <a:srgbClr val="00357A"/>
-                </a:solidFill>
-                <a:latin typeface="Poppins" pitchFamily="34" charset="0"/>
-                <a:ea typeface="Poppins" pitchFamily="34" charset="-122"/>
-                <a:cs typeface="Poppins" pitchFamily="34" charset="-120"/>
-              </a:rPr>
-              <a:t>keep remote file (copy, not move)</a:t>
-            </a:r>
-            <a:endParaRPr lang="en-US" sz="1150" dirty="0"/>
-          </a:p>
-        </p:txBody>
-      </p:sp>
-      <p:sp>
-        <p:nvSpPr>
-          <p:cNvPr id="56" name="Shape 54"/>
-          <p:cNvSpPr/>
-          <p:nvPr/>
-        </p:nvSpPr>
-        <p:spPr>
-          <a:xfrm>
-            <a:off x="4242816" y="4306824"/>
-            <a:ext cx="3703320" cy="566928"/>
-          </a:xfrm>
-          <a:prstGeom prst="roundRect">
-            <a:avLst>
-              <a:gd name="adj" fmla="val 9677"/>
-            </a:avLst>
-          </a:prstGeom>
-          <a:solidFill>
-            <a:srgbClr val="DCEBF7"/>
-          </a:solidFill>
-          <a:ln w="12700">
-            <a:solidFill>
-              <a:srgbClr val="A9D6F2"/>
-            </a:solidFill>
-            <a:prstDash val="solid"/>
-          </a:ln>
-        </p:spPr>
-      </p:sp>
-      <p:sp>
-        <p:nvSpPr>
-          <p:cNvPr id="57" name="Shape 55"/>
-          <p:cNvSpPr/>
-          <p:nvPr/>
-        </p:nvSpPr>
-        <p:spPr>
-          <a:xfrm>
-            <a:off x="4334256" y="4425696"/>
-            <a:ext cx="777240" cy="329184"/>
-          </a:xfrm>
-          <a:prstGeom prst="roundRect">
-            <a:avLst>
-              <a:gd name="adj" fmla="val 13889"/>
-            </a:avLst>
-          </a:prstGeom>
-          <a:solidFill>
-            <a:srgbClr val="0057C2"/>
-          </a:solidFill>
-          <a:ln/>
-        </p:spPr>
-      </p:sp>
-      <p:sp>
-        <p:nvSpPr>
-          <p:cNvPr id="58" name="Text 56"/>
-          <p:cNvSpPr/>
-          <p:nvPr/>
-        </p:nvSpPr>
-        <p:spPr>
-          <a:xfrm>
-            <a:off x="4334256" y="4425696"/>
-            <a:ext cx="777240" cy="329184"/>
-          </a:xfrm>
-          <a:prstGeom prst="rect">
-            <a:avLst/>
-          </a:prstGeom>
-          <a:noFill/>
-          <a:ln/>
-        </p:spPr>
-        <p:txBody>
-          <a:bodyPr wrap="square" lIns="0" tIns="0" rIns="0" bIns="0" rtlCol="0" anchor="ctr"/>
-          <a:lstStyle/>
-          <a:p>
-            <a:pPr algn="ctr" indent="0" marL="0">
-              <a:buNone/>
-            </a:pPr>
-            <a:r>
-              <a:rPr lang="en-US" sz="1200" b="1" dirty="0">
-                <a:solidFill>
-                  <a:srgbClr val="FFFFFF"/>
-                </a:solidFill>
-                <a:latin typeface="Courier New" pitchFamily="34" charset="0"/>
-                <a:ea typeface="Courier New" pitchFamily="34" charset="-122"/>
-                <a:cs typeface="Courier New" pitchFamily="34" charset="-120"/>
-              </a:rPr>
-              <a:t>-KS</a:t>
-            </a:r>
-            <a:endParaRPr lang="en-US" sz="1200" dirty="0"/>
-          </a:p>
-        </p:txBody>
-      </p:sp>
-      <p:sp>
-        <p:nvSpPr>
-          <p:cNvPr id="59" name="Text 57"/>
-          <p:cNvSpPr/>
-          <p:nvPr/>
-        </p:nvSpPr>
-        <p:spPr>
-          <a:xfrm>
-            <a:off x="5202936" y="4306824"/>
-            <a:ext cx="2651760" cy="566928"/>
-          </a:xfrm>
-          <a:prstGeom prst="rect">
-            <a:avLst/>
-          </a:prstGeom>
-          <a:noFill/>
-          <a:ln/>
-        </p:spPr>
-        <p:txBody>
-          <a:bodyPr wrap="square" lIns="0" tIns="0" rIns="0" bIns="0" rtlCol="0" anchor="ctr"/>
-          <a:lstStyle/>
-          <a:p>
-            <a:pPr indent="0" marL="0">
-              <a:lnSpc>
-                <a:spcPct val="95000"/>
-              </a:lnSpc>
-              <a:buNone/>
-            </a:pPr>
-            <a:r>
-              <a:rPr lang="en-US" sz="1150" dirty="0">
-                <a:solidFill>
-                  <a:srgbClr val="00357A"/>
-                </a:solidFill>
-                <a:latin typeface="Poppins" pitchFamily="34" charset="0"/>
-                <a:ea typeface="Poppins" pitchFamily="34" charset="-122"/>
-                <a:cs typeface="Poppins" pitchFamily="34" charset="-120"/>
-              </a:rPr>
-              <a:t>keep server file (copy, not move)</a:t>
-            </a:r>
-            <a:endParaRPr lang="en-US" sz="1150" dirty="0"/>
-          </a:p>
-        </p:txBody>
-      </p:sp>
-      <p:sp>
-        <p:nvSpPr>
-          <p:cNvPr id="60" name="Shape 58"/>
-          <p:cNvSpPr/>
-          <p:nvPr/>
-        </p:nvSpPr>
-        <p:spPr>
-          <a:xfrm>
-            <a:off x="8028432" y="4306824"/>
-            <a:ext cx="3703320" cy="566928"/>
-          </a:xfrm>
-          <a:prstGeom prst="roundRect">
-            <a:avLst>
-              <a:gd name="adj" fmla="val 9677"/>
-            </a:avLst>
-          </a:prstGeom>
-          <a:solidFill>
-            <a:srgbClr val="DCEBF7"/>
-          </a:solidFill>
-          <a:ln w="12700">
-            <a:solidFill>
-              <a:srgbClr val="A9D6F2"/>
-            </a:solidFill>
-            <a:prstDash val="solid"/>
-          </a:ln>
-        </p:spPr>
-      </p:sp>
-      <p:sp>
-        <p:nvSpPr>
-          <p:cNvPr id="61" name="Shape 59"/>
-          <p:cNvSpPr/>
-          <p:nvPr/>
-        </p:nvSpPr>
-        <p:spPr>
-          <a:xfrm>
-            <a:off x="8119872" y="4425696"/>
-            <a:ext cx="777240" cy="329184"/>
-          </a:xfrm>
-          <a:prstGeom prst="roundRect">
-            <a:avLst>
-              <a:gd name="adj" fmla="val 13889"/>
-            </a:avLst>
-          </a:prstGeom>
-          <a:solidFill>
-            <a:srgbClr val="0057C2"/>
-          </a:solidFill>
-          <a:ln/>
-        </p:spPr>
-      </p:sp>
-      <p:sp>
-        <p:nvSpPr>
-          <p:cNvPr id="62" name="Text 60"/>
-          <p:cNvSpPr/>
-          <p:nvPr/>
-        </p:nvSpPr>
-        <p:spPr>
-          <a:xfrm>
-            <a:off x="8119872" y="4425696"/>
-            <a:ext cx="777240" cy="329184"/>
-          </a:xfrm>
-          <a:prstGeom prst="rect">
-            <a:avLst/>
-          </a:prstGeom>
-          <a:noFill/>
-          <a:ln/>
-        </p:spPr>
-        <p:txBody>
-          <a:bodyPr wrap="square" lIns="0" tIns="0" rIns="0" bIns="0" rtlCol="0" anchor="ctr"/>
-          <a:lstStyle/>
-          <a:p>
-            <a:pPr algn="ctr" indent="0" marL="0">
-              <a:buNone/>
-            </a:pPr>
-            <a:r>
-              <a:rPr lang="en-US" sz="1200" b="1" dirty="0">
-                <a:solidFill>
-                  <a:srgbClr val="FFFFFF"/>
-                </a:solidFill>
-                <a:latin typeface="Courier New" pitchFamily="34" charset="0"/>
-                <a:ea typeface="Courier New" pitchFamily="34" charset="-122"/>
-                <a:cs typeface="Courier New" pitchFamily="34" charset="-120"/>
-              </a:rPr>
-              <a:t>-UB</a:t>
-            </a:r>
-            <a:endParaRPr lang="en-US" sz="1200" dirty="0"/>
-          </a:p>
-        </p:txBody>
-      </p:sp>
-      <p:sp>
-        <p:nvSpPr>
-          <p:cNvPr id="63" name="Text 61"/>
-          <p:cNvSpPr/>
-          <p:nvPr/>
-        </p:nvSpPr>
-        <p:spPr>
-          <a:xfrm>
-            <a:off x="8988552" y="4306824"/>
-            <a:ext cx="2651760" cy="566928"/>
-          </a:xfrm>
-          <a:prstGeom prst="rect">
-            <a:avLst/>
-          </a:prstGeom>
-          <a:noFill/>
-          <a:ln/>
-        </p:spPr>
-        <p:txBody>
-          <a:bodyPr wrap="square" lIns="0" tIns="0" rIns="0" bIns="0" rtlCol="0" anchor="ctr"/>
-          <a:lstStyle/>
-          <a:p>
-            <a:pPr indent="0" marL="0">
-              <a:lnSpc>
-                <a:spcPct val="95000"/>
-              </a:lnSpc>
-              <a:buNone/>
-            </a:pPr>
-            <a:r>
-              <a:rPr lang="en-US" sz="1150" dirty="0">
-                <a:solidFill>
-                  <a:srgbClr val="00357A"/>
-                </a:solidFill>
-                <a:latin typeface="Poppins" pitchFamily="34" charset="0"/>
-                <a:ea typeface="Poppins" pitchFamily="34" charset="-122"/>
-                <a:cs typeface="Poppins" pitchFamily="34" charset="-120"/>
-              </a:rPr>
-              <a:t>use period begin time for patterns</a:t>
-            </a:r>
-            <a:endParaRPr lang="en-US" sz="1150" dirty="0"/>
-          </a:p>
-        </p:txBody>
-      </p:sp>
-      <p:sp>
-        <p:nvSpPr>
-          <p:cNvPr id="64" name="Shape 62"/>
-          <p:cNvSpPr/>
-          <p:nvPr/>
-        </p:nvSpPr>
-        <p:spPr>
-          <a:xfrm>
-            <a:off x="457200" y="4983480"/>
-            <a:ext cx="3703320" cy="566928"/>
-          </a:xfrm>
-          <a:prstGeom prst="roundRect">
-            <a:avLst>
-              <a:gd name="adj" fmla="val 9677"/>
-            </a:avLst>
-          </a:prstGeom>
-          <a:solidFill>
-            <a:srgbClr val="FFFFFF"/>
-          </a:solidFill>
-          <a:ln w="12700">
-            <a:solidFill>
-              <a:srgbClr val="A9D6F2"/>
-            </a:solidFill>
-            <a:prstDash val="solid"/>
-          </a:ln>
-        </p:spPr>
-      </p:sp>
-      <p:sp>
-        <p:nvSpPr>
-          <p:cNvPr id="65" name="Shape 63"/>
-          <p:cNvSpPr/>
-          <p:nvPr/>
-        </p:nvSpPr>
-        <p:spPr>
-          <a:xfrm>
-            <a:off x="548640" y="5102352"/>
-            <a:ext cx="777240" cy="329184"/>
-          </a:xfrm>
-          <a:prstGeom prst="roundRect">
-            <a:avLst>
-              <a:gd name="adj" fmla="val 13889"/>
-            </a:avLst>
-          </a:prstGeom>
-          <a:solidFill>
-            <a:srgbClr val="0057C2"/>
-          </a:solidFill>
-          <a:ln/>
-        </p:spPr>
-      </p:sp>
-      <p:sp>
-        <p:nvSpPr>
-          <p:cNvPr id="66" name="Text 64"/>
-          <p:cNvSpPr/>
-          <p:nvPr/>
-        </p:nvSpPr>
-        <p:spPr>
-          <a:xfrm>
-            <a:off x="548640" y="5102352"/>
-            <a:ext cx="777240" cy="329184"/>
-          </a:xfrm>
-          <a:prstGeom prst="rect">
-            <a:avLst/>
-          </a:prstGeom>
-          <a:noFill/>
-          <a:ln/>
-        </p:spPr>
-        <p:txBody>
-          <a:bodyPr wrap="square" lIns="0" tIns="0" rIns="0" bIns="0" rtlCol="0" anchor="ctr"/>
-          <a:lstStyle/>
-          <a:p>
-            <a:pPr algn="ctr" indent="0" marL="0">
-              <a:buNone/>
-            </a:pPr>
-            <a:r>
-              <a:rPr lang="en-US" sz="1200" b="1" dirty="0">
-                <a:solidFill>
-                  <a:srgbClr val="FFFFFF"/>
-                </a:solidFill>
-                <a:latin typeface="Courier New" pitchFamily="34" charset="0"/>
-                <a:ea typeface="Courier New" pitchFamily="34" charset="-122"/>
-                <a:cs typeface="Courier New" pitchFamily="34" charset="-120"/>
-              </a:rPr>
-              <a:t>-UT</a:t>
-            </a:r>
-            <a:endParaRPr lang="en-US" sz="1200" dirty="0"/>
-          </a:p>
-        </p:txBody>
-      </p:sp>
-      <p:sp>
-        <p:nvSpPr>
-          <p:cNvPr id="67" name="Text 65"/>
-          <p:cNvSpPr/>
-          <p:nvPr/>
-        </p:nvSpPr>
-        <p:spPr>
-          <a:xfrm>
-            <a:off x="1417320" y="4983480"/>
-            <a:ext cx="2651760" cy="566928"/>
-          </a:xfrm>
-          <a:prstGeom prst="rect">
-            <a:avLst/>
-          </a:prstGeom>
-          <a:noFill/>
-          <a:ln/>
-        </p:spPr>
-        <p:txBody>
-          <a:bodyPr wrap="square" lIns="0" tIns="0" rIns="0" bIns="0" rtlCol="0" anchor="ctr"/>
-          <a:lstStyle/>
-          <a:p>
-            <a:pPr indent="0" marL="0">
-              <a:lnSpc>
-                <a:spcPct val="95000"/>
-              </a:lnSpc>
-              <a:buNone/>
-            </a:pPr>
-            <a:r>
-              <a:rPr lang="en-US" sz="1150" dirty="0">
-                <a:solidFill>
-                  <a:srgbClr val="00357A"/>
-                </a:solidFill>
-                <a:latin typeface="Poppins" pitchFamily="34" charset="0"/>
-                <a:ea typeface="Poppins" pitchFamily="34" charset="-122"/>
-                <a:cs typeface="Poppins" pitchFamily="34" charset="-120"/>
-              </a:rPr>
-              <a:t>force end/next-due time advance</a:t>
-            </a:r>
-            <a:endParaRPr lang="en-US" sz="1150" dirty="0"/>
-          </a:p>
-        </p:txBody>
-      </p:sp>
-      <p:sp>
-        <p:nvSpPr>
-          <p:cNvPr id="68" name="Shape 66"/>
-          <p:cNvSpPr/>
-          <p:nvPr/>
-        </p:nvSpPr>
-        <p:spPr>
-          <a:xfrm>
-            <a:off x="4242816" y="4983480"/>
-            <a:ext cx="3703320" cy="566928"/>
-          </a:xfrm>
-          <a:prstGeom prst="roundRect">
-            <a:avLst>
-              <a:gd name="adj" fmla="val 9677"/>
-            </a:avLst>
-          </a:prstGeom>
-          <a:solidFill>
-            <a:srgbClr val="FFFFFF"/>
-          </a:solidFill>
-          <a:ln w="12700">
-            <a:solidFill>
-              <a:srgbClr val="A9D6F2"/>
-            </a:solidFill>
-            <a:prstDash val="solid"/>
-          </a:ln>
-        </p:spPr>
-      </p:sp>
-      <p:sp>
-        <p:nvSpPr>
-          <p:cNvPr id="69" name="Shape 67"/>
-          <p:cNvSpPr/>
-          <p:nvPr/>
-        </p:nvSpPr>
-        <p:spPr>
-          <a:xfrm>
-            <a:off x="4334256" y="5102352"/>
-            <a:ext cx="777240" cy="329184"/>
-          </a:xfrm>
-          <a:prstGeom prst="roundRect">
-            <a:avLst>
-              <a:gd name="adj" fmla="val 13889"/>
-            </a:avLst>
-          </a:prstGeom>
-          <a:solidFill>
-            <a:srgbClr val="0057C2"/>
-          </a:solidFill>
-          <a:ln/>
-        </p:spPr>
-      </p:sp>
-      <p:sp>
-        <p:nvSpPr>
-          <p:cNvPr id="70" name="Text 68"/>
-          <p:cNvSpPr/>
-          <p:nvPr/>
-        </p:nvSpPr>
-        <p:spPr>
-          <a:xfrm>
-            <a:off x="4334256" y="5102352"/>
-            <a:ext cx="777240" cy="329184"/>
-          </a:xfrm>
-          <a:prstGeom prst="rect">
-            <a:avLst/>
-          </a:prstGeom>
-          <a:noFill/>
-          <a:ln/>
-        </p:spPr>
-        <p:txBody>
-          <a:bodyPr wrap="square" lIns="0" tIns="0" rIns="0" bIns="0" rtlCol="0" anchor="ctr"/>
-          <a:lstStyle/>
-          <a:p>
-            <a:pPr algn="ctr" indent="0" marL="0">
-              <a:buNone/>
-            </a:pPr>
-            <a:r>
-              <a:rPr lang="en-US" sz="1200" b="1" dirty="0">
-                <a:solidFill>
-                  <a:srgbClr val="FFFFFF"/>
-                </a:solidFill>
-                <a:latin typeface="Courier New" pitchFamily="34" charset="0"/>
-                <a:ea typeface="Courier New" pitchFamily="34" charset="-122"/>
-                <a:cs typeface="Courier New" pitchFamily="34" charset="-120"/>
-              </a:rPr>
-              <a:t>-BG</a:t>
-            </a:r>
-            <a:endParaRPr lang="en-US" sz="1200" dirty="0"/>
-          </a:p>
-        </p:txBody>
-      </p:sp>
-      <p:sp>
-        <p:nvSpPr>
-          <p:cNvPr id="71" name="Text 69"/>
-          <p:cNvSpPr/>
-          <p:nvPr/>
-        </p:nvSpPr>
-        <p:spPr>
-          <a:xfrm>
-            <a:off x="5202936" y="4983480"/>
-            <a:ext cx="2651760" cy="566928"/>
-          </a:xfrm>
-          <a:prstGeom prst="rect">
-            <a:avLst/>
-          </a:prstGeom>
-          <a:noFill/>
-          <a:ln/>
-        </p:spPr>
-        <p:txBody>
-          <a:bodyPr wrap="square" lIns="0" tIns="0" rIns="0" bIns="0" rtlCol="0" anchor="ctr"/>
-          <a:lstStyle/>
-          <a:p>
-            <a:pPr indent="0" marL="0">
-              <a:lnSpc>
-                <a:spcPct val="95000"/>
-              </a:lnSpc>
-              <a:buNone/>
-            </a:pPr>
-            <a:r>
-              <a:rPr lang="en-US" sz="1150" dirty="0">
-                <a:solidFill>
-                  <a:srgbClr val="00357A"/>
-                </a:solidFill>
-                <a:latin typeface="Poppins" pitchFamily="34" charset="0"/>
-                <a:ea typeface="Poppins" pitchFamily="34" charset="-122"/>
-                <a:cs typeface="Poppins" pitchFamily="34" charset="-120"/>
-              </a:rPr>
-              <a:t>background; suppress screen output</a:t>
-            </a:r>
-            <a:endParaRPr lang="en-US" sz="1150" dirty="0"/>
-          </a:p>
-        </p:txBody>
-      </p:sp>
-      <p:sp>
-        <p:nvSpPr>
-          <p:cNvPr id="72" name="Shape 70"/>
-          <p:cNvSpPr/>
-          <p:nvPr/>
-        </p:nvSpPr>
-        <p:spPr>
-          <a:xfrm>
-            <a:off x="8028432" y="4983480"/>
-            <a:ext cx="3703320" cy="566928"/>
-          </a:xfrm>
-          <a:prstGeom prst="roundRect">
-            <a:avLst>
-              <a:gd name="adj" fmla="val 9677"/>
-            </a:avLst>
-          </a:prstGeom>
-          <a:solidFill>
-            <a:srgbClr val="FFFFFF"/>
-          </a:solidFill>
-          <a:ln w="12700">
-            <a:solidFill>
-              <a:srgbClr val="A9D6F2"/>
-            </a:solidFill>
-            <a:prstDash val="solid"/>
-          </a:ln>
-        </p:spPr>
-      </p:sp>
-      <p:sp>
-        <p:nvSpPr>
-          <p:cNvPr id="73" name="Shape 71"/>
-          <p:cNvSpPr/>
-          <p:nvPr/>
-        </p:nvSpPr>
-        <p:spPr>
-          <a:xfrm>
-            <a:off x="8119872" y="5102352"/>
-            <a:ext cx="777240" cy="329184"/>
-          </a:xfrm>
-          <a:prstGeom prst="roundRect">
-            <a:avLst>
-              <a:gd name="adj" fmla="val 13889"/>
-            </a:avLst>
-          </a:prstGeom>
-          <a:solidFill>
-            <a:srgbClr val="0057C2"/>
-          </a:solidFill>
-          <a:ln/>
-        </p:spPr>
-      </p:sp>
-      <p:sp>
-        <p:nvSpPr>
-          <p:cNvPr id="74" name="Text 72"/>
-          <p:cNvSpPr/>
-          <p:nvPr/>
-        </p:nvSpPr>
-        <p:spPr>
-          <a:xfrm>
-            <a:off x="8119872" y="5102352"/>
-            <a:ext cx="777240" cy="329184"/>
-          </a:xfrm>
-          <a:prstGeom prst="rect">
-            <a:avLst/>
-          </a:prstGeom>
-          <a:noFill/>
-          <a:ln/>
-        </p:spPr>
-        <p:txBody>
-          <a:bodyPr wrap="square" lIns="0" tIns="0" rIns="0" bIns="0" rtlCol="0" anchor="ctr"/>
-          <a:lstStyle/>
-          <a:p>
-            <a:pPr algn="ctr" indent="0" marL="0">
-              <a:buNone/>
-            </a:pPr>
-            <a:r>
-              <a:rPr lang="en-US" sz="1200" b="1" dirty="0">
-                <a:solidFill>
-                  <a:srgbClr val="FFFFFF"/>
-                </a:solidFill>
-                <a:latin typeface="Courier New" pitchFamily="34" charset="0"/>
-                <a:ea typeface="Courier New" pitchFamily="34" charset="-122"/>
-                <a:cs typeface="Courier New" pitchFamily="34" charset="-120"/>
-              </a:rPr>
-              <a:t>-NE</a:t>
-            </a:r>
-            <a:endParaRPr lang="en-US" sz="1200" dirty="0"/>
-          </a:p>
-        </p:txBody>
-      </p:sp>
-      <p:sp>
-        <p:nvSpPr>
-          <p:cNvPr id="75" name="Text 73"/>
-          <p:cNvSpPr/>
-          <p:nvPr/>
-        </p:nvSpPr>
-        <p:spPr>
-          <a:xfrm>
-            <a:off x="8988552" y="4983480"/>
-            <a:ext cx="2651760" cy="566928"/>
-          </a:xfrm>
-          <a:prstGeom prst="rect">
-            <a:avLst/>
-          </a:prstGeom>
-          <a:noFill/>
-          <a:ln/>
-        </p:spPr>
-        <p:txBody>
-          <a:bodyPr wrap="square" lIns="0" tIns="0" rIns="0" bIns="0" rtlCol="0" anchor="ctr"/>
-          <a:lstStyle/>
-          <a:p>
-            <a:pPr indent="0" marL="0">
-              <a:lnSpc>
-                <a:spcPct val="95000"/>
-              </a:lnSpc>
-              <a:buNone/>
-            </a:pPr>
-            <a:r>
-              <a:rPr lang="en-US" sz="1150" dirty="0">
-                <a:solidFill>
-                  <a:srgbClr val="00357A"/>
-                </a:solidFill>
-                <a:latin typeface="Poppins" pitchFamily="34" charset="0"/>
-                <a:ea typeface="Poppins" pitchFamily="34" charset="-122"/>
-                <a:cs typeface="Poppins" pitchFamily="34" charset="-120"/>
-              </a:rPr>
-              <a:t>suppress notification email</a:t>
-            </a:r>
-            <a:endParaRPr lang="en-US" sz="1150" dirty="0"/>
-          </a:p>
-        </p:txBody>
-      </p:sp>
-      <p:sp>
-        <p:nvSpPr>
-          <p:cNvPr id="76" name="Text 74"/>
-          <p:cNvSpPr/>
-          <p:nvPr/>
-        </p:nvSpPr>
-        <p:spPr>
-          <a:xfrm>
-            <a:off x="457200" y="5779008"/>
-            <a:ext cx="9966960" cy="274320"/>
-          </a:xfrm>
-          <a:prstGeom prst="rect">
-            <a:avLst/>
-          </a:prstGeom>
-          <a:noFill/>
-          <a:ln/>
-        </p:spPr>
-        <p:txBody>
-          <a:bodyPr wrap="square" lIns="0" tIns="0" rIns="0" bIns="0" rtlCol="0" anchor="ctr"/>
-          <a:lstStyle/>
-          <a:p>
-            <a:pPr algn="ctr" indent="0" marL="0">
-              <a:buNone/>
-            </a:pPr>
-            <a:r>
-              <a:rPr lang="en-US" sz="1200" i="1" dirty="0">
-                <a:solidFill>
-                  <a:srgbClr val="53565A"/>
-                </a:solidFill>
-                <a:latin typeface="Poppins" pitchFamily="34" charset="0"/>
-                <a:ea typeface="Poppins" pitchFamily="34" charset="-122"/>
-                <a:cs typeface="Poppins" pitchFamily="34" charset="-120"/>
-              </a:rPr>
-              <a:t>Most modes can be preset in the control record via -UC (single letters) and -KF / -MC / -EC.</a:t>
-            </a:r>
-            <a:endParaRPr lang="en-US" sz="1200" dirty="0"/>
-          </a:p>
-        </p:txBody>
-      </p:sp>
-      <p:sp>
-        <p:nvSpPr>
-          <p:cNvPr id="77" name="Text 75"/>
+              <a:t> instead of on every run.</a:t>
+            </a:r>
+            <a:endParaRPr lang="en-US" sz="1100" dirty="0"/>
+          </a:p>
+        </p:txBody>
+      </p:sp>
+      <p:sp>
+        <p:nvSpPr>
+          <p:cNvPr id="124" name="Text 122"/>
           <p:cNvSpPr/>
           <p:nvPr/>
         </p:nvSpPr>
@@ -34252,7 +35963,7 @@
       </p:sp>
       <p:sp>
         <p:nvSpPr>
-          <p:cNvPr id="78" name="Text 76"/>
+          <p:cNvPr id="125" name="Text 123"/>
           <p:cNvSpPr/>
           <p:nvPr/>
         </p:nvSpPr>
@@ -44149,8 +45860,8 @@
         </p:nvSpPr>
         <p:spPr>
           <a:xfrm>
-            <a:off x="457200" y="5815584"/>
-            <a:ext cx="9966960" cy="365760"/>
+            <a:off x="457200" y="6016752"/>
+            <a:ext cx="9966960" cy="310896"/>
           </a:xfrm>
           <a:prstGeom prst="rect">
             <a:avLst/>
@@ -44166,7 +45877,7 @@
               <a:buNone/>
             </a:pPr>
             <a:r>
-              <a:rPr lang="en-US" sz="1150" b="1" dirty="0">
+              <a:rPr lang="en-US" sz="1100" b="1" dirty="0">
                 <a:solidFill>
                   <a:srgbClr val="C25E00"/>
                 </a:solidFill>
@@ -44180,7 +45891,7 @@
               <a:buNone/>
             </a:pPr>
             <a:r>
-              <a:rPr lang="en-US" sz="1150" dirty="0">
+              <a:rPr lang="en-US" sz="1100" dirty="0">
                 <a:solidFill>
                   <a:srgbClr val="00357A"/>
                 </a:solidFill>
@@ -44194,7 +45905,7 @@
               <a:buNone/>
             </a:pPr>
             <a:r>
-              <a:rPr lang="en-US" sz="1150" b="1" dirty="0">
+              <a:rPr lang="en-US" sz="1100" b="1" dirty="0">
                 <a:solidFill>
                   <a:srgbClr val="00357A"/>
                 </a:solidFill>
@@ -44208,7 +45919,7 @@
               <a:buNone/>
             </a:pPr>
             <a:r>
-              <a:rPr lang="en-US" sz="1150" dirty="0">
+              <a:rPr lang="en-US" sz="1100" dirty="0">
                 <a:solidFill>
                   <a:srgbClr val="00357A"/>
                 </a:solidFill>
@@ -44222,7 +45933,7 @@
               <a:buNone/>
             </a:pPr>
             <a:r>
-              <a:rPr lang="en-US" sz="1150" b="1" dirty="0">
+              <a:rPr lang="en-US" sz="1100" b="1" dirty="0">
                 <a:solidFill>
                   <a:srgbClr val="00357A"/>
                 </a:solidFill>
@@ -44236,7 +45947,7 @@
               <a:buNone/>
             </a:pPr>
             <a:r>
-              <a:rPr lang="en-US" sz="1150" dirty="0">
+              <a:rPr lang="en-US" sz="1100" dirty="0">
                 <a:solidFill>
                   <a:srgbClr val="00357A"/>
                 </a:solidFill>
@@ -44250,7 +45961,7 @@
               <a:buNone/>
             </a:pPr>
             <a:r>
-              <a:rPr lang="en-US" sz="1150" b="1" dirty="0">
+              <a:rPr lang="en-US" sz="1100" b="1" dirty="0">
                 <a:solidFill>
                   <a:srgbClr val="00357A"/>
                 </a:solidFill>
@@ -44264,7 +45975,7 @@
               <a:buNone/>
             </a:pPr>
             <a:r>
-              <a:rPr lang="en-US" sz="1150" dirty="0">
+              <a:rPr lang="en-US" sz="1100" dirty="0">
                 <a:solidFill>
                   <a:srgbClr val="00357A"/>
                 </a:solidFill>
@@ -44272,9 +45983,9 @@
                 <a:ea typeface="Poppins" pitchFamily="34" charset="-122"/>
                 <a:cs typeface="Poppins" pitchFamily="34" charset="-120"/>
               </a:rPr>
-              <a:t>  on Get actions to list records across all of your datasets.</a:t>
-            </a:r>
-            <a:endParaRPr lang="en-US" sz="1150" dirty="0"/>
+              <a:t>  on Get actions to list records for all your datasets.</a:t>
+            </a:r>
+            <a:endParaRPr lang="en-US" sz="1100" dirty="0"/>
           </a:p>
         </p:txBody>
       </p:sp>
